--- a/deliverables/3b. intermediate slides/Intermediate Slides.pptx
+++ b/deliverables/3b. intermediate slides/Intermediate Slides.pptx
@@ -5,22 +5,24 @@
     <p:sldMasterId id="2147483660" r:id="rId4"/>
   </p:sldMasterIdLst>
   <p:notesMasterIdLst>
-    <p:notesMasterId r:id="rId10"/>
+    <p:notesMasterId r:id="rId12"/>
   </p:notesMasterIdLst>
   <p:handoutMasterIdLst>
-    <p:handoutMasterId r:id="rId11"/>
+    <p:handoutMasterId r:id="rId13"/>
   </p:handoutMasterIdLst>
   <p:sldIdLst>
     <p:sldId id="278" r:id="rId5"/>
     <p:sldId id="279" r:id="rId6"/>
     <p:sldId id="280" r:id="rId7"/>
-    <p:sldId id="281" r:id="rId8"/>
-    <p:sldId id="282" r:id="rId9"/>
+    <p:sldId id="283" r:id="rId8"/>
+    <p:sldId id="284" r:id="rId9"/>
+    <p:sldId id="281" r:id="rId10"/>
+    <p:sldId id="282" r:id="rId11"/>
   </p:sldIdLst>
   <p:sldSz cx="9144000" cy="5715000" type="screen16x10"/>
   <p:notesSz cx="6858000" cy="9144000"/>
   <p:custDataLst>
-    <p:tags r:id="rId12"/>
+    <p:tags r:id="rId14"/>
   </p:custDataLst>
   <p:defaultTextStyle>
     <a:defPPr>
@@ -256,7 +258,7 @@
                 <a:ea typeface="Verdana" pitchFamily="34" charset="0"/>
                 <a:cs typeface="Verdana" pitchFamily="34" charset="0"/>
               </a:rPr>
-              <a:t>09.04.2026</a:t>
+              <a:t>18.04.2026</a:t>
             </a:fld>
             <a:endParaRPr lang="de-AT" sz="1000" dirty="0">
               <a:latin typeface="Verdana" pitchFamily="34" charset="0"/>
@@ -446,7 +448,7 @@
             <a:fld id="{C0A972FC-F5E0-4F80-B169-F0B5EFC71333}" type="datetimeFigureOut">
               <a:rPr lang="de-AT" smtClean="0"/>
               <a:pPr/>
-              <a:t>09.04.2026</a:t>
+              <a:t>18.04.2026</a:t>
             </a:fld>
             <a:endParaRPr lang="de-AT" dirty="0"/>
           </a:p>
@@ -1541,7 +1543,7 @@
           <a:p>
             <a:fld id="{EF16FBD4-A1A0-4C0D-8ECA-591A550A295A}" type="datetime1">
               <a:rPr lang="de-AT" smtClean="0"/>
-              <a:t>09.04.2026</a:t>
+              <a:t>18.04.2026</a:t>
             </a:fld>
             <a:endParaRPr lang="de-AT" dirty="0"/>
           </a:p>
@@ -1906,7 +1908,7 @@
           <a:p>
             <a:fld id="{EF16FBD4-A1A0-4C0D-8ECA-591A550A295A}" type="datetime1">
               <a:rPr lang="de-AT" smtClean="0"/>
-              <a:t>09.04.2026</a:t>
+              <a:t>18.04.2026</a:t>
             </a:fld>
             <a:endParaRPr lang="de-AT" dirty="0"/>
           </a:p>
@@ -2407,7 +2409,7 @@
           <a:p>
             <a:fld id="{DC0C0548-BB61-4975-B080-1B6E0D52ECC3}" type="datetime1">
               <a:rPr lang="de-AT" smtClean="0"/>
-              <a:t>09.04.2026</a:t>
+              <a:t>18.04.2026</a:t>
             </a:fld>
             <a:endParaRPr lang="de-AT" dirty="0"/>
           </a:p>
@@ -2769,7 +2771,7 @@
           <a:p>
             <a:fld id="{2208B580-4914-472C-873D-0ABC3D2F1944}" type="datetime1">
               <a:rPr lang="de-AT" smtClean="0"/>
-              <a:t>09.04.2026</a:t>
+              <a:t>18.04.2026</a:t>
             </a:fld>
             <a:endParaRPr lang="de-AT" dirty="0"/>
           </a:p>
@@ -3154,7 +3156,7 @@
           <a:p>
             <a:fld id="{460B22D8-19A8-4750-AD83-286C35A4BCEC}" type="datetime1">
               <a:rPr lang="de-AT" smtClean="0"/>
-              <a:t>09.04.2026</a:t>
+              <a:t>18.04.2026</a:t>
             </a:fld>
             <a:endParaRPr lang="de-AT" dirty="0"/>
           </a:p>
@@ -3817,7 +3819,7 @@
           <a:p>
             <a:fld id="{BCE4B0F6-B814-432F-A5EF-779CD4E3E58E}" type="datetime1">
               <a:rPr lang="de-AT" smtClean="0"/>
-              <a:t>09.04.2026</a:t>
+              <a:t>18.04.2026</a:t>
             </a:fld>
             <a:endParaRPr lang="de-AT" dirty="0"/>
           </a:p>
@@ -7083,7 +7085,7 @@
             <a:fld id="{EF16FBD4-A1A0-4C0D-8ECA-591A550A295A}" type="datetime1">
               <a:rPr lang="de-AT" smtClean="0"/>
               <a:pPr/>
-              <a:t>09.04.2026</a:t>
+              <a:t>18.04.2026</a:t>
             </a:fld>
             <a:endParaRPr lang="de-AT" dirty="0"/>
           </a:p>
@@ -7816,8 +7818,8 @@
               <a:buChar char="•"/>
             </a:pPr>
             <a:r>
-              <a:rPr lang="de-AT"/>
-              <a:t>Thema für die Präsentation hinzufügen</a:t>
+              <a:rPr lang="en-AT" dirty="0"/>
+              <a:t>Introduction</a:t>
             </a:r>
           </a:p>
           <a:p>
@@ -7826,8 +7828,8 @@
               <a:buChar char="•"/>
             </a:pPr>
             <a:r>
-              <a:rPr lang="de-AT"/>
-              <a:t>Thema für die Präsentation hinzufügen</a:t>
+              <a:rPr lang="en-AT" dirty="0"/>
+              <a:t>Project Outline</a:t>
             </a:r>
           </a:p>
           <a:p>
@@ -7836,29 +7838,10 @@
               <a:buChar char="•"/>
             </a:pPr>
             <a:r>
-              <a:rPr lang="de-AT"/>
-              <a:t>Thema für die Präsentation hinzufügen</a:t>
-            </a:r>
-          </a:p>
-          <a:p>
-            <a:pPr>
-              <a:buFont typeface="Arial" panose="020B0604020202020204" pitchFamily="34" charset="0"/>
-              <a:buChar char="•"/>
-            </a:pPr>
-            <a:r>
-              <a:rPr lang="de-AT"/>
-              <a:t>Thema für die Präsentation hinzufügen</a:t>
-            </a:r>
-          </a:p>
-          <a:p>
-            <a:pPr>
-              <a:buFont typeface="Arial" panose="020B0604020202020204" pitchFamily="34" charset="0"/>
-              <a:buChar char="•"/>
-            </a:pPr>
-            <a:r>
-              <a:rPr lang="de-AT"/>
-              <a:t>Thema für die Präsentation hinzufügen</a:t>
-            </a:r>
+              <a:rPr lang="en-AT" dirty="0"/>
+              <a:t>Data</a:t>
+            </a:r>
+            <a:endParaRPr lang="de-AT" dirty="0"/>
           </a:p>
         </p:txBody>
       </p:sp>
@@ -8037,7 +8020,164 @@
           <a:bodyPr/>
           <a:lstStyle/>
           <a:p>
-            <a:endParaRPr lang="de-AT"/>
+            <a:r>
+              <a:rPr lang="en-AT" dirty="0"/>
+              <a:t>&lt;</a:t>
+            </a:r>
+            <a:r>
+              <a:rPr lang="en-AT" dirty="0" err="1"/>
+              <a:t>hitze</a:t>
+            </a:r>
+            <a:r>
+              <a:rPr lang="en-AT" dirty="0"/>
+              <a:t> </a:t>
+            </a:r>
+            <a:r>
+              <a:rPr lang="en-AT" dirty="0" err="1"/>
+              <a:t>grafik</a:t>
+            </a:r>
+            <a:r>
+              <a:rPr lang="en-AT" dirty="0"/>
+              <a:t>&gt; - </a:t>
+            </a:r>
+            <a:r>
+              <a:rPr lang="en-AT" dirty="0" err="1"/>
+              <a:t>wärmebild</a:t>
+            </a:r>
+            <a:r>
+              <a:rPr lang="en-AT" dirty="0"/>
+              <a:t> </a:t>
+            </a:r>
+            <a:r>
+              <a:rPr lang="en-AT" dirty="0" err="1"/>
+              <a:t>zB</a:t>
+            </a:r>
+            <a:endParaRPr lang="en-AT" dirty="0"/>
+          </a:p>
+          <a:p>
+            <a:r>
+              <a:rPr lang="de-AT" dirty="0"/>
+              <a:t>R</a:t>
+            </a:r>
+            <a:r>
+              <a:rPr lang="en-AT" dirty="0" err="1"/>
+              <a:t>eden</a:t>
+            </a:r>
+            <a:r>
+              <a:rPr lang="en-AT" dirty="0"/>
+              <a:t> </a:t>
+            </a:r>
+            <a:r>
+              <a:rPr lang="en-AT" dirty="0" err="1"/>
+              <a:t>über</a:t>
+            </a:r>
+            <a:r>
+              <a:rPr lang="en-AT" dirty="0"/>
+              <a:t> </a:t>
+            </a:r>
+            <a:r>
+              <a:rPr lang="en-AT" dirty="0" err="1"/>
+              <a:t>klimawandel</a:t>
+            </a:r>
+            <a:r>
+              <a:rPr lang="en-AT" dirty="0"/>
+              <a:t> </a:t>
+            </a:r>
+          </a:p>
+          <a:p>
+            <a:r>
+              <a:rPr lang="en-AT" dirty="0"/>
+              <a:t>&lt;</a:t>
+            </a:r>
+            <a:r>
+              <a:rPr lang="en-AT" dirty="0" err="1"/>
+              <a:t>bild</a:t>
+            </a:r>
+            <a:r>
+              <a:rPr lang="en-AT" dirty="0"/>
+              <a:t> </a:t>
+            </a:r>
+            <a:r>
+              <a:rPr lang="en-AT" dirty="0" err="1"/>
+              <a:t>grün</a:t>
+            </a:r>
+            <a:r>
+              <a:rPr lang="en-AT" dirty="0"/>
+              <a:t>, </a:t>
+            </a:r>
+            <a:r>
+              <a:rPr lang="en-AT" dirty="0" err="1"/>
+              <a:t>bäume</a:t>
+            </a:r>
+            <a:r>
+              <a:rPr lang="en-AT" dirty="0"/>
+              <a:t>&gt;</a:t>
+            </a:r>
+          </a:p>
+          <a:p>
+            <a:r>
+              <a:rPr lang="de-AT" dirty="0"/>
+              <a:t>R</a:t>
+            </a:r>
+            <a:r>
+              <a:rPr lang="en-AT" dirty="0" err="1"/>
+              <a:t>eden</a:t>
+            </a:r>
+            <a:r>
+              <a:rPr lang="en-AT" dirty="0"/>
+              <a:t> </a:t>
+            </a:r>
+            <a:r>
+              <a:rPr lang="en-AT" dirty="0" err="1"/>
+              <a:t>über</a:t>
+            </a:r>
+            <a:r>
+              <a:rPr lang="en-AT" dirty="0"/>
+              <a:t> </a:t>
+            </a:r>
+            <a:r>
+              <a:rPr lang="en-AT" dirty="0" err="1"/>
+              <a:t>kühlfaktor</a:t>
+            </a:r>
+            <a:r>
+              <a:rPr lang="en-AT" dirty="0"/>
+              <a:t> von </a:t>
+            </a:r>
+            <a:r>
+              <a:rPr lang="en-AT" dirty="0" err="1"/>
+              <a:t>bäumen</a:t>
+            </a:r>
+            <a:endParaRPr lang="en-AT" dirty="0"/>
+          </a:p>
+          <a:p>
+            <a:r>
+              <a:rPr lang="en-AT" dirty="0" err="1"/>
+              <a:t>Bäume</a:t>
+            </a:r>
+            <a:r>
+              <a:rPr lang="en-AT" dirty="0"/>
+              <a:t>: </a:t>
+            </a:r>
+            <a:r>
+              <a:rPr lang="en-AT" dirty="0" err="1"/>
+              <a:t>Mikroklima</a:t>
+            </a:r>
+            <a:endParaRPr lang="en-AT" dirty="0"/>
+          </a:p>
+          <a:p>
+            <a:r>
+              <a:rPr lang="en-AT" dirty="0" err="1"/>
+              <a:t>Bäume</a:t>
+            </a:r>
+            <a:r>
+              <a:rPr lang="en-AT" dirty="0"/>
+              <a:t> </a:t>
+            </a:r>
+            <a:r>
+              <a:rPr lang="en-AT" dirty="0" err="1"/>
+              <a:t>Hochwasserschutz</a:t>
+            </a:r>
+            <a:endParaRPr lang="en-AT" dirty="0"/>
           </a:p>
         </p:txBody>
       </p:sp>
@@ -8126,7 +8266,7 @@
           <a:p>
             <a:r>
               <a:rPr lang="en-AT" dirty="0"/>
-              <a:t>Introduction</a:t>
+              <a:t>Introduction - Problem</a:t>
             </a:r>
             <a:endParaRPr lang="de-AT" dirty="0"/>
           </a:p>
@@ -8153,7 +8293,13 @@
   <p:cSld>
     <p:spTree>
       <p:nvGrpSpPr>
-        <p:cNvPr id="1" name=""/>
+        <p:cNvPr id="1" name="">
+          <a:extLst>
+            <a:ext uri="{FF2B5EF4-FFF2-40B4-BE49-F238E27FC236}">
+              <a16:creationId xmlns:a16="http://schemas.microsoft.com/office/drawing/2014/main" id="{F13D100B-FEDE-01FA-15CF-FE363BF16408}"/>
+            </a:ext>
+          </a:extLst>
+        </p:cNvPr>
         <p:cNvGrpSpPr/>
         <p:nvPr/>
       </p:nvGrpSpPr>
@@ -8170,7 +8316,7 @@
           <p:cNvPr id="2" name="Content Placeholder 1">
             <a:extLst>
               <a:ext uri="{FF2B5EF4-FFF2-40B4-BE49-F238E27FC236}">
-                <a16:creationId xmlns:a16="http://schemas.microsoft.com/office/drawing/2014/main" id="{1D2C18C2-F185-C621-7435-72C1CFBDD815}"/>
+                <a16:creationId xmlns:a16="http://schemas.microsoft.com/office/drawing/2014/main" id="{EB0998CE-9581-AABF-DCF5-DEF07AAE988B}"/>
               </a:ext>
             </a:extLst>
           </p:cNvPr>
@@ -8186,7 +8332,61 @@
           <a:bodyPr/>
           <a:lstStyle/>
           <a:p>
-            <a:endParaRPr lang="de-AT"/>
+            <a:r>
+              <a:rPr lang="en-AT" dirty="0"/>
+              <a:t>&lt;Logo Infrared&gt; - </a:t>
+            </a:r>
+            <a:r>
+              <a:rPr lang="en-AT" dirty="0" err="1"/>
+              <a:t>kurz</a:t>
+            </a:r>
+            <a:r>
+              <a:rPr lang="en-AT" dirty="0"/>
+              <a:t> </a:t>
+            </a:r>
+            <a:r>
+              <a:rPr lang="en-AT" dirty="0" err="1"/>
+              <a:t>über</a:t>
+            </a:r>
+            <a:r>
+              <a:rPr lang="en-AT" dirty="0"/>
+              <a:t> den </a:t>
+            </a:r>
+            <a:r>
+              <a:rPr lang="en-AT" dirty="0" err="1"/>
+              <a:t>firmenpartner</a:t>
+            </a:r>
+            <a:r>
+              <a:rPr lang="en-AT" dirty="0"/>
+              <a:t> </a:t>
+            </a:r>
+            <a:r>
+              <a:rPr lang="en-AT" dirty="0" err="1"/>
+              <a:t>reden</a:t>
+            </a:r>
+            <a:endParaRPr lang="en-AT" dirty="0"/>
+          </a:p>
+          <a:p>
+            <a:r>
+              <a:rPr lang="en-AT" dirty="0"/>
+              <a:t>&lt;</a:t>
+            </a:r>
+            <a:r>
+              <a:rPr lang="en-AT" dirty="0" err="1"/>
+              <a:t>Vorjahresprojekte</a:t>
+            </a:r>
+            <a:r>
+              <a:rPr lang="en-AT" dirty="0"/>
+              <a:t> </a:t>
+            </a:r>
+            <a:r>
+              <a:rPr lang="en-AT" dirty="0" err="1"/>
+              <a:t>referenzieren</a:t>
+            </a:r>
+            <a:r>
+              <a:rPr lang="en-AT" dirty="0"/>
+              <a:t>&gt;</a:t>
+            </a:r>
           </a:p>
         </p:txBody>
       </p:sp>
@@ -8195,7 +8395,7 @@
           <p:cNvPr id="3" name="Footer Placeholder 2">
             <a:extLst>
               <a:ext uri="{FF2B5EF4-FFF2-40B4-BE49-F238E27FC236}">
-                <a16:creationId xmlns:a16="http://schemas.microsoft.com/office/drawing/2014/main" id="{55B64D95-FAF4-69ED-418D-4071B194B9C3}"/>
+                <a16:creationId xmlns:a16="http://schemas.microsoft.com/office/drawing/2014/main" id="{488AC091-D0D4-C0B4-BD79-9D614FFFD711}"/>
               </a:ext>
             </a:extLst>
           </p:cNvPr>
@@ -8224,7 +8424,7 @@
           <p:cNvPr id="4" name="Slide Number Placeholder 3">
             <a:extLst>
               <a:ext uri="{FF2B5EF4-FFF2-40B4-BE49-F238E27FC236}">
-                <a16:creationId xmlns:a16="http://schemas.microsoft.com/office/drawing/2014/main" id="{33B2AAA4-35A8-7150-EB96-79DC412AECBE}"/>
+                <a16:creationId xmlns:a16="http://schemas.microsoft.com/office/drawing/2014/main" id="{F5FFDE91-CCD3-18A2-BE6E-4A1B011CBC92}"/>
               </a:ext>
             </a:extLst>
           </p:cNvPr>
@@ -8257,7 +8457,7 @@
           <p:cNvPr id="5" name="Title 4">
             <a:extLst>
               <a:ext uri="{FF2B5EF4-FFF2-40B4-BE49-F238E27FC236}">
-                <a16:creationId xmlns:a16="http://schemas.microsoft.com/office/drawing/2014/main" id="{404B5E96-66C7-B557-D215-2616AAD0E7D3}"/>
+                <a16:creationId xmlns:a16="http://schemas.microsoft.com/office/drawing/2014/main" id="{9FB909EC-5B0E-DDEA-8EC7-3BF2DEB0BC1F}"/>
               </a:ext>
             </a:extLst>
           </p:cNvPr>
@@ -8275,7 +8475,7 @@
           <a:p>
             <a:r>
               <a:rPr lang="en-AT" dirty="0"/>
-              <a:t>Project Outline</a:t>
+              <a:t>Introduction - Context</a:t>
             </a:r>
             <a:endParaRPr lang="de-AT" dirty="0"/>
           </a:p>
@@ -8284,7 +8484,7 @@
     </p:spTree>
     <p:extLst>
       <p:ext uri="{BB962C8B-B14F-4D97-AF65-F5344CB8AC3E}">
-        <p14:creationId xmlns:p14="http://schemas.microsoft.com/office/powerpoint/2010/main" val="4176988336"/>
+        <p14:creationId xmlns:p14="http://schemas.microsoft.com/office/powerpoint/2010/main" val="415673921"/>
       </p:ext>
     </p:extLst>
   </p:cSld>
@@ -8319,6 +8519,466 @@
           <p:cNvPr id="2" name="Content Placeholder 1">
             <a:extLst>
               <a:ext uri="{FF2B5EF4-FFF2-40B4-BE49-F238E27FC236}">
+                <a16:creationId xmlns:a16="http://schemas.microsoft.com/office/drawing/2014/main" id="{9E1213BA-B3C2-2AEB-9193-431C84D29BF6}"/>
+              </a:ext>
+            </a:extLst>
+          </p:cNvPr>
+          <p:cNvSpPr>
+            <a:spLocks noGrp="1"/>
+          </p:cNvSpPr>
+          <p:nvPr>
+            <p:ph idx="1"/>
+          </p:nvPr>
+        </p:nvSpPr>
+        <p:spPr/>
+        <p:txBody>
+          <a:bodyPr/>
+          <a:lstStyle/>
+          <a:p>
+            <a:r>
+              <a:rPr lang="de-AT" dirty="0"/>
+              <a:t>S</a:t>
+            </a:r>
+            <a:r>
+              <a:rPr lang="en-AT" dirty="0" err="1"/>
+              <a:t>ehr</a:t>
+            </a:r>
+            <a:r>
+              <a:rPr lang="en-AT" dirty="0"/>
+              <a:t> </a:t>
+            </a:r>
+            <a:r>
+              <a:rPr lang="en-AT" dirty="0" err="1"/>
+              <a:t>kurze</a:t>
+            </a:r>
+            <a:r>
+              <a:rPr lang="en-AT" dirty="0"/>
+              <a:t> </a:t>
+            </a:r>
+            <a:r>
+              <a:rPr lang="en-AT" dirty="0" err="1"/>
+              <a:t>beschreibung</a:t>
+            </a:r>
+            <a:r>
+              <a:rPr lang="en-AT" dirty="0"/>
+              <a:t> </a:t>
+            </a:r>
+            <a:r>
+              <a:rPr lang="en-AT" dirty="0" err="1"/>
+              <a:t>über</a:t>
+            </a:r>
+            <a:r>
+              <a:rPr lang="en-AT" dirty="0"/>
+              <a:t> </a:t>
+            </a:r>
+            <a:r>
+              <a:rPr lang="en-AT" dirty="0" err="1"/>
+              <a:t>unseren</a:t>
+            </a:r>
+            <a:r>
+              <a:rPr lang="en-AT" dirty="0"/>
+              <a:t> </a:t>
+            </a:r>
+            <a:r>
+              <a:rPr lang="en-AT" dirty="0" err="1"/>
+              <a:t>lösungsansatz</a:t>
+            </a:r>
+            <a:r>
+              <a:rPr lang="en-AT" dirty="0"/>
+              <a:t>. </a:t>
+            </a:r>
+          </a:p>
+          <a:p>
+            <a:r>
+              <a:rPr lang="en-AT" dirty="0"/>
+              <a:t>Big Picture</a:t>
+            </a:r>
+            <a:endParaRPr lang="de-AT" dirty="0"/>
+          </a:p>
+        </p:txBody>
+      </p:sp>
+      <p:sp>
+        <p:nvSpPr>
+          <p:cNvPr id="3" name="Footer Placeholder 2">
+            <a:extLst>
+              <a:ext uri="{FF2B5EF4-FFF2-40B4-BE49-F238E27FC236}">
+                <a16:creationId xmlns:a16="http://schemas.microsoft.com/office/drawing/2014/main" id="{868B6370-F74B-016B-FF0D-DC1DB043D59D}"/>
+              </a:ext>
+            </a:extLst>
+          </p:cNvPr>
+          <p:cNvSpPr>
+            <a:spLocks noGrp="1"/>
+          </p:cNvSpPr>
+          <p:nvPr>
+            <p:ph type="ftr" sz="quarter" idx="11"/>
+          </p:nvPr>
+        </p:nvSpPr>
+        <p:spPr/>
+        <p:txBody>
+          <a:bodyPr/>
+          <a:lstStyle/>
+          <a:p>
+            <a:r>
+              <a:rPr lang="de-AT"/>
+              <a:t>Fusszeile</a:t>
+            </a:r>
+            <a:endParaRPr lang="de-AT" dirty="0"/>
+          </a:p>
+        </p:txBody>
+      </p:sp>
+      <p:sp>
+        <p:nvSpPr>
+          <p:cNvPr id="4" name="Slide Number Placeholder 3">
+            <a:extLst>
+              <a:ext uri="{FF2B5EF4-FFF2-40B4-BE49-F238E27FC236}">
+                <a16:creationId xmlns:a16="http://schemas.microsoft.com/office/drawing/2014/main" id="{F5250EA5-2055-EE81-72DE-79F3DC45E2AC}"/>
+              </a:ext>
+            </a:extLst>
+          </p:cNvPr>
+          <p:cNvSpPr>
+            <a:spLocks noGrp="1"/>
+          </p:cNvSpPr>
+          <p:nvPr>
+            <p:ph type="sldNum" sz="quarter" idx="12"/>
+          </p:nvPr>
+        </p:nvSpPr>
+        <p:spPr/>
+        <p:txBody>
+          <a:bodyPr/>
+          <a:lstStyle/>
+          <a:p>
+            <a:r>
+              <a:rPr lang="de-AT"/>
+              <a:t>SEITE </a:t>
+            </a:r>
+            <a:fld id="{BE3DC40E-DBBE-4E2D-9EEC-FBF0DA0E9179}" type="slidenum">
+              <a:rPr lang="de-AT" smtClean="0"/>
+              <a:t>5</a:t>
+            </a:fld>
+            <a:endParaRPr lang="de-AT" dirty="0"/>
+          </a:p>
+        </p:txBody>
+      </p:sp>
+      <p:sp>
+        <p:nvSpPr>
+          <p:cNvPr id="5" name="Title 4">
+            <a:extLst>
+              <a:ext uri="{FF2B5EF4-FFF2-40B4-BE49-F238E27FC236}">
+                <a16:creationId xmlns:a16="http://schemas.microsoft.com/office/drawing/2014/main" id="{7E724D8D-8F49-F6D8-7959-06B7DCFC7327}"/>
+              </a:ext>
+            </a:extLst>
+          </p:cNvPr>
+          <p:cNvSpPr>
+            <a:spLocks noGrp="1"/>
+          </p:cNvSpPr>
+          <p:nvPr>
+            <p:ph type="title"/>
+          </p:nvPr>
+        </p:nvSpPr>
+        <p:spPr/>
+        <p:txBody>
+          <a:bodyPr/>
+          <a:lstStyle/>
+          <a:p>
+            <a:r>
+              <a:rPr lang="en-AT" dirty="0"/>
+              <a:t>Introduction – Our solution</a:t>
+            </a:r>
+            <a:endParaRPr lang="de-AT" dirty="0"/>
+          </a:p>
+        </p:txBody>
+      </p:sp>
+    </p:spTree>
+    <p:extLst>
+      <p:ext uri="{BB962C8B-B14F-4D97-AF65-F5344CB8AC3E}">
+        <p14:creationId xmlns:p14="http://schemas.microsoft.com/office/powerpoint/2010/main" val="3480902647"/>
+      </p:ext>
+    </p:extLst>
+  </p:cSld>
+  <p:clrMapOvr>
+    <a:masterClrMapping/>
+  </p:clrMapOvr>
+  <p:transition>
+    <p:fade/>
+  </p:transition>
+</p:sld>
+</file>
+
+<file path=ppt/slides/slide6.xml><?xml version="1.0" encoding="utf-8"?>
+<p:sld xmlns:a="http://schemas.openxmlformats.org/drawingml/2006/main" xmlns:r="http://schemas.openxmlformats.org/officeDocument/2006/relationships" xmlns:p="http://schemas.openxmlformats.org/presentationml/2006/main">
+  <p:cSld>
+    <p:spTree>
+      <p:nvGrpSpPr>
+        <p:cNvPr id="1" name=""/>
+        <p:cNvGrpSpPr/>
+        <p:nvPr/>
+      </p:nvGrpSpPr>
+      <p:grpSpPr>
+        <a:xfrm>
+          <a:off x="0" y="0"/>
+          <a:ext cx="0" cy="0"/>
+          <a:chOff x="0" y="0"/>
+          <a:chExt cx="0" cy="0"/>
+        </a:xfrm>
+      </p:grpSpPr>
+      <p:sp>
+        <p:nvSpPr>
+          <p:cNvPr id="2" name="Content Placeholder 1">
+            <a:extLst>
+              <a:ext uri="{FF2B5EF4-FFF2-40B4-BE49-F238E27FC236}">
+                <a16:creationId xmlns:a16="http://schemas.microsoft.com/office/drawing/2014/main" id="{1D2C18C2-F185-C621-7435-72C1CFBDD815}"/>
+              </a:ext>
+            </a:extLst>
+          </p:cNvPr>
+          <p:cNvSpPr>
+            <a:spLocks noGrp="1"/>
+          </p:cNvSpPr>
+          <p:nvPr>
+            <p:ph idx="1"/>
+          </p:nvPr>
+        </p:nvSpPr>
+        <p:spPr/>
+        <p:txBody>
+          <a:bodyPr/>
+          <a:lstStyle/>
+          <a:p>
+            <a:r>
+              <a:rPr lang="en-AT" dirty="0" err="1"/>
+              <a:t>Klimazone</a:t>
+            </a:r>
+            <a:r>
+              <a:rPr lang="en-AT" dirty="0"/>
+              <a:t> (</a:t>
+            </a:r>
+            <a:r>
+              <a:rPr lang="en-AT" dirty="0" err="1"/>
+              <a:t>gemäßigt</a:t>
+            </a:r>
+            <a:r>
+              <a:rPr lang="en-AT" dirty="0"/>
+              <a:t> </a:t>
+            </a:r>
+            <a:r>
+              <a:rPr lang="en-AT" dirty="0" err="1"/>
+              <a:t>mitteleuropäisch</a:t>
+            </a:r>
+            <a:r>
+              <a:rPr lang="en-AT" dirty="0"/>
+              <a:t>)</a:t>
+            </a:r>
+          </a:p>
+          <a:p>
+            <a:r>
+              <a:rPr lang="en-AT" dirty="0" err="1"/>
+              <a:t>Mehrere</a:t>
+            </a:r>
+            <a:r>
+              <a:rPr lang="en-AT" dirty="0"/>
+              <a:t> Jahreszeiten</a:t>
+            </a:r>
+          </a:p>
+          <a:p>
+            <a:endParaRPr lang="en-AT" dirty="0"/>
+          </a:p>
+          <a:p>
+            <a:endParaRPr lang="en-AT" dirty="0"/>
+          </a:p>
+          <a:p>
+            <a:r>
+              <a:rPr lang="en-AT" dirty="0"/>
+              <a:t>Out of scope: </a:t>
+            </a:r>
+          </a:p>
+          <a:p>
+            <a:pPr lvl="1"/>
+            <a:r>
+              <a:rPr lang="en-AT" dirty="0" err="1"/>
+              <a:t>Simulationen</a:t>
+            </a:r>
+            <a:r>
+              <a:rPr lang="en-AT" dirty="0"/>
+              <a:t> (Hitze, </a:t>
+            </a:r>
+            <a:r>
+              <a:rPr lang="en-AT" dirty="0" err="1"/>
+              <a:t>flut</a:t>
+            </a:r>
+            <a:r>
+              <a:rPr lang="en-AT" dirty="0"/>
+              <a:t>). </a:t>
+            </a:r>
+          </a:p>
+          <a:p>
+            <a:pPr lvl="1"/>
+            <a:r>
+              <a:rPr lang="en-AT" dirty="0"/>
+              <a:t>Kleine </a:t>
+            </a:r>
+            <a:r>
+              <a:rPr lang="en-AT" dirty="0" err="1"/>
+              <a:t>einzelbäume</a:t>
+            </a:r>
+            <a:r>
+              <a:rPr lang="en-AT" dirty="0"/>
+              <a:t> (die in </a:t>
+            </a:r>
+            <a:r>
+              <a:rPr lang="en-AT" dirty="0" err="1"/>
+              <a:t>auflösung</a:t>
+            </a:r>
+            <a:r>
+              <a:rPr lang="en-AT" dirty="0"/>
+              <a:t> </a:t>
+            </a:r>
+            <a:r>
+              <a:rPr lang="en-AT" dirty="0" err="1"/>
+              <a:t>unter</a:t>
+            </a:r>
+            <a:r>
+              <a:rPr lang="en-AT" dirty="0"/>
+              <a:t> </a:t>
+            </a:r>
+            <a:r>
+              <a:rPr lang="en-AT" dirty="0" err="1"/>
+              <a:t>gehen</a:t>
+            </a:r>
+            <a:r>
+              <a:rPr lang="en-AT" dirty="0"/>
+              <a:t>)</a:t>
+            </a:r>
+            <a:endParaRPr lang="de-AT" dirty="0"/>
+          </a:p>
+        </p:txBody>
+      </p:sp>
+      <p:sp>
+        <p:nvSpPr>
+          <p:cNvPr id="3" name="Footer Placeholder 2">
+            <a:extLst>
+              <a:ext uri="{FF2B5EF4-FFF2-40B4-BE49-F238E27FC236}">
+                <a16:creationId xmlns:a16="http://schemas.microsoft.com/office/drawing/2014/main" id="{55B64D95-FAF4-69ED-418D-4071B194B9C3}"/>
+              </a:ext>
+            </a:extLst>
+          </p:cNvPr>
+          <p:cNvSpPr>
+            <a:spLocks noGrp="1"/>
+          </p:cNvSpPr>
+          <p:nvPr>
+            <p:ph type="ftr" sz="quarter" idx="11"/>
+          </p:nvPr>
+        </p:nvSpPr>
+        <p:spPr/>
+        <p:txBody>
+          <a:bodyPr/>
+          <a:lstStyle/>
+          <a:p>
+            <a:r>
+              <a:rPr lang="de-AT"/>
+              <a:t>Fusszeile</a:t>
+            </a:r>
+            <a:endParaRPr lang="de-AT" dirty="0"/>
+          </a:p>
+        </p:txBody>
+      </p:sp>
+      <p:sp>
+        <p:nvSpPr>
+          <p:cNvPr id="4" name="Slide Number Placeholder 3">
+            <a:extLst>
+              <a:ext uri="{FF2B5EF4-FFF2-40B4-BE49-F238E27FC236}">
+                <a16:creationId xmlns:a16="http://schemas.microsoft.com/office/drawing/2014/main" id="{33B2AAA4-35A8-7150-EB96-79DC412AECBE}"/>
+              </a:ext>
+            </a:extLst>
+          </p:cNvPr>
+          <p:cNvSpPr>
+            <a:spLocks noGrp="1"/>
+          </p:cNvSpPr>
+          <p:nvPr>
+            <p:ph type="sldNum" sz="quarter" idx="12"/>
+          </p:nvPr>
+        </p:nvSpPr>
+        <p:spPr/>
+        <p:txBody>
+          <a:bodyPr/>
+          <a:lstStyle/>
+          <a:p>
+            <a:r>
+              <a:rPr lang="de-AT"/>
+              <a:t>SEITE </a:t>
+            </a:r>
+            <a:fld id="{BE3DC40E-DBBE-4E2D-9EEC-FBF0DA0E9179}" type="slidenum">
+              <a:rPr lang="de-AT" smtClean="0"/>
+              <a:t>6</a:t>
+            </a:fld>
+            <a:endParaRPr lang="de-AT" dirty="0"/>
+          </a:p>
+        </p:txBody>
+      </p:sp>
+      <p:sp>
+        <p:nvSpPr>
+          <p:cNvPr id="5" name="Title 4">
+            <a:extLst>
+              <a:ext uri="{FF2B5EF4-FFF2-40B4-BE49-F238E27FC236}">
+                <a16:creationId xmlns:a16="http://schemas.microsoft.com/office/drawing/2014/main" id="{404B5E96-66C7-B557-D215-2616AAD0E7D3}"/>
+              </a:ext>
+            </a:extLst>
+          </p:cNvPr>
+          <p:cNvSpPr>
+            <a:spLocks noGrp="1"/>
+          </p:cNvSpPr>
+          <p:nvPr>
+            <p:ph type="title"/>
+          </p:nvPr>
+        </p:nvSpPr>
+        <p:spPr/>
+        <p:txBody>
+          <a:bodyPr/>
+          <a:lstStyle/>
+          <a:p>
+            <a:r>
+              <a:rPr lang="en-AT" dirty="0"/>
+              <a:t>Introduction – Scope and Limitation</a:t>
+            </a:r>
+            <a:endParaRPr lang="de-AT" dirty="0"/>
+          </a:p>
+        </p:txBody>
+      </p:sp>
+    </p:spTree>
+    <p:extLst>
+      <p:ext uri="{BB962C8B-B14F-4D97-AF65-F5344CB8AC3E}">
+        <p14:creationId xmlns:p14="http://schemas.microsoft.com/office/powerpoint/2010/main" val="4176988336"/>
+      </p:ext>
+    </p:extLst>
+  </p:cSld>
+  <p:clrMapOvr>
+    <a:masterClrMapping/>
+  </p:clrMapOvr>
+  <p:transition>
+    <p:fade/>
+  </p:transition>
+</p:sld>
+</file>
+
+<file path=ppt/slides/slide7.xml><?xml version="1.0" encoding="utf-8"?>
+<p:sld xmlns:a="http://schemas.openxmlformats.org/drawingml/2006/main" xmlns:r="http://schemas.openxmlformats.org/officeDocument/2006/relationships" xmlns:p="http://schemas.openxmlformats.org/presentationml/2006/main">
+  <p:cSld>
+    <p:spTree>
+      <p:nvGrpSpPr>
+        <p:cNvPr id="1" name=""/>
+        <p:cNvGrpSpPr/>
+        <p:nvPr/>
+      </p:nvGrpSpPr>
+      <p:grpSpPr>
+        <a:xfrm>
+          <a:off x="0" y="0"/>
+          <a:ext cx="0" cy="0"/>
+          <a:chOff x="0" y="0"/>
+          <a:chExt cx="0" cy="0"/>
+        </a:xfrm>
+      </p:grpSpPr>
+      <p:sp>
+        <p:nvSpPr>
+          <p:cNvPr id="2" name="Content Placeholder 1">
+            <a:extLst>
+              <a:ext uri="{FF2B5EF4-FFF2-40B4-BE49-F238E27FC236}">
                 <a16:creationId xmlns:a16="http://schemas.microsoft.com/office/drawing/2014/main" id="{932E7214-4F08-BCA5-CB79-65FC9D8116E0}"/>
               </a:ext>
             </a:extLst>
@@ -8395,7 +9055,7 @@
             </a:r>
             <a:fld id="{BE3DC40E-DBBE-4E2D-9EEC-FBF0DA0E9179}" type="slidenum">
               <a:rPr lang="de-AT" smtClean="0"/>
-              <a:t>5</a:t>
+              <a:t>7</a:t>
             </a:fld>
             <a:endParaRPr lang="de-AT" dirty="0"/>
           </a:p>
@@ -9278,6 +9938,57 @@
 </file>
 
 <file path=customXml/item1.xml><?xml version="1.0" encoding="utf-8"?>
+<?mso-contentType ?>
+<FormTemplates xmlns="http://schemas.microsoft.com/sharepoint/v3/contenttype/forms">
+  <Display>DocumentLibraryForm</Display>
+  <Edit>DocumentLibraryForm</Edit>
+  <New>DocumentLibraryForm</New>
+</FormTemplates>
+</file>
+
+<file path=customXml/item2.xml><?xml version="1.0" encoding="utf-8"?>
+<p:properties xmlns:p="http://schemas.microsoft.com/office/2006/metadata/properties" xmlns:xsi="http://www.w3.org/2001/XMLSchema-instance" xmlns:pc="http://schemas.microsoft.com/office/infopath/2007/PartnerControls">
+  <documentManagement>
+    <Kategorie xmlns="dde413db-0745-4f3a-8dca-564dc7ff6f7d">Präsentationen</Kategorie>
+    <Beschreibung xmlns="dde413db-0745-4f3a-8dca-564dc7ff6f7d">Musterpräsentation im Format 16:10 (= WU Standard)</Beschreibung>
+    <TaxCatchAll xmlns="08b0a3ee-3d2a-451c-9a1a-7e5d5b0c9c77">
+      <Value>266</Value>
+      <Value>403</Value>
+    </TaxCatchAll>
+    <DokumentenartTaxHTField0 xmlns="1a8d9a65-8471-4209-a900-f8e11db75e0a">
+      <Terms xmlns="http://schemas.microsoft.com/office/infopath/2007/PartnerControls">
+        <TermInfo xmlns="http://schemas.microsoft.com/office/infopath/2007/PartnerControls">
+          <TermName xmlns="http://schemas.microsoft.com/office/infopath/2007/PartnerControls">Vorlagen</TermName>
+          <TermId xmlns="http://schemas.microsoft.com/office/infopath/2007/PartnerControls">17fc50ed-8ad1-47be-ab12-04243fd74ddb</TermId>
+        </TermInfo>
+      </Terms>
+    </DokumentenartTaxHTField0>
+    <WU_x0020_ThemaTaxHTField0 xmlns="1a8d9a65-8471-4209-a900-f8e11db75e0a">
+      <Terms xmlns="http://schemas.microsoft.com/office/infopath/2007/PartnerControls">
+        <TermInfo xmlns="http://schemas.microsoft.com/office/infopath/2007/PartnerControls">
+          <TermName xmlns="http://schemas.microsoft.com/office/infopath/2007/PartnerControls">Corporate Design</TermName>
+          <TermId xmlns="http://schemas.microsoft.com/office/infopath/2007/PartnerControls">19895bcd-b158-45ae-ab7b-f5ca217dfcec</TermId>
+        </TermInfo>
+      </Terms>
+    </WU_x0020_ThemaTaxHTField0>
+    <Format xmlns="dde413db-0745-4f3a-8dca-564dc7ff6f7d">Microsoft Office 2013/2016</Format>
+    <SharedWithUsers xmlns="08b0a3ee-3d2a-451c-9a1a-7e5d5b0c9c77">
+      <UserInfo>
+        <DisplayName>Hernandez Perez, Laura</DisplayName>
+        <AccountId>6100</AccountId>
+        <AccountType/>
+      </UserInfo>
+      <UserInfo>
+        <DisplayName>Hermann, Anett</DisplayName>
+        <AccountId>2869</AccountId>
+        <AccountType/>
+      </UserInfo>
+    </SharedWithUsers>
+  </documentManagement>
+</p:properties>
+</file>
+
+<file path=customXml/item3.xml><?xml version="1.0" encoding="utf-8"?>
 <ct:contentTypeSchema xmlns:ct="http://schemas.microsoft.com/office/2006/metadata/contentType" xmlns:ma="http://schemas.microsoft.com/office/2006/metadata/properties/metaAttributes" ct:_="" ma:_="" ma:contentTypeName="Dokument" ma:contentTypeID="0x010100BCF651A35DF3154DB01328AF51148DAE" ma:contentTypeVersion="2" ma:contentTypeDescription="Ein neues Dokument erstellen." ma:contentTypeScope="" ma:versionID="b5ccb5bb211b6ddcc624790d84f2bb9f">
   <xsd:schema xmlns:xsd="http://www.w3.org/2001/XMLSchema" xmlns:xs="http://www.w3.org/2001/XMLSchema" xmlns:p="http://schemas.microsoft.com/office/2006/metadata/properties" xmlns:ns2="1a8d9a65-8471-4209-a900-f8e11db75e0a" xmlns:ns3="08b0a3ee-3d2a-451c-9a1a-7e5d5b0c9c77" xmlns:ns4="dde413db-0745-4f3a-8dca-564dc7ff6f7d" targetNamespace="http://schemas.microsoft.com/office/2006/metadata/properties" ma:root="true" ma:fieldsID="046596c9011a87760a505164f9d920d3" ns2:_="" ns3:_="" ns4:_="">
     <xsd:import namespace="1a8d9a65-8471-4209-a900-f8e11db75e0a"/>
@@ -9508,58 +10219,27 @@
 </ct:contentTypeSchema>
 </file>
 
-<file path=customXml/item2.xml><?xml version="1.0" encoding="utf-8"?>
-<p:properties xmlns:p="http://schemas.microsoft.com/office/2006/metadata/properties" xmlns:xsi="http://www.w3.org/2001/XMLSchema-instance" xmlns:pc="http://schemas.microsoft.com/office/infopath/2007/PartnerControls">
-  <documentManagement>
-    <Kategorie xmlns="dde413db-0745-4f3a-8dca-564dc7ff6f7d">Präsentationen</Kategorie>
-    <Beschreibung xmlns="dde413db-0745-4f3a-8dca-564dc7ff6f7d">Musterpräsentation im Format 16:10 (= WU Standard)</Beschreibung>
-    <TaxCatchAll xmlns="08b0a3ee-3d2a-451c-9a1a-7e5d5b0c9c77">
-      <Value>266</Value>
-      <Value>403</Value>
-    </TaxCatchAll>
-    <DokumentenartTaxHTField0 xmlns="1a8d9a65-8471-4209-a900-f8e11db75e0a">
-      <Terms xmlns="http://schemas.microsoft.com/office/infopath/2007/PartnerControls">
-        <TermInfo xmlns="http://schemas.microsoft.com/office/infopath/2007/PartnerControls">
-          <TermName xmlns="http://schemas.microsoft.com/office/infopath/2007/PartnerControls">Vorlagen</TermName>
-          <TermId xmlns="http://schemas.microsoft.com/office/infopath/2007/PartnerControls">17fc50ed-8ad1-47be-ab12-04243fd74ddb</TermId>
-        </TermInfo>
-      </Terms>
-    </DokumentenartTaxHTField0>
-    <WU_x0020_ThemaTaxHTField0 xmlns="1a8d9a65-8471-4209-a900-f8e11db75e0a">
-      <Terms xmlns="http://schemas.microsoft.com/office/infopath/2007/PartnerControls">
-        <TermInfo xmlns="http://schemas.microsoft.com/office/infopath/2007/PartnerControls">
-          <TermName xmlns="http://schemas.microsoft.com/office/infopath/2007/PartnerControls">Corporate Design</TermName>
-          <TermId xmlns="http://schemas.microsoft.com/office/infopath/2007/PartnerControls">19895bcd-b158-45ae-ab7b-f5ca217dfcec</TermId>
-        </TermInfo>
-      </Terms>
-    </WU_x0020_ThemaTaxHTField0>
-    <Format xmlns="dde413db-0745-4f3a-8dca-564dc7ff6f7d">Microsoft Office 2013/2016</Format>
-    <SharedWithUsers xmlns="08b0a3ee-3d2a-451c-9a1a-7e5d5b0c9c77">
-      <UserInfo>
-        <DisplayName>Hernandez Perez, Laura</DisplayName>
-        <AccountId>6100</AccountId>
-        <AccountType/>
-      </UserInfo>
-      <UserInfo>
-        <DisplayName>Hermann, Anett</DisplayName>
-        <AccountId>2869</AccountId>
-        <AccountType/>
-      </UserInfo>
-    </SharedWithUsers>
-  </documentManagement>
-</p:properties>
+<file path=customXml/itemProps1.xml><?xml version="1.0" encoding="utf-8"?>
+<ds:datastoreItem xmlns:ds="http://schemas.openxmlformats.org/officeDocument/2006/customXml" ds:itemID="{9346B3ED-06B1-4DE8-9648-0F78B5B453B2}">
+  <ds:schemaRefs>
+    <ds:schemaRef ds:uri="http://schemas.microsoft.com/sharepoint/v3/contenttype/forms"/>
+  </ds:schemaRefs>
+</ds:datastoreItem>
 </file>
 
-<file path=customXml/item3.xml><?xml version="1.0" encoding="utf-8"?>
-<?mso-contentType ?>
-<FormTemplates xmlns="http://schemas.microsoft.com/sharepoint/v3/contenttype/forms">
-  <Display>DocumentLibraryForm</Display>
-  <Edit>DocumentLibraryForm</Edit>
-  <New>DocumentLibraryForm</New>
-</FormTemplates>
+<file path=customXml/itemProps2.xml><?xml version="1.0" encoding="utf-8"?>
+<ds:datastoreItem xmlns:ds="http://schemas.openxmlformats.org/officeDocument/2006/customXml" ds:itemID="{BF58DFAF-C9AD-4CE5-A221-45D64FB05328}">
+  <ds:schemaRefs>
+    <ds:schemaRef ds:uri="http://schemas.microsoft.com/office/2006/metadata/properties"/>
+    <ds:schemaRef ds:uri="http://schemas.microsoft.com/office/infopath/2007/PartnerControls"/>
+    <ds:schemaRef ds:uri="dde413db-0745-4f3a-8dca-564dc7ff6f7d"/>
+    <ds:schemaRef ds:uri="08b0a3ee-3d2a-451c-9a1a-7e5d5b0c9c77"/>
+    <ds:schemaRef ds:uri="1a8d9a65-8471-4209-a900-f8e11db75e0a"/>
+  </ds:schemaRefs>
+</ds:datastoreItem>
 </file>
 
-<file path=customXml/itemProps1.xml><?xml version="1.0" encoding="utf-8"?>
+<file path=customXml/itemProps3.xml><?xml version="1.0" encoding="utf-8"?>
 <ds:datastoreItem xmlns:ds="http://schemas.openxmlformats.org/officeDocument/2006/customXml" ds:itemID="{069B4889-3CCA-46C6-8FD4-B0AB941A4B59}">
   <ds:schemaRefs>
     <ds:schemaRef ds:uri="http://schemas.microsoft.com/office/2006/metadata/contentType"/>
@@ -9577,24 +10257,4 @@
     <ds:schemaRef ds:uri="http://schemas.microsoft.com/internal/obd"/>
   </ds:schemaRefs>
 </ds:datastoreItem>
-</file>
-
-<file path=customXml/itemProps2.xml><?xml version="1.0" encoding="utf-8"?>
-<ds:datastoreItem xmlns:ds="http://schemas.openxmlformats.org/officeDocument/2006/customXml" ds:itemID="{BF58DFAF-C9AD-4CE5-A221-45D64FB05328}">
-  <ds:schemaRefs>
-    <ds:schemaRef ds:uri="http://schemas.microsoft.com/office/2006/metadata/properties"/>
-    <ds:schemaRef ds:uri="http://schemas.microsoft.com/office/infopath/2007/PartnerControls"/>
-    <ds:schemaRef ds:uri="dde413db-0745-4f3a-8dca-564dc7ff6f7d"/>
-    <ds:schemaRef ds:uri="08b0a3ee-3d2a-451c-9a1a-7e5d5b0c9c77"/>
-    <ds:schemaRef ds:uri="1a8d9a65-8471-4209-a900-f8e11db75e0a"/>
-  </ds:schemaRefs>
-</ds:datastoreItem>
-</file>
-
-<file path=customXml/itemProps3.xml><?xml version="1.0" encoding="utf-8"?>
-<ds:datastoreItem xmlns:ds="http://schemas.openxmlformats.org/officeDocument/2006/customXml" ds:itemID="{9346B3ED-06B1-4DE8-9648-0F78B5B453B2}">
-  <ds:schemaRefs>
-    <ds:schemaRef ds:uri="http://schemas.microsoft.com/sharepoint/v3/contenttype/forms"/>
-  </ds:schemaRefs>
-</ds:datastoreItem>
 </file>
--- a/deliverables/3b. intermediate slides/Intermediate Slides.pptx
+++ b/deliverables/3b. intermediate slides/Intermediate Slides.pptx
@@ -5,24 +5,32 @@
     <p:sldMasterId id="2147483660" r:id="rId4"/>
   </p:sldMasterIdLst>
   <p:notesMasterIdLst>
-    <p:notesMasterId r:id="rId12"/>
+    <p:notesMasterId r:id="rId20"/>
   </p:notesMasterIdLst>
   <p:handoutMasterIdLst>
-    <p:handoutMasterId r:id="rId13"/>
+    <p:handoutMasterId r:id="rId21"/>
   </p:handoutMasterIdLst>
   <p:sldIdLst>
     <p:sldId id="278" r:id="rId5"/>
     <p:sldId id="279" r:id="rId6"/>
-    <p:sldId id="280" r:id="rId7"/>
-    <p:sldId id="283" r:id="rId8"/>
-    <p:sldId id="284" r:id="rId9"/>
-    <p:sldId id="281" r:id="rId10"/>
-    <p:sldId id="282" r:id="rId11"/>
+    <p:sldId id="289" r:id="rId7"/>
+    <p:sldId id="280" r:id="rId8"/>
+    <p:sldId id="283" r:id="rId9"/>
+    <p:sldId id="284" r:id="rId10"/>
+    <p:sldId id="281" r:id="rId11"/>
+    <p:sldId id="290" r:id="rId12"/>
+    <p:sldId id="282" r:id="rId13"/>
+    <p:sldId id="291" r:id="rId14"/>
+    <p:sldId id="285" r:id="rId15"/>
+    <p:sldId id="292" r:id="rId16"/>
+    <p:sldId id="286" r:id="rId17"/>
+    <p:sldId id="287" r:id="rId18"/>
+    <p:sldId id="288" r:id="rId19"/>
   </p:sldIdLst>
   <p:sldSz cx="9144000" cy="5715000" type="screen16x10"/>
   <p:notesSz cx="6858000" cy="9144000"/>
   <p:custDataLst>
-    <p:tags r:id="rId14"/>
+    <p:tags r:id="rId22"/>
   </p:custDataLst>
   <p:defaultTextStyle>
     <a:defPPr>
@@ -7759,6 +7767,1004 @@
 </p:sld>
 </file>
 
+<file path=ppt/slides/slide10.xml><?xml version="1.0" encoding="utf-8"?>
+<p:sld xmlns:a="http://schemas.openxmlformats.org/drawingml/2006/main" xmlns:r="http://schemas.openxmlformats.org/officeDocument/2006/relationships" xmlns:p="http://schemas.openxmlformats.org/presentationml/2006/main">
+  <p:cSld>
+    <p:spTree>
+      <p:nvGrpSpPr>
+        <p:cNvPr id="1" name="">
+          <a:extLst>
+            <a:ext uri="{FF2B5EF4-FFF2-40B4-BE49-F238E27FC236}">
+              <a16:creationId xmlns:a16="http://schemas.microsoft.com/office/drawing/2014/main" id="{51452552-A00A-904C-7C5B-1060AC6B9750}"/>
+            </a:ext>
+          </a:extLst>
+        </p:cNvPr>
+        <p:cNvGrpSpPr/>
+        <p:nvPr/>
+      </p:nvGrpSpPr>
+      <p:grpSpPr>
+        <a:xfrm>
+          <a:off x="0" y="0"/>
+          <a:ext cx="0" cy="0"/>
+          <a:chOff x="0" y="0"/>
+          <a:chExt cx="0" cy="0"/>
+        </a:xfrm>
+      </p:grpSpPr>
+      <p:sp>
+        <p:nvSpPr>
+          <p:cNvPr id="10" name="Text Placeholder 1">
+            <a:extLst>
+              <a:ext uri="{FF2B5EF4-FFF2-40B4-BE49-F238E27FC236}">
+                <a16:creationId xmlns:a16="http://schemas.microsoft.com/office/drawing/2014/main" id="{DEE036EB-28F2-D729-CAF5-479DBCDF2390}"/>
+              </a:ext>
+            </a:extLst>
+          </p:cNvPr>
+          <p:cNvSpPr>
+            <a:spLocks noGrp="1"/>
+          </p:cNvSpPr>
+          <p:nvPr>
+            <p:ph type="body" sz="quarter" idx="11"/>
+          </p:nvPr>
+        </p:nvSpPr>
+        <p:spPr>
+          <a:xfrm>
+            <a:off x="287338" y="2941638"/>
+            <a:ext cx="4284662" cy="620885"/>
+          </a:xfrm>
+        </p:spPr>
+        <p:txBody>
+          <a:bodyPr/>
+          <a:lstStyle/>
+          <a:p>
+            <a:endParaRPr lang="en-US"/>
+          </a:p>
+        </p:txBody>
+      </p:sp>
+      <p:sp>
+        <p:nvSpPr>
+          <p:cNvPr id="5" name="Title 4">
+            <a:extLst>
+              <a:ext uri="{FF2B5EF4-FFF2-40B4-BE49-F238E27FC236}">
+                <a16:creationId xmlns:a16="http://schemas.microsoft.com/office/drawing/2014/main" id="{1D14F809-7769-243A-89F5-C8A05A3B242E}"/>
+              </a:ext>
+            </a:extLst>
+          </p:cNvPr>
+          <p:cNvSpPr>
+            <a:spLocks noGrp="1"/>
+          </p:cNvSpPr>
+          <p:nvPr>
+            <p:ph type="ctrTitle"/>
+          </p:nvPr>
+        </p:nvSpPr>
+        <p:spPr>
+          <a:xfrm>
+            <a:off x="605406" y="1301365"/>
+            <a:ext cx="5436000" cy="1026000"/>
+          </a:xfrm>
+        </p:spPr>
+        <p:txBody>
+          <a:bodyPr anchor="ctr">
+            <a:normAutofit/>
+          </a:bodyPr>
+          <a:lstStyle/>
+          <a:p>
+            <a:r>
+              <a:rPr lang="en-AT" dirty="0"/>
+              <a:t>EDA</a:t>
+            </a:r>
+            <a:endParaRPr lang="de-AT" dirty="0"/>
+          </a:p>
+        </p:txBody>
+      </p:sp>
+      <p:sp>
+        <p:nvSpPr>
+          <p:cNvPr id="3" name="Footer Placeholder 2">
+            <a:extLst>
+              <a:ext uri="{FF2B5EF4-FFF2-40B4-BE49-F238E27FC236}">
+                <a16:creationId xmlns:a16="http://schemas.microsoft.com/office/drawing/2014/main" id="{3FF68120-CC3E-2103-8570-542A7B980DCA}"/>
+              </a:ext>
+            </a:extLst>
+          </p:cNvPr>
+          <p:cNvSpPr>
+            <a:spLocks noGrp="1"/>
+          </p:cNvSpPr>
+          <p:nvPr>
+            <p:ph type="ftr" sz="quarter" idx="14"/>
+          </p:nvPr>
+        </p:nvSpPr>
+        <p:spPr>
+          <a:xfrm>
+            <a:off x="1354561" y="5412059"/>
+            <a:ext cx="3217443" cy="258085"/>
+          </a:xfrm>
+        </p:spPr>
+        <p:txBody>
+          <a:bodyPr anchor="ctr">
+            <a:normAutofit/>
+          </a:bodyPr>
+          <a:lstStyle/>
+          <a:p>
+            <a:pPr>
+              <a:spcAft>
+                <a:spcPts val="600"/>
+              </a:spcAft>
+            </a:pPr>
+            <a:r>
+              <a:rPr lang="de-AT"/>
+              <a:t>Fusszeile</a:t>
+            </a:r>
+          </a:p>
+        </p:txBody>
+      </p:sp>
+      <p:sp>
+        <p:nvSpPr>
+          <p:cNvPr id="4" name="Slide Number Placeholder 3">
+            <a:extLst>
+              <a:ext uri="{FF2B5EF4-FFF2-40B4-BE49-F238E27FC236}">
+                <a16:creationId xmlns:a16="http://schemas.microsoft.com/office/drawing/2014/main" id="{2BAC7969-4824-F50A-DB54-40F24F006B15}"/>
+              </a:ext>
+            </a:extLst>
+          </p:cNvPr>
+          <p:cNvSpPr>
+            <a:spLocks noGrp="1"/>
+          </p:cNvSpPr>
+          <p:nvPr>
+            <p:ph type="sldNum" sz="quarter" idx="15"/>
+          </p:nvPr>
+        </p:nvSpPr>
+        <p:spPr>
+          <a:xfrm>
+            <a:off x="462407" y="5412059"/>
+            <a:ext cx="892150" cy="258085"/>
+          </a:xfrm>
+        </p:spPr>
+        <p:txBody>
+          <a:bodyPr anchor="ctr">
+            <a:normAutofit/>
+          </a:bodyPr>
+          <a:lstStyle/>
+          <a:p>
+            <a:pPr>
+              <a:spcAft>
+                <a:spcPts val="600"/>
+              </a:spcAft>
+            </a:pPr>
+            <a:r>
+              <a:rPr lang="de-AT"/>
+              <a:t>SEITE </a:t>
+            </a:r>
+            <a:fld id="{BE3DC40E-DBBE-4E2D-9EEC-FBF0DA0E9179}" type="slidenum">
+              <a:rPr lang="de-AT" smtClean="0"/>
+              <a:pPr>
+                <a:spcAft>
+                  <a:spcPts val="600"/>
+                </a:spcAft>
+              </a:pPr>
+              <a:t>10</a:t>
+            </a:fld>
+            <a:endParaRPr lang="de-AT"/>
+          </a:p>
+        </p:txBody>
+      </p:sp>
+    </p:spTree>
+    <p:extLst>
+      <p:ext uri="{BB962C8B-B14F-4D97-AF65-F5344CB8AC3E}">
+        <p14:creationId xmlns:p14="http://schemas.microsoft.com/office/powerpoint/2010/main" val="3607917642"/>
+      </p:ext>
+    </p:extLst>
+  </p:cSld>
+  <p:clrMapOvr>
+    <a:masterClrMapping/>
+  </p:clrMapOvr>
+  <p:transition>
+    <p:fade/>
+  </p:transition>
+</p:sld>
+</file>
+
+<file path=ppt/slides/slide11.xml><?xml version="1.0" encoding="utf-8"?>
+<p:sld xmlns:a="http://schemas.openxmlformats.org/drawingml/2006/main" xmlns:r="http://schemas.openxmlformats.org/officeDocument/2006/relationships" xmlns:p="http://schemas.openxmlformats.org/presentationml/2006/main">
+  <p:cSld>
+    <p:spTree>
+      <p:nvGrpSpPr>
+        <p:cNvPr id="1" name=""/>
+        <p:cNvGrpSpPr/>
+        <p:nvPr/>
+      </p:nvGrpSpPr>
+      <p:grpSpPr>
+        <a:xfrm>
+          <a:off x="0" y="0"/>
+          <a:ext cx="0" cy="0"/>
+          <a:chOff x="0" y="0"/>
+          <a:chExt cx="0" cy="0"/>
+        </a:xfrm>
+      </p:grpSpPr>
+      <p:sp>
+        <p:nvSpPr>
+          <p:cNvPr id="2" name="Content Placeholder 1">
+            <a:extLst>
+              <a:ext uri="{FF2B5EF4-FFF2-40B4-BE49-F238E27FC236}">
+                <a16:creationId xmlns:a16="http://schemas.microsoft.com/office/drawing/2014/main" id="{742892A8-59FD-BDE2-5C31-E8A3391794B6}"/>
+              </a:ext>
+            </a:extLst>
+          </p:cNvPr>
+          <p:cNvSpPr>
+            <a:spLocks noGrp="1"/>
+          </p:cNvSpPr>
+          <p:nvPr>
+            <p:ph idx="1"/>
+          </p:nvPr>
+        </p:nvSpPr>
+        <p:spPr/>
+        <p:txBody>
+          <a:bodyPr/>
+          <a:lstStyle/>
+          <a:p>
+            <a:r>
+              <a:rPr lang="en-AT" dirty="0"/>
+              <a:t>Sara</a:t>
+            </a:r>
+            <a:endParaRPr lang="de-AT" dirty="0"/>
+          </a:p>
+        </p:txBody>
+      </p:sp>
+      <p:sp>
+        <p:nvSpPr>
+          <p:cNvPr id="3" name="Footer Placeholder 2">
+            <a:extLst>
+              <a:ext uri="{FF2B5EF4-FFF2-40B4-BE49-F238E27FC236}">
+                <a16:creationId xmlns:a16="http://schemas.microsoft.com/office/drawing/2014/main" id="{6EBE826A-1745-69E7-B6E1-1A33BB14BFE8}"/>
+              </a:ext>
+            </a:extLst>
+          </p:cNvPr>
+          <p:cNvSpPr>
+            <a:spLocks noGrp="1"/>
+          </p:cNvSpPr>
+          <p:nvPr>
+            <p:ph type="ftr" sz="quarter" idx="11"/>
+          </p:nvPr>
+        </p:nvSpPr>
+        <p:spPr/>
+        <p:txBody>
+          <a:bodyPr/>
+          <a:lstStyle/>
+          <a:p>
+            <a:r>
+              <a:rPr lang="de-AT"/>
+              <a:t>Fusszeile</a:t>
+            </a:r>
+            <a:endParaRPr lang="de-AT" dirty="0"/>
+          </a:p>
+        </p:txBody>
+      </p:sp>
+      <p:sp>
+        <p:nvSpPr>
+          <p:cNvPr id="4" name="Slide Number Placeholder 3">
+            <a:extLst>
+              <a:ext uri="{FF2B5EF4-FFF2-40B4-BE49-F238E27FC236}">
+                <a16:creationId xmlns:a16="http://schemas.microsoft.com/office/drawing/2014/main" id="{DD2B74D9-3E76-D0C8-63E6-C2C85C9B0C81}"/>
+              </a:ext>
+            </a:extLst>
+          </p:cNvPr>
+          <p:cNvSpPr>
+            <a:spLocks noGrp="1"/>
+          </p:cNvSpPr>
+          <p:nvPr>
+            <p:ph type="sldNum" sz="quarter" idx="12"/>
+          </p:nvPr>
+        </p:nvSpPr>
+        <p:spPr/>
+        <p:txBody>
+          <a:bodyPr/>
+          <a:lstStyle/>
+          <a:p>
+            <a:r>
+              <a:rPr lang="de-AT"/>
+              <a:t>SEITE </a:t>
+            </a:r>
+            <a:fld id="{BE3DC40E-DBBE-4E2D-9EEC-FBF0DA0E9179}" type="slidenum">
+              <a:rPr lang="de-AT" smtClean="0"/>
+              <a:t>11</a:t>
+            </a:fld>
+            <a:endParaRPr lang="de-AT" dirty="0"/>
+          </a:p>
+        </p:txBody>
+      </p:sp>
+      <p:sp>
+        <p:nvSpPr>
+          <p:cNvPr id="5" name="Title 4">
+            <a:extLst>
+              <a:ext uri="{FF2B5EF4-FFF2-40B4-BE49-F238E27FC236}">
+                <a16:creationId xmlns:a16="http://schemas.microsoft.com/office/drawing/2014/main" id="{D60DEAA2-3E85-9897-D9BB-34B7F9CC3049}"/>
+              </a:ext>
+            </a:extLst>
+          </p:cNvPr>
+          <p:cNvSpPr>
+            <a:spLocks noGrp="1"/>
+          </p:cNvSpPr>
+          <p:nvPr>
+            <p:ph type="title"/>
+          </p:nvPr>
+        </p:nvSpPr>
+        <p:spPr/>
+        <p:txBody>
+          <a:bodyPr/>
+          <a:lstStyle/>
+          <a:p>
+            <a:r>
+              <a:rPr lang="en-AT" dirty="0"/>
+              <a:t>EDA</a:t>
+            </a:r>
+            <a:endParaRPr lang="de-AT" dirty="0"/>
+          </a:p>
+        </p:txBody>
+      </p:sp>
+    </p:spTree>
+    <p:extLst>
+      <p:ext uri="{BB962C8B-B14F-4D97-AF65-F5344CB8AC3E}">
+        <p14:creationId xmlns:p14="http://schemas.microsoft.com/office/powerpoint/2010/main" val="1167099027"/>
+      </p:ext>
+    </p:extLst>
+  </p:cSld>
+  <p:clrMapOvr>
+    <a:masterClrMapping/>
+  </p:clrMapOvr>
+  <p:transition>
+    <p:fade/>
+  </p:transition>
+</p:sld>
+</file>
+
+<file path=ppt/slides/slide12.xml><?xml version="1.0" encoding="utf-8"?>
+<p:sld xmlns:a="http://schemas.openxmlformats.org/drawingml/2006/main" xmlns:r="http://schemas.openxmlformats.org/officeDocument/2006/relationships" xmlns:p="http://schemas.openxmlformats.org/presentationml/2006/main">
+  <p:cSld>
+    <p:spTree>
+      <p:nvGrpSpPr>
+        <p:cNvPr id="1" name="">
+          <a:extLst>
+            <a:ext uri="{FF2B5EF4-FFF2-40B4-BE49-F238E27FC236}">
+              <a16:creationId xmlns:a16="http://schemas.microsoft.com/office/drawing/2014/main" id="{D7A18064-ED54-24FD-9DDA-6A49A4C1DC6F}"/>
+            </a:ext>
+          </a:extLst>
+        </p:cNvPr>
+        <p:cNvGrpSpPr/>
+        <p:nvPr/>
+      </p:nvGrpSpPr>
+      <p:grpSpPr>
+        <a:xfrm>
+          <a:off x="0" y="0"/>
+          <a:ext cx="0" cy="0"/>
+          <a:chOff x="0" y="0"/>
+          <a:chExt cx="0" cy="0"/>
+        </a:xfrm>
+      </p:grpSpPr>
+      <p:sp>
+        <p:nvSpPr>
+          <p:cNvPr id="10" name="Text Placeholder 1">
+            <a:extLst>
+              <a:ext uri="{FF2B5EF4-FFF2-40B4-BE49-F238E27FC236}">
+                <a16:creationId xmlns:a16="http://schemas.microsoft.com/office/drawing/2014/main" id="{E7777D16-03AB-0A96-7198-944DB3591ABF}"/>
+              </a:ext>
+            </a:extLst>
+          </p:cNvPr>
+          <p:cNvSpPr>
+            <a:spLocks noGrp="1"/>
+          </p:cNvSpPr>
+          <p:nvPr>
+            <p:ph type="body" sz="quarter" idx="11"/>
+          </p:nvPr>
+        </p:nvSpPr>
+        <p:spPr>
+          <a:xfrm>
+            <a:off x="287338" y="2941638"/>
+            <a:ext cx="4284662" cy="620885"/>
+          </a:xfrm>
+        </p:spPr>
+        <p:txBody>
+          <a:bodyPr/>
+          <a:lstStyle/>
+          <a:p>
+            <a:endParaRPr lang="en-US"/>
+          </a:p>
+        </p:txBody>
+      </p:sp>
+      <p:sp>
+        <p:nvSpPr>
+          <p:cNvPr id="5" name="Title 4">
+            <a:extLst>
+              <a:ext uri="{FF2B5EF4-FFF2-40B4-BE49-F238E27FC236}">
+                <a16:creationId xmlns:a16="http://schemas.microsoft.com/office/drawing/2014/main" id="{739B1456-DDC3-2B4C-B3DD-340D9058CBD3}"/>
+              </a:ext>
+            </a:extLst>
+          </p:cNvPr>
+          <p:cNvSpPr>
+            <a:spLocks noGrp="1"/>
+          </p:cNvSpPr>
+          <p:nvPr>
+            <p:ph type="ctrTitle"/>
+          </p:nvPr>
+        </p:nvSpPr>
+        <p:spPr>
+          <a:xfrm>
+            <a:off x="605406" y="1301365"/>
+            <a:ext cx="5436000" cy="1026000"/>
+          </a:xfrm>
+        </p:spPr>
+        <p:txBody>
+          <a:bodyPr anchor="ctr">
+            <a:normAutofit/>
+          </a:bodyPr>
+          <a:lstStyle/>
+          <a:p>
+            <a:r>
+              <a:rPr lang="en-AT" dirty="0"/>
+              <a:t>ML Pipeline</a:t>
+            </a:r>
+            <a:endParaRPr lang="de-AT" dirty="0"/>
+          </a:p>
+        </p:txBody>
+      </p:sp>
+      <p:sp>
+        <p:nvSpPr>
+          <p:cNvPr id="3" name="Footer Placeholder 2">
+            <a:extLst>
+              <a:ext uri="{FF2B5EF4-FFF2-40B4-BE49-F238E27FC236}">
+                <a16:creationId xmlns:a16="http://schemas.microsoft.com/office/drawing/2014/main" id="{521E4410-BE81-67FE-5B0B-DC510C21F964}"/>
+              </a:ext>
+            </a:extLst>
+          </p:cNvPr>
+          <p:cNvSpPr>
+            <a:spLocks noGrp="1"/>
+          </p:cNvSpPr>
+          <p:nvPr>
+            <p:ph type="ftr" sz="quarter" idx="14"/>
+          </p:nvPr>
+        </p:nvSpPr>
+        <p:spPr>
+          <a:xfrm>
+            <a:off x="1354561" y="5412059"/>
+            <a:ext cx="3217443" cy="258085"/>
+          </a:xfrm>
+        </p:spPr>
+        <p:txBody>
+          <a:bodyPr anchor="ctr">
+            <a:normAutofit/>
+          </a:bodyPr>
+          <a:lstStyle/>
+          <a:p>
+            <a:pPr>
+              <a:spcAft>
+                <a:spcPts val="600"/>
+              </a:spcAft>
+            </a:pPr>
+            <a:r>
+              <a:rPr lang="de-AT"/>
+              <a:t>Fusszeile</a:t>
+            </a:r>
+          </a:p>
+        </p:txBody>
+      </p:sp>
+      <p:sp>
+        <p:nvSpPr>
+          <p:cNvPr id="4" name="Slide Number Placeholder 3">
+            <a:extLst>
+              <a:ext uri="{FF2B5EF4-FFF2-40B4-BE49-F238E27FC236}">
+                <a16:creationId xmlns:a16="http://schemas.microsoft.com/office/drawing/2014/main" id="{B73B18E5-A68F-3E1A-0FF7-783324C416BD}"/>
+              </a:ext>
+            </a:extLst>
+          </p:cNvPr>
+          <p:cNvSpPr>
+            <a:spLocks noGrp="1"/>
+          </p:cNvSpPr>
+          <p:nvPr>
+            <p:ph type="sldNum" sz="quarter" idx="15"/>
+          </p:nvPr>
+        </p:nvSpPr>
+        <p:spPr>
+          <a:xfrm>
+            <a:off x="462407" y="5412059"/>
+            <a:ext cx="892150" cy="258085"/>
+          </a:xfrm>
+        </p:spPr>
+        <p:txBody>
+          <a:bodyPr anchor="ctr">
+            <a:normAutofit/>
+          </a:bodyPr>
+          <a:lstStyle/>
+          <a:p>
+            <a:pPr>
+              <a:spcAft>
+                <a:spcPts val="600"/>
+              </a:spcAft>
+            </a:pPr>
+            <a:r>
+              <a:rPr lang="de-AT"/>
+              <a:t>SEITE </a:t>
+            </a:r>
+            <a:fld id="{BE3DC40E-DBBE-4E2D-9EEC-FBF0DA0E9179}" type="slidenum">
+              <a:rPr lang="de-AT" smtClean="0"/>
+              <a:pPr>
+                <a:spcAft>
+                  <a:spcPts val="600"/>
+                </a:spcAft>
+              </a:pPr>
+              <a:t>12</a:t>
+            </a:fld>
+            <a:endParaRPr lang="de-AT"/>
+          </a:p>
+        </p:txBody>
+      </p:sp>
+    </p:spTree>
+    <p:extLst>
+      <p:ext uri="{BB962C8B-B14F-4D97-AF65-F5344CB8AC3E}">
+        <p14:creationId xmlns:p14="http://schemas.microsoft.com/office/powerpoint/2010/main" val="162581398"/>
+      </p:ext>
+    </p:extLst>
+  </p:cSld>
+  <p:clrMapOvr>
+    <a:masterClrMapping/>
+  </p:clrMapOvr>
+  <p:transition>
+    <p:fade/>
+  </p:transition>
+</p:sld>
+</file>
+
+<file path=ppt/slides/slide13.xml><?xml version="1.0" encoding="utf-8"?>
+<p:sld xmlns:a="http://schemas.openxmlformats.org/drawingml/2006/main" xmlns:r="http://schemas.openxmlformats.org/officeDocument/2006/relationships" xmlns:p="http://schemas.openxmlformats.org/presentationml/2006/main">
+  <p:cSld>
+    <p:spTree>
+      <p:nvGrpSpPr>
+        <p:cNvPr id="1" name=""/>
+        <p:cNvGrpSpPr/>
+        <p:nvPr/>
+      </p:nvGrpSpPr>
+      <p:grpSpPr>
+        <a:xfrm>
+          <a:off x="0" y="0"/>
+          <a:ext cx="0" cy="0"/>
+          <a:chOff x="0" y="0"/>
+          <a:chExt cx="0" cy="0"/>
+        </a:xfrm>
+      </p:grpSpPr>
+      <p:sp>
+        <p:nvSpPr>
+          <p:cNvPr id="2" name="Content Placeholder 1">
+            <a:extLst>
+              <a:ext uri="{FF2B5EF4-FFF2-40B4-BE49-F238E27FC236}">
+                <a16:creationId xmlns:a16="http://schemas.microsoft.com/office/drawing/2014/main" id="{6F82311F-B799-E5F3-5922-87F2BC9843E6}"/>
+              </a:ext>
+            </a:extLst>
+          </p:cNvPr>
+          <p:cNvSpPr>
+            <a:spLocks noGrp="1"/>
+          </p:cNvSpPr>
+          <p:nvPr>
+            <p:ph idx="1"/>
+          </p:nvPr>
+        </p:nvSpPr>
+        <p:spPr/>
+        <p:txBody>
+          <a:bodyPr/>
+          <a:lstStyle/>
+          <a:p>
+            <a:r>
+              <a:rPr lang="en-AT" dirty="0"/>
+              <a:t>Moritz</a:t>
+            </a:r>
+            <a:endParaRPr lang="de-AT" dirty="0"/>
+          </a:p>
+        </p:txBody>
+      </p:sp>
+      <p:sp>
+        <p:nvSpPr>
+          <p:cNvPr id="3" name="Footer Placeholder 2">
+            <a:extLst>
+              <a:ext uri="{FF2B5EF4-FFF2-40B4-BE49-F238E27FC236}">
+                <a16:creationId xmlns:a16="http://schemas.microsoft.com/office/drawing/2014/main" id="{B5D817E9-7FF2-549D-90CA-F6F1446EB662}"/>
+              </a:ext>
+            </a:extLst>
+          </p:cNvPr>
+          <p:cNvSpPr>
+            <a:spLocks noGrp="1"/>
+          </p:cNvSpPr>
+          <p:nvPr>
+            <p:ph type="ftr" sz="quarter" idx="11"/>
+          </p:nvPr>
+        </p:nvSpPr>
+        <p:spPr/>
+        <p:txBody>
+          <a:bodyPr/>
+          <a:lstStyle/>
+          <a:p>
+            <a:r>
+              <a:rPr lang="de-AT"/>
+              <a:t>Fusszeile</a:t>
+            </a:r>
+            <a:endParaRPr lang="de-AT" dirty="0"/>
+          </a:p>
+        </p:txBody>
+      </p:sp>
+      <p:sp>
+        <p:nvSpPr>
+          <p:cNvPr id="4" name="Slide Number Placeholder 3">
+            <a:extLst>
+              <a:ext uri="{FF2B5EF4-FFF2-40B4-BE49-F238E27FC236}">
+                <a16:creationId xmlns:a16="http://schemas.microsoft.com/office/drawing/2014/main" id="{75566076-D74B-486C-F520-9051D41D4F85}"/>
+              </a:ext>
+            </a:extLst>
+          </p:cNvPr>
+          <p:cNvSpPr>
+            <a:spLocks noGrp="1"/>
+          </p:cNvSpPr>
+          <p:nvPr>
+            <p:ph type="sldNum" sz="quarter" idx="12"/>
+          </p:nvPr>
+        </p:nvSpPr>
+        <p:spPr/>
+        <p:txBody>
+          <a:bodyPr/>
+          <a:lstStyle/>
+          <a:p>
+            <a:r>
+              <a:rPr lang="de-AT"/>
+              <a:t>SEITE </a:t>
+            </a:r>
+            <a:fld id="{BE3DC40E-DBBE-4E2D-9EEC-FBF0DA0E9179}" type="slidenum">
+              <a:rPr lang="de-AT" smtClean="0"/>
+              <a:t>13</a:t>
+            </a:fld>
+            <a:endParaRPr lang="de-AT" dirty="0"/>
+          </a:p>
+        </p:txBody>
+      </p:sp>
+      <p:sp>
+        <p:nvSpPr>
+          <p:cNvPr id="5" name="Title 4">
+            <a:extLst>
+              <a:ext uri="{FF2B5EF4-FFF2-40B4-BE49-F238E27FC236}">
+                <a16:creationId xmlns:a16="http://schemas.microsoft.com/office/drawing/2014/main" id="{B36D4E55-CBA9-89D7-0CE9-EF7E41234DF5}"/>
+              </a:ext>
+            </a:extLst>
+          </p:cNvPr>
+          <p:cNvSpPr>
+            <a:spLocks noGrp="1"/>
+          </p:cNvSpPr>
+          <p:nvPr>
+            <p:ph type="title"/>
+          </p:nvPr>
+        </p:nvSpPr>
+        <p:spPr/>
+        <p:txBody>
+          <a:bodyPr/>
+          <a:lstStyle/>
+          <a:p>
+            <a:r>
+              <a:rPr lang="en-AT" dirty="0"/>
+              <a:t>Pipeline, Implementation</a:t>
+            </a:r>
+            <a:endParaRPr lang="de-AT" dirty="0"/>
+          </a:p>
+        </p:txBody>
+      </p:sp>
+    </p:spTree>
+    <p:extLst>
+      <p:ext uri="{BB962C8B-B14F-4D97-AF65-F5344CB8AC3E}">
+        <p14:creationId xmlns:p14="http://schemas.microsoft.com/office/powerpoint/2010/main" val="30516714"/>
+      </p:ext>
+    </p:extLst>
+  </p:cSld>
+  <p:clrMapOvr>
+    <a:masterClrMapping/>
+  </p:clrMapOvr>
+  <p:transition>
+    <p:fade/>
+  </p:transition>
+</p:sld>
+</file>
+
+<file path=ppt/slides/slide14.xml><?xml version="1.0" encoding="utf-8"?>
+<p:sld xmlns:a="http://schemas.openxmlformats.org/drawingml/2006/main" xmlns:r="http://schemas.openxmlformats.org/officeDocument/2006/relationships" xmlns:p="http://schemas.openxmlformats.org/presentationml/2006/main">
+  <p:cSld>
+    <p:spTree>
+      <p:nvGrpSpPr>
+        <p:cNvPr id="1" name=""/>
+        <p:cNvGrpSpPr/>
+        <p:nvPr/>
+      </p:nvGrpSpPr>
+      <p:grpSpPr>
+        <a:xfrm>
+          <a:off x="0" y="0"/>
+          <a:ext cx="0" cy="0"/>
+          <a:chOff x="0" y="0"/>
+          <a:chExt cx="0" cy="0"/>
+        </a:xfrm>
+      </p:grpSpPr>
+      <p:sp>
+        <p:nvSpPr>
+          <p:cNvPr id="2" name="Content Placeholder 1">
+            <a:extLst>
+              <a:ext uri="{FF2B5EF4-FFF2-40B4-BE49-F238E27FC236}">
+                <a16:creationId xmlns:a16="http://schemas.microsoft.com/office/drawing/2014/main" id="{439199E9-7453-F47B-9446-81F386FB039E}"/>
+              </a:ext>
+            </a:extLst>
+          </p:cNvPr>
+          <p:cNvSpPr>
+            <a:spLocks noGrp="1"/>
+          </p:cNvSpPr>
+          <p:nvPr>
+            <p:ph idx="1"/>
+          </p:nvPr>
+        </p:nvSpPr>
+        <p:spPr/>
+        <p:txBody>
+          <a:bodyPr/>
+          <a:lstStyle/>
+          <a:p>
+            <a:r>
+              <a:rPr lang="en-AT" dirty="0"/>
+              <a:t>Moritz</a:t>
+            </a:r>
+            <a:endParaRPr lang="de-AT" dirty="0"/>
+          </a:p>
+        </p:txBody>
+      </p:sp>
+      <p:sp>
+        <p:nvSpPr>
+          <p:cNvPr id="3" name="Footer Placeholder 2">
+            <a:extLst>
+              <a:ext uri="{FF2B5EF4-FFF2-40B4-BE49-F238E27FC236}">
+                <a16:creationId xmlns:a16="http://schemas.microsoft.com/office/drawing/2014/main" id="{FE26E0E6-41F2-96DE-BF05-12C29143042F}"/>
+              </a:ext>
+            </a:extLst>
+          </p:cNvPr>
+          <p:cNvSpPr>
+            <a:spLocks noGrp="1"/>
+          </p:cNvSpPr>
+          <p:nvPr>
+            <p:ph type="ftr" sz="quarter" idx="11"/>
+          </p:nvPr>
+        </p:nvSpPr>
+        <p:spPr/>
+        <p:txBody>
+          <a:bodyPr/>
+          <a:lstStyle/>
+          <a:p>
+            <a:r>
+              <a:rPr lang="de-AT"/>
+              <a:t>Fusszeile</a:t>
+            </a:r>
+            <a:endParaRPr lang="de-AT" dirty="0"/>
+          </a:p>
+        </p:txBody>
+      </p:sp>
+      <p:sp>
+        <p:nvSpPr>
+          <p:cNvPr id="4" name="Slide Number Placeholder 3">
+            <a:extLst>
+              <a:ext uri="{FF2B5EF4-FFF2-40B4-BE49-F238E27FC236}">
+                <a16:creationId xmlns:a16="http://schemas.microsoft.com/office/drawing/2014/main" id="{106B0CDD-22CD-F2C3-CDA9-CB13E464927D}"/>
+              </a:ext>
+            </a:extLst>
+          </p:cNvPr>
+          <p:cNvSpPr>
+            <a:spLocks noGrp="1"/>
+          </p:cNvSpPr>
+          <p:nvPr>
+            <p:ph type="sldNum" sz="quarter" idx="12"/>
+          </p:nvPr>
+        </p:nvSpPr>
+        <p:spPr/>
+        <p:txBody>
+          <a:bodyPr/>
+          <a:lstStyle/>
+          <a:p>
+            <a:r>
+              <a:rPr lang="de-AT"/>
+              <a:t>SEITE </a:t>
+            </a:r>
+            <a:fld id="{BE3DC40E-DBBE-4E2D-9EEC-FBF0DA0E9179}" type="slidenum">
+              <a:rPr lang="de-AT" smtClean="0"/>
+              <a:t>14</a:t>
+            </a:fld>
+            <a:endParaRPr lang="de-AT" dirty="0"/>
+          </a:p>
+        </p:txBody>
+      </p:sp>
+      <p:sp>
+        <p:nvSpPr>
+          <p:cNvPr id="5" name="Title 4">
+            <a:extLst>
+              <a:ext uri="{FF2B5EF4-FFF2-40B4-BE49-F238E27FC236}">
+                <a16:creationId xmlns:a16="http://schemas.microsoft.com/office/drawing/2014/main" id="{30B34AEE-C292-F9D9-E0D1-5FCDC45038F2}"/>
+              </a:ext>
+            </a:extLst>
+          </p:cNvPr>
+          <p:cNvSpPr>
+            <a:spLocks noGrp="1"/>
+          </p:cNvSpPr>
+          <p:nvPr>
+            <p:ph type="title"/>
+          </p:nvPr>
+        </p:nvSpPr>
+        <p:spPr/>
+        <p:txBody>
+          <a:bodyPr/>
+          <a:lstStyle/>
+          <a:p>
+            <a:r>
+              <a:rPr lang="en-AT" dirty="0"/>
+              <a:t>Problems</a:t>
+            </a:r>
+            <a:endParaRPr lang="de-AT" dirty="0"/>
+          </a:p>
+        </p:txBody>
+      </p:sp>
+    </p:spTree>
+    <p:extLst>
+      <p:ext uri="{BB962C8B-B14F-4D97-AF65-F5344CB8AC3E}">
+        <p14:creationId xmlns:p14="http://schemas.microsoft.com/office/powerpoint/2010/main" val="1228913258"/>
+      </p:ext>
+    </p:extLst>
+  </p:cSld>
+  <p:clrMapOvr>
+    <a:masterClrMapping/>
+  </p:clrMapOvr>
+  <p:transition>
+    <p:fade/>
+  </p:transition>
+</p:sld>
+</file>
+
+<file path=ppt/slides/slide15.xml><?xml version="1.0" encoding="utf-8"?>
+<p:sld xmlns:a="http://schemas.openxmlformats.org/drawingml/2006/main" xmlns:r="http://schemas.openxmlformats.org/officeDocument/2006/relationships" xmlns:p="http://schemas.openxmlformats.org/presentationml/2006/main">
+  <p:cSld>
+    <p:spTree>
+      <p:nvGrpSpPr>
+        <p:cNvPr id="1" name=""/>
+        <p:cNvGrpSpPr/>
+        <p:nvPr/>
+      </p:nvGrpSpPr>
+      <p:grpSpPr>
+        <a:xfrm>
+          <a:off x="0" y="0"/>
+          <a:ext cx="0" cy="0"/>
+          <a:chOff x="0" y="0"/>
+          <a:chExt cx="0" cy="0"/>
+        </a:xfrm>
+      </p:grpSpPr>
+      <p:sp>
+        <p:nvSpPr>
+          <p:cNvPr id="2" name="Content Placeholder 1">
+            <a:extLst>
+              <a:ext uri="{FF2B5EF4-FFF2-40B4-BE49-F238E27FC236}">
+                <a16:creationId xmlns:a16="http://schemas.microsoft.com/office/drawing/2014/main" id="{D49693A6-9344-C5E4-3755-8973C9E05706}"/>
+              </a:ext>
+            </a:extLst>
+          </p:cNvPr>
+          <p:cNvSpPr>
+            <a:spLocks noGrp="1"/>
+          </p:cNvSpPr>
+          <p:nvPr>
+            <p:ph idx="1"/>
+          </p:nvPr>
+        </p:nvSpPr>
+        <p:spPr/>
+        <p:txBody>
+          <a:bodyPr/>
+          <a:lstStyle/>
+          <a:p>
+            <a:endParaRPr lang="de-AT"/>
+          </a:p>
+        </p:txBody>
+      </p:sp>
+      <p:sp>
+        <p:nvSpPr>
+          <p:cNvPr id="3" name="Footer Placeholder 2">
+            <a:extLst>
+              <a:ext uri="{FF2B5EF4-FFF2-40B4-BE49-F238E27FC236}">
+                <a16:creationId xmlns:a16="http://schemas.microsoft.com/office/drawing/2014/main" id="{A1B25A93-C64F-E01C-0CC1-3A930E78FAE7}"/>
+              </a:ext>
+            </a:extLst>
+          </p:cNvPr>
+          <p:cNvSpPr>
+            <a:spLocks noGrp="1"/>
+          </p:cNvSpPr>
+          <p:nvPr>
+            <p:ph type="ftr" sz="quarter" idx="11"/>
+          </p:nvPr>
+        </p:nvSpPr>
+        <p:spPr/>
+        <p:txBody>
+          <a:bodyPr/>
+          <a:lstStyle/>
+          <a:p>
+            <a:r>
+              <a:rPr lang="de-AT"/>
+              <a:t>Fusszeile</a:t>
+            </a:r>
+            <a:endParaRPr lang="de-AT" dirty="0"/>
+          </a:p>
+        </p:txBody>
+      </p:sp>
+      <p:sp>
+        <p:nvSpPr>
+          <p:cNvPr id="4" name="Slide Number Placeholder 3">
+            <a:extLst>
+              <a:ext uri="{FF2B5EF4-FFF2-40B4-BE49-F238E27FC236}">
+                <a16:creationId xmlns:a16="http://schemas.microsoft.com/office/drawing/2014/main" id="{7DFC2F18-AA5F-703D-E941-865891491132}"/>
+              </a:ext>
+            </a:extLst>
+          </p:cNvPr>
+          <p:cNvSpPr>
+            <a:spLocks noGrp="1"/>
+          </p:cNvSpPr>
+          <p:nvPr>
+            <p:ph type="sldNum" sz="quarter" idx="12"/>
+          </p:nvPr>
+        </p:nvSpPr>
+        <p:spPr/>
+        <p:txBody>
+          <a:bodyPr/>
+          <a:lstStyle/>
+          <a:p>
+            <a:r>
+              <a:rPr lang="de-AT"/>
+              <a:t>SEITE </a:t>
+            </a:r>
+            <a:fld id="{BE3DC40E-DBBE-4E2D-9EEC-FBF0DA0E9179}" type="slidenum">
+              <a:rPr lang="de-AT" smtClean="0"/>
+              <a:t>15</a:t>
+            </a:fld>
+            <a:endParaRPr lang="de-AT" dirty="0"/>
+          </a:p>
+        </p:txBody>
+      </p:sp>
+      <p:sp>
+        <p:nvSpPr>
+          <p:cNvPr id="5" name="Title 4">
+            <a:extLst>
+              <a:ext uri="{FF2B5EF4-FFF2-40B4-BE49-F238E27FC236}">
+                <a16:creationId xmlns:a16="http://schemas.microsoft.com/office/drawing/2014/main" id="{E17993FF-05FC-40D7-1E06-61B1A287DAB8}"/>
+              </a:ext>
+            </a:extLst>
+          </p:cNvPr>
+          <p:cNvSpPr>
+            <a:spLocks noGrp="1"/>
+          </p:cNvSpPr>
+          <p:nvPr>
+            <p:ph type="title"/>
+          </p:nvPr>
+        </p:nvSpPr>
+        <p:spPr/>
+        <p:txBody>
+          <a:bodyPr/>
+          <a:lstStyle/>
+          <a:p>
+            <a:r>
+              <a:rPr lang="en-AT" dirty="0"/>
+              <a:t>Discussion</a:t>
+            </a:r>
+            <a:endParaRPr lang="de-AT" dirty="0"/>
+          </a:p>
+        </p:txBody>
+      </p:sp>
+    </p:spTree>
+    <p:extLst>
+      <p:ext uri="{BB962C8B-B14F-4D97-AF65-F5344CB8AC3E}">
+        <p14:creationId xmlns:p14="http://schemas.microsoft.com/office/powerpoint/2010/main" val="1722022222"/>
+      </p:ext>
+    </p:extLst>
+  </p:cSld>
+  <p:clrMapOvr>
+    <a:masterClrMapping/>
+  </p:clrMapOvr>
+  <p:transition>
+    <p:fade/>
+  </p:transition>
+</p:sld>
+</file>
+
 <file path=ppt/slides/slide2.xml><?xml version="1.0" encoding="utf-8"?>
 <p:sld xmlns:a="http://schemas.openxmlformats.org/drawingml/2006/main" xmlns:r="http://schemas.openxmlformats.org/officeDocument/2006/relationships" xmlns:p="http://schemas.openxmlformats.org/presentationml/2006/main">
   <p:cSld>
@@ -7841,6 +8847,39 @@
               <a:rPr lang="en-AT" dirty="0"/>
               <a:t>Data</a:t>
             </a:r>
+          </a:p>
+          <a:p>
+            <a:pPr>
+              <a:buFont typeface="Arial" panose="020B0604020202020204" pitchFamily="34" charset="0"/>
+              <a:buChar char="•"/>
+            </a:pPr>
+            <a:r>
+              <a:rPr lang="en-AT" dirty="0"/>
+              <a:t>ML Pipeline</a:t>
+            </a:r>
+          </a:p>
+          <a:p>
+            <a:pPr>
+              <a:buFont typeface="Arial" panose="020B0604020202020204" pitchFamily="34" charset="0"/>
+              <a:buChar char="•"/>
+            </a:pPr>
+            <a:r>
+              <a:rPr lang="en-AT" dirty="0"/>
+              <a:t>Problems</a:t>
+            </a:r>
+          </a:p>
+          <a:p>
+            <a:pPr>
+              <a:buFont typeface="Arial" panose="020B0604020202020204" pitchFamily="34" charset="0"/>
+              <a:buChar char="•"/>
+            </a:pPr>
+            <a:endParaRPr lang="en-AT" dirty="0"/>
+          </a:p>
+          <a:p>
+            <a:pPr>
+              <a:buFont typeface="Arial" panose="020B0604020202020204" pitchFamily="34" charset="0"/>
+              <a:buChar char="•"/>
+            </a:pPr>
             <a:endParaRPr lang="de-AT" dirty="0"/>
           </a:p>
         </p:txBody>
@@ -8001,6 +9040,195 @@
       </p:grpSpPr>
       <p:sp>
         <p:nvSpPr>
+          <p:cNvPr id="10" name="Text Placeholder 1">
+            <a:extLst>
+              <a:ext uri="{FF2B5EF4-FFF2-40B4-BE49-F238E27FC236}">
+                <a16:creationId xmlns:a16="http://schemas.microsoft.com/office/drawing/2014/main" id="{D6CCD093-8E48-7105-9335-0C6CF0347598}"/>
+              </a:ext>
+            </a:extLst>
+          </p:cNvPr>
+          <p:cNvSpPr>
+            <a:spLocks noGrp="1"/>
+          </p:cNvSpPr>
+          <p:nvPr>
+            <p:ph type="body" sz="quarter" idx="11"/>
+          </p:nvPr>
+        </p:nvSpPr>
+        <p:spPr>
+          <a:xfrm>
+            <a:off x="287338" y="2941638"/>
+            <a:ext cx="4284662" cy="620885"/>
+          </a:xfrm>
+        </p:spPr>
+        <p:txBody>
+          <a:bodyPr/>
+          <a:lstStyle/>
+          <a:p>
+            <a:endParaRPr lang="en-US"/>
+          </a:p>
+        </p:txBody>
+      </p:sp>
+      <p:sp>
+        <p:nvSpPr>
+          <p:cNvPr id="5" name="Title 4">
+            <a:extLst>
+              <a:ext uri="{FF2B5EF4-FFF2-40B4-BE49-F238E27FC236}">
+                <a16:creationId xmlns:a16="http://schemas.microsoft.com/office/drawing/2014/main" id="{F78A38ED-D965-8D8C-CE06-352C3174613A}"/>
+              </a:ext>
+            </a:extLst>
+          </p:cNvPr>
+          <p:cNvSpPr>
+            <a:spLocks noGrp="1"/>
+          </p:cNvSpPr>
+          <p:nvPr>
+            <p:ph type="ctrTitle"/>
+          </p:nvPr>
+        </p:nvSpPr>
+        <p:spPr>
+          <a:xfrm>
+            <a:off x="605406" y="1301365"/>
+            <a:ext cx="5436000" cy="1026000"/>
+          </a:xfrm>
+        </p:spPr>
+        <p:txBody>
+          <a:bodyPr anchor="ctr">
+            <a:normAutofit/>
+          </a:bodyPr>
+          <a:lstStyle/>
+          <a:p>
+            <a:r>
+              <a:rPr lang="en-AT" dirty="0"/>
+              <a:t>Introduction</a:t>
+            </a:r>
+            <a:endParaRPr lang="de-AT" dirty="0"/>
+          </a:p>
+        </p:txBody>
+      </p:sp>
+      <p:sp>
+        <p:nvSpPr>
+          <p:cNvPr id="3" name="Footer Placeholder 2">
+            <a:extLst>
+              <a:ext uri="{FF2B5EF4-FFF2-40B4-BE49-F238E27FC236}">
+                <a16:creationId xmlns:a16="http://schemas.microsoft.com/office/drawing/2014/main" id="{A6E8F32F-DDBD-9E15-612D-88EC46FEA33C}"/>
+              </a:ext>
+            </a:extLst>
+          </p:cNvPr>
+          <p:cNvSpPr>
+            <a:spLocks noGrp="1"/>
+          </p:cNvSpPr>
+          <p:nvPr>
+            <p:ph type="ftr" sz="quarter" idx="14"/>
+          </p:nvPr>
+        </p:nvSpPr>
+        <p:spPr>
+          <a:xfrm>
+            <a:off x="1354561" y="5412059"/>
+            <a:ext cx="3217443" cy="258085"/>
+          </a:xfrm>
+        </p:spPr>
+        <p:txBody>
+          <a:bodyPr anchor="ctr">
+            <a:normAutofit/>
+          </a:bodyPr>
+          <a:lstStyle/>
+          <a:p>
+            <a:pPr>
+              <a:spcAft>
+                <a:spcPts val="600"/>
+              </a:spcAft>
+            </a:pPr>
+            <a:r>
+              <a:rPr lang="de-AT"/>
+              <a:t>Fusszeile</a:t>
+            </a:r>
+          </a:p>
+        </p:txBody>
+      </p:sp>
+      <p:sp>
+        <p:nvSpPr>
+          <p:cNvPr id="4" name="Slide Number Placeholder 3">
+            <a:extLst>
+              <a:ext uri="{FF2B5EF4-FFF2-40B4-BE49-F238E27FC236}">
+                <a16:creationId xmlns:a16="http://schemas.microsoft.com/office/drawing/2014/main" id="{829372F8-276C-039B-1BC1-220CF67F7CB4}"/>
+              </a:ext>
+            </a:extLst>
+          </p:cNvPr>
+          <p:cNvSpPr>
+            <a:spLocks noGrp="1"/>
+          </p:cNvSpPr>
+          <p:nvPr>
+            <p:ph type="sldNum" sz="quarter" idx="15"/>
+          </p:nvPr>
+        </p:nvSpPr>
+        <p:spPr>
+          <a:xfrm>
+            <a:off x="462407" y="5412059"/>
+            <a:ext cx="892150" cy="258085"/>
+          </a:xfrm>
+        </p:spPr>
+        <p:txBody>
+          <a:bodyPr anchor="ctr">
+            <a:normAutofit/>
+          </a:bodyPr>
+          <a:lstStyle/>
+          <a:p>
+            <a:pPr>
+              <a:spcAft>
+                <a:spcPts val="600"/>
+              </a:spcAft>
+            </a:pPr>
+            <a:r>
+              <a:rPr lang="de-AT"/>
+              <a:t>SEITE </a:t>
+            </a:r>
+            <a:fld id="{BE3DC40E-DBBE-4E2D-9EEC-FBF0DA0E9179}" type="slidenum">
+              <a:rPr lang="de-AT" smtClean="0"/>
+              <a:pPr>
+                <a:spcAft>
+                  <a:spcPts val="600"/>
+                </a:spcAft>
+              </a:pPr>
+              <a:t>3</a:t>
+            </a:fld>
+            <a:endParaRPr lang="de-AT"/>
+          </a:p>
+        </p:txBody>
+      </p:sp>
+    </p:spTree>
+    <p:extLst>
+      <p:ext uri="{BB962C8B-B14F-4D97-AF65-F5344CB8AC3E}">
+        <p14:creationId xmlns:p14="http://schemas.microsoft.com/office/powerpoint/2010/main" val="2848148943"/>
+      </p:ext>
+    </p:extLst>
+  </p:cSld>
+  <p:clrMapOvr>
+    <a:masterClrMapping/>
+  </p:clrMapOvr>
+  <p:transition>
+    <p:fade/>
+  </p:transition>
+</p:sld>
+</file>
+
+<file path=ppt/slides/slide4.xml><?xml version="1.0" encoding="utf-8"?>
+<p:sld xmlns:a="http://schemas.openxmlformats.org/drawingml/2006/main" xmlns:r="http://schemas.openxmlformats.org/officeDocument/2006/relationships" xmlns:p="http://schemas.openxmlformats.org/presentationml/2006/main">
+  <p:cSld>
+    <p:spTree>
+      <p:nvGrpSpPr>
+        <p:cNvPr id="1" name=""/>
+        <p:cNvGrpSpPr/>
+        <p:nvPr/>
+      </p:nvGrpSpPr>
+      <p:grpSpPr>
+        <a:xfrm>
+          <a:off x="0" y="0"/>
+          <a:ext cx="0" cy="0"/>
+          <a:chOff x="0" y="0"/>
+          <a:chExt cx="0" cy="0"/>
+        </a:xfrm>
+      </p:grpSpPr>
+      <p:sp>
+        <p:nvSpPr>
           <p:cNvPr id="2" name="Content Placeholder 1">
             <a:extLst>
               <a:ext uri="{FF2B5EF4-FFF2-40B4-BE49-F238E27FC236}">
@@ -8237,7 +9465,7 @@
             </a:r>
             <a:fld id="{BE3DC40E-DBBE-4E2D-9EEC-FBF0DA0E9179}" type="slidenum">
               <a:rPr lang="de-AT" smtClean="0"/>
-              <a:t>3</a:t>
+              <a:t>4</a:t>
             </a:fld>
             <a:endParaRPr lang="de-AT" dirty="0"/>
           </a:p>
@@ -8288,7 +9516,7 @@
 </p:sld>
 </file>
 
-<file path=ppt/slides/slide4.xml><?xml version="1.0" encoding="utf-8"?>
+<file path=ppt/slides/slide5.xml><?xml version="1.0" encoding="utf-8"?>
 <p:sld xmlns:a="http://schemas.openxmlformats.org/drawingml/2006/main" xmlns:r="http://schemas.openxmlformats.org/officeDocument/2006/relationships" xmlns:p="http://schemas.openxmlformats.org/presentationml/2006/main">
   <p:cSld>
     <p:spTree>
@@ -8446,7 +9674,7 @@
             </a:r>
             <a:fld id="{BE3DC40E-DBBE-4E2D-9EEC-FBF0DA0E9179}" type="slidenum">
               <a:rPr lang="de-AT" smtClean="0"/>
-              <a:t>4</a:t>
+              <a:t>5</a:t>
             </a:fld>
             <a:endParaRPr lang="de-AT" dirty="0"/>
           </a:p>
@@ -8485,213 +9713,6 @@
     <p:extLst>
       <p:ext uri="{BB962C8B-B14F-4D97-AF65-F5344CB8AC3E}">
         <p14:creationId xmlns:p14="http://schemas.microsoft.com/office/powerpoint/2010/main" val="415673921"/>
-      </p:ext>
-    </p:extLst>
-  </p:cSld>
-  <p:clrMapOvr>
-    <a:masterClrMapping/>
-  </p:clrMapOvr>
-  <p:transition>
-    <p:fade/>
-  </p:transition>
-</p:sld>
-</file>
-
-<file path=ppt/slides/slide5.xml><?xml version="1.0" encoding="utf-8"?>
-<p:sld xmlns:a="http://schemas.openxmlformats.org/drawingml/2006/main" xmlns:r="http://schemas.openxmlformats.org/officeDocument/2006/relationships" xmlns:p="http://schemas.openxmlformats.org/presentationml/2006/main">
-  <p:cSld>
-    <p:spTree>
-      <p:nvGrpSpPr>
-        <p:cNvPr id="1" name=""/>
-        <p:cNvGrpSpPr/>
-        <p:nvPr/>
-      </p:nvGrpSpPr>
-      <p:grpSpPr>
-        <a:xfrm>
-          <a:off x="0" y="0"/>
-          <a:ext cx="0" cy="0"/>
-          <a:chOff x="0" y="0"/>
-          <a:chExt cx="0" cy="0"/>
-        </a:xfrm>
-      </p:grpSpPr>
-      <p:sp>
-        <p:nvSpPr>
-          <p:cNvPr id="2" name="Content Placeholder 1">
-            <a:extLst>
-              <a:ext uri="{FF2B5EF4-FFF2-40B4-BE49-F238E27FC236}">
-                <a16:creationId xmlns:a16="http://schemas.microsoft.com/office/drawing/2014/main" id="{9E1213BA-B3C2-2AEB-9193-431C84D29BF6}"/>
-              </a:ext>
-            </a:extLst>
-          </p:cNvPr>
-          <p:cNvSpPr>
-            <a:spLocks noGrp="1"/>
-          </p:cNvSpPr>
-          <p:nvPr>
-            <p:ph idx="1"/>
-          </p:nvPr>
-        </p:nvSpPr>
-        <p:spPr/>
-        <p:txBody>
-          <a:bodyPr/>
-          <a:lstStyle/>
-          <a:p>
-            <a:r>
-              <a:rPr lang="de-AT" dirty="0"/>
-              <a:t>S</a:t>
-            </a:r>
-            <a:r>
-              <a:rPr lang="en-AT" dirty="0" err="1"/>
-              <a:t>ehr</a:t>
-            </a:r>
-            <a:r>
-              <a:rPr lang="en-AT" dirty="0"/>
-              <a:t> </a:t>
-            </a:r>
-            <a:r>
-              <a:rPr lang="en-AT" dirty="0" err="1"/>
-              <a:t>kurze</a:t>
-            </a:r>
-            <a:r>
-              <a:rPr lang="en-AT" dirty="0"/>
-              <a:t> </a:t>
-            </a:r>
-            <a:r>
-              <a:rPr lang="en-AT" dirty="0" err="1"/>
-              <a:t>beschreibung</a:t>
-            </a:r>
-            <a:r>
-              <a:rPr lang="en-AT" dirty="0"/>
-              <a:t> </a:t>
-            </a:r>
-            <a:r>
-              <a:rPr lang="en-AT" dirty="0" err="1"/>
-              <a:t>über</a:t>
-            </a:r>
-            <a:r>
-              <a:rPr lang="en-AT" dirty="0"/>
-              <a:t> </a:t>
-            </a:r>
-            <a:r>
-              <a:rPr lang="en-AT" dirty="0" err="1"/>
-              <a:t>unseren</a:t>
-            </a:r>
-            <a:r>
-              <a:rPr lang="en-AT" dirty="0"/>
-              <a:t> </a:t>
-            </a:r>
-            <a:r>
-              <a:rPr lang="en-AT" dirty="0" err="1"/>
-              <a:t>lösungsansatz</a:t>
-            </a:r>
-            <a:r>
-              <a:rPr lang="en-AT" dirty="0"/>
-              <a:t>. </a:t>
-            </a:r>
-          </a:p>
-          <a:p>
-            <a:r>
-              <a:rPr lang="en-AT" dirty="0"/>
-              <a:t>Big Picture</a:t>
-            </a:r>
-            <a:endParaRPr lang="de-AT" dirty="0"/>
-          </a:p>
-        </p:txBody>
-      </p:sp>
-      <p:sp>
-        <p:nvSpPr>
-          <p:cNvPr id="3" name="Footer Placeholder 2">
-            <a:extLst>
-              <a:ext uri="{FF2B5EF4-FFF2-40B4-BE49-F238E27FC236}">
-                <a16:creationId xmlns:a16="http://schemas.microsoft.com/office/drawing/2014/main" id="{868B6370-F74B-016B-FF0D-DC1DB043D59D}"/>
-              </a:ext>
-            </a:extLst>
-          </p:cNvPr>
-          <p:cNvSpPr>
-            <a:spLocks noGrp="1"/>
-          </p:cNvSpPr>
-          <p:nvPr>
-            <p:ph type="ftr" sz="quarter" idx="11"/>
-          </p:nvPr>
-        </p:nvSpPr>
-        <p:spPr/>
-        <p:txBody>
-          <a:bodyPr/>
-          <a:lstStyle/>
-          <a:p>
-            <a:r>
-              <a:rPr lang="de-AT"/>
-              <a:t>Fusszeile</a:t>
-            </a:r>
-            <a:endParaRPr lang="de-AT" dirty="0"/>
-          </a:p>
-        </p:txBody>
-      </p:sp>
-      <p:sp>
-        <p:nvSpPr>
-          <p:cNvPr id="4" name="Slide Number Placeholder 3">
-            <a:extLst>
-              <a:ext uri="{FF2B5EF4-FFF2-40B4-BE49-F238E27FC236}">
-                <a16:creationId xmlns:a16="http://schemas.microsoft.com/office/drawing/2014/main" id="{F5250EA5-2055-EE81-72DE-79F3DC45E2AC}"/>
-              </a:ext>
-            </a:extLst>
-          </p:cNvPr>
-          <p:cNvSpPr>
-            <a:spLocks noGrp="1"/>
-          </p:cNvSpPr>
-          <p:nvPr>
-            <p:ph type="sldNum" sz="quarter" idx="12"/>
-          </p:nvPr>
-        </p:nvSpPr>
-        <p:spPr/>
-        <p:txBody>
-          <a:bodyPr/>
-          <a:lstStyle/>
-          <a:p>
-            <a:r>
-              <a:rPr lang="de-AT"/>
-              <a:t>SEITE </a:t>
-            </a:r>
-            <a:fld id="{BE3DC40E-DBBE-4E2D-9EEC-FBF0DA0E9179}" type="slidenum">
-              <a:rPr lang="de-AT" smtClean="0"/>
-              <a:t>5</a:t>
-            </a:fld>
-            <a:endParaRPr lang="de-AT" dirty="0"/>
-          </a:p>
-        </p:txBody>
-      </p:sp>
-      <p:sp>
-        <p:nvSpPr>
-          <p:cNvPr id="5" name="Title 4">
-            <a:extLst>
-              <a:ext uri="{FF2B5EF4-FFF2-40B4-BE49-F238E27FC236}">
-                <a16:creationId xmlns:a16="http://schemas.microsoft.com/office/drawing/2014/main" id="{7E724D8D-8F49-F6D8-7959-06B7DCFC7327}"/>
-              </a:ext>
-            </a:extLst>
-          </p:cNvPr>
-          <p:cNvSpPr>
-            <a:spLocks noGrp="1"/>
-          </p:cNvSpPr>
-          <p:nvPr>
-            <p:ph type="title"/>
-          </p:nvPr>
-        </p:nvSpPr>
-        <p:spPr/>
-        <p:txBody>
-          <a:bodyPr/>
-          <a:lstStyle/>
-          <a:p>
-            <a:r>
-              <a:rPr lang="en-AT" dirty="0"/>
-              <a:t>Introduction – Our solution</a:t>
-            </a:r>
-            <a:endParaRPr lang="de-AT" dirty="0"/>
-          </a:p>
-        </p:txBody>
-      </p:sp>
-    </p:spTree>
-    <p:extLst>
-      <p:ext uri="{BB962C8B-B14F-4D97-AF65-F5344CB8AC3E}">
-        <p14:creationId xmlns:p14="http://schemas.microsoft.com/office/powerpoint/2010/main" val="3480902647"/>
       </p:ext>
     </p:extLst>
   </p:cSld>
@@ -8726,7 +9747,7 @@
           <p:cNvPr id="2" name="Content Placeholder 1">
             <a:extLst>
               <a:ext uri="{FF2B5EF4-FFF2-40B4-BE49-F238E27FC236}">
-                <a16:creationId xmlns:a16="http://schemas.microsoft.com/office/drawing/2014/main" id="{1D2C18C2-F185-C621-7435-72C1CFBDD815}"/>
+                <a16:creationId xmlns:a16="http://schemas.microsoft.com/office/drawing/2014/main" id="{9E1213BA-B3C2-2AEB-9193-431C84D29BF6}"/>
               </a:ext>
             </a:extLst>
           </p:cNvPr>
@@ -8743,16 +9764,12 @@
           <a:lstStyle/>
           <a:p>
             <a:r>
+              <a:rPr lang="de-AT" dirty="0"/>
+              <a:t>S</a:t>
+            </a:r>
+            <a:r>
               <a:rPr lang="en-AT" dirty="0" err="1"/>
-              <a:t>Klimazone</a:t>
-            </a:r>
-            <a:r>
-              <a:rPr lang="en-AT" dirty="0"/>
-              <a:t> (</a:t>
-            </a:r>
-            <a:r>
-              <a:rPr lang="en-AT" dirty="0" err="1"/>
-              <a:t>gemäßigt</a:t>
+              <a:t>ehr</a:t>
             </a:r>
             <a:r>
               <a:rPr lang="en-AT" dirty="0"/>
@@ -8760,71 +9777,7 @@
             </a:r>
             <a:r>
               <a:rPr lang="en-AT" dirty="0" err="1"/>
-              <a:t>mitteleuropäisch</a:t>
-            </a:r>
-            <a:r>
-              <a:rPr lang="en-AT" dirty="0"/>
-              <a:t>)</a:t>
-            </a:r>
-          </a:p>
-          <a:p>
-            <a:r>
-              <a:rPr lang="en-AT" dirty="0" err="1"/>
-              <a:t>Mehrere</a:t>
-            </a:r>
-            <a:r>
-              <a:rPr lang="en-AT" dirty="0"/>
-              <a:t> Jahreszeiten</a:t>
-            </a:r>
-          </a:p>
-          <a:p>
-            <a:endParaRPr lang="en-AT" dirty="0"/>
-          </a:p>
-          <a:p>
-            <a:endParaRPr lang="en-AT" dirty="0"/>
-          </a:p>
-          <a:p>
-            <a:r>
-              <a:rPr lang="en-AT" dirty="0"/>
-              <a:t>Out of scope: </a:t>
-            </a:r>
-          </a:p>
-          <a:p>
-            <a:pPr lvl="1"/>
-            <a:r>
-              <a:rPr lang="en-AT" dirty="0" err="1"/>
-              <a:t>Simulationen</a:t>
-            </a:r>
-            <a:r>
-              <a:rPr lang="en-AT" dirty="0"/>
-              <a:t> (Hitze, </a:t>
-            </a:r>
-            <a:r>
-              <a:rPr lang="en-AT" dirty="0" err="1"/>
-              <a:t>flut</a:t>
-            </a:r>
-            <a:r>
-              <a:rPr lang="en-AT" dirty="0"/>
-              <a:t>). </a:t>
-            </a:r>
-          </a:p>
-          <a:p>
-            <a:pPr lvl="1"/>
-            <a:r>
-              <a:rPr lang="en-AT" dirty="0"/>
-              <a:t>Kleine </a:t>
-            </a:r>
-            <a:r>
-              <a:rPr lang="en-AT" dirty="0" err="1"/>
-              <a:t>einzelbäume</a:t>
-            </a:r>
-            <a:r>
-              <a:rPr lang="en-AT" dirty="0"/>
-              <a:t> (die in </a:t>
-            </a:r>
-            <a:r>
-              <a:rPr lang="en-AT" dirty="0" err="1"/>
-              <a:t>auflösung</a:t>
+              <a:t>kurze</a:t>
             </a:r>
             <a:r>
               <a:rPr lang="en-AT" dirty="0"/>
@@ -8832,7 +9785,7 @@
             </a:r>
             <a:r>
               <a:rPr lang="en-AT" dirty="0" err="1"/>
-              <a:t>unter</a:t>
+              <a:t>beschreibung</a:t>
             </a:r>
             <a:r>
               <a:rPr lang="en-AT" dirty="0"/>
@@ -8840,11 +9793,33 @@
             </a:r>
             <a:r>
               <a:rPr lang="en-AT" dirty="0" err="1"/>
-              <a:t>gehen</a:t>
+              <a:t>über</a:t>
             </a:r>
             <a:r>
               <a:rPr lang="en-AT" dirty="0"/>
-              <a:t>)</a:t>
+              <a:t> </a:t>
+            </a:r>
+            <a:r>
+              <a:rPr lang="en-AT" dirty="0" err="1"/>
+              <a:t>unseren</a:t>
+            </a:r>
+            <a:r>
+              <a:rPr lang="en-AT" dirty="0"/>
+              <a:t> </a:t>
+            </a:r>
+            <a:r>
+              <a:rPr lang="en-AT" dirty="0" err="1"/>
+              <a:t>lösungsansatz</a:t>
+            </a:r>
+            <a:r>
+              <a:rPr lang="en-AT" dirty="0"/>
+              <a:t>. </a:t>
+            </a:r>
+          </a:p>
+          <a:p>
+            <a:r>
+              <a:rPr lang="en-AT" dirty="0"/>
+              <a:t>Big Picture</a:t>
             </a:r>
             <a:endParaRPr lang="de-AT" dirty="0"/>
           </a:p>
@@ -8855,7 +9830,7 @@
           <p:cNvPr id="3" name="Footer Placeholder 2">
             <a:extLst>
               <a:ext uri="{FF2B5EF4-FFF2-40B4-BE49-F238E27FC236}">
-                <a16:creationId xmlns:a16="http://schemas.microsoft.com/office/drawing/2014/main" id="{55B64D95-FAF4-69ED-418D-4071B194B9C3}"/>
+                <a16:creationId xmlns:a16="http://schemas.microsoft.com/office/drawing/2014/main" id="{868B6370-F74B-016B-FF0D-DC1DB043D59D}"/>
               </a:ext>
             </a:extLst>
           </p:cNvPr>
@@ -8884,7 +9859,7 @@
           <p:cNvPr id="4" name="Slide Number Placeholder 3">
             <a:extLst>
               <a:ext uri="{FF2B5EF4-FFF2-40B4-BE49-F238E27FC236}">
-                <a16:creationId xmlns:a16="http://schemas.microsoft.com/office/drawing/2014/main" id="{33B2AAA4-35A8-7150-EB96-79DC412AECBE}"/>
+                <a16:creationId xmlns:a16="http://schemas.microsoft.com/office/drawing/2014/main" id="{F5250EA5-2055-EE81-72DE-79F3DC45E2AC}"/>
               </a:ext>
             </a:extLst>
           </p:cNvPr>
@@ -8917,7 +9892,7 @@
           <p:cNvPr id="5" name="Title 4">
             <a:extLst>
               <a:ext uri="{FF2B5EF4-FFF2-40B4-BE49-F238E27FC236}">
-                <a16:creationId xmlns:a16="http://schemas.microsoft.com/office/drawing/2014/main" id="{404B5E96-66C7-B557-D215-2616AAD0E7D3}"/>
+                <a16:creationId xmlns:a16="http://schemas.microsoft.com/office/drawing/2014/main" id="{7E724D8D-8F49-F6D8-7959-06B7DCFC7327}"/>
               </a:ext>
             </a:extLst>
           </p:cNvPr>
@@ -8935,7 +9910,7 @@
           <a:p>
             <a:r>
               <a:rPr lang="en-AT" dirty="0"/>
-              <a:t>Introduction – Scope and Limitation</a:t>
+              <a:t>Introduction – Our solution</a:t>
             </a:r>
             <a:endParaRPr lang="de-AT" dirty="0"/>
           </a:p>
@@ -8944,7 +9919,7 @@
     </p:spTree>
     <p:extLst>
       <p:ext uri="{BB962C8B-B14F-4D97-AF65-F5344CB8AC3E}">
-        <p14:creationId xmlns:p14="http://schemas.microsoft.com/office/powerpoint/2010/main" val="4176988336"/>
+        <p14:creationId xmlns:p14="http://schemas.microsoft.com/office/powerpoint/2010/main" val="3480902647"/>
       </p:ext>
     </p:extLst>
   </p:cSld>
@@ -8979,6 +9954,454 @@
           <p:cNvPr id="2" name="Content Placeholder 1">
             <a:extLst>
               <a:ext uri="{FF2B5EF4-FFF2-40B4-BE49-F238E27FC236}">
+                <a16:creationId xmlns:a16="http://schemas.microsoft.com/office/drawing/2014/main" id="{1D2C18C2-F185-C621-7435-72C1CFBDD815}"/>
+              </a:ext>
+            </a:extLst>
+          </p:cNvPr>
+          <p:cNvSpPr>
+            <a:spLocks noGrp="1"/>
+          </p:cNvSpPr>
+          <p:nvPr>
+            <p:ph idx="1"/>
+          </p:nvPr>
+        </p:nvSpPr>
+        <p:spPr/>
+        <p:txBody>
+          <a:bodyPr/>
+          <a:lstStyle/>
+          <a:p>
+            <a:r>
+              <a:rPr lang="en-AT" dirty="0" err="1"/>
+              <a:t>Klimazone</a:t>
+            </a:r>
+            <a:r>
+              <a:rPr lang="en-AT" dirty="0"/>
+              <a:t> (</a:t>
+            </a:r>
+            <a:r>
+              <a:rPr lang="en-AT" dirty="0" err="1"/>
+              <a:t>gemäßigt</a:t>
+            </a:r>
+            <a:r>
+              <a:rPr lang="en-AT" dirty="0"/>
+              <a:t> </a:t>
+            </a:r>
+            <a:r>
+              <a:rPr lang="en-AT" dirty="0" err="1"/>
+              <a:t>mitteleuropäisch</a:t>
+            </a:r>
+            <a:r>
+              <a:rPr lang="en-AT" dirty="0"/>
+              <a:t>)</a:t>
+            </a:r>
+          </a:p>
+          <a:p>
+            <a:r>
+              <a:rPr lang="en-AT" dirty="0" err="1"/>
+              <a:t>Mehrere</a:t>
+            </a:r>
+            <a:r>
+              <a:rPr lang="en-AT" dirty="0"/>
+              <a:t> Jahreszeiten</a:t>
+            </a:r>
+          </a:p>
+          <a:p>
+            <a:endParaRPr lang="en-AT" dirty="0"/>
+          </a:p>
+          <a:p>
+            <a:endParaRPr lang="en-AT" dirty="0"/>
+          </a:p>
+          <a:p>
+            <a:r>
+              <a:rPr lang="en-AT" dirty="0"/>
+              <a:t>Out of scope: </a:t>
+            </a:r>
+          </a:p>
+          <a:p>
+            <a:pPr lvl="1"/>
+            <a:r>
+              <a:rPr lang="en-AT" dirty="0" err="1"/>
+              <a:t>Simulationen</a:t>
+            </a:r>
+            <a:r>
+              <a:rPr lang="en-AT" dirty="0"/>
+              <a:t> (Hitze, </a:t>
+            </a:r>
+            <a:r>
+              <a:rPr lang="en-AT" dirty="0" err="1"/>
+              <a:t>flut</a:t>
+            </a:r>
+            <a:r>
+              <a:rPr lang="en-AT" dirty="0"/>
+              <a:t>). </a:t>
+            </a:r>
+          </a:p>
+          <a:p>
+            <a:pPr lvl="1"/>
+            <a:r>
+              <a:rPr lang="en-AT" dirty="0"/>
+              <a:t>Kleine </a:t>
+            </a:r>
+            <a:r>
+              <a:rPr lang="en-AT" dirty="0" err="1"/>
+              <a:t>einzelbäume</a:t>
+            </a:r>
+            <a:r>
+              <a:rPr lang="en-AT" dirty="0"/>
+              <a:t> (die in </a:t>
+            </a:r>
+            <a:r>
+              <a:rPr lang="en-AT" dirty="0" err="1"/>
+              <a:t>auflösung</a:t>
+            </a:r>
+            <a:r>
+              <a:rPr lang="en-AT" dirty="0"/>
+              <a:t> </a:t>
+            </a:r>
+            <a:r>
+              <a:rPr lang="en-AT" dirty="0" err="1"/>
+              <a:t>unter</a:t>
+            </a:r>
+            <a:r>
+              <a:rPr lang="en-AT" dirty="0"/>
+              <a:t> </a:t>
+            </a:r>
+            <a:r>
+              <a:rPr lang="en-AT" dirty="0" err="1"/>
+              <a:t>gehen</a:t>
+            </a:r>
+            <a:r>
+              <a:rPr lang="en-AT" dirty="0"/>
+              <a:t>)</a:t>
+            </a:r>
+            <a:endParaRPr lang="de-AT" dirty="0"/>
+          </a:p>
+        </p:txBody>
+      </p:sp>
+      <p:sp>
+        <p:nvSpPr>
+          <p:cNvPr id="3" name="Footer Placeholder 2">
+            <a:extLst>
+              <a:ext uri="{FF2B5EF4-FFF2-40B4-BE49-F238E27FC236}">
+                <a16:creationId xmlns:a16="http://schemas.microsoft.com/office/drawing/2014/main" id="{55B64D95-FAF4-69ED-418D-4071B194B9C3}"/>
+              </a:ext>
+            </a:extLst>
+          </p:cNvPr>
+          <p:cNvSpPr>
+            <a:spLocks noGrp="1"/>
+          </p:cNvSpPr>
+          <p:nvPr>
+            <p:ph type="ftr" sz="quarter" idx="11"/>
+          </p:nvPr>
+        </p:nvSpPr>
+        <p:spPr/>
+        <p:txBody>
+          <a:bodyPr/>
+          <a:lstStyle/>
+          <a:p>
+            <a:r>
+              <a:rPr lang="de-AT"/>
+              <a:t>Fusszeile</a:t>
+            </a:r>
+            <a:endParaRPr lang="de-AT" dirty="0"/>
+          </a:p>
+        </p:txBody>
+      </p:sp>
+      <p:sp>
+        <p:nvSpPr>
+          <p:cNvPr id="4" name="Slide Number Placeholder 3">
+            <a:extLst>
+              <a:ext uri="{FF2B5EF4-FFF2-40B4-BE49-F238E27FC236}">
+                <a16:creationId xmlns:a16="http://schemas.microsoft.com/office/drawing/2014/main" id="{33B2AAA4-35A8-7150-EB96-79DC412AECBE}"/>
+              </a:ext>
+            </a:extLst>
+          </p:cNvPr>
+          <p:cNvSpPr>
+            <a:spLocks noGrp="1"/>
+          </p:cNvSpPr>
+          <p:nvPr>
+            <p:ph type="sldNum" sz="quarter" idx="12"/>
+          </p:nvPr>
+        </p:nvSpPr>
+        <p:spPr/>
+        <p:txBody>
+          <a:bodyPr/>
+          <a:lstStyle/>
+          <a:p>
+            <a:r>
+              <a:rPr lang="de-AT"/>
+              <a:t>SEITE </a:t>
+            </a:r>
+            <a:fld id="{BE3DC40E-DBBE-4E2D-9EEC-FBF0DA0E9179}" type="slidenum">
+              <a:rPr lang="de-AT" smtClean="0"/>
+              <a:t>7</a:t>
+            </a:fld>
+            <a:endParaRPr lang="de-AT" dirty="0"/>
+          </a:p>
+        </p:txBody>
+      </p:sp>
+      <p:sp>
+        <p:nvSpPr>
+          <p:cNvPr id="5" name="Title 4">
+            <a:extLst>
+              <a:ext uri="{FF2B5EF4-FFF2-40B4-BE49-F238E27FC236}">
+                <a16:creationId xmlns:a16="http://schemas.microsoft.com/office/drawing/2014/main" id="{404B5E96-66C7-B557-D215-2616AAD0E7D3}"/>
+              </a:ext>
+            </a:extLst>
+          </p:cNvPr>
+          <p:cNvSpPr>
+            <a:spLocks noGrp="1"/>
+          </p:cNvSpPr>
+          <p:nvPr>
+            <p:ph type="title"/>
+          </p:nvPr>
+        </p:nvSpPr>
+        <p:spPr/>
+        <p:txBody>
+          <a:bodyPr/>
+          <a:lstStyle/>
+          <a:p>
+            <a:r>
+              <a:rPr lang="en-AT" dirty="0"/>
+              <a:t>Introduction – Scope and Limitation</a:t>
+            </a:r>
+            <a:endParaRPr lang="de-AT" dirty="0"/>
+          </a:p>
+        </p:txBody>
+      </p:sp>
+    </p:spTree>
+    <p:extLst>
+      <p:ext uri="{BB962C8B-B14F-4D97-AF65-F5344CB8AC3E}">
+        <p14:creationId xmlns:p14="http://schemas.microsoft.com/office/powerpoint/2010/main" val="4176988336"/>
+      </p:ext>
+    </p:extLst>
+  </p:cSld>
+  <p:clrMapOvr>
+    <a:masterClrMapping/>
+  </p:clrMapOvr>
+  <p:transition>
+    <p:fade/>
+  </p:transition>
+</p:sld>
+</file>
+
+<file path=ppt/slides/slide8.xml><?xml version="1.0" encoding="utf-8"?>
+<p:sld xmlns:a="http://schemas.openxmlformats.org/drawingml/2006/main" xmlns:r="http://schemas.openxmlformats.org/officeDocument/2006/relationships" xmlns:p="http://schemas.openxmlformats.org/presentationml/2006/main">
+  <p:cSld>
+    <p:spTree>
+      <p:nvGrpSpPr>
+        <p:cNvPr id="1" name="">
+          <a:extLst>
+            <a:ext uri="{FF2B5EF4-FFF2-40B4-BE49-F238E27FC236}">
+              <a16:creationId xmlns:a16="http://schemas.microsoft.com/office/drawing/2014/main" id="{B45A9787-3D65-3BEC-6313-2A969AFE09E9}"/>
+            </a:ext>
+          </a:extLst>
+        </p:cNvPr>
+        <p:cNvGrpSpPr/>
+        <p:nvPr/>
+      </p:nvGrpSpPr>
+      <p:grpSpPr>
+        <a:xfrm>
+          <a:off x="0" y="0"/>
+          <a:ext cx="0" cy="0"/>
+          <a:chOff x="0" y="0"/>
+          <a:chExt cx="0" cy="0"/>
+        </a:xfrm>
+      </p:grpSpPr>
+      <p:sp>
+        <p:nvSpPr>
+          <p:cNvPr id="10" name="Text Placeholder 1">
+            <a:extLst>
+              <a:ext uri="{FF2B5EF4-FFF2-40B4-BE49-F238E27FC236}">
+                <a16:creationId xmlns:a16="http://schemas.microsoft.com/office/drawing/2014/main" id="{251A5E02-4242-D600-A920-0DAB419AC7F5}"/>
+              </a:ext>
+            </a:extLst>
+          </p:cNvPr>
+          <p:cNvSpPr>
+            <a:spLocks noGrp="1"/>
+          </p:cNvSpPr>
+          <p:nvPr>
+            <p:ph type="body" sz="quarter" idx="11"/>
+          </p:nvPr>
+        </p:nvSpPr>
+        <p:spPr>
+          <a:xfrm>
+            <a:off x="287338" y="2941638"/>
+            <a:ext cx="4284662" cy="620885"/>
+          </a:xfrm>
+        </p:spPr>
+        <p:txBody>
+          <a:bodyPr/>
+          <a:lstStyle/>
+          <a:p>
+            <a:endParaRPr lang="en-US"/>
+          </a:p>
+        </p:txBody>
+      </p:sp>
+      <p:sp>
+        <p:nvSpPr>
+          <p:cNvPr id="5" name="Title 4">
+            <a:extLst>
+              <a:ext uri="{FF2B5EF4-FFF2-40B4-BE49-F238E27FC236}">
+                <a16:creationId xmlns:a16="http://schemas.microsoft.com/office/drawing/2014/main" id="{61D3E41C-4FB2-0BCD-907D-CEAE3AA9E019}"/>
+              </a:ext>
+            </a:extLst>
+          </p:cNvPr>
+          <p:cNvSpPr>
+            <a:spLocks noGrp="1"/>
+          </p:cNvSpPr>
+          <p:nvPr>
+            <p:ph type="ctrTitle"/>
+          </p:nvPr>
+        </p:nvSpPr>
+        <p:spPr>
+          <a:xfrm>
+            <a:off x="605406" y="1301365"/>
+            <a:ext cx="5436000" cy="1026000"/>
+          </a:xfrm>
+        </p:spPr>
+        <p:txBody>
+          <a:bodyPr anchor="ctr">
+            <a:normAutofit/>
+          </a:bodyPr>
+          <a:lstStyle/>
+          <a:p>
+            <a:r>
+              <a:rPr lang="en-AT" dirty="0"/>
+              <a:t>Data</a:t>
+            </a:r>
+            <a:endParaRPr lang="de-AT" dirty="0"/>
+          </a:p>
+        </p:txBody>
+      </p:sp>
+      <p:sp>
+        <p:nvSpPr>
+          <p:cNvPr id="3" name="Footer Placeholder 2">
+            <a:extLst>
+              <a:ext uri="{FF2B5EF4-FFF2-40B4-BE49-F238E27FC236}">
+                <a16:creationId xmlns:a16="http://schemas.microsoft.com/office/drawing/2014/main" id="{1098F11D-E956-FC68-4A79-9A2203B5CD3C}"/>
+              </a:ext>
+            </a:extLst>
+          </p:cNvPr>
+          <p:cNvSpPr>
+            <a:spLocks noGrp="1"/>
+          </p:cNvSpPr>
+          <p:nvPr>
+            <p:ph type="ftr" sz="quarter" idx="14"/>
+          </p:nvPr>
+        </p:nvSpPr>
+        <p:spPr>
+          <a:xfrm>
+            <a:off x="1354561" y="5412059"/>
+            <a:ext cx="3217443" cy="258085"/>
+          </a:xfrm>
+        </p:spPr>
+        <p:txBody>
+          <a:bodyPr anchor="ctr">
+            <a:normAutofit/>
+          </a:bodyPr>
+          <a:lstStyle/>
+          <a:p>
+            <a:pPr>
+              <a:spcAft>
+                <a:spcPts val="600"/>
+              </a:spcAft>
+            </a:pPr>
+            <a:r>
+              <a:rPr lang="de-AT"/>
+              <a:t>Fusszeile</a:t>
+            </a:r>
+          </a:p>
+        </p:txBody>
+      </p:sp>
+      <p:sp>
+        <p:nvSpPr>
+          <p:cNvPr id="4" name="Slide Number Placeholder 3">
+            <a:extLst>
+              <a:ext uri="{FF2B5EF4-FFF2-40B4-BE49-F238E27FC236}">
+                <a16:creationId xmlns:a16="http://schemas.microsoft.com/office/drawing/2014/main" id="{E0EDD7BD-0339-92CF-FB96-5FB245E924CA}"/>
+              </a:ext>
+            </a:extLst>
+          </p:cNvPr>
+          <p:cNvSpPr>
+            <a:spLocks noGrp="1"/>
+          </p:cNvSpPr>
+          <p:nvPr>
+            <p:ph type="sldNum" sz="quarter" idx="15"/>
+          </p:nvPr>
+        </p:nvSpPr>
+        <p:spPr>
+          <a:xfrm>
+            <a:off x="462407" y="5412059"/>
+            <a:ext cx="892150" cy="258085"/>
+          </a:xfrm>
+        </p:spPr>
+        <p:txBody>
+          <a:bodyPr anchor="ctr">
+            <a:normAutofit/>
+          </a:bodyPr>
+          <a:lstStyle/>
+          <a:p>
+            <a:pPr>
+              <a:spcAft>
+                <a:spcPts val="600"/>
+              </a:spcAft>
+            </a:pPr>
+            <a:r>
+              <a:rPr lang="de-AT"/>
+              <a:t>SEITE </a:t>
+            </a:r>
+            <a:fld id="{BE3DC40E-DBBE-4E2D-9EEC-FBF0DA0E9179}" type="slidenum">
+              <a:rPr lang="de-AT" smtClean="0"/>
+              <a:pPr>
+                <a:spcAft>
+                  <a:spcPts val="600"/>
+                </a:spcAft>
+              </a:pPr>
+              <a:t>8</a:t>
+            </a:fld>
+            <a:endParaRPr lang="de-AT"/>
+          </a:p>
+        </p:txBody>
+      </p:sp>
+    </p:spTree>
+    <p:extLst>
+      <p:ext uri="{BB962C8B-B14F-4D97-AF65-F5344CB8AC3E}">
+        <p14:creationId xmlns:p14="http://schemas.microsoft.com/office/powerpoint/2010/main" val="2953633624"/>
+      </p:ext>
+    </p:extLst>
+  </p:cSld>
+  <p:clrMapOvr>
+    <a:masterClrMapping/>
+  </p:clrMapOvr>
+  <p:transition>
+    <p:fade/>
+  </p:transition>
+</p:sld>
+</file>
+
+<file path=ppt/slides/slide9.xml><?xml version="1.0" encoding="utf-8"?>
+<p:sld xmlns:a="http://schemas.openxmlformats.org/drawingml/2006/main" xmlns:r="http://schemas.openxmlformats.org/officeDocument/2006/relationships" xmlns:p="http://schemas.openxmlformats.org/presentationml/2006/main">
+  <p:cSld>
+    <p:spTree>
+      <p:nvGrpSpPr>
+        <p:cNvPr id="1" name=""/>
+        <p:cNvGrpSpPr/>
+        <p:nvPr/>
+      </p:nvGrpSpPr>
+      <p:grpSpPr>
+        <a:xfrm>
+          <a:off x="0" y="0"/>
+          <a:ext cx="0" cy="0"/>
+          <a:chOff x="0" y="0"/>
+          <a:chExt cx="0" cy="0"/>
+        </a:xfrm>
+      </p:grpSpPr>
+      <p:sp>
+        <p:nvSpPr>
+          <p:cNvPr id="2" name="Content Placeholder 1">
+            <a:extLst>
+              <a:ext uri="{FF2B5EF4-FFF2-40B4-BE49-F238E27FC236}">
                 <a16:creationId xmlns:a16="http://schemas.microsoft.com/office/drawing/2014/main" id="{932E7214-4F08-BCA5-CB79-65FC9D8116E0}"/>
               </a:ext>
             </a:extLst>
@@ -8995,7 +10418,11 @@
           <a:bodyPr/>
           <a:lstStyle/>
           <a:p>
-            <a:endParaRPr lang="de-AT"/>
+            <a:r>
+              <a:rPr lang="en-AT" dirty="0"/>
+              <a:t>Nina</a:t>
+            </a:r>
+            <a:endParaRPr lang="de-AT" dirty="0"/>
           </a:p>
         </p:txBody>
       </p:sp>
@@ -9055,7 +10482,7 @@
             </a:r>
             <a:fld id="{BE3DC40E-DBBE-4E2D-9EEC-FBF0DA0E9179}" type="slidenum">
               <a:rPr lang="de-AT" smtClean="0"/>
-              <a:t>7</a:t>
+              <a:t>9</a:t>
             </a:fld>
             <a:endParaRPr lang="de-AT" dirty="0"/>
           </a:p>
@@ -9938,57 +11365,6 @@
 </file>
 
 <file path=customXml/item1.xml><?xml version="1.0" encoding="utf-8"?>
-<?mso-contentType ?>
-<FormTemplates xmlns="http://schemas.microsoft.com/sharepoint/v3/contenttype/forms">
-  <Display>DocumentLibraryForm</Display>
-  <Edit>DocumentLibraryForm</Edit>
-  <New>DocumentLibraryForm</New>
-</FormTemplates>
-</file>
-
-<file path=customXml/item2.xml><?xml version="1.0" encoding="utf-8"?>
-<p:properties xmlns:p="http://schemas.microsoft.com/office/2006/metadata/properties" xmlns:xsi="http://www.w3.org/2001/XMLSchema-instance" xmlns:pc="http://schemas.microsoft.com/office/infopath/2007/PartnerControls">
-  <documentManagement>
-    <Kategorie xmlns="dde413db-0745-4f3a-8dca-564dc7ff6f7d">Präsentationen</Kategorie>
-    <Beschreibung xmlns="dde413db-0745-4f3a-8dca-564dc7ff6f7d">Musterpräsentation im Format 16:10 (= WU Standard)</Beschreibung>
-    <TaxCatchAll xmlns="08b0a3ee-3d2a-451c-9a1a-7e5d5b0c9c77">
-      <Value>266</Value>
-      <Value>403</Value>
-    </TaxCatchAll>
-    <DokumentenartTaxHTField0 xmlns="1a8d9a65-8471-4209-a900-f8e11db75e0a">
-      <Terms xmlns="http://schemas.microsoft.com/office/infopath/2007/PartnerControls">
-        <TermInfo xmlns="http://schemas.microsoft.com/office/infopath/2007/PartnerControls">
-          <TermName xmlns="http://schemas.microsoft.com/office/infopath/2007/PartnerControls">Vorlagen</TermName>
-          <TermId xmlns="http://schemas.microsoft.com/office/infopath/2007/PartnerControls">17fc50ed-8ad1-47be-ab12-04243fd74ddb</TermId>
-        </TermInfo>
-      </Terms>
-    </DokumentenartTaxHTField0>
-    <WU_x0020_ThemaTaxHTField0 xmlns="1a8d9a65-8471-4209-a900-f8e11db75e0a">
-      <Terms xmlns="http://schemas.microsoft.com/office/infopath/2007/PartnerControls">
-        <TermInfo xmlns="http://schemas.microsoft.com/office/infopath/2007/PartnerControls">
-          <TermName xmlns="http://schemas.microsoft.com/office/infopath/2007/PartnerControls">Corporate Design</TermName>
-          <TermId xmlns="http://schemas.microsoft.com/office/infopath/2007/PartnerControls">19895bcd-b158-45ae-ab7b-f5ca217dfcec</TermId>
-        </TermInfo>
-      </Terms>
-    </WU_x0020_ThemaTaxHTField0>
-    <Format xmlns="dde413db-0745-4f3a-8dca-564dc7ff6f7d">Microsoft Office 2013/2016</Format>
-    <SharedWithUsers xmlns="08b0a3ee-3d2a-451c-9a1a-7e5d5b0c9c77">
-      <UserInfo>
-        <DisplayName>Hernandez Perez, Laura</DisplayName>
-        <AccountId>6100</AccountId>
-        <AccountType/>
-      </UserInfo>
-      <UserInfo>
-        <DisplayName>Hermann, Anett</DisplayName>
-        <AccountId>2869</AccountId>
-        <AccountType/>
-      </UserInfo>
-    </SharedWithUsers>
-  </documentManagement>
-</p:properties>
-</file>
-
-<file path=customXml/item3.xml><?xml version="1.0" encoding="utf-8"?>
 <ct:contentTypeSchema xmlns:ct="http://schemas.microsoft.com/office/2006/metadata/contentType" xmlns:ma="http://schemas.microsoft.com/office/2006/metadata/properties/metaAttributes" ct:_="" ma:_="" ma:contentTypeName="Dokument" ma:contentTypeID="0x010100BCF651A35DF3154DB01328AF51148DAE" ma:contentTypeVersion="2" ma:contentTypeDescription="Ein neues Dokument erstellen." ma:contentTypeScope="" ma:versionID="b5ccb5bb211b6ddcc624790d84f2bb9f">
   <xsd:schema xmlns:xsd="http://www.w3.org/2001/XMLSchema" xmlns:xs="http://www.w3.org/2001/XMLSchema" xmlns:p="http://schemas.microsoft.com/office/2006/metadata/properties" xmlns:ns2="1a8d9a65-8471-4209-a900-f8e11db75e0a" xmlns:ns3="08b0a3ee-3d2a-451c-9a1a-7e5d5b0c9c77" xmlns:ns4="dde413db-0745-4f3a-8dca-564dc7ff6f7d" targetNamespace="http://schemas.microsoft.com/office/2006/metadata/properties" ma:root="true" ma:fieldsID="046596c9011a87760a505164f9d920d3" ns2:_="" ns3:_="" ns4:_="">
     <xsd:import namespace="1a8d9a65-8471-4209-a900-f8e11db75e0a"/>
@@ -10219,10 +11595,73 @@
 </ct:contentTypeSchema>
 </file>
 
+<file path=customXml/item2.xml><?xml version="1.0" encoding="utf-8"?>
+<p:properties xmlns:p="http://schemas.microsoft.com/office/2006/metadata/properties" xmlns:xsi="http://www.w3.org/2001/XMLSchema-instance" xmlns:pc="http://schemas.microsoft.com/office/infopath/2007/PartnerControls">
+  <documentManagement>
+    <Kategorie xmlns="dde413db-0745-4f3a-8dca-564dc7ff6f7d">Präsentationen</Kategorie>
+    <Beschreibung xmlns="dde413db-0745-4f3a-8dca-564dc7ff6f7d">Musterpräsentation im Format 16:10 (= WU Standard)</Beschreibung>
+    <TaxCatchAll xmlns="08b0a3ee-3d2a-451c-9a1a-7e5d5b0c9c77">
+      <Value>266</Value>
+      <Value>403</Value>
+    </TaxCatchAll>
+    <DokumentenartTaxHTField0 xmlns="1a8d9a65-8471-4209-a900-f8e11db75e0a">
+      <Terms xmlns="http://schemas.microsoft.com/office/infopath/2007/PartnerControls">
+        <TermInfo xmlns="http://schemas.microsoft.com/office/infopath/2007/PartnerControls">
+          <TermName xmlns="http://schemas.microsoft.com/office/infopath/2007/PartnerControls">Vorlagen</TermName>
+          <TermId xmlns="http://schemas.microsoft.com/office/infopath/2007/PartnerControls">17fc50ed-8ad1-47be-ab12-04243fd74ddb</TermId>
+        </TermInfo>
+      </Terms>
+    </DokumentenartTaxHTField0>
+    <WU_x0020_ThemaTaxHTField0 xmlns="1a8d9a65-8471-4209-a900-f8e11db75e0a">
+      <Terms xmlns="http://schemas.microsoft.com/office/infopath/2007/PartnerControls">
+        <TermInfo xmlns="http://schemas.microsoft.com/office/infopath/2007/PartnerControls">
+          <TermName xmlns="http://schemas.microsoft.com/office/infopath/2007/PartnerControls">Corporate Design</TermName>
+          <TermId xmlns="http://schemas.microsoft.com/office/infopath/2007/PartnerControls">19895bcd-b158-45ae-ab7b-f5ca217dfcec</TermId>
+        </TermInfo>
+      </Terms>
+    </WU_x0020_ThemaTaxHTField0>
+    <Format xmlns="dde413db-0745-4f3a-8dca-564dc7ff6f7d">Microsoft Office 2013/2016</Format>
+    <SharedWithUsers xmlns="08b0a3ee-3d2a-451c-9a1a-7e5d5b0c9c77">
+      <UserInfo>
+        <DisplayName>Hernandez Perez, Laura</DisplayName>
+        <AccountId>6100</AccountId>
+        <AccountType/>
+      </UserInfo>
+      <UserInfo>
+        <DisplayName>Hermann, Anett</DisplayName>
+        <AccountId>2869</AccountId>
+        <AccountType/>
+      </UserInfo>
+    </SharedWithUsers>
+  </documentManagement>
+</p:properties>
+</file>
+
+<file path=customXml/item3.xml><?xml version="1.0" encoding="utf-8"?>
+<?mso-contentType ?>
+<FormTemplates xmlns="http://schemas.microsoft.com/sharepoint/v3/contenttype/forms">
+  <Display>DocumentLibraryForm</Display>
+  <Edit>DocumentLibraryForm</Edit>
+  <New>DocumentLibraryForm</New>
+</FormTemplates>
+</file>
+
 <file path=customXml/itemProps1.xml><?xml version="1.0" encoding="utf-8"?>
-<ds:datastoreItem xmlns:ds="http://schemas.openxmlformats.org/officeDocument/2006/customXml" ds:itemID="{9346B3ED-06B1-4DE8-9648-0F78B5B453B2}">
+<ds:datastoreItem xmlns:ds="http://schemas.openxmlformats.org/officeDocument/2006/customXml" ds:itemID="{069B4889-3CCA-46C6-8FD4-B0AB941A4B59}">
   <ds:schemaRefs>
-    <ds:schemaRef ds:uri="http://schemas.microsoft.com/sharepoint/v3/contenttype/forms"/>
+    <ds:schemaRef ds:uri="http://schemas.microsoft.com/office/2006/metadata/contentType"/>
+    <ds:schemaRef ds:uri="http://schemas.microsoft.com/office/2006/metadata/properties/metaAttributes"/>
+    <ds:schemaRef ds:uri="http://www.w3.org/2001/XMLSchema"/>
+    <ds:schemaRef ds:uri="http://schemas.microsoft.com/office/2006/metadata/properties"/>
+    <ds:schemaRef ds:uri="1a8d9a65-8471-4209-a900-f8e11db75e0a"/>
+    <ds:schemaRef ds:uri="08b0a3ee-3d2a-451c-9a1a-7e5d5b0c9c77"/>
+    <ds:schemaRef ds:uri="dde413db-0745-4f3a-8dca-564dc7ff6f7d"/>
+    <ds:schemaRef ds:uri="http://schemas.microsoft.com/office/2006/documentManagement/types"/>
+    <ds:schemaRef ds:uri="http://schemas.microsoft.com/office/infopath/2007/PartnerControls"/>
+    <ds:schemaRef ds:uri="http://schemas.openxmlformats.org/package/2006/metadata/core-properties"/>
+    <ds:schemaRef ds:uri="http://purl.org/dc/elements/1.1/"/>
+    <ds:schemaRef ds:uri="http://purl.org/dc/terms/"/>
+    <ds:schemaRef ds:uri="http://schemas.microsoft.com/internal/obd"/>
   </ds:schemaRefs>
 </ds:datastoreItem>
 </file>
@@ -10240,21 +11679,9 @@
 </file>
 
 <file path=customXml/itemProps3.xml><?xml version="1.0" encoding="utf-8"?>
-<ds:datastoreItem xmlns:ds="http://schemas.openxmlformats.org/officeDocument/2006/customXml" ds:itemID="{069B4889-3CCA-46C6-8FD4-B0AB941A4B59}">
+<ds:datastoreItem xmlns:ds="http://schemas.openxmlformats.org/officeDocument/2006/customXml" ds:itemID="{9346B3ED-06B1-4DE8-9648-0F78B5B453B2}">
   <ds:schemaRefs>
-    <ds:schemaRef ds:uri="http://schemas.microsoft.com/office/2006/metadata/contentType"/>
-    <ds:schemaRef ds:uri="http://schemas.microsoft.com/office/2006/metadata/properties/metaAttributes"/>
-    <ds:schemaRef ds:uri="http://www.w3.org/2001/XMLSchema"/>
-    <ds:schemaRef ds:uri="http://schemas.microsoft.com/office/2006/metadata/properties"/>
-    <ds:schemaRef ds:uri="1a8d9a65-8471-4209-a900-f8e11db75e0a"/>
-    <ds:schemaRef ds:uri="08b0a3ee-3d2a-451c-9a1a-7e5d5b0c9c77"/>
-    <ds:schemaRef ds:uri="dde413db-0745-4f3a-8dca-564dc7ff6f7d"/>
-    <ds:schemaRef ds:uri="http://schemas.microsoft.com/office/2006/documentManagement/types"/>
-    <ds:schemaRef ds:uri="http://schemas.microsoft.com/office/infopath/2007/PartnerControls"/>
-    <ds:schemaRef ds:uri="http://schemas.openxmlformats.org/package/2006/metadata/core-properties"/>
-    <ds:schemaRef ds:uri="http://purl.org/dc/elements/1.1/"/>
-    <ds:schemaRef ds:uri="http://purl.org/dc/terms/"/>
-    <ds:schemaRef ds:uri="http://schemas.microsoft.com/internal/obd"/>
+    <ds:schemaRef ds:uri="http://schemas.microsoft.com/sharepoint/v3/contenttype/forms"/>
   </ds:schemaRefs>
 </ds:datastoreItem>
 </file>
--- a/deliverables/3b. intermediate slides/Intermediate Slides.pptx
+++ b/deliverables/3b. intermediate slides/Intermediate Slides.pptx
@@ -5,10 +5,10 @@
     <p:sldMasterId id="2147483660" r:id="rId4"/>
   </p:sldMasterIdLst>
   <p:notesMasterIdLst>
-    <p:notesMasterId r:id="rId20"/>
+    <p:notesMasterId r:id="rId19"/>
   </p:notesMasterIdLst>
   <p:handoutMasterIdLst>
-    <p:handoutMasterId r:id="rId21"/>
+    <p:handoutMasterId r:id="rId20"/>
   </p:handoutMasterIdLst>
   <p:sldIdLst>
     <p:sldId id="278" r:id="rId5"/>
@@ -17,20 +17,19 @@
     <p:sldId id="280" r:id="rId8"/>
     <p:sldId id="283" r:id="rId9"/>
     <p:sldId id="284" r:id="rId10"/>
-    <p:sldId id="281" r:id="rId11"/>
-    <p:sldId id="290" r:id="rId12"/>
-    <p:sldId id="282" r:id="rId13"/>
-    <p:sldId id="291" r:id="rId14"/>
-    <p:sldId id="285" r:id="rId15"/>
-    <p:sldId id="292" r:id="rId16"/>
-    <p:sldId id="286" r:id="rId17"/>
-    <p:sldId id="287" r:id="rId18"/>
-    <p:sldId id="288" r:id="rId19"/>
+    <p:sldId id="290" r:id="rId11"/>
+    <p:sldId id="282" r:id="rId12"/>
+    <p:sldId id="291" r:id="rId13"/>
+    <p:sldId id="285" r:id="rId14"/>
+    <p:sldId id="292" r:id="rId15"/>
+    <p:sldId id="286" r:id="rId16"/>
+    <p:sldId id="287" r:id="rId17"/>
+    <p:sldId id="288" r:id="rId18"/>
   </p:sldIdLst>
   <p:sldSz cx="9144000" cy="5715000" type="screen16x10"/>
   <p:notesSz cx="6858000" cy="9144000"/>
   <p:custDataLst>
-    <p:tags r:id="rId22"/>
+    <p:tags r:id="rId21"/>
   </p:custDataLst>
   <p:defaultTextStyle>
     <a:defPPr>
@@ -174,6 +173,3289 @@
 <p:cmAuthorLst xmlns:a="http://schemas.openxmlformats.org/drawingml/2006/main" xmlns:r="http://schemas.openxmlformats.org/officeDocument/2006/relationships" xmlns:p="http://schemas.openxmlformats.org/presentationml/2006/main">
   <p:cmAuthor id="9" name="Autor" initials="A" lastIdx="1" clrIdx="8"/>
 </p:cmAuthorLst>
+</file>
+
+<file path=ppt/diagrams/colors1.xml><?xml version="1.0" encoding="utf-8"?>
+<dgm:colorsDef xmlns:dgm="http://schemas.openxmlformats.org/drawingml/2006/diagram" xmlns:a="http://schemas.openxmlformats.org/drawingml/2006/main" uniqueId="urn:microsoft.com/office/officeart/2005/8/colors/accent1_2">
+  <dgm:title val=""/>
+  <dgm:desc val=""/>
+  <dgm:catLst>
+    <dgm:cat type="accent1" pri="11200"/>
+  </dgm:catLst>
+  <dgm:styleLbl name="node0">
+    <dgm:fillClrLst meth="repeat">
+      <a:schemeClr val="accent1"/>
+    </dgm:fillClrLst>
+    <dgm:linClrLst meth="repeat">
+      <a:schemeClr val="lt1"/>
+    </dgm:linClrLst>
+    <dgm:effectClrLst/>
+    <dgm:txLinClrLst/>
+    <dgm:txFillClrLst/>
+    <dgm:txEffectClrLst/>
+  </dgm:styleLbl>
+  <dgm:styleLbl name="alignNode1">
+    <dgm:fillClrLst meth="repeat">
+      <a:schemeClr val="accent1"/>
+    </dgm:fillClrLst>
+    <dgm:linClrLst meth="repeat">
+      <a:schemeClr val="accent1"/>
+    </dgm:linClrLst>
+    <dgm:effectClrLst/>
+    <dgm:txLinClrLst/>
+    <dgm:txFillClrLst/>
+    <dgm:txEffectClrLst/>
+  </dgm:styleLbl>
+  <dgm:styleLbl name="node1">
+    <dgm:fillClrLst meth="repeat">
+      <a:schemeClr val="accent1"/>
+    </dgm:fillClrLst>
+    <dgm:linClrLst meth="repeat">
+      <a:schemeClr val="lt1"/>
+    </dgm:linClrLst>
+    <dgm:effectClrLst/>
+    <dgm:txLinClrLst/>
+    <dgm:txFillClrLst/>
+    <dgm:txEffectClrLst/>
+  </dgm:styleLbl>
+  <dgm:styleLbl name="lnNode1">
+    <dgm:fillClrLst meth="repeat">
+      <a:schemeClr val="accent1"/>
+    </dgm:fillClrLst>
+    <dgm:linClrLst meth="repeat">
+      <a:schemeClr val="lt1"/>
+    </dgm:linClrLst>
+    <dgm:effectClrLst/>
+    <dgm:txLinClrLst/>
+    <dgm:txFillClrLst/>
+    <dgm:txEffectClrLst/>
+  </dgm:styleLbl>
+  <dgm:styleLbl name="vennNode1">
+    <dgm:fillClrLst meth="repeat">
+      <a:schemeClr val="accent1">
+        <a:alpha val="50000"/>
+      </a:schemeClr>
+    </dgm:fillClrLst>
+    <dgm:linClrLst meth="repeat">
+      <a:schemeClr val="lt1"/>
+    </dgm:linClrLst>
+    <dgm:effectClrLst/>
+    <dgm:txLinClrLst/>
+    <dgm:txFillClrLst/>
+    <dgm:txEffectClrLst/>
+  </dgm:styleLbl>
+  <dgm:styleLbl name="node2">
+    <dgm:fillClrLst meth="repeat">
+      <a:schemeClr val="accent1"/>
+    </dgm:fillClrLst>
+    <dgm:linClrLst meth="repeat">
+      <a:schemeClr val="lt1"/>
+    </dgm:linClrLst>
+    <dgm:effectClrLst/>
+    <dgm:txLinClrLst/>
+    <dgm:txFillClrLst/>
+    <dgm:txEffectClrLst/>
+  </dgm:styleLbl>
+  <dgm:styleLbl name="node3">
+    <dgm:fillClrLst meth="repeat">
+      <a:schemeClr val="accent1"/>
+    </dgm:fillClrLst>
+    <dgm:linClrLst meth="repeat">
+      <a:schemeClr val="lt1"/>
+    </dgm:linClrLst>
+    <dgm:effectClrLst/>
+    <dgm:txLinClrLst/>
+    <dgm:txFillClrLst/>
+    <dgm:txEffectClrLst/>
+  </dgm:styleLbl>
+  <dgm:styleLbl name="node4">
+    <dgm:fillClrLst meth="repeat">
+      <a:schemeClr val="accent1"/>
+    </dgm:fillClrLst>
+    <dgm:linClrLst meth="repeat">
+      <a:schemeClr val="lt1"/>
+    </dgm:linClrLst>
+    <dgm:effectClrLst/>
+    <dgm:txLinClrLst/>
+    <dgm:txFillClrLst/>
+    <dgm:txEffectClrLst/>
+  </dgm:styleLbl>
+  <dgm:styleLbl name="fgImgPlace1">
+    <dgm:fillClrLst meth="repeat">
+      <a:schemeClr val="accent1">
+        <a:tint val="50000"/>
+      </a:schemeClr>
+    </dgm:fillClrLst>
+    <dgm:linClrLst meth="repeat">
+      <a:schemeClr val="lt1"/>
+    </dgm:linClrLst>
+    <dgm:effectClrLst/>
+    <dgm:txLinClrLst/>
+    <dgm:txFillClrLst meth="repeat">
+      <a:schemeClr val="lt1"/>
+    </dgm:txFillClrLst>
+    <dgm:txEffectClrLst/>
+  </dgm:styleLbl>
+  <dgm:styleLbl name="alignImgPlace1">
+    <dgm:fillClrLst meth="repeat">
+      <a:schemeClr val="accent1">
+        <a:tint val="50000"/>
+      </a:schemeClr>
+    </dgm:fillClrLst>
+    <dgm:linClrLst meth="repeat">
+      <a:schemeClr val="lt1"/>
+    </dgm:linClrLst>
+    <dgm:effectClrLst/>
+    <dgm:txLinClrLst/>
+    <dgm:txFillClrLst meth="repeat">
+      <a:schemeClr val="lt1"/>
+    </dgm:txFillClrLst>
+    <dgm:txEffectClrLst/>
+  </dgm:styleLbl>
+  <dgm:styleLbl name="bgImgPlace1">
+    <dgm:fillClrLst meth="repeat">
+      <a:schemeClr val="accent1">
+        <a:tint val="50000"/>
+      </a:schemeClr>
+    </dgm:fillClrLst>
+    <dgm:linClrLst meth="repeat">
+      <a:schemeClr val="lt1"/>
+    </dgm:linClrLst>
+    <dgm:effectClrLst/>
+    <dgm:txLinClrLst/>
+    <dgm:txFillClrLst meth="repeat">
+      <a:schemeClr val="lt1"/>
+    </dgm:txFillClrLst>
+    <dgm:txEffectClrLst/>
+  </dgm:styleLbl>
+  <dgm:styleLbl name="sibTrans2D1">
+    <dgm:fillClrLst meth="repeat">
+      <a:schemeClr val="accent1">
+        <a:tint val="60000"/>
+      </a:schemeClr>
+    </dgm:fillClrLst>
+    <dgm:linClrLst meth="repeat">
+      <a:schemeClr val="accent1">
+        <a:tint val="60000"/>
+      </a:schemeClr>
+    </dgm:linClrLst>
+    <dgm:effectClrLst/>
+    <dgm:txLinClrLst/>
+    <dgm:txFillClrLst/>
+    <dgm:txEffectClrLst/>
+  </dgm:styleLbl>
+  <dgm:styleLbl name="fgSibTrans2D1">
+    <dgm:fillClrLst meth="repeat">
+      <a:schemeClr val="accent1">
+        <a:tint val="60000"/>
+      </a:schemeClr>
+    </dgm:fillClrLst>
+    <dgm:linClrLst meth="repeat">
+      <a:schemeClr val="accent1">
+        <a:tint val="60000"/>
+      </a:schemeClr>
+    </dgm:linClrLst>
+    <dgm:effectClrLst/>
+    <dgm:txLinClrLst/>
+    <dgm:txFillClrLst/>
+    <dgm:txEffectClrLst/>
+  </dgm:styleLbl>
+  <dgm:styleLbl name="bgSibTrans2D1">
+    <dgm:fillClrLst meth="repeat">
+      <a:schemeClr val="accent1">
+        <a:tint val="60000"/>
+      </a:schemeClr>
+    </dgm:fillClrLst>
+    <dgm:linClrLst meth="repeat">
+      <a:schemeClr val="accent1">
+        <a:tint val="60000"/>
+      </a:schemeClr>
+    </dgm:linClrLst>
+    <dgm:effectClrLst/>
+    <dgm:txLinClrLst/>
+    <dgm:txFillClrLst/>
+    <dgm:txEffectClrLst/>
+  </dgm:styleLbl>
+  <dgm:styleLbl name="sibTrans1D1">
+    <dgm:fillClrLst meth="repeat">
+      <a:schemeClr val="accent1"/>
+    </dgm:fillClrLst>
+    <dgm:linClrLst meth="repeat">
+      <a:schemeClr val="accent1"/>
+    </dgm:linClrLst>
+    <dgm:effectClrLst/>
+    <dgm:txLinClrLst/>
+    <dgm:txFillClrLst meth="repeat">
+      <a:schemeClr val="tx1"/>
+    </dgm:txFillClrLst>
+    <dgm:txEffectClrLst/>
+  </dgm:styleLbl>
+  <dgm:styleLbl name="callout">
+    <dgm:fillClrLst meth="repeat">
+      <a:schemeClr val="accent1"/>
+    </dgm:fillClrLst>
+    <dgm:linClrLst meth="repeat">
+      <a:schemeClr val="accent1">
+        <a:tint val="50000"/>
+      </a:schemeClr>
+    </dgm:linClrLst>
+    <dgm:effectClrLst/>
+    <dgm:txLinClrLst/>
+    <dgm:txFillClrLst meth="repeat">
+      <a:schemeClr val="tx1"/>
+    </dgm:txFillClrLst>
+    <dgm:txEffectClrLst/>
+  </dgm:styleLbl>
+  <dgm:styleLbl name="asst0">
+    <dgm:fillClrLst meth="repeat">
+      <a:schemeClr val="accent1"/>
+    </dgm:fillClrLst>
+    <dgm:linClrLst meth="repeat">
+      <a:schemeClr val="lt1"/>
+    </dgm:linClrLst>
+    <dgm:effectClrLst/>
+    <dgm:txLinClrLst/>
+    <dgm:txFillClrLst/>
+    <dgm:txEffectClrLst/>
+  </dgm:styleLbl>
+  <dgm:styleLbl name="asst1">
+    <dgm:fillClrLst meth="repeat">
+      <a:schemeClr val="accent1"/>
+    </dgm:fillClrLst>
+    <dgm:linClrLst meth="repeat">
+      <a:schemeClr val="lt1"/>
+    </dgm:linClrLst>
+    <dgm:effectClrLst/>
+    <dgm:txLinClrLst/>
+    <dgm:txFillClrLst/>
+    <dgm:txEffectClrLst/>
+  </dgm:styleLbl>
+  <dgm:styleLbl name="asst2">
+    <dgm:fillClrLst meth="repeat">
+      <a:schemeClr val="accent1"/>
+    </dgm:fillClrLst>
+    <dgm:linClrLst meth="repeat">
+      <a:schemeClr val="lt1"/>
+    </dgm:linClrLst>
+    <dgm:effectClrLst/>
+    <dgm:txLinClrLst/>
+    <dgm:txFillClrLst/>
+    <dgm:txEffectClrLst/>
+  </dgm:styleLbl>
+  <dgm:styleLbl name="asst3">
+    <dgm:fillClrLst meth="repeat">
+      <a:schemeClr val="accent1"/>
+    </dgm:fillClrLst>
+    <dgm:linClrLst meth="repeat">
+      <a:schemeClr val="lt1"/>
+    </dgm:linClrLst>
+    <dgm:effectClrLst/>
+    <dgm:txLinClrLst/>
+    <dgm:txFillClrLst/>
+    <dgm:txEffectClrLst/>
+  </dgm:styleLbl>
+  <dgm:styleLbl name="asst4">
+    <dgm:fillClrLst meth="repeat">
+      <a:schemeClr val="accent1"/>
+    </dgm:fillClrLst>
+    <dgm:linClrLst meth="repeat">
+      <a:schemeClr val="lt1"/>
+    </dgm:linClrLst>
+    <dgm:effectClrLst/>
+    <dgm:txLinClrLst/>
+    <dgm:txFillClrLst/>
+    <dgm:txEffectClrLst/>
+  </dgm:styleLbl>
+  <dgm:styleLbl name="parChTrans2D1">
+    <dgm:fillClrLst meth="repeat">
+      <a:schemeClr val="accent1">
+        <a:tint val="60000"/>
+      </a:schemeClr>
+    </dgm:fillClrLst>
+    <dgm:linClrLst meth="repeat">
+      <a:schemeClr val="accent1">
+        <a:tint val="60000"/>
+      </a:schemeClr>
+    </dgm:linClrLst>
+    <dgm:effectClrLst/>
+    <dgm:txLinClrLst/>
+    <dgm:txFillClrLst meth="repeat">
+      <a:schemeClr val="lt1"/>
+    </dgm:txFillClrLst>
+    <dgm:txEffectClrLst/>
+  </dgm:styleLbl>
+  <dgm:styleLbl name="parChTrans2D2">
+    <dgm:fillClrLst meth="repeat">
+      <a:schemeClr val="accent1"/>
+    </dgm:fillClrLst>
+    <dgm:linClrLst meth="repeat">
+      <a:schemeClr val="accent1"/>
+    </dgm:linClrLst>
+    <dgm:effectClrLst/>
+    <dgm:txLinClrLst/>
+    <dgm:txFillClrLst meth="repeat">
+      <a:schemeClr val="lt1"/>
+    </dgm:txFillClrLst>
+    <dgm:txEffectClrLst/>
+  </dgm:styleLbl>
+  <dgm:styleLbl name="parChTrans2D3">
+    <dgm:fillClrLst meth="repeat">
+      <a:schemeClr val="accent1"/>
+    </dgm:fillClrLst>
+    <dgm:linClrLst meth="repeat">
+      <a:schemeClr val="accent1"/>
+    </dgm:linClrLst>
+    <dgm:effectClrLst/>
+    <dgm:txLinClrLst/>
+    <dgm:txFillClrLst meth="repeat">
+      <a:schemeClr val="lt1"/>
+    </dgm:txFillClrLst>
+    <dgm:txEffectClrLst/>
+  </dgm:styleLbl>
+  <dgm:styleLbl name="parChTrans2D4">
+    <dgm:fillClrLst meth="repeat">
+      <a:schemeClr val="accent1"/>
+    </dgm:fillClrLst>
+    <dgm:linClrLst meth="repeat">
+      <a:schemeClr val="accent1"/>
+    </dgm:linClrLst>
+    <dgm:effectClrLst/>
+    <dgm:txLinClrLst/>
+    <dgm:txFillClrLst meth="repeat">
+      <a:schemeClr val="lt1"/>
+    </dgm:txFillClrLst>
+    <dgm:txEffectClrLst/>
+  </dgm:styleLbl>
+  <dgm:styleLbl name="parChTrans1D1">
+    <dgm:fillClrLst meth="repeat">
+      <a:schemeClr val="accent1"/>
+    </dgm:fillClrLst>
+    <dgm:linClrLst meth="repeat">
+      <a:schemeClr val="accent1">
+        <a:shade val="60000"/>
+      </a:schemeClr>
+    </dgm:linClrLst>
+    <dgm:effectClrLst/>
+    <dgm:txLinClrLst/>
+    <dgm:txFillClrLst meth="repeat">
+      <a:schemeClr val="tx1"/>
+    </dgm:txFillClrLst>
+    <dgm:txEffectClrLst/>
+  </dgm:styleLbl>
+  <dgm:styleLbl name="parChTrans1D2">
+    <dgm:fillClrLst meth="repeat">
+      <a:schemeClr val="accent1"/>
+    </dgm:fillClrLst>
+    <dgm:linClrLst meth="repeat">
+      <a:schemeClr val="accent1">
+        <a:shade val="60000"/>
+      </a:schemeClr>
+    </dgm:linClrLst>
+    <dgm:effectClrLst/>
+    <dgm:txLinClrLst/>
+    <dgm:txFillClrLst meth="repeat">
+      <a:schemeClr val="tx1"/>
+    </dgm:txFillClrLst>
+    <dgm:txEffectClrLst/>
+  </dgm:styleLbl>
+  <dgm:styleLbl name="parChTrans1D3">
+    <dgm:fillClrLst meth="repeat">
+      <a:schemeClr val="accent1"/>
+    </dgm:fillClrLst>
+    <dgm:linClrLst meth="repeat">
+      <a:schemeClr val="accent1">
+        <a:shade val="80000"/>
+      </a:schemeClr>
+    </dgm:linClrLst>
+    <dgm:effectClrLst/>
+    <dgm:txLinClrLst/>
+    <dgm:txFillClrLst meth="repeat">
+      <a:schemeClr val="tx1"/>
+    </dgm:txFillClrLst>
+    <dgm:txEffectClrLst/>
+  </dgm:styleLbl>
+  <dgm:styleLbl name="parChTrans1D4">
+    <dgm:fillClrLst meth="repeat">
+      <a:schemeClr val="accent1"/>
+    </dgm:fillClrLst>
+    <dgm:linClrLst meth="repeat">
+      <a:schemeClr val="accent1">
+        <a:shade val="80000"/>
+      </a:schemeClr>
+    </dgm:linClrLst>
+    <dgm:effectClrLst/>
+    <dgm:txLinClrLst/>
+    <dgm:txFillClrLst meth="repeat">
+      <a:schemeClr val="tx1"/>
+    </dgm:txFillClrLst>
+    <dgm:txEffectClrLst/>
+  </dgm:styleLbl>
+  <dgm:styleLbl name="fgAcc1">
+    <dgm:fillClrLst meth="repeat">
+      <a:schemeClr val="lt1">
+        <a:alpha val="90000"/>
+      </a:schemeClr>
+    </dgm:fillClrLst>
+    <dgm:linClrLst meth="repeat">
+      <a:schemeClr val="accent1"/>
+    </dgm:linClrLst>
+    <dgm:effectClrLst/>
+    <dgm:txLinClrLst/>
+    <dgm:txFillClrLst meth="repeat">
+      <a:schemeClr val="dk1"/>
+    </dgm:txFillClrLst>
+    <dgm:txEffectClrLst/>
+  </dgm:styleLbl>
+  <dgm:styleLbl name="conFgAcc1">
+    <dgm:fillClrLst meth="repeat">
+      <a:schemeClr val="lt1">
+        <a:alpha val="90000"/>
+      </a:schemeClr>
+    </dgm:fillClrLst>
+    <dgm:linClrLst meth="repeat">
+      <a:schemeClr val="accent1"/>
+    </dgm:linClrLst>
+    <dgm:effectClrLst/>
+    <dgm:txLinClrLst/>
+    <dgm:txFillClrLst meth="repeat">
+      <a:schemeClr val="dk1"/>
+    </dgm:txFillClrLst>
+    <dgm:txEffectClrLst/>
+  </dgm:styleLbl>
+  <dgm:styleLbl name="alignAcc1">
+    <dgm:fillClrLst meth="repeat">
+      <a:schemeClr val="lt1">
+        <a:alpha val="90000"/>
+      </a:schemeClr>
+    </dgm:fillClrLst>
+    <dgm:linClrLst meth="repeat">
+      <a:schemeClr val="accent1"/>
+    </dgm:linClrLst>
+    <dgm:effectClrLst/>
+    <dgm:txLinClrLst/>
+    <dgm:txFillClrLst meth="repeat">
+      <a:schemeClr val="dk1"/>
+    </dgm:txFillClrLst>
+    <dgm:txEffectClrLst/>
+  </dgm:styleLbl>
+  <dgm:styleLbl name="trAlignAcc1">
+    <dgm:fillClrLst meth="repeat">
+      <a:schemeClr val="lt1">
+        <a:alpha val="40000"/>
+      </a:schemeClr>
+    </dgm:fillClrLst>
+    <dgm:linClrLst meth="repeat">
+      <a:schemeClr val="accent1"/>
+    </dgm:linClrLst>
+    <dgm:effectClrLst/>
+    <dgm:txLinClrLst/>
+    <dgm:txFillClrLst meth="repeat">
+      <a:schemeClr val="dk1"/>
+    </dgm:txFillClrLst>
+    <dgm:txEffectClrLst/>
+  </dgm:styleLbl>
+  <dgm:styleLbl name="bgAcc1">
+    <dgm:fillClrLst meth="repeat">
+      <a:schemeClr val="lt1">
+        <a:alpha val="90000"/>
+      </a:schemeClr>
+    </dgm:fillClrLst>
+    <dgm:linClrLst meth="repeat">
+      <a:schemeClr val="accent1"/>
+    </dgm:linClrLst>
+    <dgm:effectClrLst/>
+    <dgm:txLinClrLst/>
+    <dgm:txFillClrLst meth="repeat">
+      <a:schemeClr val="dk1"/>
+    </dgm:txFillClrLst>
+    <dgm:txEffectClrLst/>
+  </dgm:styleLbl>
+  <dgm:styleLbl name="solidFgAcc1">
+    <dgm:fillClrLst meth="repeat">
+      <a:schemeClr val="lt1"/>
+    </dgm:fillClrLst>
+    <dgm:linClrLst meth="repeat">
+      <a:schemeClr val="accent1"/>
+    </dgm:linClrLst>
+    <dgm:effectClrLst/>
+    <dgm:txLinClrLst/>
+    <dgm:txFillClrLst meth="repeat">
+      <a:schemeClr val="dk1"/>
+    </dgm:txFillClrLst>
+    <dgm:txEffectClrLst/>
+  </dgm:styleLbl>
+  <dgm:styleLbl name="solidAlignAcc1">
+    <dgm:fillClrLst meth="repeat">
+      <a:schemeClr val="lt1"/>
+    </dgm:fillClrLst>
+    <dgm:linClrLst meth="repeat">
+      <a:schemeClr val="accent1"/>
+    </dgm:linClrLst>
+    <dgm:effectClrLst/>
+    <dgm:txLinClrLst/>
+    <dgm:txFillClrLst meth="repeat">
+      <a:schemeClr val="dk1"/>
+    </dgm:txFillClrLst>
+    <dgm:txEffectClrLst/>
+  </dgm:styleLbl>
+  <dgm:styleLbl name="solidBgAcc1">
+    <dgm:fillClrLst meth="repeat">
+      <a:schemeClr val="lt1"/>
+    </dgm:fillClrLst>
+    <dgm:linClrLst meth="repeat">
+      <a:schemeClr val="accent1"/>
+    </dgm:linClrLst>
+    <dgm:effectClrLst/>
+    <dgm:txLinClrLst/>
+    <dgm:txFillClrLst meth="repeat">
+      <a:schemeClr val="dk1"/>
+    </dgm:txFillClrLst>
+    <dgm:txEffectClrLst/>
+  </dgm:styleLbl>
+  <dgm:styleLbl name="fgAccFollowNode1">
+    <dgm:fillClrLst meth="repeat">
+      <a:schemeClr val="accent1">
+        <a:alpha val="90000"/>
+        <a:tint val="40000"/>
+      </a:schemeClr>
+    </dgm:fillClrLst>
+    <dgm:linClrLst meth="repeat">
+      <a:schemeClr val="accent1">
+        <a:alpha val="90000"/>
+        <a:tint val="40000"/>
+      </a:schemeClr>
+    </dgm:linClrLst>
+    <dgm:effectClrLst/>
+    <dgm:txLinClrLst/>
+    <dgm:txFillClrLst meth="repeat">
+      <a:schemeClr val="dk1"/>
+    </dgm:txFillClrLst>
+    <dgm:txEffectClrLst/>
+  </dgm:styleLbl>
+  <dgm:styleLbl name="alignAccFollowNode1">
+    <dgm:fillClrLst meth="repeat">
+      <a:schemeClr val="accent1">
+        <a:alpha val="90000"/>
+        <a:tint val="40000"/>
+      </a:schemeClr>
+    </dgm:fillClrLst>
+    <dgm:linClrLst meth="repeat">
+      <a:schemeClr val="accent1">
+        <a:alpha val="90000"/>
+        <a:tint val="40000"/>
+      </a:schemeClr>
+    </dgm:linClrLst>
+    <dgm:effectClrLst/>
+    <dgm:txLinClrLst/>
+    <dgm:txFillClrLst meth="repeat">
+      <a:schemeClr val="dk1"/>
+    </dgm:txFillClrLst>
+    <dgm:txEffectClrLst/>
+  </dgm:styleLbl>
+  <dgm:styleLbl name="bgAccFollowNode1">
+    <dgm:fillClrLst meth="repeat">
+      <a:schemeClr val="accent1">
+        <a:alpha val="90000"/>
+        <a:tint val="40000"/>
+      </a:schemeClr>
+    </dgm:fillClrLst>
+    <dgm:linClrLst meth="repeat">
+      <a:schemeClr val="accent1">
+        <a:alpha val="90000"/>
+        <a:tint val="40000"/>
+      </a:schemeClr>
+    </dgm:linClrLst>
+    <dgm:effectClrLst/>
+    <dgm:txLinClrLst/>
+    <dgm:txFillClrLst meth="repeat">
+      <a:schemeClr val="dk1"/>
+    </dgm:txFillClrLst>
+    <dgm:txEffectClrLst/>
+  </dgm:styleLbl>
+  <dgm:styleLbl name="fgAcc0">
+    <dgm:fillClrLst meth="repeat">
+      <a:schemeClr val="lt1">
+        <a:alpha val="90000"/>
+      </a:schemeClr>
+    </dgm:fillClrLst>
+    <dgm:linClrLst meth="repeat">
+      <a:schemeClr val="accent1"/>
+    </dgm:linClrLst>
+    <dgm:effectClrLst/>
+    <dgm:txLinClrLst/>
+    <dgm:txFillClrLst meth="repeat">
+      <a:schemeClr val="dk1"/>
+    </dgm:txFillClrLst>
+    <dgm:txEffectClrLst/>
+  </dgm:styleLbl>
+  <dgm:styleLbl name="fgAcc2">
+    <dgm:fillClrLst meth="repeat">
+      <a:schemeClr val="lt1">
+        <a:alpha val="90000"/>
+      </a:schemeClr>
+    </dgm:fillClrLst>
+    <dgm:linClrLst meth="repeat">
+      <a:schemeClr val="accent1"/>
+    </dgm:linClrLst>
+    <dgm:effectClrLst/>
+    <dgm:txLinClrLst/>
+    <dgm:txFillClrLst meth="repeat">
+      <a:schemeClr val="dk1"/>
+    </dgm:txFillClrLst>
+    <dgm:txEffectClrLst/>
+  </dgm:styleLbl>
+  <dgm:styleLbl name="fgAcc3">
+    <dgm:fillClrLst meth="repeat">
+      <a:schemeClr val="lt1">
+        <a:alpha val="90000"/>
+      </a:schemeClr>
+    </dgm:fillClrLst>
+    <dgm:linClrLst meth="repeat">
+      <a:schemeClr val="accent1"/>
+    </dgm:linClrLst>
+    <dgm:effectClrLst/>
+    <dgm:txLinClrLst/>
+    <dgm:txFillClrLst meth="repeat">
+      <a:schemeClr val="dk1"/>
+    </dgm:txFillClrLst>
+    <dgm:txEffectClrLst/>
+  </dgm:styleLbl>
+  <dgm:styleLbl name="fgAcc4">
+    <dgm:fillClrLst meth="repeat">
+      <a:schemeClr val="lt1">
+        <a:alpha val="90000"/>
+      </a:schemeClr>
+    </dgm:fillClrLst>
+    <dgm:linClrLst meth="repeat">
+      <a:schemeClr val="accent1"/>
+    </dgm:linClrLst>
+    <dgm:effectClrLst/>
+    <dgm:txLinClrLst/>
+    <dgm:txFillClrLst meth="repeat">
+      <a:schemeClr val="dk1"/>
+    </dgm:txFillClrLst>
+    <dgm:txEffectClrLst/>
+  </dgm:styleLbl>
+  <dgm:styleLbl name="bgShp">
+    <dgm:fillClrLst meth="repeat">
+      <a:schemeClr val="accent1">
+        <a:tint val="40000"/>
+      </a:schemeClr>
+    </dgm:fillClrLst>
+    <dgm:linClrLst meth="repeat">
+      <a:schemeClr val="accent1"/>
+    </dgm:linClrLst>
+    <dgm:effectClrLst/>
+    <dgm:txLinClrLst/>
+    <dgm:txFillClrLst meth="repeat">
+      <a:schemeClr val="dk1"/>
+    </dgm:txFillClrLst>
+    <dgm:txEffectClrLst/>
+  </dgm:styleLbl>
+  <dgm:styleLbl name="dkBgShp">
+    <dgm:fillClrLst meth="repeat">
+      <a:schemeClr val="accent1">
+        <a:shade val="80000"/>
+      </a:schemeClr>
+    </dgm:fillClrLst>
+    <dgm:linClrLst meth="repeat">
+      <a:schemeClr val="accent1"/>
+    </dgm:linClrLst>
+    <dgm:effectClrLst/>
+    <dgm:txLinClrLst/>
+    <dgm:txFillClrLst meth="repeat">
+      <a:schemeClr val="lt1"/>
+    </dgm:txFillClrLst>
+    <dgm:txEffectClrLst/>
+  </dgm:styleLbl>
+  <dgm:styleLbl name="trBgShp">
+    <dgm:fillClrLst meth="repeat">
+      <a:schemeClr val="accent1">
+        <a:tint val="50000"/>
+        <a:alpha val="40000"/>
+      </a:schemeClr>
+    </dgm:fillClrLst>
+    <dgm:linClrLst meth="repeat">
+      <a:schemeClr val="accent1"/>
+    </dgm:linClrLst>
+    <dgm:effectClrLst/>
+    <dgm:txLinClrLst/>
+    <dgm:txFillClrLst meth="repeat">
+      <a:schemeClr val="lt1"/>
+    </dgm:txFillClrLst>
+    <dgm:txEffectClrLst/>
+  </dgm:styleLbl>
+  <dgm:styleLbl name="fgShp">
+    <dgm:fillClrLst meth="repeat">
+      <a:schemeClr val="accent1">
+        <a:tint val="60000"/>
+      </a:schemeClr>
+    </dgm:fillClrLst>
+    <dgm:linClrLst meth="repeat">
+      <a:schemeClr val="lt1"/>
+    </dgm:linClrLst>
+    <dgm:effectClrLst/>
+    <dgm:txLinClrLst/>
+    <dgm:txFillClrLst meth="repeat">
+      <a:schemeClr val="dk1"/>
+    </dgm:txFillClrLst>
+    <dgm:txEffectClrLst/>
+  </dgm:styleLbl>
+  <dgm:styleLbl name="revTx">
+    <dgm:fillClrLst meth="repeat">
+      <a:schemeClr val="lt1">
+        <a:alpha val="0"/>
+      </a:schemeClr>
+    </dgm:fillClrLst>
+    <dgm:linClrLst meth="repeat">
+      <a:schemeClr val="dk1">
+        <a:alpha val="0"/>
+      </a:schemeClr>
+    </dgm:linClrLst>
+    <dgm:effectClrLst/>
+    <dgm:txLinClrLst/>
+    <dgm:txFillClrLst meth="repeat">
+      <a:schemeClr val="tx1"/>
+    </dgm:txFillClrLst>
+    <dgm:txEffectClrLst/>
+  </dgm:styleLbl>
+</dgm:colorsDef>
+</file>
+
+<file path=ppt/diagrams/data1.xml><?xml version="1.0" encoding="utf-8"?>
+<dgm:dataModel xmlns:dgm="http://schemas.openxmlformats.org/drawingml/2006/diagram" xmlns:a="http://schemas.openxmlformats.org/drawingml/2006/main">
+  <dgm:ptLst>
+    <dgm:pt modelId="{CDCA56D4-C300-4833-AFAB-D0215ADD99CA}" type="doc">
+      <dgm:prSet loTypeId="urn:microsoft.com/office/officeart/2016/7/layout/ChevronBlockProcess" loCatId="process" qsTypeId="urn:microsoft.com/office/officeart/2005/8/quickstyle/simple4" qsCatId="simple" csTypeId="urn:microsoft.com/office/officeart/2005/8/colors/accent1_2" csCatId="accent1" phldr="1"/>
+      <dgm:spPr/>
+      <dgm:t>
+        <a:bodyPr/>
+        <a:lstStyle/>
+        <a:p>
+          <a:endParaRPr lang="de-AT"/>
+        </a:p>
+      </dgm:t>
+    </dgm:pt>
+    <dgm:pt modelId="{1F60A019-B797-4391-976B-E0843452B598}">
+      <dgm:prSet phldrT="[Text]"/>
+      <dgm:spPr/>
+      <dgm:t>
+        <a:bodyPr/>
+        <a:lstStyle/>
+        <a:p>
+          <a:r>
+            <a:rPr lang="en-AT" dirty="0"/>
+            <a:t>Input</a:t>
+          </a:r>
+          <a:endParaRPr lang="de-AT" dirty="0"/>
+        </a:p>
+      </dgm:t>
+    </dgm:pt>
+    <dgm:pt modelId="{5C4F573B-406E-4D33-9E63-AA971ED3A878}" type="parTrans" cxnId="{9F0BEF87-F90A-49B0-BA41-88D5088D40D6}">
+      <dgm:prSet/>
+      <dgm:spPr/>
+      <dgm:t>
+        <a:bodyPr/>
+        <a:lstStyle/>
+        <a:p>
+          <a:endParaRPr lang="de-AT"/>
+        </a:p>
+      </dgm:t>
+    </dgm:pt>
+    <dgm:pt modelId="{8494E388-FF08-4522-B1AF-84C2FAF2C49F}" type="sibTrans" cxnId="{9F0BEF87-F90A-49B0-BA41-88D5088D40D6}">
+      <dgm:prSet/>
+      <dgm:spPr/>
+      <dgm:t>
+        <a:bodyPr/>
+        <a:lstStyle/>
+        <a:p>
+          <a:endParaRPr lang="de-AT"/>
+        </a:p>
+      </dgm:t>
+    </dgm:pt>
+    <dgm:pt modelId="{0CD2BD8A-A26E-4D1C-B5E1-234A36081911}">
+      <dgm:prSet/>
+      <dgm:spPr/>
+      <dgm:t>
+        <a:bodyPr/>
+        <a:lstStyle/>
+        <a:p>
+          <a:r>
+            <a:rPr lang="en-AT" dirty="0"/>
+            <a:t>Satellite Images</a:t>
+          </a:r>
+        </a:p>
+      </dgm:t>
+    </dgm:pt>
+    <dgm:pt modelId="{F4A2E9B3-D55F-4353-863A-FBE440DC9DC8}" type="parTrans" cxnId="{45EFE236-BF2F-4E6B-A45F-70F44449E4BF}">
+      <dgm:prSet/>
+      <dgm:spPr/>
+      <dgm:t>
+        <a:bodyPr/>
+        <a:lstStyle/>
+        <a:p>
+          <a:endParaRPr lang="de-AT"/>
+        </a:p>
+      </dgm:t>
+    </dgm:pt>
+    <dgm:pt modelId="{50C9DE14-B4AA-4DDC-9ED9-BE88316711E7}" type="sibTrans" cxnId="{45EFE236-BF2F-4E6B-A45F-70F44449E4BF}">
+      <dgm:prSet/>
+      <dgm:spPr/>
+      <dgm:t>
+        <a:bodyPr/>
+        <a:lstStyle/>
+        <a:p>
+          <a:endParaRPr lang="de-AT"/>
+        </a:p>
+      </dgm:t>
+    </dgm:pt>
+    <dgm:pt modelId="{69A47DB4-09FB-43A1-B3C3-1A9106F90793}">
+      <dgm:prSet/>
+      <dgm:spPr/>
+      <dgm:t>
+        <a:bodyPr/>
+        <a:lstStyle/>
+        <a:p>
+          <a:r>
+            <a:rPr lang="en-AT" dirty="0"/>
+            <a:t>Open Street Map Land Use Layer</a:t>
+          </a:r>
+        </a:p>
+      </dgm:t>
+    </dgm:pt>
+    <dgm:pt modelId="{254D9416-1C09-48ED-AAD3-6B7AFE889903}" type="parTrans" cxnId="{1E4132FD-ABDB-461A-BB93-EAF142660AEC}">
+      <dgm:prSet/>
+      <dgm:spPr/>
+      <dgm:t>
+        <a:bodyPr/>
+        <a:lstStyle/>
+        <a:p>
+          <a:endParaRPr lang="de-AT"/>
+        </a:p>
+      </dgm:t>
+    </dgm:pt>
+    <dgm:pt modelId="{0234CE47-38BE-4B87-9A04-E11ACF4CB64A}" type="sibTrans" cxnId="{1E4132FD-ABDB-461A-BB93-EAF142660AEC}">
+      <dgm:prSet/>
+      <dgm:spPr/>
+      <dgm:t>
+        <a:bodyPr/>
+        <a:lstStyle/>
+        <a:p>
+          <a:endParaRPr lang="de-AT"/>
+        </a:p>
+      </dgm:t>
+    </dgm:pt>
+    <dgm:pt modelId="{6840CA70-1C38-42F8-BA0D-EEA1D81F6D71}">
+      <dgm:prSet/>
+      <dgm:spPr/>
+      <dgm:t>
+        <a:bodyPr/>
+        <a:lstStyle/>
+        <a:p>
+          <a:r>
+            <a:rPr lang="de-AT" dirty="0"/>
+            <a:t>T</a:t>
+          </a:r>
+          <a:r>
+            <a:rPr lang="en-AT" dirty="0" err="1"/>
+            <a:t>ree</a:t>
+          </a:r>
+          <a:r>
+            <a:rPr lang="en-AT" dirty="0"/>
+            <a:t> register (“</a:t>
+          </a:r>
+          <a:r>
+            <a:rPr lang="en-AT" dirty="0" err="1"/>
+            <a:t>Baumkataster</a:t>
+          </a:r>
+          <a:r>
+            <a:rPr lang="en-AT" dirty="0"/>
+            <a:t>”)</a:t>
+          </a:r>
+        </a:p>
+      </dgm:t>
+    </dgm:pt>
+    <dgm:pt modelId="{D77E7138-3896-4E8C-9F2B-2FC8F0027329}" type="parTrans" cxnId="{41B9A2D7-9795-45D9-AFDE-8C6D19D454E6}">
+      <dgm:prSet/>
+      <dgm:spPr/>
+      <dgm:t>
+        <a:bodyPr/>
+        <a:lstStyle/>
+        <a:p>
+          <a:endParaRPr lang="de-AT"/>
+        </a:p>
+      </dgm:t>
+    </dgm:pt>
+    <dgm:pt modelId="{2E66EC53-A04F-4239-9D65-6787483CFCC2}" type="sibTrans" cxnId="{41B9A2D7-9795-45D9-AFDE-8C6D19D454E6}">
+      <dgm:prSet/>
+      <dgm:spPr/>
+      <dgm:t>
+        <a:bodyPr/>
+        <a:lstStyle/>
+        <a:p>
+          <a:endParaRPr lang="de-AT"/>
+        </a:p>
+      </dgm:t>
+    </dgm:pt>
+    <dgm:pt modelId="{7BDA1F35-C63A-477E-8A2B-DA8A3A59F611}">
+      <dgm:prSet/>
+      <dgm:spPr/>
+      <dgm:t>
+        <a:bodyPr/>
+        <a:lstStyle/>
+        <a:p>
+          <a:r>
+            <a:rPr lang="en-AT" dirty="0"/>
+            <a:t>Consider </a:t>
+          </a:r>
+        </a:p>
+      </dgm:t>
+    </dgm:pt>
+    <dgm:pt modelId="{61FA9310-079D-46B9-8307-8C7F6DAC9283}" type="parTrans" cxnId="{91A4257A-9985-4572-97BB-0D9C8A217B12}">
+      <dgm:prSet/>
+      <dgm:spPr/>
+      <dgm:t>
+        <a:bodyPr/>
+        <a:lstStyle/>
+        <a:p>
+          <a:endParaRPr lang="de-AT"/>
+        </a:p>
+      </dgm:t>
+    </dgm:pt>
+    <dgm:pt modelId="{5DB42164-53F6-4E5B-BD78-8E6EA670F982}" type="sibTrans" cxnId="{91A4257A-9985-4572-97BB-0D9C8A217B12}">
+      <dgm:prSet/>
+      <dgm:spPr/>
+      <dgm:t>
+        <a:bodyPr/>
+        <a:lstStyle/>
+        <a:p>
+          <a:endParaRPr lang="de-AT"/>
+        </a:p>
+      </dgm:t>
+    </dgm:pt>
+    <dgm:pt modelId="{62098A33-0493-440F-94FB-1183BAFF7F9A}">
+      <dgm:prSet/>
+      <dgm:spPr/>
+      <dgm:t>
+        <a:bodyPr/>
+        <a:lstStyle/>
+        <a:p>
+          <a:r>
+            <a:rPr lang="en-AT" dirty="0"/>
+            <a:t>Seasons (multiple)</a:t>
+          </a:r>
+        </a:p>
+      </dgm:t>
+    </dgm:pt>
+    <dgm:pt modelId="{D5DC8C38-C0F8-4820-9150-D35DA57B789D}" type="parTrans" cxnId="{30EC9882-2DDD-45D7-87F1-E3DE1E250ABF}">
+      <dgm:prSet/>
+      <dgm:spPr/>
+      <dgm:t>
+        <a:bodyPr/>
+        <a:lstStyle/>
+        <a:p>
+          <a:endParaRPr lang="de-AT"/>
+        </a:p>
+      </dgm:t>
+    </dgm:pt>
+    <dgm:pt modelId="{9F6F0AA7-3E12-4474-BEB0-364EDF2E1695}" type="sibTrans" cxnId="{30EC9882-2DDD-45D7-87F1-E3DE1E250ABF}">
+      <dgm:prSet/>
+      <dgm:spPr/>
+      <dgm:t>
+        <a:bodyPr/>
+        <a:lstStyle/>
+        <a:p>
+          <a:endParaRPr lang="de-AT"/>
+        </a:p>
+      </dgm:t>
+    </dgm:pt>
+    <dgm:pt modelId="{CF141A7F-B2F6-4C92-8B45-DAD736945877}">
+      <dgm:prSet/>
+      <dgm:spPr/>
+      <dgm:t>
+        <a:bodyPr/>
+        <a:lstStyle/>
+        <a:p>
+          <a:r>
+            <a:rPr lang="en-AT" dirty="0"/>
+            <a:t>Climate Zone (restricted -&gt; middle </a:t>
+          </a:r>
+          <a:r>
+            <a:rPr lang="en-AT" dirty="0" err="1"/>
+            <a:t>european</a:t>
+          </a:r>
+          <a:r>
+            <a:rPr lang="en-AT" dirty="0"/>
+            <a:t>)</a:t>
+          </a:r>
+        </a:p>
+      </dgm:t>
+    </dgm:pt>
+    <dgm:pt modelId="{857B0034-8E7A-47AE-9174-66B73F88A073}" type="parTrans" cxnId="{20CD648B-B160-4E7F-A120-AEE39EAE0C74}">
+      <dgm:prSet/>
+      <dgm:spPr/>
+      <dgm:t>
+        <a:bodyPr/>
+        <a:lstStyle/>
+        <a:p>
+          <a:endParaRPr lang="de-AT"/>
+        </a:p>
+      </dgm:t>
+    </dgm:pt>
+    <dgm:pt modelId="{013E8559-01ED-415E-B66F-853FEAEF4972}" type="sibTrans" cxnId="{20CD648B-B160-4E7F-A120-AEE39EAE0C74}">
+      <dgm:prSet/>
+      <dgm:spPr/>
+      <dgm:t>
+        <a:bodyPr/>
+        <a:lstStyle/>
+        <a:p>
+          <a:endParaRPr lang="de-AT"/>
+        </a:p>
+      </dgm:t>
+    </dgm:pt>
+    <dgm:pt modelId="{C47D7EE8-5E64-4371-B96B-2EC84031CBC0}">
+      <dgm:prSet/>
+      <dgm:spPr/>
+      <dgm:t>
+        <a:bodyPr/>
+        <a:lstStyle/>
+        <a:p>
+          <a:r>
+            <a:rPr lang="en-AT"/>
+            <a:t>Output </a:t>
+          </a:r>
+          <a:endParaRPr lang="en-AT" dirty="0"/>
+        </a:p>
+      </dgm:t>
+    </dgm:pt>
+    <dgm:pt modelId="{95BD2147-3D46-40CE-91DF-2BB5820836BA}" type="parTrans" cxnId="{33149EB3-1ED5-4A15-9891-8D88C96A3A1B}">
+      <dgm:prSet/>
+      <dgm:spPr/>
+      <dgm:t>
+        <a:bodyPr/>
+        <a:lstStyle/>
+        <a:p>
+          <a:endParaRPr lang="de-AT"/>
+        </a:p>
+      </dgm:t>
+    </dgm:pt>
+    <dgm:pt modelId="{CB56EC17-7BE8-425D-A0D1-8EFC317B720C}" type="sibTrans" cxnId="{33149EB3-1ED5-4A15-9891-8D88C96A3A1B}">
+      <dgm:prSet/>
+      <dgm:spPr/>
+      <dgm:t>
+        <a:bodyPr/>
+        <a:lstStyle/>
+        <a:p>
+          <a:endParaRPr lang="de-AT"/>
+        </a:p>
+      </dgm:t>
+    </dgm:pt>
+    <dgm:pt modelId="{DD11C167-7802-48D4-83A9-18C0EF27FC2B}">
+      <dgm:prSet/>
+      <dgm:spPr/>
+      <dgm:t>
+        <a:bodyPr/>
+        <a:lstStyle/>
+        <a:p>
+          <a:r>
+            <a:rPr lang="en-AT"/>
+            <a:t>Predicted Tree Locations</a:t>
+          </a:r>
+          <a:endParaRPr lang="de-AT" dirty="0"/>
+        </a:p>
+      </dgm:t>
+    </dgm:pt>
+    <dgm:pt modelId="{324BF15C-40A1-4EB5-BBE2-C9182A295D49}" type="parTrans" cxnId="{5422B8D1-9BCD-44EF-AD1C-78A59D0D8D4F}">
+      <dgm:prSet/>
+      <dgm:spPr/>
+      <dgm:t>
+        <a:bodyPr/>
+        <a:lstStyle/>
+        <a:p>
+          <a:endParaRPr lang="de-AT"/>
+        </a:p>
+      </dgm:t>
+    </dgm:pt>
+    <dgm:pt modelId="{0F90546B-67AD-4AF8-9C2A-E862D6BAA902}" type="sibTrans" cxnId="{5422B8D1-9BCD-44EF-AD1C-78A59D0D8D4F}">
+      <dgm:prSet/>
+      <dgm:spPr/>
+      <dgm:t>
+        <a:bodyPr/>
+        <a:lstStyle/>
+        <a:p>
+          <a:endParaRPr lang="de-AT"/>
+        </a:p>
+      </dgm:t>
+    </dgm:pt>
+    <dgm:pt modelId="{0D4DE367-7729-49F0-8949-86B9A7447876}">
+      <dgm:prSet/>
+      <dgm:spPr/>
+      <dgm:t>
+        <a:bodyPr/>
+        <a:lstStyle/>
+        <a:p>
+          <a:endParaRPr lang="en-AT" dirty="0"/>
+        </a:p>
+      </dgm:t>
+    </dgm:pt>
+    <dgm:pt modelId="{E281FCE4-2F63-43C7-ADE8-C589BDD0AE1A}" type="parTrans" cxnId="{58DCA3E6-F59F-4FFA-B0BF-8124D2E76D09}">
+      <dgm:prSet/>
+      <dgm:spPr/>
+      <dgm:t>
+        <a:bodyPr/>
+        <a:lstStyle/>
+        <a:p>
+          <a:endParaRPr lang="de-AT"/>
+        </a:p>
+      </dgm:t>
+    </dgm:pt>
+    <dgm:pt modelId="{63BDA96C-6243-4DB7-BB3B-22A2EA4749EE}" type="sibTrans" cxnId="{58DCA3E6-F59F-4FFA-B0BF-8124D2E76D09}">
+      <dgm:prSet/>
+      <dgm:spPr/>
+      <dgm:t>
+        <a:bodyPr/>
+        <a:lstStyle/>
+        <a:p>
+          <a:endParaRPr lang="de-AT"/>
+        </a:p>
+      </dgm:t>
+    </dgm:pt>
+    <dgm:pt modelId="{84E736F8-CDA4-497D-8EFE-4996A62ACECA}">
+      <dgm:prSet/>
+      <dgm:spPr/>
+      <dgm:t>
+        <a:bodyPr/>
+        <a:lstStyle/>
+        <a:p>
+          <a:endParaRPr lang="en-AT" dirty="0"/>
+        </a:p>
+      </dgm:t>
+    </dgm:pt>
+    <dgm:pt modelId="{5BA0EBC1-8022-43B6-A8AE-7FF041F7E44D}" type="parTrans" cxnId="{7884AAA9-8147-4AB8-AA64-4FF8D7A9CD1F}">
+      <dgm:prSet/>
+      <dgm:spPr/>
+      <dgm:t>
+        <a:bodyPr/>
+        <a:lstStyle/>
+        <a:p>
+          <a:endParaRPr lang="de-AT"/>
+        </a:p>
+      </dgm:t>
+    </dgm:pt>
+    <dgm:pt modelId="{E10401E3-8ECD-4638-B4B2-16E53C277134}" type="sibTrans" cxnId="{7884AAA9-8147-4AB8-AA64-4FF8D7A9CD1F}">
+      <dgm:prSet/>
+      <dgm:spPr/>
+      <dgm:t>
+        <a:bodyPr/>
+        <a:lstStyle/>
+        <a:p>
+          <a:endParaRPr lang="de-AT"/>
+        </a:p>
+      </dgm:t>
+    </dgm:pt>
+    <dgm:pt modelId="{AB20D057-EDFF-464C-96B9-447072025B2B}">
+      <dgm:prSet/>
+      <dgm:spPr/>
+      <dgm:t>
+        <a:bodyPr/>
+        <a:lstStyle/>
+        <a:p>
+          <a:endParaRPr lang="en-AT" dirty="0"/>
+        </a:p>
+      </dgm:t>
+    </dgm:pt>
+    <dgm:pt modelId="{EE398D41-ECEB-4438-832C-14D2EDEFEC73}" type="parTrans" cxnId="{5A188A90-4461-4A63-B281-B63AA61F820D}">
+      <dgm:prSet/>
+      <dgm:spPr/>
+      <dgm:t>
+        <a:bodyPr/>
+        <a:lstStyle/>
+        <a:p>
+          <a:endParaRPr lang="de-AT"/>
+        </a:p>
+      </dgm:t>
+    </dgm:pt>
+    <dgm:pt modelId="{44269A9B-A7CD-423A-8F61-772F21F7334D}" type="sibTrans" cxnId="{5A188A90-4461-4A63-B281-B63AA61F820D}">
+      <dgm:prSet/>
+      <dgm:spPr/>
+      <dgm:t>
+        <a:bodyPr/>
+        <a:lstStyle/>
+        <a:p>
+          <a:endParaRPr lang="de-AT"/>
+        </a:p>
+      </dgm:t>
+    </dgm:pt>
+    <dgm:pt modelId="{72636061-D84D-4D0B-91B0-A2326C79A81D}" type="pres">
+      <dgm:prSet presAssocID="{CDCA56D4-C300-4833-AFAB-D0215ADD99CA}" presName="Name0" presStyleCnt="0">
+        <dgm:presLayoutVars>
+          <dgm:dir/>
+          <dgm:animLvl val="lvl"/>
+          <dgm:resizeHandles val="exact"/>
+        </dgm:presLayoutVars>
+      </dgm:prSet>
+      <dgm:spPr/>
+    </dgm:pt>
+    <dgm:pt modelId="{29DAEF74-02BD-43DF-8A24-2146908FF6F8}" type="pres">
+      <dgm:prSet presAssocID="{1F60A019-B797-4391-976B-E0843452B598}" presName="composite" presStyleCnt="0"/>
+      <dgm:spPr/>
+    </dgm:pt>
+    <dgm:pt modelId="{7950B7CA-0670-49C5-BA28-CE31D6D40205}" type="pres">
+      <dgm:prSet presAssocID="{1F60A019-B797-4391-976B-E0843452B598}" presName="parTx" presStyleLbl="alignNode1" presStyleIdx="0" presStyleCnt="3">
+        <dgm:presLayoutVars>
+          <dgm:chMax val="0"/>
+          <dgm:chPref val="0"/>
+        </dgm:presLayoutVars>
+      </dgm:prSet>
+      <dgm:spPr/>
+    </dgm:pt>
+    <dgm:pt modelId="{E36CD81A-A67D-481E-B6D3-DD571AF376A5}" type="pres">
+      <dgm:prSet presAssocID="{1F60A019-B797-4391-976B-E0843452B598}" presName="desTx" presStyleLbl="alignAccFollowNode1" presStyleIdx="0" presStyleCnt="3">
+        <dgm:presLayoutVars/>
+      </dgm:prSet>
+      <dgm:spPr/>
+    </dgm:pt>
+    <dgm:pt modelId="{A732507C-B241-4F08-89FD-F30E967C413B}" type="pres">
+      <dgm:prSet presAssocID="{8494E388-FF08-4522-B1AF-84C2FAF2C49F}" presName="space" presStyleCnt="0"/>
+      <dgm:spPr/>
+    </dgm:pt>
+    <dgm:pt modelId="{2B11FB3A-C891-4E93-AFBC-2DCE69695B8E}" type="pres">
+      <dgm:prSet presAssocID="{7BDA1F35-C63A-477E-8A2B-DA8A3A59F611}" presName="composite" presStyleCnt="0"/>
+      <dgm:spPr/>
+    </dgm:pt>
+    <dgm:pt modelId="{33870E2A-E5CD-4BED-8E86-627BCBBE931A}" type="pres">
+      <dgm:prSet presAssocID="{7BDA1F35-C63A-477E-8A2B-DA8A3A59F611}" presName="parTx" presStyleLbl="alignNode1" presStyleIdx="1" presStyleCnt="3">
+        <dgm:presLayoutVars>
+          <dgm:chMax val="0"/>
+          <dgm:chPref val="0"/>
+        </dgm:presLayoutVars>
+      </dgm:prSet>
+      <dgm:spPr/>
+    </dgm:pt>
+    <dgm:pt modelId="{3ACE3EDB-8C21-4AFE-8E02-5739AE2F28C0}" type="pres">
+      <dgm:prSet presAssocID="{7BDA1F35-C63A-477E-8A2B-DA8A3A59F611}" presName="desTx" presStyleLbl="alignAccFollowNode1" presStyleIdx="1" presStyleCnt="3">
+        <dgm:presLayoutVars/>
+      </dgm:prSet>
+      <dgm:spPr/>
+    </dgm:pt>
+    <dgm:pt modelId="{CFD690EA-6FA0-408C-A46D-03054352488D}" type="pres">
+      <dgm:prSet presAssocID="{5DB42164-53F6-4E5B-BD78-8E6EA670F982}" presName="space" presStyleCnt="0"/>
+      <dgm:spPr/>
+    </dgm:pt>
+    <dgm:pt modelId="{788AB3DD-EA7F-4D15-93F3-5548FB6E0582}" type="pres">
+      <dgm:prSet presAssocID="{C47D7EE8-5E64-4371-B96B-2EC84031CBC0}" presName="composite" presStyleCnt="0"/>
+      <dgm:spPr/>
+    </dgm:pt>
+    <dgm:pt modelId="{3CB18357-C77C-4370-8D66-4D934AC9793B}" type="pres">
+      <dgm:prSet presAssocID="{C47D7EE8-5E64-4371-B96B-2EC84031CBC0}" presName="parTx" presStyleLbl="alignNode1" presStyleIdx="2" presStyleCnt="3">
+        <dgm:presLayoutVars>
+          <dgm:chMax val="0"/>
+          <dgm:chPref val="0"/>
+        </dgm:presLayoutVars>
+      </dgm:prSet>
+      <dgm:spPr/>
+    </dgm:pt>
+    <dgm:pt modelId="{BE929402-A2CF-4123-AE71-3509B105F0AE}" type="pres">
+      <dgm:prSet presAssocID="{C47D7EE8-5E64-4371-B96B-2EC84031CBC0}" presName="desTx" presStyleLbl="alignAccFollowNode1" presStyleIdx="2" presStyleCnt="3">
+        <dgm:presLayoutVars/>
+      </dgm:prSet>
+      <dgm:spPr/>
+    </dgm:pt>
+  </dgm:ptLst>
+  <dgm:cxnLst>
+    <dgm:cxn modelId="{99C86015-6F62-4F39-BCD4-B3664872451F}" type="presOf" srcId="{DD11C167-7802-48D4-83A9-18C0EF27FC2B}" destId="{BE929402-A2CF-4123-AE71-3509B105F0AE}" srcOrd="0" destOrd="0" presId="urn:microsoft.com/office/officeart/2016/7/layout/ChevronBlockProcess"/>
+    <dgm:cxn modelId="{E6EEBE18-01A4-48CD-8A5F-72F8176BEC3E}" type="presOf" srcId="{7BDA1F35-C63A-477E-8A2B-DA8A3A59F611}" destId="{33870E2A-E5CD-4BED-8E86-627BCBBE931A}" srcOrd="0" destOrd="0" presId="urn:microsoft.com/office/officeart/2016/7/layout/ChevronBlockProcess"/>
+    <dgm:cxn modelId="{FA7EBC27-4A3F-4310-A63B-C63EEA9C9D5D}" type="presOf" srcId="{CF141A7F-B2F6-4C92-8B45-DAD736945877}" destId="{3ACE3EDB-8C21-4AFE-8E02-5739AE2F28C0}" srcOrd="0" destOrd="2" presId="urn:microsoft.com/office/officeart/2016/7/layout/ChevronBlockProcess"/>
+    <dgm:cxn modelId="{EA38282C-50DD-40F2-9CD8-4A90EE5C08E5}" type="presOf" srcId="{C47D7EE8-5E64-4371-B96B-2EC84031CBC0}" destId="{3CB18357-C77C-4370-8D66-4D934AC9793B}" srcOrd="0" destOrd="0" presId="urn:microsoft.com/office/officeart/2016/7/layout/ChevronBlockProcess"/>
+    <dgm:cxn modelId="{7F17AE2D-0551-4695-86D3-5FFE611CD024}" type="presOf" srcId="{AB20D057-EDFF-464C-96B9-447072025B2B}" destId="{E36CD81A-A67D-481E-B6D3-DD571AF376A5}" srcOrd="0" destOrd="3" presId="urn:microsoft.com/office/officeart/2016/7/layout/ChevronBlockProcess"/>
+    <dgm:cxn modelId="{45EFE236-BF2F-4E6B-A45F-70F44449E4BF}" srcId="{1F60A019-B797-4391-976B-E0843452B598}" destId="{0CD2BD8A-A26E-4D1C-B5E1-234A36081911}" srcOrd="0" destOrd="0" parTransId="{F4A2E9B3-D55F-4353-863A-FBE440DC9DC8}" sibTransId="{50C9DE14-B4AA-4DDC-9ED9-BE88316711E7}"/>
+    <dgm:cxn modelId="{491D0D45-AD6A-4B4B-B56C-CC4C035CE8E1}" type="presOf" srcId="{62098A33-0493-440F-94FB-1183BAFF7F9A}" destId="{3ACE3EDB-8C21-4AFE-8E02-5739AE2F28C0}" srcOrd="0" destOrd="0" presId="urn:microsoft.com/office/officeart/2016/7/layout/ChevronBlockProcess"/>
+    <dgm:cxn modelId="{F97AB84F-4EF9-4E83-A9C1-6DA298BC1666}" type="presOf" srcId="{0CD2BD8A-A26E-4D1C-B5E1-234A36081911}" destId="{E36CD81A-A67D-481E-B6D3-DD571AF376A5}" srcOrd="0" destOrd="0" presId="urn:microsoft.com/office/officeart/2016/7/layout/ChevronBlockProcess"/>
+    <dgm:cxn modelId="{91A4257A-9985-4572-97BB-0D9C8A217B12}" srcId="{CDCA56D4-C300-4833-AFAB-D0215ADD99CA}" destId="{7BDA1F35-C63A-477E-8A2B-DA8A3A59F611}" srcOrd="1" destOrd="0" parTransId="{61FA9310-079D-46B9-8307-8C7F6DAC9283}" sibTransId="{5DB42164-53F6-4E5B-BD78-8E6EA670F982}"/>
+    <dgm:cxn modelId="{30EC9882-2DDD-45D7-87F1-E3DE1E250ABF}" srcId="{7BDA1F35-C63A-477E-8A2B-DA8A3A59F611}" destId="{62098A33-0493-440F-94FB-1183BAFF7F9A}" srcOrd="0" destOrd="0" parTransId="{D5DC8C38-C0F8-4820-9150-D35DA57B789D}" sibTransId="{9F6F0AA7-3E12-4474-BEB0-364EDF2E1695}"/>
+    <dgm:cxn modelId="{9F0BEF87-F90A-49B0-BA41-88D5088D40D6}" srcId="{CDCA56D4-C300-4833-AFAB-D0215ADD99CA}" destId="{1F60A019-B797-4391-976B-E0843452B598}" srcOrd="0" destOrd="0" parTransId="{5C4F573B-406E-4D33-9E63-AA971ED3A878}" sibTransId="{8494E388-FF08-4522-B1AF-84C2FAF2C49F}"/>
+    <dgm:cxn modelId="{20CD648B-B160-4E7F-A120-AEE39EAE0C74}" srcId="{7BDA1F35-C63A-477E-8A2B-DA8A3A59F611}" destId="{CF141A7F-B2F6-4C92-8B45-DAD736945877}" srcOrd="2" destOrd="0" parTransId="{857B0034-8E7A-47AE-9174-66B73F88A073}" sibTransId="{013E8559-01ED-415E-B66F-853FEAEF4972}"/>
+    <dgm:cxn modelId="{129ABD8F-4D16-48CE-B6D4-8F89F98AEC67}" type="presOf" srcId="{0D4DE367-7729-49F0-8949-86B9A7447876}" destId="{3ACE3EDB-8C21-4AFE-8E02-5739AE2F28C0}" srcOrd="0" destOrd="1" presId="urn:microsoft.com/office/officeart/2016/7/layout/ChevronBlockProcess"/>
+    <dgm:cxn modelId="{5A188A90-4461-4A63-B281-B63AA61F820D}" srcId="{1F60A019-B797-4391-976B-E0843452B598}" destId="{AB20D057-EDFF-464C-96B9-447072025B2B}" srcOrd="3" destOrd="0" parTransId="{EE398D41-ECEB-4438-832C-14D2EDEFEC73}" sibTransId="{44269A9B-A7CD-423A-8F61-772F21F7334D}"/>
+    <dgm:cxn modelId="{9C255596-47DD-458C-AF84-542208AA5FD7}" type="presOf" srcId="{84E736F8-CDA4-497D-8EFE-4996A62ACECA}" destId="{E36CD81A-A67D-481E-B6D3-DD571AF376A5}" srcOrd="0" destOrd="1" presId="urn:microsoft.com/office/officeart/2016/7/layout/ChevronBlockProcess"/>
+    <dgm:cxn modelId="{7FC351A2-AB6F-49A6-923F-7132943C0A98}" type="presOf" srcId="{69A47DB4-09FB-43A1-B3C3-1A9106F90793}" destId="{E36CD81A-A67D-481E-B6D3-DD571AF376A5}" srcOrd="0" destOrd="2" presId="urn:microsoft.com/office/officeart/2016/7/layout/ChevronBlockProcess"/>
+    <dgm:cxn modelId="{7884AAA9-8147-4AB8-AA64-4FF8D7A9CD1F}" srcId="{1F60A019-B797-4391-976B-E0843452B598}" destId="{84E736F8-CDA4-497D-8EFE-4996A62ACECA}" srcOrd="1" destOrd="0" parTransId="{5BA0EBC1-8022-43B6-A8AE-7FF041F7E44D}" sibTransId="{E10401E3-8ECD-4638-B4B2-16E53C277134}"/>
+    <dgm:cxn modelId="{33149EB3-1ED5-4A15-9891-8D88C96A3A1B}" srcId="{CDCA56D4-C300-4833-AFAB-D0215ADD99CA}" destId="{C47D7EE8-5E64-4371-B96B-2EC84031CBC0}" srcOrd="2" destOrd="0" parTransId="{95BD2147-3D46-40CE-91DF-2BB5820836BA}" sibTransId="{CB56EC17-7BE8-425D-A0D1-8EFC317B720C}"/>
+    <dgm:cxn modelId="{6BC9F5C2-5E12-4A75-8D98-370511C13825}" type="presOf" srcId="{6840CA70-1C38-42F8-BA0D-EEA1D81F6D71}" destId="{E36CD81A-A67D-481E-B6D3-DD571AF376A5}" srcOrd="0" destOrd="4" presId="urn:microsoft.com/office/officeart/2016/7/layout/ChevronBlockProcess"/>
+    <dgm:cxn modelId="{5422B8D1-9BCD-44EF-AD1C-78A59D0D8D4F}" srcId="{C47D7EE8-5E64-4371-B96B-2EC84031CBC0}" destId="{DD11C167-7802-48D4-83A9-18C0EF27FC2B}" srcOrd="0" destOrd="0" parTransId="{324BF15C-40A1-4EB5-BBE2-C9182A295D49}" sibTransId="{0F90546B-67AD-4AF8-9C2A-E862D6BAA902}"/>
+    <dgm:cxn modelId="{41B9A2D7-9795-45D9-AFDE-8C6D19D454E6}" srcId="{1F60A019-B797-4391-976B-E0843452B598}" destId="{6840CA70-1C38-42F8-BA0D-EEA1D81F6D71}" srcOrd="4" destOrd="0" parTransId="{D77E7138-3896-4E8C-9F2B-2FC8F0027329}" sibTransId="{2E66EC53-A04F-4239-9D65-6787483CFCC2}"/>
+    <dgm:cxn modelId="{58DCA3E6-F59F-4FFA-B0BF-8124D2E76D09}" srcId="{7BDA1F35-C63A-477E-8A2B-DA8A3A59F611}" destId="{0D4DE367-7729-49F0-8949-86B9A7447876}" srcOrd="1" destOrd="0" parTransId="{E281FCE4-2F63-43C7-ADE8-C589BDD0AE1A}" sibTransId="{63BDA96C-6243-4DB7-BB3B-22A2EA4749EE}"/>
+    <dgm:cxn modelId="{7780F5EE-0E14-42B4-A80D-22FFC02B6F2C}" type="presOf" srcId="{CDCA56D4-C300-4833-AFAB-D0215ADD99CA}" destId="{72636061-D84D-4D0B-91B0-A2326C79A81D}" srcOrd="0" destOrd="0" presId="urn:microsoft.com/office/officeart/2016/7/layout/ChevronBlockProcess"/>
+    <dgm:cxn modelId="{9457EBFB-3122-437B-9819-91F5AAC93579}" type="presOf" srcId="{1F60A019-B797-4391-976B-E0843452B598}" destId="{7950B7CA-0670-49C5-BA28-CE31D6D40205}" srcOrd="0" destOrd="0" presId="urn:microsoft.com/office/officeart/2016/7/layout/ChevronBlockProcess"/>
+    <dgm:cxn modelId="{1E4132FD-ABDB-461A-BB93-EAF142660AEC}" srcId="{1F60A019-B797-4391-976B-E0843452B598}" destId="{69A47DB4-09FB-43A1-B3C3-1A9106F90793}" srcOrd="2" destOrd="0" parTransId="{254D9416-1C09-48ED-AAD3-6B7AFE889903}" sibTransId="{0234CE47-38BE-4B87-9A04-E11ACF4CB64A}"/>
+    <dgm:cxn modelId="{F9AC4C8E-825F-48B2-8E24-2C63EA3D25BB}" type="presParOf" srcId="{72636061-D84D-4D0B-91B0-A2326C79A81D}" destId="{29DAEF74-02BD-43DF-8A24-2146908FF6F8}" srcOrd="0" destOrd="0" presId="urn:microsoft.com/office/officeart/2016/7/layout/ChevronBlockProcess"/>
+    <dgm:cxn modelId="{F1C51D14-0F2B-459D-9A46-BC0EE7614DE5}" type="presParOf" srcId="{29DAEF74-02BD-43DF-8A24-2146908FF6F8}" destId="{7950B7CA-0670-49C5-BA28-CE31D6D40205}" srcOrd="0" destOrd="0" presId="urn:microsoft.com/office/officeart/2016/7/layout/ChevronBlockProcess"/>
+    <dgm:cxn modelId="{27740FC0-0B51-4AEC-9CDF-2758BF7089D4}" type="presParOf" srcId="{29DAEF74-02BD-43DF-8A24-2146908FF6F8}" destId="{E36CD81A-A67D-481E-B6D3-DD571AF376A5}" srcOrd="1" destOrd="0" presId="urn:microsoft.com/office/officeart/2016/7/layout/ChevronBlockProcess"/>
+    <dgm:cxn modelId="{DEB785F2-E37B-4B13-ABFF-BB64BB300658}" type="presParOf" srcId="{72636061-D84D-4D0B-91B0-A2326C79A81D}" destId="{A732507C-B241-4F08-89FD-F30E967C413B}" srcOrd="1" destOrd="0" presId="urn:microsoft.com/office/officeart/2016/7/layout/ChevronBlockProcess"/>
+    <dgm:cxn modelId="{F04816E2-CB96-47A3-8C5E-3267897CDDFC}" type="presParOf" srcId="{72636061-D84D-4D0B-91B0-A2326C79A81D}" destId="{2B11FB3A-C891-4E93-AFBC-2DCE69695B8E}" srcOrd="2" destOrd="0" presId="urn:microsoft.com/office/officeart/2016/7/layout/ChevronBlockProcess"/>
+    <dgm:cxn modelId="{41FF8154-CD40-4EC3-9DBB-D930D32BFB57}" type="presParOf" srcId="{2B11FB3A-C891-4E93-AFBC-2DCE69695B8E}" destId="{33870E2A-E5CD-4BED-8E86-627BCBBE931A}" srcOrd="0" destOrd="0" presId="urn:microsoft.com/office/officeart/2016/7/layout/ChevronBlockProcess"/>
+    <dgm:cxn modelId="{4E8E2DED-5572-4690-98A3-2E96CBBC79A6}" type="presParOf" srcId="{2B11FB3A-C891-4E93-AFBC-2DCE69695B8E}" destId="{3ACE3EDB-8C21-4AFE-8E02-5739AE2F28C0}" srcOrd="1" destOrd="0" presId="urn:microsoft.com/office/officeart/2016/7/layout/ChevronBlockProcess"/>
+    <dgm:cxn modelId="{D966FF8B-8F86-4C58-A744-238F1031B714}" type="presParOf" srcId="{72636061-D84D-4D0B-91B0-A2326C79A81D}" destId="{CFD690EA-6FA0-408C-A46D-03054352488D}" srcOrd="3" destOrd="0" presId="urn:microsoft.com/office/officeart/2016/7/layout/ChevronBlockProcess"/>
+    <dgm:cxn modelId="{C92D591A-2163-45C1-8917-EBD9B739689B}" type="presParOf" srcId="{72636061-D84D-4D0B-91B0-A2326C79A81D}" destId="{788AB3DD-EA7F-4D15-93F3-5548FB6E0582}" srcOrd="4" destOrd="0" presId="urn:microsoft.com/office/officeart/2016/7/layout/ChevronBlockProcess"/>
+    <dgm:cxn modelId="{044D8C73-6877-4725-A7AA-CB1E15BFEB01}" type="presParOf" srcId="{788AB3DD-EA7F-4D15-93F3-5548FB6E0582}" destId="{3CB18357-C77C-4370-8D66-4D934AC9793B}" srcOrd="0" destOrd="0" presId="urn:microsoft.com/office/officeart/2016/7/layout/ChevronBlockProcess"/>
+    <dgm:cxn modelId="{C1C7BEDE-2A84-4270-9195-0BF0ABB6454B}" type="presParOf" srcId="{788AB3DD-EA7F-4D15-93F3-5548FB6E0582}" destId="{BE929402-A2CF-4123-AE71-3509B105F0AE}" srcOrd="1" destOrd="0" presId="urn:microsoft.com/office/officeart/2016/7/layout/ChevronBlockProcess"/>
+  </dgm:cxnLst>
+  <dgm:bg/>
+  <dgm:whole/>
+  <dgm:extLst>
+    <a:ext uri="http://schemas.microsoft.com/office/drawing/2008/diagram">
+      <dsp:dataModelExt xmlns:dsp="http://schemas.microsoft.com/office/drawing/2008/diagram" relId="rId7" minVer="http://schemas.openxmlformats.org/drawingml/2006/diagram"/>
+    </a:ext>
+  </dgm:extLst>
+</dgm:dataModel>
+</file>
+
+<file path=ppt/diagrams/drawing1.xml><?xml version="1.0" encoding="utf-8"?>
+<dsp:drawing xmlns:dgm="http://schemas.openxmlformats.org/drawingml/2006/diagram" xmlns:dsp="http://schemas.microsoft.com/office/drawing/2008/diagram" xmlns:a="http://schemas.openxmlformats.org/drawingml/2006/main">
+  <dsp:spTree>
+    <dsp:nvGrpSpPr>
+      <dsp:cNvPr id="0" name=""/>
+      <dsp:cNvGrpSpPr/>
+    </dsp:nvGrpSpPr>
+    <dsp:grpSpPr/>
+    <dsp:sp modelId="{7950B7CA-0670-49C5-BA28-CE31D6D40205}">
+      <dsp:nvSpPr>
+        <dsp:cNvPr id="0" name=""/>
+        <dsp:cNvSpPr/>
+      </dsp:nvSpPr>
+      <dsp:spPr>
+        <a:xfrm>
+          <a:off x="6589" y="220957"/>
+          <a:ext cx="2607994" cy="782398"/>
+        </a:xfrm>
+        <a:prstGeom prst="chevron">
+          <a:avLst>
+            <a:gd name="adj" fmla="val 30000"/>
+          </a:avLst>
+        </a:prstGeom>
+        <a:gradFill rotWithShape="0">
+          <a:gsLst>
+            <a:gs pos="0">
+              <a:schemeClr val="accent1">
+                <a:hueOff val="0"/>
+                <a:satOff val="0"/>
+                <a:lumOff val="0"/>
+                <a:alphaOff val="0"/>
+                <a:satMod val="103000"/>
+                <a:lumMod val="102000"/>
+                <a:tint val="94000"/>
+              </a:schemeClr>
+            </a:gs>
+            <a:gs pos="50000">
+              <a:schemeClr val="accent1">
+                <a:hueOff val="0"/>
+                <a:satOff val="0"/>
+                <a:lumOff val="0"/>
+                <a:alphaOff val="0"/>
+                <a:satMod val="110000"/>
+                <a:lumMod val="100000"/>
+                <a:shade val="100000"/>
+              </a:schemeClr>
+            </a:gs>
+            <a:gs pos="100000">
+              <a:schemeClr val="accent1">
+                <a:hueOff val="0"/>
+                <a:satOff val="0"/>
+                <a:lumOff val="0"/>
+                <a:alphaOff val="0"/>
+                <a:lumMod val="99000"/>
+                <a:satMod val="120000"/>
+                <a:shade val="78000"/>
+              </a:schemeClr>
+            </a:gs>
+          </a:gsLst>
+          <a:lin ang="5400000" scaled="0"/>
+        </a:gradFill>
+        <a:ln w="6350" cap="flat" cmpd="sng" algn="ctr">
+          <a:solidFill>
+            <a:schemeClr val="accent1">
+              <a:hueOff val="0"/>
+              <a:satOff val="0"/>
+              <a:lumOff val="0"/>
+              <a:alphaOff val="0"/>
+            </a:schemeClr>
+          </a:solidFill>
+          <a:prstDash val="solid"/>
+          <a:miter lim="800000"/>
+        </a:ln>
+        <a:effectLst/>
+      </dsp:spPr>
+      <dsp:style>
+        <a:lnRef idx="1">
+          <a:scrgbClr r="0" g="0" b="0"/>
+        </a:lnRef>
+        <a:fillRef idx="3">
+          <a:scrgbClr r="0" g="0" b="0"/>
+        </a:fillRef>
+        <a:effectRef idx="2">
+          <a:scrgbClr r="0" g="0" b="0"/>
+        </a:effectRef>
+        <a:fontRef idx="minor">
+          <a:schemeClr val="lt1"/>
+        </a:fontRef>
+      </dsp:style>
+      <dsp:txBody>
+        <a:bodyPr spcFirstLastPara="0" vert="horz" wrap="square" lIns="96604" tIns="96604" rIns="96604" bIns="96604" numCol="1" spcCol="1270" anchor="ctr" anchorCtr="0">
+          <a:noAutofit/>
+        </a:bodyPr>
+        <a:lstStyle/>
+        <a:p>
+          <a:pPr marL="0" lvl="0" indent="0" algn="ctr" defTabSz="1244600">
+            <a:lnSpc>
+              <a:spcPct val="90000"/>
+            </a:lnSpc>
+            <a:spcBef>
+              <a:spcPct val="0"/>
+            </a:spcBef>
+            <a:spcAft>
+              <a:spcPct val="35000"/>
+            </a:spcAft>
+            <a:buNone/>
+          </a:pPr>
+          <a:r>
+            <a:rPr lang="en-AT" sz="2800" kern="1200" dirty="0"/>
+            <a:t>Input</a:t>
+          </a:r>
+          <a:endParaRPr lang="de-AT" sz="2800" kern="1200" dirty="0"/>
+        </a:p>
+      </dsp:txBody>
+      <dsp:txXfrm>
+        <a:off x="241308" y="220957"/>
+        <a:ext cx="2138556" cy="782398"/>
+      </dsp:txXfrm>
+    </dsp:sp>
+    <dsp:sp modelId="{E36CD81A-A67D-481E-B6D3-DD571AF376A5}">
+      <dsp:nvSpPr>
+        <dsp:cNvPr id="0" name=""/>
+        <dsp:cNvSpPr/>
+      </dsp:nvSpPr>
+      <dsp:spPr>
+        <a:xfrm>
+          <a:off x="6589" y="1003355"/>
+          <a:ext cx="2373275" cy="2629592"/>
+        </a:xfrm>
+        <a:prstGeom prst="rect">
+          <a:avLst/>
+        </a:prstGeom>
+        <a:solidFill>
+          <a:schemeClr val="accent1">
+            <a:alpha val="90000"/>
+            <a:tint val="40000"/>
+            <a:hueOff val="0"/>
+            <a:satOff val="0"/>
+            <a:lumOff val="0"/>
+            <a:alphaOff val="0"/>
+          </a:schemeClr>
+        </a:solidFill>
+        <a:ln w="6350" cap="flat" cmpd="sng" algn="ctr">
+          <a:solidFill>
+            <a:schemeClr val="accent1">
+              <a:alpha val="90000"/>
+              <a:tint val="40000"/>
+              <a:hueOff val="0"/>
+              <a:satOff val="0"/>
+              <a:lumOff val="0"/>
+              <a:alphaOff val="0"/>
+            </a:schemeClr>
+          </a:solidFill>
+          <a:prstDash val="solid"/>
+          <a:miter lim="800000"/>
+        </a:ln>
+        <a:effectLst/>
+      </dsp:spPr>
+      <dsp:style>
+        <a:lnRef idx="1">
+          <a:scrgbClr r="0" g="0" b="0"/>
+        </a:lnRef>
+        <a:fillRef idx="1">
+          <a:scrgbClr r="0" g="0" b="0"/>
+        </a:fillRef>
+        <a:effectRef idx="0">
+          <a:scrgbClr r="0" g="0" b="0"/>
+        </a:effectRef>
+        <a:fontRef idx="minor"/>
+      </dsp:style>
+      <dsp:txBody>
+        <a:bodyPr spcFirstLastPara="0" vert="horz" wrap="square" lIns="187541" tIns="187541" rIns="187541" bIns="375083" numCol="1" spcCol="1270" anchor="t" anchorCtr="0">
+          <a:noAutofit/>
+        </a:bodyPr>
+        <a:lstStyle/>
+        <a:p>
+          <a:pPr marL="0" lvl="0" indent="0" algn="l" defTabSz="755650">
+            <a:lnSpc>
+              <a:spcPct val="90000"/>
+            </a:lnSpc>
+            <a:spcBef>
+              <a:spcPct val="0"/>
+            </a:spcBef>
+            <a:spcAft>
+              <a:spcPct val="35000"/>
+            </a:spcAft>
+            <a:buNone/>
+          </a:pPr>
+          <a:r>
+            <a:rPr lang="en-AT" sz="1700" kern="1200" dirty="0"/>
+            <a:t>Satellite Images</a:t>
+          </a:r>
+        </a:p>
+        <a:p>
+          <a:pPr marL="0" lvl="0" indent="0" algn="l" defTabSz="755650">
+            <a:lnSpc>
+              <a:spcPct val="90000"/>
+            </a:lnSpc>
+            <a:spcBef>
+              <a:spcPct val="0"/>
+            </a:spcBef>
+            <a:spcAft>
+              <a:spcPct val="35000"/>
+            </a:spcAft>
+            <a:buNone/>
+          </a:pPr>
+          <a:endParaRPr lang="en-AT" sz="1700" kern="1200" dirty="0"/>
+        </a:p>
+        <a:p>
+          <a:pPr marL="0" lvl="0" indent="0" algn="l" defTabSz="755650">
+            <a:lnSpc>
+              <a:spcPct val="90000"/>
+            </a:lnSpc>
+            <a:spcBef>
+              <a:spcPct val="0"/>
+            </a:spcBef>
+            <a:spcAft>
+              <a:spcPct val="35000"/>
+            </a:spcAft>
+            <a:buNone/>
+          </a:pPr>
+          <a:r>
+            <a:rPr lang="en-AT" sz="1700" kern="1200" dirty="0"/>
+            <a:t>Open Street Map Land Use Layer</a:t>
+          </a:r>
+        </a:p>
+        <a:p>
+          <a:pPr marL="0" lvl="0" indent="0" algn="l" defTabSz="755650">
+            <a:lnSpc>
+              <a:spcPct val="90000"/>
+            </a:lnSpc>
+            <a:spcBef>
+              <a:spcPct val="0"/>
+            </a:spcBef>
+            <a:spcAft>
+              <a:spcPct val="35000"/>
+            </a:spcAft>
+            <a:buNone/>
+          </a:pPr>
+          <a:endParaRPr lang="en-AT" sz="1700" kern="1200" dirty="0"/>
+        </a:p>
+        <a:p>
+          <a:pPr marL="0" lvl="0" indent="0" algn="l" defTabSz="755650">
+            <a:lnSpc>
+              <a:spcPct val="90000"/>
+            </a:lnSpc>
+            <a:spcBef>
+              <a:spcPct val="0"/>
+            </a:spcBef>
+            <a:spcAft>
+              <a:spcPct val="35000"/>
+            </a:spcAft>
+            <a:buNone/>
+          </a:pPr>
+          <a:r>
+            <a:rPr lang="de-AT" sz="1700" kern="1200" dirty="0"/>
+            <a:t>T</a:t>
+          </a:r>
+          <a:r>
+            <a:rPr lang="en-AT" sz="1700" kern="1200" dirty="0" err="1"/>
+            <a:t>ree</a:t>
+          </a:r>
+          <a:r>
+            <a:rPr lang="en-AT" sz="1700" kern="1200" dirty="0"/>
+            <a:t> register (“</a:t>
+          </a:r>
+          <a:r>
+            <a:rPr lang="en-AT" sz="1700" kern="1200" dirty="0" err="1"/>
+            <a:t>Baumkataster</a:t>
+          </a:r>
+          <a:r>
+            <a:rPr lang="en-AT" sz="1700" kern="1200" dirty="0"/>
+            <a:t>”)</a:t>
+          </a:r>
+        </a:p>
+      </dsp:txBody>
+      <dsp:txXfrm>
+        <a:off x="6589" y="1003355"/>
+        <a:ext cx="2373275" cy="2629592"/>
+      </dsp:txXfrm>
+    </dsp:sp>
+    <dsp:sp modelId="{33870E2A-E5CD-4BED-8E86-627BCBBE931A}">
+      <dsp:nvSpPr>
+        <dsp:cNvPr id="0" name=""/>
+        <dsp:cNvSpPr/>
+      </dsp:nvSpPr>
+      <dsp:spPr>
+        <a:xfrm>
+          <a:off x="2575824" y="220957"/>
+          <a:ext cx="2607994" cy="782398"/>
+        </a:xfrm>
+        <a:prstGeom prst="chevron">
+          <a:avLst>
+            <a:gd name="adj" fmla="val 30000"/>
+          </a:avLst>
+        </a:prstGeom>
+        <a:gradFill rotWithShape="0">
+          <a:gsLst>
+            <a:gs pos="0">
+              <a:schemeClr val="accent1">
+                <a:hueOff val="0"/>
+                <a:satOff val="0"/>
+                <a:lumOff val="0"/>
+                <a:alphaOff val="0"/>
+                <a:satMod val="103000"/>
+                <a:lumMod val="102000"/>
+                <a:tint val="94000"/>
+              </a:schemeClr>
+            </a:gs>
+            <a:gs pos="50000">
+              <a:schemeClr val="accent1">
+                <a:hueOff val="0"/>
+                <a:satOff val="0"/>
+                <a:lumOff val="0"/>
+                <a:alphaOff val="0"/>
+                <a:satMod val="110000"/>
+                <a:lumMod val="100000"/>
+                <a:shade val="100000"/>
+              </a:schemeClr>
+            </a:gs>
+            <a:gs pos="100000">
+              <a:schemeClr val="accent1">
+                <a:hueOff val="0"/>
+                <a:satOff val="0"/>
+                <a:lumOff val="0"/>
+                <a:alphaOff val="0"/>
+                <a:lumMod val="99000"/>
+                <a:satMod val="120000"/>
+                <a:shade val="78000"/>
+              </a:schemeClr>
+            </a:gs>
+          </a:gsLst>
+          <a:lin ang="5400000" scaled="0"/>
+        </a:gradFill>
+        <a:ln w="6350" cap="flat" cmpd="sng" algn="ctr">
+          <a:solidFill>
+            <a:schemeClr val="accent1">
+              <a:hueOff val="0"/>
+              <a:satOff val="0"/>
+              <a:lumOff val="0"/>
+              <a:alphaOff val="0"/>
+            </a:schemeClr>
+          </a:solidFill>
+          <a:prstDash val="solid"/>
+          <a:miter lim="800000"/>
+        </a:ln>
+        <a:effectLst/>
+      </dsp:spPr>
+      <dsp:style>
+        <a:lnRef idx="1">
+          <a:scrgbClr r="0" g="0" b="0"/>
+        </a:lnRef>
+        <a:fillRef idx="3">
+          <a:scrgbClr r="0" g="0" b="0"/>
+        </a:fillRef>
+        <a:effectRef idx="2">
+          <a:scrgbClr r="0" g="0" b="0"/>
+        </a:effectRef>
+        <a:fontRef idx="minor">
+          <a:schemeClr val="lt1"/>
+        </a:fontRef>
+      </dsp:style>
+      <dsp:txBody>
+        <a:bodyPr spcFirstLastPara="0" vert="horz" wrap="square" lIns="96604" tIns="96604" rIns="96604" bIns="96604" numCol="1" spcCol="1270" anchor="ctr" anchorCtr="0">
+          <a:noAutofit/>
+        </a:bodyPr>
+        <a:lstStyle/>
+        <a:p>
+          <a:pPr marL="0" lvl="0" indent="0" algn="ctr" defTabSz="1244600">
+            <a:lnSpc>
+              <a:spcPct val="90000"/>
+            </a:lnSpc>
+            <a:spcBef>
+              <a:spcPct val="0"/>
+            </a:spcBef>
+            <a:spcAft>
+              <a:spcPct val="35000"/>
+            </a:spcAft>
+            <a:buNone/>
+          </a:pPr>
+          <a:r>
+            <a:rPr lang="en-AT" sz="2800" kern="1200" dirty="0"/>
+            <a:t>Consider </a:t>
+          </a:r>
+        </a:p>
+      </dsp:txBody>
+      <dsp:txXfrm>
+        <a:off x="2810543" y="220957"/>
+        <a:ext cx="2138556" cy="782398"/>
+      </dsp:txXfrm>
+    </dsp:sp>
+    <dsp:sp modelId="{3ACE3EDB-8C21-4AFE-8E02-5739AE2F28C0}">
+      <dsp:nvSpPr>
+        <dsp:cNvPr id="0" name=""/>
+        <dsp:cNvSpPr/>
+      </dsp:nvSpPr>
+      <dsp:spPr>
+        <a:xfrm>
+          <a:off x="2575824" y="1003355"/>
+          <a:ext cx="2373275" cy="2629592"/>
+        </a:xfrm>
+        <a:prstGeom prst="rect">
+          <a:avLst/>
+        </a:prstGeom>
+        <a:solidFill>
+          <a:schemeClr val="accent1">
+            <a:alpha val="90000"/>
+            <a:tint val="40000"/>
+            <a:hueOff val="0"/>
+            <a:satOff val="0"/>
+            <a:lumOff val="0"/>
+            <a:alphaOff val="0"/>
+          </a:schemeClr>
+        </a:solidFill>
+        <a:ln w="6350" cap="flat" cmpd="sng" algn="ctr">
+          <a:solidFill>
+            <a:schemeClr val="accent1">
+              <a:alpha val="90000"/>
+              <a:tint val="40000"/>
+              <a:hueOff val="0"/>
+              <a:satOff val="0"/>
+              <a:lumOff val="0"/>
+              <a:alphaOff val="0"/>
+            </a:schemeClr>
+          </a:solidFill>
+          <a:prstDash val="solid"/>
+          <a:miter lim="800000"/>
+        </a:ln>
+        <a:effectLst/>
+      </dsp:spPr>
+      <dsp:style>
+        <a:lnRef idx="1">
+          <a:scrgbClr r="0" g="0" b="0"/>
+        </a:lnRef>
+        <a:fillRef idx="1">
+          <a:scrgbClr r="0" g="0" b="0"/>
+        </a:fillRef>
+        <a:effectRef idx="0">
+          <a:scrgbClr r="0" g="0" b="0"/>
+        </a:effectRef>
+        <a:fontRef idx="minor"/>
+      </dsp:style>
+      <dsp:txBody>
+        <a:bodyPr spcFirstLastPara="0" vert="horz" wrap="square" lIns="187541" tIns="187541" rIns="187541" bIns="375083" numCol="1" spcCol="1270" anchor="t" anchorCtr="0">
+          <a:noAutofit/>
+        </a:bodyPr>
+        <a:lstStyle/>
+        <a:p>
+          <a:pPr marL="0" lvl="0" indent="0" algn="l" defTabSz="755650">
+            <a:lnSpc>
+              <a:spcPct val="90000"/>
+            </a:lnSpc>
+            <a:spcBef>
+              <a:spcPct val="0"/>
+            </a:spcBef>
+            <a:spcAft>
+              <a:spcPct val="35000"/>
+            </a:spcAft>
+            <a:buNone/>
+          </a:pPr>
+          <a:r>
+            <a:rPr lang="en-AT" sz="1700" kern="1200" dirty="0"/>
+            <a:t>Seasons (multiple)</a:t>
+          </a:r>
+        </a:p>
+        <a:p>
+          <a:pPr marL="0" lvl="0" indent="0" algn="l" defTabSz="755650">
+            <a:lnSpc>
+              <a:spcPct val="90000"/>
+            </a:lnSpc>
+            <a:spcBef>
+              <a:spcPct val="0"/>
+            </a:spcBef>
+            <a:spcAft>
+              <a:spcPct val="35000"/>
+            </a:spcAft>
+            <a:buNone/>
+          </a:pPr>
+          <a:endParaRPr lang="en-AT" sz="1700" kern="1200" dirty="0"/>
+        </a:p>
+        <a:p>
+          <a:pPr marL="0" lvl="0" indent="0" algn="l" defTabSz="755650">
+            <a:lnSpc>
+              <a:spcPct val="90000"/>
+            </a:lnSpc>
+            <a:spcBef>
+              <a:spcPct val="0"/>
+            </a:spcBef>
+            <a:spcAft>
+              <a:spcPct val="35000"/>
+            </a:spcAft>
+            <a:buNone/>
+          </a:pPr>
+          <a:r>
+            <a:rPr lang="en-AT" sz="1700" kern="1200" dirty="0"/>
+            <a:t>Climate Zone (restricted -&gt; middle </a:t>
+          </a:r>
+          <a:r>
+            <a:rPr lang="en-AT" sz="1700" kern="1200" dirty="0" err="1"/>
+            <a:t>european</a:t>
+          </a:r>
+          <a:r>
+            <a:rPr lang="en-AT" sz="1700" kern="1200" dirty="0"/>
+            <a:t>)</a:t>
+          </a:r>
+        </a:p>
+      </dsp:txBody>
+      <dsp:txXfrm>
+        <a:off x="2575824" y="1003355"/>
+        <a:ext cx="2373275" cy="2629592"/>
+      </dsp:txXfrm>
+    </dsp:sp>
+    <dsp:sp modelId="{3CB18357-C77C-4370-8D66-4D934AC9793B}">
+      <dsp:nvSpPr>
+        <dsp:cNvPr id="0" name=""/>
+        <dsp:cNvSpPr/>
+      </dsp:nvSpPr>
+      <dsp:spPr>
+        <a:xfrm>
+          <a:off x="5145059" y="220957"/>
+          <a:ext cx="2607994" cy="782398"/>
+        </a:xfrm>
+        <a:prstGeom prst="chevron">
+          <a:avLst>
+            <a:gd name="adj" fmla="val 30000"/>
+          </a:avLst>
+        </a:prstGeom>
+        <a:gradFill rotWithShape="0">
+          <a:gsLst>
+            <a:gs pos="0">
+              <a:schemeClr val="accent1">
+                <a:hueOff val="0"/>
+                <a:satOff val="0"/>
+                <a:lumOff val="0"/>
+                <a:alphaOff val="0"/>
+                <a:satMod val="103000"/>
+                <a:lumMod val="102000"/>
+                <a:tint val="94000"/>
+              </a:schemeClr>
+            </a:gs>
+            <a:gs pos="50000">
+              <a:schemeClr val="accent1">
+                <a:hueOff val="0"/>
+                <a:satOff val="0"/>
+                <a:lumOff val="0"/>
+                <a:alphaOff val="0"/>
+                <a:satMod val="110000"/>
+                <a:lumMod val="100000"/>
+                <a:shade val="100000"/>
+              </a:schemeClr>
+            </a:gs>
+            <a:gs pos="100000">
+              <a:schemeClr val="accent1">
+                <a:hueOff val="0"/>
+                <a:satOff val="0"/>
+                <a:lumOff val="0"/>
+                <a:alphaOff val="0"/>
+                <a:lumMod val="99000"/>
+                <a:satMod val="120000"/>
+                <a:shade val="78000"/>
+              </a:schemeClr>
+            </a:gs>
+          </a:gsLst>
+          <a:lin ang="5400000" scaled="0"/>
+        </a:gradFill>
+        <a:ln w="6350" cap="flat" cmpd="sng" algn="ctr">
+          <a:solidFill>
+            <a:schemeClr val="accent1">
+              <a:hueOff val="0"/>
+              <a:satOff val="0"/>
+              <a:lumOff val="0"/>
+              <a:alphaOff val="0"/>
+            </a:schemeClr>
+          </a:solidFill>
+          <a:prstDash val="solid"/>
+          <a:miter lim="800000"/>
+        </a:ln>
+        <a:effectLst/>
+      </dsp:spPr>
+      <dsp:style>
+        <a:lnRef idx="1">
+          <a:scrgbClr r="0" g="0" b="0"/>
+        </a:lnRef>
+        <a:fillRef idx="3">
+          <a:scrgbClr r="0" g="0" b="0"/>
+        </a:fillRef>
+        <a:effectRef idx="2">
+          <a:scrgbClr r="0" g="0" b="0"/>
+        </a:effectRef>
+        <a:fontRef idx="minor">
+          <a:schemeClr val="lt1"/>
+        </a:fontRef>
+      </dsp:style>
+      <dsp:txBody>
+        <a:bodyPr spcFirstLastPara="0" vert="horz" wrap="square" lIns="96604" tIns="96604" rIns="96604" bIns="96604" numCol="1" spcCol="1270" anchor="ctr" anchorCtr="0">
+          <a:noAutofit/>
+        </a:bodyPr>
+        <a:lstStyle/>
+        <a:p>
+          <a:pPr marL="0" lvl="0" indent="0" algn="ctr" defTabSz="1244600">
+            <a:lnSpc>
+              <a:spcPct val="90000"/>
+            </a:lnSpc>
+            <a:spcBef>
+              <a:spcPct val="0"/>
+            </a:spcBef>
+            <a:spcAft>
+              <a:spcPct val="35000"/>
+            </a:spcAft>
+            <a:buNone/>
+          </a:pPr>
+          <a:r>
+            <a:rPr lang="en-AT" sz="2800" kern="1200"/>
+            <a:t>Output </a:t>
+          </a:r>
+          <a:endParaRPr lang="en-AT" sz="2800" kern="1200" dirty="0"/>
+        </a:p>
+      </dsp:txBody>
+      <dsp:txXfrm>
+        <a:off x="5379778" y="220957"/>
+        <a:ext cx="2138556" cy="782398"/>
+      </dsp:txXfrm>
+    </dsp:sp>
+    <dsp:sp modelId="{BE929402-A2CF-4123-AE71-3509B105F0AE}">
+      <dsp:nvSpPr>
+        <dsp:cNvPr id="0" name=""/>
+        <dsp:cNvSpPr/>
+      </dsp:nvSpPr>
+      <dsp:spPr>
+        <a:xfrm>
+          <a:off x="5145059" y="1003355"/>
+          <a:ext cx="2373275" cy="2629592"/>
+        </a:xfrm>
+        <a:prstGeom prst="rect">
+          <a:avLst/>
+        </a:prstGeom>
+        <a:solidFill>
+          <a:schemeClr val="accent1">
+            <a:alpha val="90000"/>
+            <a:tint val="40000"/>
+            <a:hueOff val="0"/>
+            <a:satOff val="0"/>
+            <a:lumOff val="0"/>
+            <a:alphaOff val="0"/>
+          </a:schemeClr>
+        </a:solidFill>
+        <a:ln w="6350" cap="flat" cmpd="sng" algn="ctr">
+          <a:solidFill>
+            <a:schemeClr val="accent1">
+              <a:alpha val="90000"/>
+              <a:tint val="40000"/>
+              <a:hueOff val="0"/>
+              <a:satOff val="0"/>
+              <a:lumOff val="0"/>
+              <a:alphaOff val="0"/>
+            </a:schemeClr>
+          </a:solidFill>
+          <a:prstDash val="solid"/>
+          <a:miter lim="800000"/>
+        </a:ln>
+        <a:effectLst/>
+      </dsp:spPr>
+      <dsp:style>
+        <a:lnRef idx="1">
+          <a:scrgbClr r="0" g="0" b="0"/>
+        </a:lnRef>
+        <a:fillRef idx="1">
+          <a:scrgbClr r="0" g="0" b="0"/>
+        </a:fillRef>
+        <a:effectRef idx="0">
+          <a:scrgbClr r="0" g="0" b="0"/>
+        </a:effectRef>
+        <a:fontRef idx="minor"/>
+      </dsp:style>
+      <dsp:txBody>
+        <a:bodyPr spcFirstLastPara="0" vert="horz" wrap="square" lIns="187541" tIns="187541" rIns="187541" bIns="375083" numCol="1" spcCol="1270" anchor="t" anchorCtr="0">
+          <a:noAutofit/>
+        </a:bodyPr>
+        <a:lstStyle/>
+        <a:p>
+          <a:pPr marL="0" lvl="0" indent="0" algn="l" defTabSz="755650">
+            <a:lnSpc>
+              <a:spcPct val="90000"/>
+            </a:lnSpc>
+            <a:spcBef>
+              <a:spcPct val="0"/>
+            </a:spcBef>
+            <a:spcAft>
+              <a:spcPct val="35000"/>
+            </a:spcAft>
+            <a:buNone/>
+          </a:pPr>
+          <a:r>
+            <a:rPr lang="en-AT" sz="1700" kern="1200"/>
+            <a:t>Predicted Tree Locations</a:t>
+          </a:r>
+          <a:endParaRPr lang="de-AT" sz="1700" kern="1200" dirty="0"/>
+        </a:p>
+      </dsp:txBody>
+      <dsp:txXfrm>
+        <a:off x="5145059" y="1003355"/>
+        <a:ext cx="2373275" cy="2629592"/>
+      </dsp:txXfrm>
+    </dsp:sp>
+  </dsp:spTree>
+</dsp:drawing>
+</file>
+
+<file path=ppt/diagrams/layout1.xml><?xml version="1.0" encoding="utf-8"?>
+<dgm:layoutDef xmlns:dgm="http://schemas.openxmlformats.org/drawingml/2006/diagram" xmlns:a="http://schemas.openxmlformats.org/drawingml/2006/main" uniqueId="urn:microsoft.com/office/officeart/2016/7/layout/ChevronBlockProcess">
+  <dgm:title val="Chevron Block Process"/>
+  <dgm:desc val="Use to show a progression; a timeline; sequential steps in a task, process, or workflow; or to emphasize movement or direction. Level 1 text appears inside an arrow shape while Level 2 text appears below the arrow shapes."/>
+  <dgm:catLst>
+    <dgm:cat type="process" pri="500"/>
+  </dgm:catLst>
+  <dgm:sampData useDef="1">
+    <dgm:dataModel>
+      <dgm:ptLst/>
+      <dgm:bg/>
+      <dgm:whole/>
+    </dgm:dataModel>
+  </dgm:sampData>
+  <dgm:styleData>
+    <dgm:dataModel>
+      <dgm:ptLst>
+        <dgm:pt modelId="0" type="doc"/>
+        <dgm:pt modelId="1"/>
+        <dgm:pt modelId="2"/>
+      </dgm:ptLst>
+      <dgm:cxnLst>
+        <dgm:cxn modelId="3" srcId="0" destId="1" srcOrd="0" destOrd="0"/>
+        <dgm:cxn modelId="4" srcId="0" destId="2" srcOrd="1" destOrd="0"/>
+      </dgm:cxnLst>
+      <dgm:bg/>
+      <dgm:whole/>
+    </dgm:dataModel>
+  </dgm:styleData>
+  <dgm:clrData>
+    <dgm:dataModel>
+      <dgm:ptLst>
+        <dgm:pt modelId="0" type="doc"/>
+        <dgm:pt modelId="1"/>
+        <dgm:pt modelId="2"/>
+        <dgm:pt modelId="3"/>
+        <dgm:pt modelId="4"/>
+      </dgm:ptLst>
+      <dgm:cxnLst>
+        <dgm:cxn modelId="5" srcId="0" destId="1" srcOrd="0" destOrd="0"/>
+        <dgm:cxn modelId="6" srcId="0" destId="2" srcOrd="1" destOrd="0"/>
+        <dgm:cxn modelId="7" srcId="0" destId="3" srcOrd="2" destOrd="0"/>
+        <dgm:cxn modelId="8" srcId="0" destId="4" srcOrd="3" destOrd="0"/>
+      </dgm:cxnLst>
+      <dgm:bg/>
+      <dgm:whole/>
+    </dgm:dataModel>
+  </dgm:clrData>
+  <dgm:layoutNode name="Name0">
+    <dgm:varLst>
+      <dgm:dir/>
+      <dgm:animLvl val="lvl"/>
+      <dgm:resizeHandles val="exact"/>
+    </dgm:varLst>
+    <dgm:choose name="Name1">
+      <dgm:if name="Name2" func="var" arg="dir" op="equ" val="norm">
+        <dgm:alg type="lin"/>
+      </dgm:if>
+      <dgm:else name="Name3">
+        <dgm:alg type="lin">
+          <dgm:param type="linDir" val="fromR"/>
+        </dgm:alg>
+      </dgm:else>
+    </dgm:choose>
+    <dgm:shape xmlns:r="http://schemas.openxmlformats.org/officeDocument/2006/relationships" r:blip="">
+      <dgm:adjLst/>
+    </dgm:shape>
+    <dgm:presOf/>
+    <dgm:constrLst>
+      <dgm:constr type="h" for="ch" forName="composite" refType="h" fact="0.6"/>
+      <dgm:constr type="h" for="des" forName="composite" op="equ"/>
+      <dgm:constr type="w" for="ch" forName="composite" refType="w"/>
+      <dgm:constr type="w" for="des" forName="parTx"/>
+      <dgm:constr type="h" for="des" forName="parTx" op="equ"/>
+      <dgm:constr type="w" for="des" forName="desTx"/>
+      <dgm:constr type="primFontSz" for="des" forName="parTx" val="28"/>
+      <dgm:constr type="primFontSz" for="des" forName="desTx" refType="primFontSz" refFor="des" refForName="parTx" op="lte" fact="0.75"/>
+      <dgm:constr type="h" for="des" forName="desTx" op="equ"/>
+      <dgm:constr type="w" for="ch" forName="space" refType="w" op="equ" fact="-0.005"/>
+    </dgm:constrLst>
+    <dgm:ruleLst>
+      <dgm:rule type="w" for="ch" forName="composite" val="0" fact="NaN" max="NaN"/>
+    </dgm:ruleLst>
+    <dgm:forEach name="Name6" axis="ch" ptType="node">
+      <dgm:layoutNode name="composite">
+        <dgm:alg type="composite"/>
+        <dgm:shape xmlns:r="http://schemas.openxmlformats.org/officeDocument/2006/relationships" r:blip="">
+          <dgm:adjLst/>
+        </dgm:shape>
+        <dgm:presOf/>
+        <dgm:choose name="Name7">
+          <dgm:if name="Name8" func="var" arg="dir" op="equ" val="norm">
+            <dgm:constrLst>
+              <dgm:constr type="l" for="ch" forName="parTx"/>
+              <dgm:constr type="w" for="ch" forName="parTx" refType="w"/>
+              <dgm:constr type="t" for="ch" forName="parTx"/>
+              <dgm:constr type="l" for="ch" forName="desTx"/>
+              <dgm:constr type="w" for="ch" forName="desTx" refType="w" refFor="ch" refForName="parTx" fact="0.91"/>
+              <dgm:constr type="t" for="ch" forName="desTx" refType="h" refFor="ch" refForName="parTx"/>
+            </dgm:constrLst>
+          </dgm:if>
+          <dgm:else name="Name9">
+            <dgm:constrLst>
+              <dgm:constr type="l" for="ch" forName="parTx"/>
+              <dgm:constr type="w" for="ch" forName="parTx" refType="w"/>
+              <dgm:constr type="t" for="ch" forName="parTx"/>
+              <dgm:constr type="l" for="ch" forName="desTx" refType="w" fact="0.09"/>
+              <dgm:constr type="w" for="ch" forName="desTx" refType="w" refFor="ch" refForName="parTx" fact="0.91"/>
+              <dgm:constr type="t" for="ch" forName="desTx" refType="h" refFor="ch" refForName="parTx"/>
+            </dgm:constrLst>
+          </dgm:else>
+        </dgm:choose>
+        <dgm:ruleLst>
+          <dgm:rule type="h" val="INF" fact="NaN" max="NaN"/>
+        </dgm:ruleLst>
+        <dgm:layoutNode name="parTx" styleLbl="alignNode1">
+          <dgm:varLst>
+            <dgm:chMax val="0"/>
+            <dgm:chPref val="0"/>
+          </dgm:varLst>
+          <dgm:alg type="tx"/>
+          <dgm:choose name="Name10">
+            <dgm:if name="Name11" func="var" arg="dir" op="equ" val="norm">
+              <dgm:shape xmlns:r="http://schemas.openxmlformats.org/officeDocument/2006/relationships" type="chevron" r:blip="">
+                <dgm:adjLst>
+                  <dgm:adj idx="1" val="0.3"/>
+                </dgm:adjLst>
+              </dgm:shape>
+            </dgm:if>
+            <dgm:else name="Name12">
+              <dgm:shape xmlns:r="http://schemas.openxmlformats.org/officeDocument/2006/relationships" rot="180" type="chevron" r:blip="">
+                <dgm:adjLst/>
+              </dgm:shape>
+            </dgm:else>
+          </dgm:choose>
+          <dgm:presOf axis="self" ptType="node"/>
+          <dgm:choose name="Name13">
+            <dgm:if name="Name14" func="var" arg="dir" op="equ" val="norm">
+              <dgm:constrLst>
+                <dgm:constr type="h" refType="w" op="lte" fact="0.3"/>
+                <dgm:constr type="h"/>
+                <dgm:constr type="tMarg" refType="w" fact="0.105"/>
+                <dgm:constr type="bMarg" refType="w" fact="0.105"/>
+                <dgm:constr type="lMarg" refType="w" fact="0.105"/>
+                <dgm:constr type="rMarg" refType="w" fact="0.105"/>
+              </dgm:constrLst>
+            </dgm:if>
+            <dgm:else name="Name15">
+              <dgm:constrLst>
+                <dgm:constr type="h" refType="w" op="lte" fact="0.3"/>
+                <dgm:constr type="h"/>
+                <dgm:constr type="tMarg" refType="w" fact="0.105"/>
+                <dgm:constr type="bMarg" refType="w" fact="0.105"/>
+                <dgm:constr type="lMarg" refType="w" fact="0.105"/>
+                <dgm:constr type="rMarg" refType="w" fact="0.105"/>
+              </dgm:constrLst>
+            </dgm:else>
+          </dgm:choose>
+          <dgm:ruleLst>
+            <dgm:rule type="h" val="INF" fact="NaN" max="NaN"/>
+            <dgm:rule type="primFontSz" val="14" fact="NaN" max="NaN"/>
+          </dgm:ruleLst>
+        </dgm:layoutNode>
+        <dgm:layoutNode name="desTx" styleLbl="alignAccFollowNode1">
+          <dgm:varLst/>
+          <dgm:alg type="tx">
+            <dgm:param type="stBulletLvl" val="0"/>
+            <dgm:param type="txAnchorVert" val="t"/>
+            <dgm:param type="parTxLTRAlign" val="l"/>
+            <dgm:param type="shpTxLTRAlignCh" val="l"/>
+            <dgm:param type="parTxRTLAlign" val="r"/>
+            <dgm:param type="shpTxRTLAlignCh" val="r"/>
+          </dgm:alg>
+          <dgm:shape xmlns:r="http://schemas.openxmlformats.org/officeDocument/2006/relationships" type="rect" r:blip="">
+            <dgm:adjLst/>
+          </dgm:shape>
+          <dgm:presOf axis="des" ptType="node"/>
+          <dgm:constrLst>
+            <dgm:constr type="primFontSz" val="20"/>
+            <dgm:constr type="tMarg" refType="w" fact="0.224"/>
+            <dgm:constr type="bMarg" refType="w" fact="0.448"/>
+            <dgm:constr type="lMarg" refType="w" fact="0.224"/>
+            <dgm:constr type="rMarg" refType="w" fact="0.224"/>
+          </dgm:constrLst>
+          <dgm:ruleLst>
+            <dgm:rule type="h" val="INF" fact="NaN" max="NaN"/>
+            <dgm:rule type="primFontSz" val="11" fact="NaN" max="NaN"/>
+          </dgm:ruleLst>
+        </dgm:layoutNode>
+      </dgm:layoutNode>
+      <dgm:forEach name="Name19" axis="followSib" ptType="sibTrans" cnt="1">
+        <dgm:layoutNode name="space">
+          <dgm:alg type="sp"/>
+          <dgm:shape xmlns:r="http://schemas.openxmlformats.org/officeDocument/2006/relationships" r:blip="">
+            <dgm:adjLst/>
+          </dgm:shape>
+          <dgm:presOf/>
+          <dgm:constrLst/>
+          <dgm:ruleLst/>
+        </dgm:layoutNode>
+      </dgm:forEach>
+    </dgm:forEach>
+  </dgm:layoutNode>
+</dgm:layoutDef>
+</file>
+
+<file path=ppt/diagrams/quickStyle1.xml><?xml version="1.0" encoding="utf-8"?>
+<dgm:styleDef xmlns:dgm="http://schemas.openxmlformats.org/drawingml/2006/diagram" xmlns:a="http://schemas.openxmlformats.org/drawingml/2006/main" uniqueId="urn:microsoft.com/office/officeart/2005/8/quickstyle/simple4">
+  <dgm:title val=""/>
+  <dgm:desc val=""/>
+  <dgm:catLst>
+    <dgm:cat type="simple" pri="10400"/>
+  </dgm:catLst>
+  <dgm:scene3d>
+    <a:camera prst="orthographicFront"/>
+    <a:lightRig rig="threePt" dir="t"/>
+  </dgm:scene3d>
+  <dgm:styleLbl name="node0">
+    <dgm:scene3d>
+      <a:camera prst="orthographicFront"/>
+      <a:lightRig rig="threePt" dir="t"/>
+    </dgm:scene3d>
+    <dgm:sp3d/>
+    <dgm:txPr/>
+    <dgm:style>
+      <a:lnRef idx="0">
+        <a:scrgbClr r="0" g="0" b="0"/>
+      </a:lnRef>
+      <a:fillRef idx="3">
+        <a:scrgbClr r="0" g="0" b="0"/>
+      </a:fillRef>
+      <a:effectRef idx="2">
+        <a:scrgbClr r="0" g="0" b="0"/>
+      </a:effectRef>
+      <a:fontRef idx="minor">
+        <a:schemeClr val="lt1"/>
+      </a:fontRef>
+    </dgm:style>
+  </dgm:styleLbl>
+  <dgm:styleLbl name="lnNode1">
+    <dgm:scene3d>
+      <a:camera prst="orthographicFront"/>
+      <a:lightRig rig="threePt" dir="t"/>
+    </dgm:scene3d>
+    <dgm:sp3d/>
+    <dgm:txPr/>
+    <dgm:style>
+      <a:lnRef idx="1">
+        <a:scrgbClr r="0" g="0" b="0"/>
+      </a:lnRef>
+      <a:fillRef idx="3">
+        <a:scrgbClr r="0" g="0" b="0"/>
+      </a:fillRef>
+      <a:effectRef idx="2">
+        <a:scrgbClr r="0" g="0" b="0"/>
+      </a:effectRef>
+      <a:fontRef idx="minor">
+        <a:schemeClr val="lt1"/>
+      </a:fontRef>
+    </dgm:style>
+  </dgm:styleLbl>
+  <dgm:styleLbl name="vennNode1">
+    <dgm:scene3d>
+      <a:camera prst="orthographicFront"/>
+      <a:lightRig rig="threePt" dir="t"/>
+    </dgm:scene3d>
+    <dgm:sp3d/>
+    <dgm:txPr/>
+    <dgm:style>
+      <a:lnRef idx="0">
+        <a:scrgbClr r="0" g="0" b="0"/>
+      </a:lnRef>
+      <a:fillRef idx="3">
+        <a:scrgbClr r="0" g="0" b="0"/>
+      </a:fillRef>
+      <a:effectRef idx="0">
+        <a:scrgbClr r="0" g="0" b="0"/>
+      </a:effectRef>
+      <a:fontRef idx="minor">
+        <a:schemeClr val="tx1"/>
+      </a:fontRef>
+    </dgm:style>
+  </dgm:styleLbl>
+  <dgm:styleLbl name="alignNode1">
+    <dgm:scene3d>
+      <a:camera prst="orthographicFront"/>
+      <a:lightRig rig="threePt" dir="t"/>
+    </dgm:scene3d>
+    <dgm:sp3d/>
+    <dgm:txPr/>
+    <dgm:style>
+      <a:lnRef idx="1">
+        <a:scrgbClr r="0" g="0" b="0"/>
+      </a:lnRef>
+      <a:fillRef idx="3">
+        <a:scrgbClr r="0" g="0" b="0"/>
+      </a:fillRef>
+      <a:effectRef idx="2">
+        <a:scrgbClr r="0" g="0" b="0"/>
+      </a:effectRef>
+      <a:fontRef idx="minor">
+        <a:schemeClr val="lt1"/>
+      </a:fontRef>
+    </dgm:style>
+  </dgm:styleLbl>
+  <dgm:styleLbl name="node1">
+    <dgm:scene3d>
+      <a:camera prst="orthographicFront"/>
+      <a:lightRig rig="threePt" dir="t"/>
+    </dgm:scene3d>
+    <dgm:sp3d/>
+    <dgm:txPr/>
+    <dgm:style>
+      <a:lnRef idx="0">
+        <a:scrgbClr r="0" g="0" b="0"/>
+      </a:lnRef>
+      <a:fillRef idx="3">
+        <a:scrgbClr r="0" g="0" b="0"/>
+      </a:fillRef>
+      <a:effectRef idx="2">
+        <a:scrgbClr r="0" g="0" b="0"/>
+      </a:effectRef>
+      <a:fontRef idx="minor">
+        <a:schemeClr val="lt1"/>
+      </a:fontRef>
+    </dgm:style>
+  </dgm:styleLbl>
+  <dgm:styleLbl name="node2">
+    <dgm:scene3d>
+      <a:camera prst="orthographicFront"/>
+      <a:lightRig rig="threePt" dir="t"/>
+    </dgm:scene3d>
+    <dgm:sp3d/>
+    <dgm:txPr/>
+    <dgm:style>
+      <a:lnRef idx="0">
+        <a:scrgbClr r="0" g="0" b="0"/>
+      </a:lnRef>
+      <a:fillRef idx="3">
+        <a:scrgbClr r="0" g="0" b="0"/>
+      </a:fillRef>
+      <a:effectRef idx="2">
+        <a:scrgbClr r="0" g="0" b="0"/>
+      </a:effectRef>
+      <a:fontRef idx="minor">
+        <a:schemeClr val="lt1"/>
+      </a:fontRef>
+    </dgm:style>
+  </dgm:styleLbl>
+  <dgm:styleLbl name="node3">
+    <dgm:scene3d>
+      <a:camera prst="orthographicFront"/>
+      <a:lightRig rig="threePt" dir="t"/>
+    </dgm:scene3d>
+    <dgm:sp3d/>
+    <dgm:txPr/>
+    <dgm:style>
+      <a:lnRef idx="0">
+        <a:scrgbClr r="0" g="0" b="0"/>
+      </a:lnRef>
+      <a:fillRef idx="3">
+        <a:scrgbClr r="0" g="0" b="0"/>
+      </a:fillRef>
+      <a:effectRef idx="2">
+        <a:scrgbClr r="0" g="0" b="0"/>
+      </a:effectRef>
+      <a:fontRef idx="minor">
+        <a:schemeClr val="lt1"/>
+      </a:fontRef>
+    </dgm:style>
+  </dgm:styleLbl>
+  <dgm:styleLbl name="node4">
+    <dgm:scene3d>
+      <a:camera prst="orthographicFront"/>
+      <a:lightRig rig="threePt" dir="t"/>
+    </dgm:scene3d>
+    <dgm:sp3d/>
+    <dgm:txPr/>
+    <dgm:style>
+      <a:lnRef idx="0">
+        <a:scrgbClr r="0" g="0" b="0"/>
+      </a:lnRef>
+      <a:fillRef idx="3">
+        <a:scrgbClr r="0" g="0" b="0"/>
+      </a:fillRef>
+      <a:effectRef idx="2">
+        <a:scrgbClr r="0" g="0" b="0"/>
+      </a:effectRef>
+      <a:fontRef idx="minor">
+        <a:schemeClr val="lt1"/>
+      </a:fontRef>
+    </dgm:style>
+  </dgm:styleLbl>
+  <dgm:styleLbl name="fgImgPlace1">
+    <dgm:scene3d>
+      <a:camera prst="orthographicFront"/>
+      <a:lightRig rig="threePt" dir="t"/>
+    </dgm:scene3d>
+    <dgm:sp3d/>
+    <dgm:txPr/>
+    <dgm:style>
+      <a:lnRef idx="0">
+        <a:scrgbClr r="0" g="0" b="0"/>
+      </a:lnRef>
+      <a:fillRef idx="1">
+        <a:scrgbClr r="0" g="0" b="0"/>
+      </a:fillRef>
+      <a:effectRef idx="2">
+        <a:scrgbClr r="0" g="0" b="0"/>
+      </a:effectRef>
+      <a:fontRef idx="minor"/>
+    </dgm:style>
+  </dgm:styleLbl>
+  <dgm:styleLbl name="alignImgPlace1">
+    <dgm:scene3d>
+      <a:camera prst="orthographicFront"/>
+      <a:lightRig rig="threePt" dir="t"/>
+    </dgm:scene3d>
+    <dgm:sp3d/>
+    <dgm:txPr/>
+    <dgm:style>
+      <a:lnRef idx="0">
+        <a:scrgbClr r="0" g="0" b="0"/>
+      </a:lnRef>
+      <a:fillRef idx="1">
+        <a:scrgbClr r="0" g="0" b="0"/>
+      </a:fillRef>
+      <a:effectRef idx="2">
+        <a:scrgbClr r="0" g="0" b="0"/>
+      </a:effectRef>
+      <a:fontRef idx="minor"/>
+    </dgm:style>
+  </dgm:styleLbl>
+  <dgm:styleLbl name="bgImgPlace1">
+    <dgm:scene3d>
+      <a:camera prst="orthographicFront"/>
+      <a:lightRig rig="threePt" dir="t"/>
+    </dgm:scene3d>
+    <dgm:sp3d/>
+    <dgm:txPr/>
+    <dgm:style>
+      <a:lnRef idx="0">
+        <a:scrgbClr r="0" g="0" b="0"/>
+      </a:lnRef>
+      <a:fillRef idx="1">
+        <a:scrgbClr r="0" g="0" b="0"/>
+      </a:fillRef>
+      <a:effectRef idx="2">
+        <a:scrgbClr r="0" g="0" b="0"/>
+      </a:effectRef>
+      <a:fontRef idx="minor"/>
+    </dgm:style>
+  </dgm:styleLbl>
+  <dgm:styleLbl name="sibTrans2D1">
+    <dgm:scene3d>
+      <a:camera prst="orthographicFront"/>
+      <a:lightRig rig="threePt" dir="t"/>
+    </dgm:scene3d>
+    <dgm:sp3d/>
+    <dgm:txPr/>
+    <dgm:style>
+      <a:lnRef idx="0">
+        <a:scrgbClr r="0" g="0" b="0"/>
+      </a:lnRef>
+      <a:fillRef idx="3">
+        <a:scrgbClr r="0" g="0" b="0"/>
+      </a:fillRef>
+      <a:effectRef idx="2">
+        <a:scrgbClr r="0" g="0" b="0"/>
+      </a:effectRef>
+      <a:fontRef idx="minor">
+        <a:schemeClr val="lt1"/>
+      </a:fontRef>
+    </dgm:style>
+  </dgm:styleLbl>
+  <dgm:styleLbl name="fgSibTrans2D1">
+    <dgm:scene3d>
+      <a:camera prst="orthographicFront"/>
+      <a:lightRig rig="threePt" dir="t"/>
+    </dgm:scene3d>
+    <dgm:sp3d/>
+    <dgm:txPr/>
+    <dgm:style>
+      <a:lnRef idx="0">
+        <a:scrgbClr r="0" g="0" b="0"/>
+      </a:lnRef>
+      <a:fillRef idx="3">
+        <a:scrgbClr r="0" g="0" b="0"/>
+      </a:fillRef>
+      <a:effectRef idx="2">
+        <a:scrgbClr r="0" g="0" b="0"/>
+      </a:effectRef>
+      <a:fontRef idx="minor">
+        <a:schemeClr val="lt1"/>
+      </a:fontRef>
+    </dgm:style>
+  </dgm:styleLbl>
+  <dgm:styleLbl name="bgSibTrans2D1">
+    <dgm:scene3d>
+      <a:camera prst="orthographicFront"/>
+      <a:lightRig rig="threePt" dir="t"/>
+    </dgm:scene3d>
+    <dgm:sp3d/>
+    <dgm:txPr/>
+    <dgm:style>
+      <a:lnRef idx="0">
+        <a:scrgbClr r="0" g="0" b="0"/>
+      </a:lnRef>
+      <a:fillRef idx="3">
+        <a:scrgbClr r="0" g="0" b="0"/>
+      </a:fillRef>
+      <a:effectRef idx="2">
+        <a:scrgbClr r="0" g="0" b="0"/>
+      </a:effectRef>
+      <a:fontRef idx="minor">
+        <a:schemeClr val="lt1"/>
+      </a:fontRef>
+    </dgm:style>
+  </dgm:styleLbl>
+  <dgm:styleLbl name="sibTrans1D1">
+    <dgm:scene3d>
+      <a:camera prst="orthographicFront"/>
+      <a:lightRig rig="threePt" dir="t"/>
+    </dgm:scene3d>
+    <dgm:sp3d/>
+    <dgm:txPr/>
+    <dgm:style>
+      <a:lnRef idx="1">
+        <a:scrgbClr r="0" g="0" b="0"/>
+      </a:lnRef>
+      <a:fillRef idx="0">
+        <a:scrgbClr r="0" g="0" b="0"/>
+      </a:fillRef>
+      <a:effectRef idx="0">
+        <a:scrgbClr r="0" g="0" b="0"/>
+      </a:effectRef>
+      <a:fontRef idx="minor"/>
+    </dgm:style>
+  </dgm:styleLbl>
+  <dgm:styleLbl name="callout">
+    <dgm:scene3d>
+      <a:camera prst="orthographicFront"/>
+      <a:lightRig rig="threePt" dir="t"/>
+    </dgm:scene3d>
+    <dgm:sp3d/>
+    <dgm:txPr/>
+    <dgm:style>
+      <a:lnRef idx="2">
+        <a:scrgbClr r="0" g="0" b="0"/>
+      </a:lnRef>
+      <a:fillRef idx="1">
+        <a:scrgbClr r="0" g="0" b="0"/>
+      </a:fillRef>
+      <a:effectRef idx="1">
+        <a:scrgbClr r="0" g="0" b="0"/>
+      </a:effectRef>
+      <a:fontRef idx="minor"/>
+    </dgm:style>
+  </dgm:styleLbl>
+  <dgm:styleLbl name="asst0">
+    <dgm:scene3d>
+      <a:camera prst="orthographicFront"/>
+      <a:lightRig rig="threePt" dir="t"/>
+    </dgm:scene3d>
+    <dgm:sp3d/>
+    <dgm:txPr/>
+    <dgm:style>
+      <a:lnRef idx="0">
+        <a:scrgbClr r="0" g="0" b="0"/>
+      </a:lnRef>
+      <a:fillRef idx="3">
+        <a:scrgbClr r="0" g="0" b="0"/>
+      </a:fillRef>
+      <a:effectRef idx="2">
+        <a:scrgbClr r="0" g="0" b="0"/>
+      </a:effectRef>
+      <a:fontRef idx="minor">
+        <a:schemeClr val="lt1"/>
+      </a:fontRef>
+    </dgm:style>
+  </dgm:styleLbl>
+  <dgm:styleLbl name="asst1">
+    <dgm:scene3d>
+      <a:camera prst="orthographicFront"/>
+      <a:lightRig rig="threePt" dir="t"/>
+    </dgm:scene3d>
+    <dgm:sp3d/>
+    <dgm:txPr/>
+    <dgm:style>
+      <a:lnRef idx="0">
+        <a:scrgbClr r="0" g="0" b="0"/>
+      </a:lnRef>
+      <a:fillRef idx="3">
+        <a:scrgbClr r="0" g="0" b="0"/>
+      </a:fillRef>
+      <a:effectRef idx="2">
+        <a:scrgbClr r="0" g="0" b="0"/>
+      </a:effectRef>
+      <a:fontRef idx="minor">
+        <a:schemeClr val="lt1"/>
+      </a:fontRef>
+    </dgm:style>
+  </dgm:styleLbl>
+  <dgm:styleLbl name="asst2">
+    <dgm:scene3d>
+      <a:camera prst="orthographicFront"/>
+      <a:lightRig rig="threePt" dir="t"/>
+    </dgm:scene3d>
+    <dgm:sp3d/>
+    <dgm:txPr/>
+    <dgm:style>
+      <a:lnRef idx="0">
+        <a:scrgbClr r="0" g="0" b="0"/>
+      </a:lnRef>
+      <a:fillRef idx="3">
+        <a:scrgbClr r="0" g="0" b="0"/>
+      </a:fillRef>
+      <a:effectRef idx="2">
+        <a:scrgbClr r="0" g="0" b="0"/>
+      </a:effectRef>
+      <a:fontRef idx="minor">
+        <a:schemeClr val="lt1"/>
+      </a:fontRef>
+    </dgm:style>
+  </dgm:styleLbl>
+  <dgm:styleLbl name="asst3">
+    <dgm:scene3d>
+      <a:camera prst="orthographicFront"/>
+      <a:lightRig rig="threePt" dir="t"/>
+    </dgm:scene3d>
+    <dgm:sp3d/>
+    <dgm:txPr/>
+    <dgm:style>
+      <a:lnRef idx="0">
+        <a:scrgbClr r="0" g="0" b="0"/>
+      </a:lnRef>
+      <a:fillRef idx="3">
+        <a:scrgbClr r="0" g="0" b="0"/>
+      </a:fillRef>
+      <a:effectRef idx="2">
+        <a:scrgbClr r="0" g="0" b="0"/>
+      </a:effectRef>
+      <a:fontRef idx="minor">
+        <a:schemeClr val="lt1"/>
+      </a:fontRef>
+    </dgm:style>
+  </dgm:styleLbl>
+  <dgm:styleLbl name="asst4">
+    <dgm:scene3d>
+      <a:camera prst="orthographicFront"/>
+      <a:lightRig rig="threePt" dir="t"/>
+    </dgm:scene3d>
+    <dgm:sp3d/>
+    <dgm:txPr/>
+    <dgm:style>
+      <a:lnRef idx="0">
+        <a:scrgbClr r="0" g="0" b="0"/>
+      </a:lnRef>
+      <a:fillRef idx="3">
+        <a:scrgbClr r="0" g="0" b="0"/>
+      </a:fillRef>
+      <a:effectRef idx="2">
+        <a:scrgbClr r="0" g="0" b="0"/>
+      </a:effectRef>
+      <a:fontRef idx="minor">
+        <a:schemeClr val="lt1"/>
+      </a:fontRef>
+    </dgm:style>
+  </dgm:styleLbl>
+  <dgm:styleLbl name="parChTrans2D1">
+    <dgm:scene3d>
+      <a:camera prst="orthographicFront"/>
+      <a:lightRig rig="threePt" dir="t"/>
+    </dgm:scene3d>
+    <dgm:sp3d/>
+    <dgm:txPr/>
+    <dgm:style>
+      <a:lnRef idx="0">
+        <a:scrgbClr r="0" g="0" b="0"/>
+      </a:lnRef>
+      <a:fillRef idx="3">
+        <a:scrgbClr r="0" g="0" b="0"/>
+      </a:fillRef>
+      <a:effectRef idx="2">
+        <a:scrgbClr r="0" g="0" b="0"/>
+      </a:effectRef>
+      <a:fontRef idx="minor">
+        <a:schemeClr val="lt1"/>
+      </a:fontRef>
+    </dgm:style>
+  </dgm:styleLbl>
+  <dgm:styleLbl name="parChTrans2D2">
+    <dgm:scene3d>
+      <a:camera prst="orthographicFront"/>
+      <a:lightRig rig="threePt" dir="t"/>
+    </dgm:scene3d>
+    <dgm:sp3d/>
+    <dgm:txPr/>
+    <dgm:style>
+      <a:lnRef idx="0">
+        <a:scrgbClr r="0" g="0" b="0"/>
+      </a:lnRef>
+      <a:fillRef idx="3">
+        <a:scrgbClr r="0" g="0" b="0"/>
+      </a:fillRef>
+      <a:effectRef idx="2">
+        <a:scrgbClr r="0" g="0" b="0"/>
+      </a:effectRef>
+      <a:fontRef idx="minor">
+        <a:schemeClr val="lt1"/>
+      </a:fontRef>
+    </dgm:style>
+  </dgm:styleLbl>
+  <dgm:styleLbl name="parChTrans2D3">
+    <dgm:scene3d>
+      <a:camera prst="orthographicFront"/>
+      <a:lightRig rig="threePt" dir="t"/>
+    </dgm:scene3d>
+    <dgm:sp3d/>
+    <dgm:txPr/>
+    <dgm:style>
+      <a:lnRef idx="1">
+        <a:scrgbClr r="0" g="0" b="0"/>
+      </a:lnRef>
+      <a:fillRef idx="3">
+        <a:scrgbClr r="0" g="0" b="0"/>
+      </a:fillRef>
+      <a:effectRef idx="2">
+        <a:scrgbClr r="0" g="0" b="0"/>
+      </a:effectRef>
+      <a:fontRef idx="minor">
+        <a:schemeClr val="lt1"/>
+      </a:fontRef>
+    </dgm:style>
+  </dgm:styleLbl>
+  <dgm:styleLbl name="parChTrans2D4">
+    <dgm:scene3d>
+      <a:camera prst="orthographicFront"/>
+      <a:lightRig rig="threePt" dir="t"/>
+    </dgm:scene3d>
+    <dgm:sp3d/>
+    <dgm:txPr/>
+    <dgm:style>
+      <a:lnRef idx="1">
+        <a:scrgbClr r="0" g="0" b="0"/>
+      </a:lnRef>
+      <a:fillRef idx="3">
+        <a:scrgbClr r="0" g="0" b="0"/>
+      </a:fillRef>
+      <a:effectRef idx="2">
+        <a:scrgbClr r="0" g="0" b="0"/>
+      </a:effectRef>
+      <a:fontRef idx="minor">
+        <a:schemeClr val="lt1"/>
+      </a:fontRef>
+    </dgm:style>
+  </dgm:styleLbl>
+  <dgm:styleLbl name="parChTrans1D1">
+    <dgm:scene3d>
+      <a:camera prst="orthographicFront"/>
+      <a:lightRig rig="threePt" dir="t"/>
+    </dgm:scene3d>
+    <dgm:sp3d/>
+    <dgm:txPr/>
+    <dgm:style>
+      <a:lnRef idx="1">
+        <a:scrgbClr r="0" g="0" b="0"/>
+      </a:lnRef>
+      <a:fillRef idx="0">
+        <a:scrgbClr r="0" g="0" b="0"/>
+      </a:fillRef>
+      <a:effectRef idx="0">
+        <a:scrgbClr r="0" g="0" b="0"/>
+      </a:effectRef>
+      <a:fontRef idx="minor"/>
+    </dgm:style>
+  </dgm:styleLbl>
+  <dgm:styleLbl name="parChTrans1D2">
+    <dgm:scene3d>
+      <a:camera prst="orthographicFront"/>
+      <a:lightRig rig="threePt" dir="t"/>
+    </dgm:scene3d>
+    <dgm:sp3d/>
+    <dgm:txPr/>
+    <dgm:style>
+      <a:lnRef idx="1">
+        <a:scrgbClr r="0" g="0" b="0"/>
+      </a:lnRef>
+      <a:fillRef idx="0">
+        <a:scrgbClr r="0" g="0" b="0"/>
+      </a:fillRef>
+      <a:effectRef idx="0">
+        <a:scrgbClr r="0" g="0" b="0"/>
+      </a:effectRef>
+      <a:fontRef idx="minor"/>
+    </dgm:style>
+  </dgm:styleLbl>
+  <dgm:styleLbl name="parChTrans1D3">
+    <dgm:scene3d>
+      <a:camera prst="orthographicFront"/>
+      <a:lightRig rig="threePt" dir="t"/>
+    </dgm:scene3d>
+    <dgm:sp3d/>
+    <dgm:txPr/>
+    <dgm:style>
+      <a:lnRef idx="1">
+        <a:scrgbClr r="0" g="0" b="0"/>
+      </a:lnRef>
+      <a:fillRef idx="0">
+        <a:scrgbClr r="0" g="0" b="0"/>
+      </a:fillRef>
+      <a:effectRef idx="0">
+        <a:scrgbClr r="0" g="0" b="0"/>
+      </a:effectRef>
+      <a:fontRef idx="minor"/>
+    </dgm:style>
+  </dgm:styleLbl>
+  <dgm:styleLbl name="parChTrans1D4">
+    <dgm:scene3d>
+      <a:camera prst="orthographicFront"/>
+      <a:lightRig rig="threePt" dir="t"/>
+    </dgm:scene3d>
+    <dgm:sp3d/>
+    <dgm:txPr/>
+    <dgm:style>
+      <a:lnRef idx="1">
+        <a:scrgbClr r="0" g="0" b="0"/>
+      </a:lnRef>
+      <a:fillRef idx="0">
+        <a:scrgbClr r="0" g="0" b="0"/>
+      </a:fillRef>
+      <a:effectRef idx="0">
+        <a:scrgbClr r="0" g="0" b="0"/>
+      </a:effectRef>
+      <a:fontRef idx="minor"/>
+    </dgm:style>
+  </dgm:styleLbl>
+  <dgm:styleLbl name="fgAcc1">
+    <dgm:scene3d>
+      <a:camera prst="orthographicFront"/>
+      <a:lightRig rig="threePt" dir="t"/>
+    </dgm:scene3d>
+    <dgm:sp3d/>
+    <dgm:txPr/>
+    <dgm:style>
+      <a:lnRef idx="1">
+        <a:scrgbClr r="0" g="0" b="0"/>
+      </a:lnRef>
+      <a:fillRef idx="1">
+        <a:scrgbClr r="0" g="0" b="0"/>
+      </a:fillRef>
+      <a:effectRef idx="0">
+        <a:scrgbClr r="0" g="0" b="0"/>
+      </a:effectRef>
+      <a:fontRef idx="minor"/>
+    </dgm:style>
+  </dgm:styleLbl>
+  <dgm:styleLbl name="conFgAcc1">
+    <dgm:scene3d>
+      <a:camera prst="orthographicFront"/>
+      <a:lightRig rig="threePt" dir="t"/>
+    </dgm:scene3d>
+    <dgm:sp3d/>
+    <dgm:txPr/>
+    <dgm:style>
+      <a:lnRef idx="1">
+        <a:scrgbClr r="0" g="0" b="0"/>
+      </a:lnRef>
+      <a:fillRef idx="1">
+        <a:scrgbClr r="0" g="0" b="0"/>
+      </a:fillRef>
+      <a:effectRef idx="0">
+        <a:scrgbClr r="0" g="0" b="0"/>
+      </a:effectRef>
+      <a:fontRef idx="minor"/>
+    </dgm:style>
+  </dgm:styleLbl>
+  <dgm:styleLbl name="alignAcc1">
+    <dgm:scene3d>
+      <a:camera prst="orthographicFront"/>
+      <a:lightRig rig="threePt" dir="t"/>
+    </dgm:scene3d>
+    <dgm:sp3d/>
+    <dgm:txPr/>
+    <dgm:style>
+      <a:lnRef idx="1">
+        <a:scrgbClr r="0" g="0" b="0"/>
+      </a:lnRef>
+      <a:fillRef idx="1">
+        <a:scrgbClr r="0" g="0" b="0"/>
+      </a:fillRef>
+      <a:effectRef idx="0">
+        <a:scrgbClr r="0" g="0" b="0"/>
+      </a:effectRef>
+      <a:fontRef idx="minor"/>
+    </dgm:style>
+  </dgm:styleLbl>
+  <dgm:styleLbl name="trAlignAcc1">
+    <dgm:scene3d>
+      <a:camera prst="orthographicFront"/>
+      <a:lightRig rig="threePt" dir="t"/>
+    </dgm:scene3d>
+    <dgm:sp3d/>
+    <dgm:txPr/>
+    <dgm:style>
+      <a:lnRef idx="1">
+        <a:scrgbClr r="0" g="0" b="0"/>
+      </a:lnRef>
+      <a:fillRef idx="1">
+        <a:scrgbClr r="0" g="0" b="0"/>
+      </a:fillRef>
+      <a:effectRef idx="0">
+        <a:scrgbClr r="0" g="0" b="0"/>
+      </a:effectRef>
+      <a:fontRef idx="minor"/>
+    </dgm:style>
+  </dgm:styleLbl>
+  <dgm:styleLbl name="bgAcc1">
+    <dgm:scene3d>
+      <a:camera prst="orthographicFront"/>
+      <a:lightRig rig="threePt" dir="t"/>
+    </dgm:scene3d>
+    <dgm:sp3d/>
+    <dgm:txPr/>
+    <dgm:style>
+      <a:lnRef idx="1">
+        <a:scrgbClr r="0" g="0" b="0"/>
+      </a:lnRef>
+      <a:fillRef idx="1">
+        <a:scrgbClr r="0" g="0" b="0"/>
+      </a:fillRef>
+      <a:effectRef idx="0">
+        <a:scrgbClr r="0" g="0" b="0"/>
+      </a:effectRef>
+      <a:fontRef idx="minor"/>
+    </dgm:style>
+  </dgm:styleLbl>
+  <dgm:styleLbl name="solidFgAcc1">
+    <dgm:scene3d>
+      <a:camera prst="orthographicFront"/>
+      <a:lightRig rig="threePt" dir="t"/>
+    </dgm:scene3d>
+    <dgm:sp3d/>
+    <dgm:txPr/>
+    <dgm:style>
+      <a:lnRef idx="1">
+        <a:scrgbClr r="0" g="0" b="0"/>
+      </a:lnRef>
+      <a:fillRef idx="1">
+        <a:scrgbClr r="0" g="0" b="0"/>
+      </a:fillRef>
+      <a:effectRef idx="0">
+        <a:scrgbClr r="0" g="0" b="0"/>
+      </a:effectRef>
+      <a:fontRef idx="minor"/>
+    </dgm:style>
+  </dgm:styleLbl>
+  <dgm:styleLbl name="solidAlignAcc1">
+    <dgm:scene3d>
+      <a:camera prst="orthographicFront"/>
+      <a:lightRig rig="threePt" dir="t"/>
+    </dgm:scene3d>
+    <dgm:sp3d/>
+    <dgm:txPr/>
+    <dgm:style>
+      <a:lnRef idx="1">
+        <a:scrgbClr r="0" g="0" b="0"/>
+      </a:lnRef>
+      <a:fillRef idx="1">
+        <a:scrgbClr r="0" g="0" b="0"/>
+      </a:fillRef>
+      <a:effectRef idx="0">
+        <a:scrgbClr r="0" g="0" b="0"/>
+      </a:effectRef>
+      <a:fontRef idx="minor"/>
+    </dgm:style>
+  </dgm:styleLbl>
+  <dgm:styleLbl name="solidBgAcc1">
+    <dgm:scene3d>
+      <a:camera prst="orthographicFront"/>
+      <a:lightRig rig="threePt" dir="t"/>
+    </dgm:scene3d>
+    <dgm:sp3d/>
+    <dgm:txPr/>
+    <dgm:style>
+      <a:lnRef idx="1">
+        <a:scrgbClr r="0" g="0" b="0"/>
+      </a:lnRef>
+      <a:fillRef idx="1">
+        <a:scrgbClr r="0" g="0" b="0"/>
+      </a:fillRef>
+      <a:effectRef idx="0">
+        <a:scrgbClr r="0" g="0" b="0"/>
+      </a:effectRef>
+      <a:fontRef idx="minor"/>
+    </dgm:style>
+  </dgm:styleLbl>
+  <dgm:styleLbl name="fgAccFollowNode1">
+    <dgm:scene3d>
+      <a:camera prst="orthographicFront"/>
+      <a:lightRig rig="threePt" dir="t"/>
+    </dgm:scene3d>
+    <dgm:sp3d/>
+    <dgm:txPr/>
+    <dgm:style>
+      <a:lnRef idx="1">
+        <a:scrgbClr r="0" g="0" b="0"/>
+      </a:lnRef>
+      <a:fillRef idx="1">
+        <a:scrgbClr r="0" g="0" b="0"/>
+      </a:fillRef>
+      <a:effectRef idx="0">
+        <a:scrgbClr r="0" g="0" b="0"/>
+      </a:effectRef>
+      <a:fontRef idx="minor"/>
+    </dgm:style>
+  </dgm:styleLbl>
+  <dgm:styleLbl name="alignAccFollowNode1">
+    <dgm:scene3d>
+      <a:camera prst="orthographicFront"/>
+      <a:lightRig rig="threePt" dir="t"/>
+    </dgm:scene3d>
+    <dgm:sp3d/>
+    <dgm:txPr/>
+    <dgm:style>
+      <a:lnRef idx="1">
+        <a:scrgbClr r="0" g="0" b="0"/>
+      </a:lnRef>
+      <a:fillRef idx="1">
+        <a:scrgbClr r="0" g="0" b="0"/>
+      </a:fillRef>
+      <a:effectRef idx="0">
+        <a:scrgbClr r="0" g="0" b="0"/>
+      </a:effectRef>
+      <a:fontRef idx="minor"/>
+    </dgm:style>
+  </dgm:styleLbl>
+  <dgm:styleLbl name="bgAccFollowNode1">
+    <dgm:scene3d>
+      <a:camera prst="orthographicFront"/>
+      <a:lightRig rig="threePt" dir="t"/>
+    </dgm:scene3d>
+    <dgm:sp3d/>
+    <dgm:txPr/>
+    <dgm:style>
+      <a:lnRef idx="1">
+        <a:scrgbClr r="0" g="0" b="0"/>
+      </a:lnRef>
+      <a:fillRef idx="1">
+        <a:scrgbClr r="0" g="0" b="0"/>
+      </a:fillRef>
+      <a:effectRef idx="0">
+        <a:scrgbClr r="0" g="0" b="0"/>
+      </a:effectRef>
+      <a:fontRef idx="minor"/>
+    </dgm:style>
+  </dgm:styleLbl>
+  <dgm:styleLbl name="fgAcc0">
+    <dgm:scene3d>
+      <a:camera prst="orthographicFront"/>
+      <a:lightRig rig="threePt" dir="t"/>
+    </dgm:scene3d>
+    <dgm:sp3d/>
+    <dgm:txPr/>
+    <dgm:style>
+      <a:lnRef idx="1">
+        <a:scrgbClr r="0" g="0" b="0"/>
+      </a:lnRef>
+      <a:fillRef idx="1">
+        <a:scrgbClr r="0" g="0" b="0"/>
+      </a:fillRef>
+      <a:effectRef idx="0">
+        <a:scrgbClr r="0" g="0" b="0"/>
+      </a:effectRef>
+      <a:fontRef idx="minor"/>
+    </dgm:style>
+  </dgm:styleLbl>
+  <dgm:styleLbl name="fgAcc2">
+    <dgm:scene3d>
+      <a:camera prst="orthographicFront"/>
+      <a:lightRig rig="threePt" dir="t"/>
+    </dgm:scene3d>
+    <dgm:sp3d/>
+    <dgm:txPr/>
+    <dgm:style>
+      <a:lnRef idx="1">
+        <a:scrgbClr r="0" g="0" b="0"/>
+      </a:lnRef>
+      <a:fillRef idx="1">
+        <a:scrgbClr r="0" g="0" b="0"/>
+      </a:fillRef>
+      <a:effectRef idx="0">
+        <a:scrgbClr r="0" g="0" b="0"/>
+      </a:effectRef>
+      <a:fontRef idx="minor"/>
+    </dgm:style>
+  </dgm:styleLbl>
+  <dgm:styleLbl name="fgAcc3">
+    <dgm:scene3d>
+      <a:camera prst="orthographicFront"/>
+      <a:lightRig rig="threePt" dir="t"/>
+    </dgm:scene3d>
+    <dgm:sp3d/>
+    <dgm:txPr/>
+    <dgm:style>
+      <a:lnRef idx="1">
+        <a:scrgbClr r="0" g="0" b="0"/>
+      </a:lnRef>
+      <a:fillRef idx="1">
+        <a:scrgbClr r="0" g="0" b="0"/>
+      </a:fillRef>
+      <a:effectRef idx="0">
+        <a:scrgbClr r="0" g="0" b="0"/>
+      </a:effectRef>
+      <a:fontRef idx="minor"/>
+    </dgm:style>
+  </dgm:styleLbl>
+  <dgm:styleLbl name="fgAcc4">
+    <dgm:scene3d>
+      <a:camera prst="orthographicFront"/>
+      <a:lightRig rig="threePt" dir="t"/>
+    </dgm:scene3d>
+    <dgm:sp3d/>
+    <dgm:txPr/>
+    <dgm:style>
+      <a:lnRef idx="1">
+        <a:scrgbClr r="0" g="0" b="0"/>
+      </a:lnRef>
+      <a:fillRef idx="1">
+        <a:scrgbClr r="0" g="0" b="0"/>
+      </a:fillRef>
+      <a:effectRef idx="0">
+        <a:scrgbClr r="0" g="0" b="0"/>
+      </a:effectRef>
+      <a:fontRef idx="minor"/>
+    </dgm:style>
+  </dgm:styleLbl>
+  <dgm:styleLbl name="bgShp">
+    <dgm:scene3d>
+      <a:camera prst="orthographicFront"/>
+      <a:lightRig rig="threePt" dir="t"/>
+    </dgm:scene3d>
+    <dgm:sp3d/>
+    <dgm:txPr/>
+    <dgm:style>
+      <a:lnRef idx="0">
+        <a:scrgbClr r="0" g="0" b="0"/>
+      </a:lnRef>
+      <a:fillRef idx="1">
+        <a:scrgbClr r="0" g="0" b="0"/>
+      </a:fillRef>
+      <a:effectRef idx="2">
+        <a:scrgbClr r="0" g="0" b="0"/>
+      </a:effectRef>
+      <a:fontRef idx="minor"/>
+    </dgm:style>
+  </dgm:styleLbl>
+  <dgm:styleLbl name="dkBgShp">
+    <dgm:scene3d>
+      <a:camera prst="orthographicFront"/>
+      <a:lightRig rig="threePt" dir="t"/>
+    </dgm:scene3d>
+    <dgm:sp3d/>
+    <dgm:txPr/>
+    <dgm:style>
+      <a:lnRef idx="0">
+        <a:scrgbClr r="0" g="0" b="0"/>
+      </a:lnRef>
+      <a:fillRef idx="1">
+        <a:scrgbClr r="0" g="0" b="0"/>
+      </a:fillRef>
+      <a:effectRef idx="2">
+        <a:scrgbClr r="0" g="0" b="0"/>
+      </a:effectRef>
+      <a:fontRef idx="minor"/>
+    </dgm:style>
+  </dgm:styleLbl>
+  <dgm:styleLbl name="trBgShp">
+    <dgm:scene3d>
+      <a:camera prst="orthographicFront"/>
+      <a:lightRig rig="threePt" dir="t"/>
+    </dgm:scene3d>
+    <dgm:sp3d/>
+    <dgm:txPr/>
+    <dgm:style>
+      <a:lnRef idx="0">
+        <a:scrgbClr r="0" g="0" b="0"/>
+      </a:lnRef>
+      <a:fillRef idx="1">
+        <a:scrgbClr r="0" g="0" b="0"/>
+      </a:fillRef>
+      <a:effectRef idx="0">
+        <a:scrgbClr r="0" g="0" b="0"/>
+      </a:effectRef>
+      <a:fontRef idx="minor"/>
+    </dgm:style>
+  </dgm:styleLbl>
+  <dgm:styleLbl name="fgShp">
+    <dgm:scene3d>
+      <a:camera prst="orthographicFront"/>
+      <a:lightRig rig="threePt" dir="t"/>
+    </dgm:scene3d>
+    <dgm:sp3d/>
+    <dgm:txPr/>
+    <dgm:style>
+      <a:lnRef idx="0">
+        <a:scrgbClr r="0" g="0" b="0"/>
+      </a:lnRef>
+      <a:fillRef idx="3">
+        <a:scrgbClr r="0" g="0" b="0"/>
+      </a:fillRef>
+      <a:effectRef idx="2">
+        <a:scrgbClr r="0" g="0" b="0"/>
+      </a:effectRef>
+      <a:fontRef idx="minor"/>
+    </dgm:style>
+  </dgm:styleLbl>
+  <dgm:styleLbl name="revTx">
+    <dgm:scene3d>
+      <a:camera prst="orthographicFront"/>
+      <a:lightRig rig="threePt" dir="t"/>
+    </dgm:scene3d>
+    <dgm:sp3d/>
+    <dgm:txPr/>
+    <dgm:style>
+      <a:lnRef idx="0">
+        <a:scrgbClr r="0" g="0" b="0"/>
+      </a:lnRef>
+      <a:fillRef idx="0">
+        <a:scrgbClr r="0" g="0" b="0"/>
+      </a:fillRef>
+      <a:effectRef idx="0">
+        <a:scrgbClr r="0" g="0" b="0"/>
+      </a:effectRef>
+      <a:fontRef idx="minor"/>
+    </dgm:style>
+  </dgm:styleLbl>
+</dgm:styleDef>
 </file>
 
 <file path=ppt/handoutMasters/handoutMaster1.xml><?xml version="1.0" encoding="utf-8"?>
@@ -808,6 +4090,589 @@
     <p:extLst>
       <p:ext uri="{BB962C8B-B14F-4D97-AF65-F5344CB8AC3E}">
         <p14:creationId xmlns:p14="http://schemas.microsoft.com/office/powerpoint/2010/main" val="3956595524"/>
+      </p:ext>
+    </p:extLst>
+  </p:cSld>
+  <p:clrMapOvr>
+    <a:masterClrMapping/>
+  </p:clrMapOvr>
+</p:notes>
+</file>
+
+<file path=ppt/notesSlides/notesSlide2.xml><?xml version="1.0" encoding="utf-8"?>
+<p:notes xmlns:a="http://schemas.openxmlformats.org/drawingml/2006/main" xmlns:r="http://schemas.openxmlformats.org/officeDocument/2006/relationships" xmlns:p="http://schemas.openxmlformats.org/presentationml/2006/main">
+  <p:cSld>
+    <p:spTree>
+      <p:nvGrpSpPr>
+        <p:cNvPr id="1" name=""/>
+        <p:cNvGrpSpPr/>
+        <p:nvPr/>
+      </p:nvGrpSpPr>
+      <p:grpSpPr>
+        <a:xfrm>
+          <a:off x="0" y="0"/>
+          <a:ext cx="0" cy="0"/>
+          <a:chOff x="0" y="0"/>
+          <a:chExt cx="0" cy="0"/>
+        </a:xfrm>
+      </p:grpSpPr>
+      <p:sp>
+        <p:nvSpPr>
+          <p:cNvPr id="2" name="Slide Image Placeholder 1"/>
+          <p:cNvSpPr>
+            <a:spLocks noGrp="1" noRot="1" noChangeAspect="1"/>
+          </p:cNvSpPr>
+          <p:nvPr>
+            <p:ph type="sldImg"/>
+          </p:nvPr>
+        </p:nvSpPr>
+        <p:spPr/>
+      </p:sp>
+      <p:sp>
+        <p:nvSpPr>
+          <p:cNvPr id="3" name="Notes Placeholder 2"/>
+          <p:cNvSpPr>
+            <a:spLocks noGrp="1"/>
+          </p:cNvSpPr>
+          <p:nvPr>
+            <p:ph type="body" idx="1"/>
+          </p:nvPr>
+        </p:nvSpPr>
+        <p:spPr/>
+        <p:txBody>
+          <a:bodyPr/>
+          <a:lstStyle/>
+          <a:p>
+            <a:r>
+              <a:rPr lang="en-AT" dirty="0"/>
+              <a:t>&lt;</a:t>
+            </a:r>
+            <a:r>
+              <a:rPr lang="en-AT" dirty="0" err="1"/>
+              <a:t>hitze</a:t>
+            </a:r>
+            <a:r>
+              <a:rPr lang="en-AT" dirty="0"/>
+              <a:t> </a:t>
+            </a:r>
+            <a:r>
+              <a:rPr lang="en-AT" dirty="0" err="1"/>
+              <a:t>grafik</a:t>
+            </a:r>
+            <a:r>
+              <a:rPr lang="en-AT" dirty="0"/>
+              <a:t>&gt; - </a:t>
+            </a:r>
+            <a:r>
+              <a:rPr lang="en-AT" dirty="0" err="1"/>
+              <a:t>wärmebild</a:t>
+            </a:r>
+            <a:r>
+              <a:rPr lang="en-AT" dirty="0"/>
+              <a:t> </a:t>
+            </a:r>
+            <a:r>
+              <a:rPr lang="en-AT" dirty="0" err="1"/>
+              <a:t>zB</a:t>
+            </a:r>
+            <a:endParaRPr lang="en-AT" dirty="0"/>
+          </a:p>
+          <a:p>
+            <a:r>
+              <a:rPr lang="de-AT" dirty="0"/>
+              <a:t>R</a:t>
+            </a:r>
+            <a:r>
+              <a:rPr lang="en-AT" dirty="0" err="1"/>
+              <a:t>eden</a:t>
+            </a:r>
+            <a:r>
+              <a:rPr lang="en-AT" dirty="0"/>
+              <a:t> </a:t>
+            </a:r>
+            <a:r>
+              <a:rPr lang="en-AT" dirty="0" err="1"/>
+              <a:t>über</a:t>
+            </a:r>
+            <a:r>
+              <a:rPr lang="en-AT" dirty="0"/>
+              <a:t> </a:t>
+            </a:r>
+            <a:r>
+              <a:rPr lang="en-AT" dirty="0" err="1"/>
+              <a:t>klimawandel</a:t>
+            </a:r>
+            <a:r>
+              <a:rPr lang="en-AT" dirty="0"/>
+              <a:t> – es </a:t>
+            </a:r>
+            <a:r>
+              <a:rPr lang="en-AT" dirty="0" err="1"/>
+              <a:t>wird</a:t>
+            </a:r>
+            <a:r>
+              <a:rPr lang="en-AT" dirty="0"/>
+              <a:t> </a:t>
+            </a:r>
+            <a:r>
+              <a:rPr lang="en-AT" dirty="0" err="1"/>
+              <a:t>wärmer</a:t>
+            </a:r>
+            <a:r>
+              <a:rPr lang="en-AT" dirty="0"/>
+              <a:t>, </a:t>
+            </a:r>
+            <a:r>
+              <a:rPr lang="en-AT" dirty="0" err="1"/>
+              <a:t>hitze</a:t>
+            </a:r>
+            <a:r>
+              <a:rPr lang="en-AT" dirty="0"/>
+              <a:t>, </a:t>
+            </a:r>
+            <a:r>
+              <a:rPr lang="en-AT" dirty="0" err="1"/>
+              <a:t>gefahren</a:t>
+            </a:r>
+            <a:endParaRPr lang="en-AT" dirty="0"/>
+          </a:p>
+          <a:p>
+            <a:endParaRPr lang="en-AT" dirty="0"/>
+          </a:p>
+          <a:p>
+            <a:r>
+              <a:rPr lang="en-AT" dirty="0"/>
+              <a:t>&lt;</a:t>
+            </a:r>
+            <a:r>
+              <a:rPr lang="en-AT" dirty="0" err="1"/>
+              <a:t>bild</a:t>
+            </a:r>
+            <a:r>
+              <a:rPr lang="en-AT" dirty="0"/>
+              <a:t> </a:t>
+            </a:r>
+            <a:r>
+              <a:rPr lang="en-AT" dirty="0" err="1"/>
+              <a:t>grün</a:t>
+            </a:r>
+            <a:r>
+              <a:rPr lang="en-AT" dirty="0"/>
+              <a:t>, </a:t>
+            </a:r>
+            <a:r>
+              <a:rPr lang="en-AT" dirty="0" err="1"/>
+              <a:t>bäume</a:t>
+            </a:r>
+            <a:r>
+              <a:rPr lang="en-AT" dirty="0"/>
+              <a:t>&gt;</a:t>
+            </a:r>
+          </a:p>
+          <a:p>
+            <a:r>
+              <a:rPr lang="de-AT" dirty="0"/>
+              <a:t>R</a:t>
+            </a:r>
+            <a:r>
+              <a:rPr lang="en-AT" dirty="0" err="1"/>
+              <a:t>eden</a:t>
+            </a:r>
+            <a:r>
+              <a:rPr lang="en-AT" dirty="0"/>
+              <a:t> </a:t>
+            </a:r>
+            <a:r>
+              <a:rPr lang="en-AT" dirty="0" err="1"/>
+              <a:t>über</a:t>
+            </a:r>
+            <a:r>
+              <a:rPr lang="en-AT" dirty="0"/>
+              <a:t> </a:t>
+            </a:r>
+            <a:r>
+              <a:rPr lang="en-AT" dirty="0" err="1"/>
+              <a:t>kühlfaktor</a:t>
+            </a:r>
+            <a:r>
+              <a:rPr lang="en-AT" dirty="0"/>
+              <a:t> von </a:t>
+            </a:r>
+            <a:r>
+              <a:rPr lang="en-AT" dirty="0" err="1"/>
+              <a:t>bäumen</a:t>
+            </a:r>
+            <a:endParaRPr lang="en-AT" dirty="0"/>
+          </a:p>
+          <a:p>
+            <a:r>
+              <a:rPr lang="en-AT" dirty="0" err="1"/>
+              <a:t>Bäume</a:t>
+            </a:r>
+            <a:r>
+              <a:rPr lang="en-AT" dirty="0"/>
+              <a:t>: </a:t>
+            </a:r>
+            <a:r>
+              <a:rPr lang="en-AT" dirty="0" err="1"/>
+              <a:t>Mikroklima</a:t>
+            </a:r>
+            <a:endParaRPr lang="en-AT" dirty="0"/>
+          </a:p>
+          <a:p>
+            <a:r>
+              <a:rPr lang="en-AT" dirty="0" err="1"/>
+              <a:t>Bäume</a:t>
+            </a:r>
+            <a:r>
+              <a:rPr lang="en-AT" dirty="0"/>
+              <a:t> </a:t>
+            </a:r>
+            <a:r>
+              <a:rPr lang="en-AT" dirty="0" err="1"/>
+              <a:t>Hochwasserschutz</a:t>
+            </a:r>
+            <a:endParaRPr lang="en-AT" dirty="0"/>
+          </a:p>
+          <a:p>
+            <a:endParaRPr lang="de-AT" dirty="0"/>
+          </a:p>
+        </p:txBody>
+      </p:sp>
+      <p:sp>
+        <p:nvSpPr>
+          <p:cNvPr id="4" name="Slide Number Placeholder 3"/>
+          <p:cNvSpPr>
+            <a:spLocks noGrp="1"/>
+          </p:cNvSpPr>
+          <p:nvPr>
+            <p:ph type="sldNum" sz="quarter" idx="5"/>
+          </p:nvPr>
+        </p:nvSpPr>
+        <p:spPr/>
+        <p:txBody>
+          <a:bodyPr/>
+          <a:lstStyle/>
+          <a:p>
+            <a:fld id="{219CC2FD-B32F-4992-A15B-F95E2E35C81B}" type="slidenum">
+              <a:rPr lang="de-AT" smtClean="0"/>
+              <a:pPr/>
+              <a:t>4</a:t>
+            </a:fld>
+            <a:endParaRPr lang="de-AT" dirty="0"/>
+          </a:p>
+        </p:txBody>
+      </p:sp>
+    </p:spTree>
+    <p:extLst>
+      <p:ext uri="{BB962C8B-B14F-4D97-AF65-F5344CB8AC3E}">
+        <p14:creationId xmlns:p14="http://schemas.microsoft.com/office/powerpoint/2010/main" val="487247566"/>
+      </p:ext>
+    </p:extLst>
+  </p:cSld>
+  <p:clrMapOvr>
+    <a:masterClrMapping/>
+  </p:clrMapOvr>
+</p:notes>
+</file>
+
+<file path=ppt/notesSlides/notesSlide3.xml><?xml version="1.0" encoding="utf-8"?>
+<p:notes xmlns:a="http://schemas.openxmlformats.org/drawingml/2006/main" xmlns:r="http://schemas.openxmlformats.org/officeDocument/2006/relationships" xmlns:p="http://schemas.openxmlformats.org/presentationml/2006/main">
+  <p:cSld>
+    <p:spTree>
+      <p:nvGrpSpPr>
+        <p:cNvPr id="1" name=""/>
+        <p:cNvGrpSpPr/>
+        <p:nvPr/>
+      </p:nvGrpSpPr>
+      <p:grpSpPr>
+        <a:xfrm>
+          <a:off x="0" y="0"/>
+          <a:ext cx="0" cy="0"/>
+          <a:chOff x="0" y="0"/>
+          <a:chExt cx="0" cy="0"/>
+        </a:xfrm>
+      </p:grpSpPr>
+      <p:sp>
+        <p:nvSpPr>
+          <p:cNvPr id="2" name="Slide Image Placeholder 1"/>
+          <p:cNvSpPr>
+            <a:spLocks noGrp="1" noRot="1" noChangeAspect="1"/>
+          </p:cNvSpPr>
+          <p:nvPr>
+            <p:ph type="sldImg"/>
+          </p:nvPr>
+        </p:nvSpPr>
+        <p:spPr/>
+      </p:sp>
+      <p:sp>
+        <p:nvSpPr>
+          <p:cNvPr id="3" name="Notes Placeholder 2"/>
+          <p:cNvSpPr>
+            <a:spLocks noGrp="1"/>
+          </p:cNvSpPr>
+          <p:nvPr>
+            <p:ph type="body" idx="1"/>
+          </p:nvPr>
+        </p:nvSpPr>
+        <p:spPr/>
+        <p:txBody>
+          <a:bodyPr/>
+          <a:lstStyle/>
+          <a:p>
+            <a:r>
+              <a:rPr lang="en-AT" dirty="0"/>
+              <a:t>&lt;Logo Infrared&gt; - </a:t>
+            </a:r>
+            <a:r>
+              <a:rPr lang="en-AT" dirty="0" err="1"/>
+              <a:t>kurz</a:t>
+            </a:r>
+            <a:r>
+              <a:rPr lang="en-AT" dirty="0"/>
+              <a:t> </a:t>
+            </a:r>
+            <a:r>
+              <a:rPr lang="en-AT" dirty="0" err="1"/>
+              <a:t>über</a:t>
+            </a:r>
+            <a:r>
+              <a:rPr lang="en-AT" dirty="0"/>
+              <a:t> den </a:t>
+            </a:r>
+            <a:r>
+              <a:rPr lang="en-AT" dirty="0" err="1"/>
+              <a:t>firmenpartner</a:t>
+            </a:r>
+            <a:r>
+              <a:rPr lang="en-AT" dirty="0"/>
+              <a:t> </a:t>
+            </a:r>
+            <a:r>
+              <a:rPr lang="en-AT" dirty="0" err="1"/>
+              <a:t>reden</a:t>
+            </a:r>
+            <a:endParaRPr lang="en-AT" dirty="0"/>
+          </a:p>
+          <a:p>
+            <a:r>
+              <a:rPr lang="en-AT" dirty="0"/>
+              <a:t>&lt;</a:t>
+            </a:r>
+            <a:r>
+              <a:rPr lang="en-AT" dirty="0" err="1"/>
+              <a:t>Vorjahresprojekte</a:t>
+            </a:r>
+            <a:r>
+              <a:rPr lang="en-AT" dirty="0"/>
+              <a:t> </a:t>
+            </a:r>
+            <a:r>
+              <a:rPr lang="en-AT" dirty="0" err="1"/>
+              <a:t>referenzieren</a:t>
+            </a:r>
+            <a:r>
+              <a:rPr lang="en-AT" dirty="0"/>
+              <a:t>&gt;</a:t>
+            </a:r>
+          </a:p>
+          <a:p>
+            <a:endParaRPr lang="de-AT" dirty="0"/>
+          </a:p>
+        </p:txBody>
+      </p:sp>
+      <p:sp>
+        <p:nvSpPr>
+          <p:cNvPr id="4" name="Slide Number Placeholder 3"/>
+          <p:cNvSpPr>
+            <a:spLocks noGrp="1"/>
+          </p:cNvSpPr>
+          <p:nvPr>
+            <p:ph type="sldNum" sz="quarter" idx="5"/>
+          </p:nvPr>
+        </p:nvSpPr>
+        <p:spPr/>
+        <p:txBody>
+          <a:bodyPr/>
+          <a:lstStyle/>
+          <a:p>
+            <a:fld id="{219CC2FD-B32F-4992-A15B-F95E2E35C81B}" type="slidenum">
+              <a:rPr lang="de-AT" smtClean="0"/>
+              <a:pPr/>
+              <a:t>5</a:t>
+            </a:fld>
+            <a:endParaRPr lang="de-AT" dirty="0"/>
+          </a:p>
+        </p:txBody>
+      </p:sp>
+    </p:spTree>
+    <p:extLst>
+      <p:ext uri="{BB962C8B-B14F-4D97-AF65-F5344CB8AC3E}">
+        <p14:creationId xmlns:p14="http://schemas.microsoft.com/office/powerpoint/2010/main" val="118195674"/>
+      </p:ext>
+    </p:extLst>
+  </p:cSld>
+  <p:clrMapOvr>
+    <a:masterClrMapping/>
+  </p:clrMapOvr>
+</p:notes>
+</file>
+
+<file path=ppt/notesSlides/notesSlide4.xml><?xml version="1.0" encoding="utf-8"?>
+<p:notes xmlns:a="http://schemas.openxmlformats.org/drawingml/2006/main" xmlns:r="http://schemas.openxmlformats.org/officeDocument/2006/relationships" xmlns:p="http://schemas.openxmlformats.org/presentationml/2006/main">
+  <p:cSld>
+    <p:spTree>
+      <p:nvGrpSpPr>
+        <p:cNvPr id="1" name=""/>
+        <p:cNvGrpSpPr/>
+        <p:nvPr/>
+      </p:nvGrpSpPr>
+      <p:grpSpPr>
+        <a:xfrm>
+          <a:off x="0" y="0"/>
+          <a:ext cx="0" cy="0"/>
+          <a:chOff x="0" y="0"/>
+          <a:chExt cx="0" cy="0"/>
+        </a:xfrm>
+      </p:grpSpPr>
+      <p:sp>
+        <p:nvSpPr>
+          <p:cNvPr id="2" name="Slide Image Placeholder 1"/>
+          <p:cNvSpPr>
+            <a:spLocks noGrp="1" noRot="1" noChangeAspect="1"/>
+          </p:cNvSpPr>
+          <p:nvPr>
+            <p:ph type="sldImg"/>
+          </p:nvPr>
+        </p:nvSpPr>
+        <p:spPr/>
+      </p:sp>
+      <p:sp>
+        <p:nvSpPr>
+          <p:cNvPr id="3" name="Notes Placeholder 2"/>
+          <p:cNvSpPr>
+            <a:spLocks noGrp="1"/>
+          </p:cNvSpPr>
+          <p:nvPr>
+            <p:ph type="body" idx="1"/>
+          </p:nvPr>
+        </p:nvSpPr>
+        <p:spPr/>
+        <p:txBody>
+          <a:bodyPr/>
+          <a:lstStyle/>
+          <a:p>
+            <a:r>
+              <a:rPr lang="de-AT" dirty="0"/>
+              <a:t>A</a:t>
+            </a:r>
+            <a:r>
+              <a:rPr lang="en-AT" dirty="0" err="1"/>
+              <a:t>dditonal</a:t>
+            </a:r>
+            <a:r>
+              <a:rPr lang="en-AT" dirty="0"/>
+              <a:t> talk</a:t>
+            </a:r>
+          </a:p>
+          <a:p>
+            <a:r>
+              <a:rPr lang="en-AT" dirty="0"/>
+              <a:t>Out of scope: </a:t>
+            </a:r>
+          </a:p>
+          <a:p>
+            <a:pPr lvl="1"/>
+            <a:r>
+              <a:rPr lang="en-AT" dirty="0" err="1"/>
+              <a:t>Simulationen</a:t>
+            </a:r>
+            <a:r>
+              <a:rPr lang="en-AT" dirty="0"/>
+              <a:t> (Hitze, </a:t>
+            </a:r>
+            <a:r>
+              <a:rPr lang="en-AT" dirty="0" err="1"/>
+              <a:t>flut</a:t>
+            </a:r>
+            <a:r>
+              <a:rPr lang="en-AT" dirty="0"/>
+              <a:t>). </a:t>
+            </a:r>
+          </a:p>
+          <a:p>
+            <a:pPr lvl="1"/>
+            <a:r>
+              <a:rPr lang="en-AT" dirty="0"/>
+              <a:t>Kleine </a:t>
+            </a:r>
+            <a:r>
+              <a:rPr lang="en-AT" dirty="0" err="1"/>
+              <a:t>einzelbäume</a:t>
+            </a:r>
+            <a:r>
+              <a:rPr lang="en-AT" dirty="0"/>
+              <a:t> (die in </a:t>
+            </a:r>
+            <a:r>
+              <a:rPr lang="en-AT" dirty="0" err="1"/>
+              <a:t>auflösung</a:t>
+            </a:r>
+            <a:r>
+              <a:rPr lang="en-AT" dirty="0"/>
+              <a:t> </a:t>
+            </a:r>
+            <a:r>
+              <a:rPr lang="en-AT" dirty="0" err="1"/>
+              <a:t>unter</a:t>
+            </a:r>
+            <a:r>
+              <a:rPr lang="en-AT" dirty="0"/>
+              <a:t> </a:t>
+            </a:r>
+            <a:r>
+              <a:rPr lang="en-AT" dirty="0" err="1"/>
+              <a:t>gehen</a:t>
+            </a:r>
+            <a:r>
+              <a:rPr lang="en-AT" dirty="0"/>
+              <a:t>)</a:t>
+            </a:r>
+            <a:endParaRPr lang="de-AT" dirty="0"/>
+          </a:p>
+          <a:p>
+            <a:endParaRPr lang="de-AT" dirty="0"/>
+          </a:p>
+        </p:txBody>
+      </p:sp>
+      <p:sp>
+        <p:nvSpPr>
+          <p:cNvPr id="4" name="Slide Number Placeholder 3"/>
+          <p:cNvSpPr>
+            <a:spLocks noGrp="1"/>
+          </p:cNvSpPr>
+          <p:nvPr>
+            <p:ph type="sldNum" sz="quarter" idx="5"/>
+          </p:nvPr>
+        </p:nvSpPr>
+        <p:spPr/>
+        <p:txBody>
+          <a:bodyPr/>
+          <a:lstStyle/>
+          <a:p>
+            <a:fld id="{219CC2FD-B32F-4992-A15B-F95E2E35C81B}" type="slidenum">
+              <a:rPr lang="de-AT" smtClean="0"/>
+              <a:pPr/>
+              <a:t>6</a:t>
+            </a:fld>
+            <a:endParaRPr lang="de-AT" dirty="0"/>
+          </a:p>
+        </p:txBody>
+      </p:sp>
+    </p:spTree>
+    <p:extLst>
+      <p:ext uri="{BB962C8B-B14F-4D97-AF65-F5344CB8AC3E}">
+        <p14:creationId xmlns:p14="http://schemas.microsoft.com/office/powerpoint/2010/main" val="929153240"/>
       </p:ext>
     </p:extLst>
   </p:cSld>
@@ -7772,201 +11637,6 @@
   <p:cSld>
     <p:spTree>
       <p:nvGrpSpPr>
-        <p:cNvPr id="1" name="">
-          <a:extLst>
-            <a:ext uri="{FF2B5EF4-FFF2-40B4-BE49-F238E27FC236}">
-              <a16:creationId xmlns:a16="http://schemas.microsoft.com/office/drawing/2014/main" id="{51452552-A00A-904C-7C5B-1060AC6B9750}"/>
-            </a:ext>
-          </a:extLst>
-        </p:cNvPr>
-        <p:cNvGrpSpPr/>
-        <p:nvPr/>
-      </p:nvGrpSpPr>
-      <p:grpSpPr>
-        <a:xfrm>
-          <a:off x="0" y="0"/>
-          <a:ext cx="0" cy="0"/>
-          <a:chOff x="0" y="0"/>
-          <a:chExt cx="0" cy="0"/>
-        </a:xfrm>
-      </p:grpSpPr>
-      <p:sp>
-        <p:nvSpPr>
-          <p:cNvPr id="10" name="Text Placeholder 1">
-            <a:extLst>
-              <a:ext uri="{FF2B5EF4-FFF2-40B4-BE49-F238E27FC236}">
-                <a16:creationId xmlns:a16="http://schemas.microsoft.com/office/drawing/2014/main" id="{DEE036EB-28F2-D729-CAF5-479DBCDF2390}"/>
-              </a:ext>
-            </a:extLst>
-          </p:cNvPr>
-          <p:cNvSpPr>
-            <a:spLocks noGrp="1"/>
-          </p:cNvSpPr>
-          <p:nvPr>
-            <p:ph type="body" sz="quarter" idx="11"/>
-          </p:nvPr>
-        </p:nvSpPr>
-        <p:spPr>
-          <a:xfrm>
-            <a:off x="287338" y="2941638"/>
-            <a:ext cx="4284662" cy="620885"/>
-          </a:xfrm>
-        </p:spPr>
-        <p:txBody>
-          <a:bodyPr/>
-          <a:lstStyle/>
-          <a:p>
-            <a:endParaRPr lang="en-US"/>
-          </a:p>
-        </p:txBody>
-      </p:sp>
-      <p:sp>
-        <p:nvSpPr>
-          <p:cNvPr id="5" name="Title 4">
-            <a:extLst>
-              <a:ext uri="{FF2B5EF4-FFF2-40B4-BE49-F238E27FC236}">
-                <a16:creationId xmlns:a16="http://schemas.microsoft.com/office/drawing/2014/main" id="{1D14F809-7769-243A-89F5-C8A05A3B242E}"/>
-              </a:ext>
-            </a:extLst>
-          </p:cNvPr>
-          <p:cNvSpPr>
-            <a:spLocks noGrp="1"/>
-          </p:cNvSpPr>
-          <p:nvPr>
-            <p:ph type="ctrTitle"/>
-          </p:nvPr>
-        </p:nvSpPr>
-        <p:spPr>
-          <a:xfrm>
-            <a:off x="605406" y="1301365"/>
-            <a:ext cx="5436000" cy="1026000"/>
-          </a:xfrm>
-        </p:spPr>
-        <p:txBody>
-          <a:bodyPr anchor="ctr">
-            <a:normAutofit/>
-          </a:bodyPr>
-          <a:lstStyle/>
-          <a:p>
-            <a:r>
-              <a:rPr lang="en-AT" dirty="0"/>
-              <a:t>EDA</a:t>
-            </a:r>
-            <a:endParaRPr lang="de-AT" dirty="0"/>
-          </a:p>
-        </p:txBody>
-      </p:sp>
-      <p:sp>
-        <p:nvSpPr>
-          <p:cNvPr id="3" name="Footer Placeholder 2">
-            <a:extLst>
-              <a:ext uri="{FF2B5EF4-FFF2-40B4-BE49-F238E27FC236}">
-                <a16:creationId xmlns:a16="http://schemas.microsoft.com/office/drawing/2014/main" id="{3FF68120-CC3E-2103-8570-542A7B980DCA}"/>
-              </a:ext>
-            </a:extLst>
-          </p:cNvPr>
-          <p:cNvSpPr>
-            <a:spLocks noGrp="1"/>
-          </p:cNvSpPr>
-          <p:nvPr>
-            <p:ph type="ftr" sz="quarter" idx="14"/>
-          </p:nvPr>
-        </p:nvSpPr>
-        <p:spPr>
-          <a:xfrm>
-            <a:off x="1354561" y="5412059"/>
-            <a:ext cx="3217443" cy="258085"/>
-          </a:xfrm>
-        </p:spPr>
-        <p:txBody>
-          <a:bodyPr anchor="ctr">
-            <a:normAutofit/>
-          </a:bodyPr>
-          <a:lstStyle/>
-          <a:p>
-            <a:pPr>
-              <a:spcAft>
-                <a:spcPts val="600"/>
-              </a:spcAft>
-            </a:pPr>
-            <a:r>
-              <a:rPr lang="de-AT"/>
-              <a:t>Fusszeile</a:t>
-            </a:r>
-          </a:p>
-        </p:txBody>
-      </p:sp>
-      <p:sp>
-        <p:nvSpPr>
-          <p:cNvPr id="4" name="Slide Number Placeholder 3">
-            <a:extLst>
-              <a:ext uri="{FF2B5EF4-FFF2-40B4-BE49-F238E27FC236}">
-                <a16:creationId xmlns:a16="http://schemas.microsoft.com/office/drawing/2014/main" id="{2BAC7969-4824-F50A-DB54-40F24F006B15}"/>
-              </a:ext>
-            </a:extLst>
-          </p:cNvPr>
-          <p:cNvSpPr>
-            <a:spLocks noGrp="1"/>
-          </p:cNvSpPr>
-          <p:nvPr>
-            <p:ph type="sldNum" sz="quarter" idx="15"/>
-          </p:nvPr>
-        </p:nvSpPr>
-        <p:spPr>
-          <a:xfrm>
-            <a:off x="462407" y="5412059"/>
-            <a:ext cx="892150" cy="258085"/>
-          </a:xfrm>
-        </p:spPr>
-        <p:txBody>
-          <a:bodyPr anchor="ctr">
-            <a:normAutofit/>
-          </a:bodyPr>
-          <a:lstStyle/>
-          <a:p>
-            <a:pPr>
-              <a:spcAft>
-                <a:spcPts val="600"/>
-              </a:spcAft>
-            </a:pPr>
-            <a:r>
-              <a:rPr lang="de-AT"/>
-              <a:t>SEITE </a:t>
-            </a:r>
-            <a:fld id="{BE3DC40E-DBBE-4E2D-9EEC-FBF0DA0E9179}" type="slidenum">
-              <a:rPr lang="de-AT" smtClean="0"/>
-              <a:pPr>
-                <a:spcAft>
-                  <a:spcPts val="600"/>
-                </a:spcAft>
-              </a:pPr>
-              <a:t>10</a:t>
-            </a:fld>
-            <a:endParaRPr lang="de-AT"/>
-          </a:p>
-        </p:txBody>
-      </p:sp>
-    </p:spTree>
-    <p:extLst>
-      <p:ext uri="{BB962C8B-B14F-4D97-AF65-F5344CB8AC3E}">
-        <p14:creationId xmlns:p14="http://schemas.microsoft.com/office/powerpoint/2010/main" val="3607917642"/>
-      </p:ext>
-    </p:extLst>
-  </p:cSld>
-  <p:clrMapOvr>
-    <a:masterClrMapping/>
-  </p:clrMapOvr>
-  <p:transition>
-    <p:fade/>
-  </p:transition>
-</p:sld>
-</file>
-
-<file path=ppt/slides/slide11.xml><?xml version="1.0" encoding="utf-8"?>
-<p:sld xmlns:a="http://schemas.openxmlformats.org/drawingml/2006/main" xmlns:r="http://schemas.openxmlformats.org/officeDocument/2006/relationships" xmlns:p="http://schemas.openxmlformats.org/presentationml/2006/main">
-  <p:cSld>
-    <p:spTree>
-      <p:nvGrpSpPr>
         <p:cNvPr id="1" name=""/>
         <p:cNvGrpSpPr/>
         <p:nvPr/>
@@ -8010,35 +11680,6 @@
       </p:sp>
       <p:sp>
         <p:nvSpPr>
-          <p:cNvPr id="3" name="Footer Placeholder 2">
-            <a:extLst>
-              <a:ext uri="{FF2B5EF4-FFF2-40B4-BE49-F238E27FC236}">
-                <a16:creationId xmlns:a16="http://schemas.microsoft.com/office/drawing/2014/main" id="{6EBE826A-1745-69E7-B6E1-1A33BB14BFE8}"/>
-              </a:ext>
-            </a:extLst>
-          </p:cNvPr>
-          <p:cNvSpPr>
-            <a:spLocks noGrp="1"/>
-          </p:cNvSpPr>
-          <p:nvPr>
-            <p:ph type="ftr" sz="quarter" idx="11"/>
-          </p:nvPr>
-        </p:nvSpPr>
-        <p:spPr/>
-        <p:txBody>
-          <a:bodyPr/>
-          <a:lstStyle/>
-          <a:p>
-            <a:r>
-              <a:rPr lang="de-AT"/>
-              <a:t>Fusszeile</a:t>
-            </a:r>
-            <a:endParaRPr lang="de-AT" dirty="0"/>
-          </a:p>
-        </p:txBody>
-      </p:sp>
-      <p:sp>
-        <p:nvSpPr>
           <p:cNvPr id="4" name="Slide Number Placeholder 3">
             <a:extLst>
               <a:ext uri="{FF2B5EF4-FFF2-40B4-BE49-F238E27FC236}">
@@ -8064,7 +11705,7 @@
             </a:r>
             <a:fld id="{BE3DC40E-DBBE-4E2D-9EEC-FBF0DA0E9179}" type="slidenum">
               <a:rPr lang="de-AT" smtClean="0"/>
-              <a:t>11</a:t>
+              <a:t>10</a:t>
             </a:fld>
             <a:endParaRPr lang="de-AT" dirty="0"/>
           </a:p>
@@ -8115,7 +11756,7 @@
 </p:sld>
 </file>
 
-<file path=ppt/slides/slide12.xml><?xml version="1.0" encoding="utf-8"?>
+<file path=ppt/slides/slide11.xml><?xml version="1.0" encoding="utf-8"?>
 <p:sld xmlns:a="http://schemas.openxmlformats.org/drawingml/2006/main" xmlns:r="http://schemas.openxmlformats.org/officeDocument/2006/relationships" xmlns:p="http://schemas.openxmlformats.org/presentationml/2006/main">
   <p:cSld>
     <p:spTree>
@@ -8206,46 +11847,6 @@
       </p:sp>
       <p:sp>
         <p:nvSpPr>
-          <p:cNvPr id="3" name="Footer Placeholder 2">
-            <a:extLst>
-              <a:ext uri="{FF2B5EF4-FFF2-40B4-BE49-F238E27FC236}">
-                <a16:creationId xmlns:a16="http://schemas.microsoft.com/office/drawing/2014/main" id="{521E4410-BE81-67FE-5B0B-DC510C21F964}"/>
-              </a:ext>
-            </a:extLst>
-          </p:cNvPr>
-          <p:cNvSpPr>
-            <a:spLocks noGrp="1"/>
-          </p:cNvSpPr>
-          <p:nvPr>
-            <p:ph type="ftr" sz="quarter" idx="14"/>
-          </p:nvPr>
-        </p:nvSpPr>
-        <p:spPr>
-          <a:xfrm>
-            <a:off x="1354561" y="5412059"/>
-            <a:ext cx="3217443" cy="258085"/>
-          </a:xfrm>
-        </p:spPr>
-        <p:txBody>
-          <a:bodyPr anchor="ctr">
-            <a:normAutofit/>
-          </a:bodyPr>
-          <a:lstStyle/>
-          <a:p>
-            <a:pPr>
-              <a:spcAft>
-                <a:spcPts val="600"/>
-              </a:spcAft>
-            </a:pPr>
-            <a:r>
-              <a:rPr lang="de-AT"/>
-              <a:t>Fusszeile</a:t>
-            </a:r>
-          </a:p>
-        </p:txBody>
-      </p:sp>
-      <p:sp>
-        <p:nvSpPr>
           <p:cNvPr id="4" name="Slide Number Placeholder 3">
             <a:extLst>
               <a:ext uri="{FF2B5EF4-FFF2-40B4-BE49-F238E27FC236}">
@@ -8288,7 +11889,7 @@
                   <a:spcPts val="600"/>
                 </a:spcAft>
               </a:pPr>
-              <a:t>12</a:t>
+              <a:t>11</a:t>
             </a:fld>
             <a:endParaRPr lang="de-AT"/>
           </a:p>
@@ -8310,7 +11911,7 @@
 </p:sld>
 </file>
 
-<file path=ppt/slides/slide13.xml><?xml version="1.0" encoding="utf-8"?>
+<file path=ppt/slides/slide12.xml><?xml version="1.0" encoding="utf-8"?>
 <p:sld xmlns:a="http://schemas.openxmlformats.org/drawingml/2006/main" xmlns:r="http://schemas.openxmlformats.org/officeDocument/2006/relationships" xmlns:p="http://schemas.openxmlformats.org/presentationml/2006/main">
   <p:cSld>
     <p:spTree>
@@ -8358,35 +11959,6 @@
       </p:sp>
       <p:sp>
         <p:nvSpPr>
-          <p:cNvPr id="3" name="Footer Placeholder 2">
-            <a:extLst>
-              <a:ext uri="{FF2B5EF4-FFF2-40B4-BE49-F238E27FC236}">
-                <a16:creationId xmlns:a16="http://schemas.microsoft.com/office/drawing/2014/main" id="{B5D817E9-7FF2-549D-90CA-F6F1446EB662}"/>
-              </a:ext>
-            </a:extLst>
-          </p:cNvPr>
-          <p:cNvSpPr>
-            <a:spLocks noGrp="1"/>
-          </p:cNvSpPr>
-          <p:nvPr>
-            <p:ph type="ftr" sz="quarter" idx="11"/>
-          </p:nvPr>
-        </p:nvSpPr>
-        <p:spPr/>
-        <p:txBody>
-          <a:bodyPr/>
-          <a:lstStyle/>
-          <a:p>
-            <a:r>
-              <a:rPr lang="de-AT"/>
-              <a:t>Fusszeile</a:t>
-            </a:r>
-            <a:endParaRPr lang="de-AT" dirty="0"/>
-          </a:p>
-        </p:txBody>
-      </p:sp>
-      <p:sp>
-        <p:nvSpPr>
           <p:cNvPr id="4" name="Slide Number Placeholder 3">
             <a:extLst>
               <a:ext uri="{FF2B5EF4-FFF2-40B4-BE49-F238E27FC236}">
@@ -8412,7 +11984,7 @@
             </a:r>
             <a:fld id="{BE3DC40E-DBBE-4E2D-9EEC-FBF0DA0E9179}" type="slidenum">
               <a:rPr lang="de-AT" smtClean="0"/>
-              <a:t>13</a:t>
+              <a:t>12</a:t>
             </a:fld>
             <a:endParaRPr lang="de-AT" dirty="0"/>
           </a:p>
@@ -8463,7 +12035,7 @@
 </p:sld>
 </file>
 
-<file path=ppt/slides/slide14.xml><?xml version="1.0" encoding="utf-8"?>
+<file path=ppt/slides/slide13.xml><?xml version="1.0" encoding="utf-8"?>
 <p:sld xmlns:a="http://schemas.openxmlformats.org/drawingml/2006/main" xmlns:r="http://schemas.openxmlformats.org/officeDocument/2006/relationships" xmlns:p="http://schemas.openxmlformats.org/presentationml/2006/main">
   <p:cSld>
     <p:spTree>
@@ -8511,35 +12083,6 @@
       </p:sp>
       <p:sp>
         <p:nvSpPr>
-          <p:cNvPr id="3" name="Footer Placeholder 2">
-            <a:extLst>
-              <a:ext uri="{FF2B5EF4-FFF2-40B4-BE49-F238E27FC236}">
-                <a16:creationId xmlns:a16="http://schemas.microsoft.com/office/drawing/2014/main" id="{FE26E0E6-41F2-96DE-BF05-12C29143042F}"/>
-              </a:ext>
-            </a:extLst>
-          </p:cNvPr>
-          <p:cNvSpPr>
-            <a:spLocks noGrp="1"/>
-          </p:cNvSpPr>
-          <p:nvPr>
-            <p:ph type="ftr" sz="quarter" idx="11"/>
-          </p:nvPr>
-        </p:nvSpPr>
-        <p:spPr/>
-        <p:txBody>
-          <a:bodyPr/>
-          <a:lstStyle/>
-          <a:p>
-            <a:r>
-              <a:rPr lang="de-AT"/>
-              <a:t>Fusszeile</a:t>
-            </a:r>
-            <a:endParaRPr lang="de-AT" dirty="0"/>
-          </a:p>
-        </p:txBody>
-      </p:sp>
-      <p:sp>
-        <p:nvSpPr>
           <p:cNvPr id="4" name="Slide Number Placeholder 3">
             <a:extLst>
               <a:ext uri="{FF2B5EF4-FFF2-40B4-BE49-F238E27FC236}">
@@ -8565,7 +12108,7 @@
             </a:r>
             <a:fld id="{BE3DC40E-DBBE-4E2D-9EEC-FBF0DA0E9179}" type="slidenum">
               <a:rPr lang="de-AT" smtClean="0"/>
-              <a:t>14</a:t>
+              <a:t>13</a:t>
             </a:fld>
             <a:endParaRPr lang="de-AT" dirty="0"/>
           </a:p>
@@ -8616,7 +12159,7 @@
 </p:sld>
 </file>
 
-<file path=ppt/slides/slide15.xml><?xml version="1.0" encoding="utf-8"?>
+<file path=ppt/slides/slide14.xml><?xml version="1.0" encoding="utf-8"?>
 <p:sld xmlns:a="http://schemas.openxmlformats.org/drawingml/2006/main" xmlns:r="http://schemas.openxmlformats.org/officeDocument/2006/relationships" xmlns:p="http://schemas.openxmlformats.org/presentationml/2006/main">
   <p:cSld>
     <p:spTree>
@@ -8660,35 +12203,6 @@
       </p:sp>
       <p:sp>
         <p:nvSpPr>
-          <p:cNvPr id="3" name="Footer Placeholder 2">
-            <a:extLst>
-              <a:ext uri="{FF2B5EF4-FFF2-40B4-BE49-F238E27FC236}">
-                <a16:creationId xmlns:a16="http://schemas.microsoft.com/office/drawing/2014/main" id="{A1B25A93-C64F-E01C-0CC1-3A930E78FAE7}"/>
-              </a:ext>
-            </a:extLst>
-          </p:cNvPr>
-          <p:cNvSpPr>
-            <a:spLocks noGrp="1"/>
-          </p:cNvSpPr>
-          <p:nvPr>
-            <p:ph type="ftr" sz="quarter" idx="11"/>
-          </p:nvPr>
-        </p:nvSpPr>
-        <p:spPr/>
-        <p:txBody>
-          <a:bodyPr/>
-          <a:lstStyle/>
-          <a:p>
-            <a:r>
-              <a:rPr lang="de-AT"/>
-              <a:t>Fusszeile</a:t>
-            </a:r>
-            <a:endParaRPr lang="de-AT" dirty="0"/>
-          </a:p>
-        </p:txBody>
-      </p:sp>
-      <p:sp>
-        <p:nvSpPr>
           <p:cNvPr id="4" name="Slide Number Placeholder 3">
             <a:extLst>
               <a:ext uri="{FF2B5EF4-FFF2-40B4-BE49-F238E27FC236}">
@@ -8714,7 +12228,7 @@
             </a:r>
             <a:fld id="{BE3DC40E-DBBE-4E2D-9EEC-FBF0DA0E9179}" type="slidenum">
               <a:rPr lang="de-AT" smtClean="0"/>
-              <a:t>15</a:t>
+              <a:t>14</a:t>
             </a:fld>
             <a:endParaRPr lang="de-AT" dirty="0"/>
           </a:p>
@@ -8886,44 +12400,6 @@
       </p:sp>
       <p:sp>
         <p:nvSpPr>
-          <p:cNvPr id="10" name="Footer Placeholder 2">
-            <a:extLst>
-              <a:ext uri="{FF2B5EF4-FFF2-40B4-BE49-F238E27FC236}">
-                <a16:creationId xmlns:a16="http://schemas.microsoft.com/office/drawing/2014/main" id="{50EAF885-E129-F31F-40B4-5D54343776FE}"/>
-              </a:ext>
-            </a:extLst>
-          </p:cNvPr>
-          <p:cNvSpPr>
-            <a:spLocks noGrp="1"/>
-          </p:cNvSpPr>
-          <p:nvPr>
-            <p:ph type="ftr" sz="quarter" idx="11"/>
-          </p:nvPr>
-        </p:nvSpPr>
-        <p:spPr>
-          <a:xfrm>
-            <a:off x="1354561" y="5412059"/>
-            <a:ext cx="3217443" cy="258085"/>
-          </a:xfrm>
-        </p:spPr>
-        <p:txBody>
-          <a:bodyPr/>
-          <a:lstStyle/>
-          <a:p>
-            <a:pPr>
-              <a:spcAft>
-                <a:spcPts val="600"/>
-              </a:spcAft>
-            </a:pPr>
-            <a:r>
-              <a:rPr lang="de-AT"/>
-              <a:t>Fusszeile</a:t>
-            </a:r>
-          </a:p>
-        </p:txBody>
-      </p:sp>
-      <p:sp>
-        <p:nvSpPr>
           <p:cNvPr id="12" name="Slide Number Placeholder 3">
             <a:extLst>
               <a:ext uri="{FF2B5EF4-FFF2-40B4-BE49-F238E27FC236}">
@@ -8954,7 +12430,7 @@
               </a:spcAft>
             </a:pPr>
             <a:r>
-              <a:rPr lang="de-AT"/>
+              <a:rPr lang="de-AT" dirty="0"/>
               <a:t>SEITE </a:t>
             </a:r>
             <a:fld id="{BE3DC40E-DBBE-4E2D-9EEC-FBF0DA0E9179}" type="slidenum">
@@ -8966,7 +12442,7 @@
               </a:pPr>
               <a:t>2</a:t>
             </a:fld>
-            <a:endParaRPr lang="de-AT"/>
+            <a:endParaRPr lang="de-AT" dirty="0"/>
           </a:p>
         </p:txBody>
       </p:sp>
@@ -9106,46 +12582,6 @@
       </p:sp>
       <p:sp>
         <p:nvSpPr>
-          <p:cNvPr id="3" name="Footer Placeholder 2">
-            <a:extLst>
-              <a:ext uri="{FF2B5EF4-FFF2-40B4-BE49-F238E27FC236}">
-                <a16:creationId xmlns:a16="http://schemas.microsoft.com/office/drawing/2014/main" id="{A6E8F32F-DDBD-9E15-612D-88EC46FEA33C}"/>
-              </a:ext>
-            </a:extLst>
-          </p:cNvPr>
-          <p:cNvSpPr>
-            <a:spLocks noGrp="1"/>
-          </p:cNvSpPr>
-          <p:nvPr>
-            <p:ph type="ftr" sz="quarter" idx="14"/>
-          </p:nvPr>
-        </p:nvSpPr>
-        <p:spPr>
-          <a:xfrm>
-            <a:off x="1354561" y="5412059"/>
-            <a:ext cx="3217443" cy="258085"/>
-          </a:xfrm>
-        </p:spPr>
-        <p:txBody>
-          <a:bodyPr anchor="ctr">
-            <a:normAutofit/>
-          </a:bodyPr>
-          <a:lstStyle/>
-          <a:p>
-            <a:pPr>
-              <a:spcAft>
-                <a:spcPts val="600"/>
-              </a:spcAft>
-            </a:pPr>
-            <a:r>
-              <a:rPr lang="de-AT"/>
-              <a:t>Fusszeile</a:t>
-            </a:r>
-          </a:p>
-        </p:txBody>
-      </p:sp>
-      <p:sp>
-        <p:nvSpPr>
           <p:cNvPr id="4" name="Slide Number Placeholder 3">
             <a:extLst>
               <a:ext uri="{FF2B5EF4-FFF2-40B4-BE49-F238E27FC236}">
@@ -9227,217 +12663,43 @@
           <a:chExt cx="0" cy="0"/>
         </a:xfrm>
       </p:grpSpPr>
-      <p:sp>
-        <p:nvSpPr>
-          <p:cNvPr id="2" name="Content Placeholder 1">
+      <p:pic>
+        <p:nvPicPr>
+          <p:cNvPr id="7" name="Content Placeholder 6" descr="Split-view photograph contrasting two urban scenes: left side shows a city street under heavy smog with orange sky and visible heat waves rising from buildings, indicating severe air pollution; right side depicts the same street on a clear day with blue sky, abundant green trees lining the road, and clean air. The comparison highlights environmental impact of pollution versus benefits of urban greenery and clean atmosphere.">
             <a:extLst>
               <a:ext uri="{FF2B5EF4-FFF2-40B4-BE49-F238E27FC236}">
-                <a16:creationId xmlns:a16="http://schemas.microsoft.com/office/drawing/2014/main" id="{B066D96B-7F11-DEDE-8549-8B93DFDDB1B4}"/>
+                <a16:creationId xmlns:a16="http://schemas.microsoft.com/office/drawing/2014/main" id="{817AE94E-8767-9C78-711A-EC85BA29A4B8}"/>
+              </a:ext>
+              <a:ext uri="{C183D7F6-B498-43B3-948B-1728B52AA6E4}">
+                <adec:decorative xmlns:adec="http://schemas.microsoft.com/office/drawing/2017/decorative" val="0"/>
               </a:ext>
             </a:extLst>
           </p:cNvPr>
-          <p:cNvSpPr>
-            <a:spLocks noGrp="1"/>
-          </p:cNvSpPr>
+          <p:cNvPicPr>
+            <a:picLocks noGrp="1" noChangeAspect="1"/>
+          </p:cNvPicPr>
           <p:nvPr>
             <p:ph idx="1"/>
           </p:nvPr>
-        </p:nvSpPr>
-        <p:spPr/>
-        <p:txBody>
-          <a:bodyPr/>
-          <a:lstStyle/>
-          <a:p>
-            <a:r>
-              <a:rPr lang="en-AT" dirty="0"/>
-              <a:t>&lt;</a:t>
-            </a:r>
-            <a:r>
-              <a:rPr lang="en-AT" dirty="0" err="1"/>
-              <a:t>hitze</a:t>
-            </a:r>
-            <a:r>
-              <a:rPr lang="en-AT" dirty="0"/>
-              <a:t> </a:t>
-            </a:r>
-            <a:r>
-              <a:rPr lang="en-AT" dirty="0" err="1"/>
-              <a:t>grafik</a:t>
-            </a:r>
-            <a:r>
-              <a:rPr lang="en-AT" dirty="0"/>
-              <a:t>&gt; - </a:t>
-            </a:r>
-            <a:r>
-              <a:rPr lang="en-AT" dirty="0" err="1"/>
-              <a:t>wärmebild</a:t>
-            </a:r>
-            <a:r>
-              <a:rPr lang="en-AT" dirty="0"/>
-              <a:t> </a:t>
-            </a:r>
-            <a:r>
-              <a:rPr lang="en-AT" dirty="0" err="1"/>
-              <a:t>zB</a:t>
-            </a:r>
-            <a:endParaRPr lang="en-AT" dirty="0"/>
-          </a:p>
-          <a:p>
-            <a:r>
-              <a:rPr lang="de-AT" dirty="0"/>
-              <a:t>R</a:t>
-            </a:r>
-            <a:r>
-              <a:rPr lang="en-AT" dirty="0" err="1"/>
-              <a:t>eden</a:t>
-            </a:r>
-            <a:r>
-              <a:rPr lang="en-AT" dirty="0"/>
-              <a:t> </a:t>
-            </a:r>
-            <a:r>
-              <a:rPr lang="en-AT" dirty="0" err="1"/>
-              <a:t>über</a:t>
-            </a:r>
-            <a:r>
-              <a:rPr lang="en-AT" dirty="0"/>
-              <a:t> </a:t>
-            </a:r>
-            <a:r>
-              <a:rPr lang="en-AT" dirty="0" err="1"/>
-              <a:t>klimawandel</a:t>
-            </a:r>
-            <a:r>
-              <a:rPr lang="en-AT" dirty="0"/>
-              <a:t> </a:t>
-            </a:r>
-          </a:p>
-          <a:p>
-            <a:r>
-              <a:rPr lang="en-AT" dirty="0"/>
-              <a:t>&lt;</a:t>
-            </a:r>
-            <a:r>
-              <a:rPr lang="en-AT" dirty="0" err="1"/>
-              <a:t>bild</a:t>
-            </a:r>
-            <a:r>
-              <a:rPr lang="en-AT" dirty="0"/>
-              <a:t> </a:t>
-            </a:r>
-            <a:r>
-              <a:rPr lang="en-AT" dirty="0" err="1"/>
-              <a:t>grün</a:t>
-            </a:r>
-            <a:r>
-              <a:rPr lang="en-AT" dirty="0"/>
-              <a:t>, </a:t>
-            </a:r>
-            <a:r>
-              <a:rPr lang="en-AT" dirty="0" err="1"/>
-              <a:t>bäume</a:t>
-            </a:r>
-            <a:r>
-              <a:rPr lang="en-AT" dirty="0"/>
-              <a:t>&gt;</a:t>
-            </a:r>
-          </a:p>
-          <a:p>
-            <a:r>
-              <a:rPr lang="de-AT" dirty="0"/>
-              <a:t>R</a:t>
-            </a:r>
-            <a:r>
-              <a:rPr lang="en-AT" dirty="0" err="1"/>
-              <a:t>eden</a:t>
-            </a:r>
-            <a:r>
-              <a:rPr lang="en-AT" dirty="0"/>
-              <a:t> </a:t>
-            </a:r>
-            <a:r>
-              <a:rPr lang="en-AT" dirty="0" err="1"/>
-              <a:t>über</a:t>
-            </a:r>
-            <a:r>
-              <a:rPr lang="en-AT" dirty="0"/>
-              <a:t> </a:t>
-            </a:r>
-            <a:r>
-              <a:rPr lang="en-AT" dirty="0" err="1"/>
-              <a:t>kühlfaktor</a:t>
-            </a:r>
-            <a:r>
-              <a:rPr lang="en-AT" dirty="0"/>
-              <a:t> von </a:t>
-            </a:r>
-            <a:r>
-              <a:rPr lang="en-AT" dirty="0" err="1"/>
-              <a:t>bäumen</a:t>
-            </a:r>
-            <a:endParaRPr lang="en-AT" dirty="0"/>
-          </a:p>
-          <a:p>
-            <a:r>
-              <a:rPr lang="en-AT" dirty="0" err="1"/>
-              <a:t>Bäume</a:t>
-            </a:r>
-            <a:r>
-              <a:rPr lang="en-AT" dirty="0"/>
-              <a:t>: </a:t>
-            </a:r>
-            <a:r>
-              <a:rPr lang="en-AT" dirty="0" err="1"/>
-              <a:t>Mikroklima</a:t>
-            </a:r>
-            <a:endParaRPr lang="en-AT" dirty="0"/>
-          </a:p>
-          <a:p>
-            <a:r>
-              <a:rPr lang="en-AT" dirty="0" err="1"/>
-              <a:t>Bäume</a:t>
-            </a:r>
-            <a:r>
-              <a:rPr lang="en-AT" dirty="0"/>
-              <a:t> </a:t>
-            </a:r>
-            <a:r>
-              <a:rPr lang="en-AT" dirty="0" err="1"/>
-              <a:t>Hochwasserschutz</a:t>
-            </a:r>
-            <a:endParaRPr lang="en-AT" dirty="0"/>
-          </a:p>
-        </p:txBody>
-      </p:sp>
-      <p:sp>
-        <p:nvSpPr>
-          <p:cNvPr id="3" name="Footer Placeholder 2">
-            <a:extLst>
-              <a:ext uri="{FF2B5EF4-FFF2-40B4-BE49-F238E27FC236}">
-                <a16:creationId xmlns:a16="http://schemas.microsoft.com/office/drawing/2014/main" id="{6D5317A6-8F44-FEF4-5A8A-CEBBF99BD459}"/>
-              </a:ext>
-            </a:extLst>
-          </p:cNvPr>
-          <p:cNvSpPr>
-            <a:spLocks noGrp="1"/>
-          </p:cNvSpPr>
-          <p:nvPr>
-            <p:ph type="ftr" sz="quarter" idx="11"/>
-          </p:nvPr>
-        </p:nvSpPr>
-        <p:spPr/>
-        <p:txBody>
-          <a:bodyPr/>
-          <a:lstStyle/>
-          <a:p>
-            <a:r>
-              <a:rPr lang="de-AT"/>
-              <a:t>Fusszeile</a:t>
-            </a:r>
-            <a:endParaRPr lang="de-AT" dirty="0"/>
-          </a:p>
-        </p:txBody>
-      </p:sp>
+        </p:nvPicPr>
+        <p:blipFill>
+          <a:blip r:embed="rId3"/>
+          <a:srcRect t="8870" r="-1" b="-1"/>
+          <a:stretch>
+            <a:fillRect/>
+          </a:stretch>
+        </p:blipFill>
+        <p:spPr>
+          <a:xfrm>
+            <a:off x="551310" y="1194067"/>
+            <a:ext cx="7759644" cy="3853905"/>
+          </a:xfrm>
+          <a:prstGeom prst="rect">
+            <a:avLst/>
+          </a:prstGeom>
+          <a:noFill/>
+        </p:spPr>
+      </p:pic>
       <p:sp>
         <p:nvSpPr>
           <p:cNvPr id="4" name="Slide Number Placeholder 3">
@@ -9454,20 +12716,37 @@
             <p:ph type="sldNum" sz="quarter" idx="12"/>
           </p:nvPr>
         </p:nvSpPr>
-        <p:spPr/>
+        <p:spPr>
+          <a:xfrm>
+            <a:off x="462407" y="5412059"/>
+            <a:ext cx="892150" cy="258085"/>
+          </a:xfrm>
+        </p:spPr>
         <p:txBody>
-          <a:bodyPr/>
+          <a:bodyPr anchor="ctr">
+            <a:normAutofit/>
+          </a:bodyPr>
           <a:lstStyle/>
           <a:p>
+            <a:pPr>
+              <a:spcAft>
+                <a:spcPts val="600"/>
+              </a:spcAft>
+            </a:pPr>
             <a:r>
               <a:rPr lang="de-AT"/>
               <a:t>SEITE </a:t>
             </a:r>
             <a:fld id="{BE3DC40E-DBBE-4E2D-9EEC-FBF0DA0E9179}" type="slidenum">
               <a:rPr lang="de-AT" smtClean="0"/>
+              <a:pPr>
+                <a:spcAft>
+                  <a:spcPts val="600"/>
+                </a:spcAft>
+              </a:pPr>
               <a:t>4</a:t>
             </a:fld>
-            <a:endParaRPr lang="de-AT" dirty="0"/>
+            <a:endParaRPr lang="de-AT"/>
           </a:p>
         </p:txBody>
       </p:sp>
@@ -9487,9 +12766,16 @@
             <p:ph type="title"/>
           </p:nvPr>
         </p:nvSpPr>
-        <p:spPr/>
+        <p:spPr>
+          <a:xfrm>
+            <a:off x="462408" y="139700"/>
+            <a:ext cx="6840000" cy="903822"/>
+          </a:xfrm>
+        </p:spPr>
         <p:txBody>
-          <a:bodyPr/>
+          <a:bodyPr anchor="ctr">
+            <a:normAutofit/>
+          </a:bodyPr>
           <a:lstStyle/>
           <a:p>
             <a:r>
@@ -9497,6 +12783,42 @@
               <a:t>Introduction - Problem</a:t>
             </a:r>
             <a:endParaRPr lang="de-AT" dirty="0"/>
+          </a:p>
+        </p:txBody>
+      </p:sp>
+      <p:sp>
+        <p:nvSpPr>
+          <p:cNvPr id="8" name="TextBox 7">
+            <a:extLst>
+              <a:ext uri="{FF2B5EF4-FFF2-40B4-BE49-F238E27FC236}">
+                <a16:creationId xmlns:a16="http://schemas.microsoft.com/office/drawing/2014/main" id="{6D470621-219C-1C1A-B415-66961CFA28B3}"/>
+              </a:ext>
+            </a:extLst>
+          </p:cNvPr>
+          <p:cNvSpPr txBox="1"/>
+          <p:nvPr/>
+        </p:nvSpPr>
+        <p:spPr>
+          <a:xfrm>
+            <a:off x="5452353" y="5047972"/>
+            <a:ext cx="2999539" cy="246221"/>
+          </a:xfrm>
+          <a:prstGeom prst="rect">
+            <a:avLst/>
+          </a:prstGeom>
+          <a:noFill/>
+        </p:spPr>
+        <p:txBody>
+          <a:bodyPr wrap="none" rtlCol="0">
+            <a:spAutoFit/>
+          </a:bodyPr>
+          <a:lstStyle/>
+          <a:p>
+            <a:r>
+              <a:rPr lang="en-AT" sz="1000" dirty="0"/>
+              <a:t>Generated by Nano Banana 2 (18.04.2026)</a:t>
+            </a:r>
+            <a:endParaRPr lang="de-AT" sz="1000" dirty="0"/>
           </a:p>
         </p:txBody>
       </p:sp>
@@ -9561,89 +12883,86 @@
           <a:lstStyle/>
           <a:p>
             <a:r>
+              <a:rPr lang="en-AT" dirty="0" err="1"/>
+              <a:t>Infrared.city</a:t>
+            </a:r>
+            <a:endParaRPr lang="en-AT" dirty="0"/>
+          </a:p>
+          <a:p>
+            <a:pPr lvl="1"/>
+            <a:r>
+              <a:rPr lang="de-AT" dirty="0"/>
+              <a:t>C</a:t>
+            </a:r>
+            <a:r>
+              <a:rPr lang="en-AT" dirty="0" err="1"/>
+              <a:t>limate</a:t>
+            </a:r>
+            <a:r>
               <a:rPr lang="en-AT" dirty="0"/>
-              <a:t>&lt;Logo Infrared&gt; - </a:t>
+              <a:t> simulation platform</a:t>
+            </a:r>
+          </a:p>
+          <a:p>
+            <a:pPr lvl="1"/>
+            <a:r>
+              <a:rPr lang="en-AT" dirty="0"/>
+              <a:t>AI-powered</a:t>
+            </a:r>
+          </a:p>
+          <a:p>
+            <a:pPr lvl="1"/>
+            <a:r>
+              <a:rPr lang="en-AT" dirty="0"/>
+              <a:t>Simulates: thermal stress, wind comfort, etc.</a:t>
+            </a:r>
+          </a:p>
+          <a:p>
+            <a:pPr lvl="1"/>
+            <a:r>
+              <a:rPr lang="de-AT" dirty="0"/>
+              <a:t>U</a:t>
             </a:r>
             <a:r>
               <a:rPr lang="en-AT" dirty="0" err="1"/>
-              <a:t>kurz</a:t>
+              <a:t>sed</a:t>
             </a:r>
             <a:r>
               <a:rPr lang="en-AT" dirty="0"/>
-              <a:t> </a:t>
+              <a:t> by: architects, city government, etc.</a:t>
+            </a:r>
+          </a:p>
+          <a:p>
+            <a:pPr lvl="1"/>
+            <a:endParaRPr lang="en-AT" dirty="0"/>
+          </a:p>
+          <a:p>
+            <a:r>
+              <a:rPr lang="en-AT" dirty="0"/>
+              <a:t>Previous projects</a:t>
+            </a:r>
+          </a:p>
+          <a:p>
+            <a:pPr lvl="1"/>
+            <a:r>
+              <a:rPr lang="en-AT" dirty="0"/>
+              <a:t>Detected Flood Risk</a:t>
+            </a:r>
+          </a:p>
+          <a:p>
+            <a:pPr lvl="1"/>
+            <a:r>
+              <a:rPr lang="de-AT" dirty="0"/>
+              <a:t>D</a:t>
             </a:r>
             <a:r>
               <a:rPr lang="en-AT" dirty="0" err="1"/>
-              <a:t>über</a:t>
+              <a:t>etected</a:t>
             </a:r>
             <a:r>
               <a:rPr lang="en-AT" dirty="0"/>
-              <a:t> den </a:t>
-            </a:r>
-            <a:r>
-              <a:rPr lang="en-AT" dirty="0" err="1"/>
-              <a:t>firmenpartner</a:t>
-            </a:r>
-            <a:r>
-              <a:rPr lang="en-AT" dirty="0"/>
-              <a:t> </a:t>
-            </a:r>
-            <a:r>
-              <a:rPr lang="en-AT" dirty="0" err="1"/>
-              <a:t>reden</a:t>
-            </a:r>
-            <a:endParaRPr lang="en-AT" dirty="0"/>
-          </a:p>
-          <a:p>
-            <a:r>
-              <a:rPr lang="en-AT" dirty="0"/>
-              <a:t>&lt;</a:t>
-            </a:r>
-            <a:r>
-              <a:rPr lang="en-AT" dirty="0" err="1"/>
-              <a:t>Vorjahresprojekte</a:t>
-            </a:r>
-            <a:r>
-              <a:rPr lang="en-AT" dirty="0"/>
-              <a:t> </a:t>
-            </a:r>
-            <a:r>
-              <a:rPr lang="en-AT" dirty="0" err="1"/>
-              <a:t>referenzieren</a:t>
-            </a:r>
-            <a:r>
-              <a:rPr lang="en-AT" dirty="0"/>
-              <a:t>&gt;</a:t>
-            </a:r>
-          </a:p>
-        </p:txBody>
-      </p:sp>
-      <p:sp>
-        <p:nvSpPr>
-          <p:cNvPr id="3" name="Footer Placeholder 2">
-            <a:extLst>
-              <a:ext uri="{FF2B5EF4-FFF2-40B4-BE49-F238E27FC236}">
-                <a16:creationId xmlns:a16="http://schemas.microsoft.com/office/drawing/2014/main" id="{488AC091-D0D4-C0B4-BD79-9D614FFFD711}"/>
-              </a:ext>
-            </a:extLst>
-          </p:cNvPr>
-          <p:cNvSpPr>
-            <a:spLocks noGrp="1"/>
-          </p:cNvSpPr>
-          <p:nvPr>
-            <p:ph type="ftr" sz="quarter" idx="11"/>
-          </p:nvPr>
-        </p:nvSpPr>
-        <p:spPr/>
-        <p:txBody>
-          <a:bodyPr/>
-          <a:lstStyle/>
-          <a:p>
-            <a:r>
-              <a:rPr lang="de-AT"/>
-              <a:t>Fusszeile</a:t>
-            </a:r>
-            <a:endParaRPr lang="de-AT" dirty="0"/>
+              <a:t> Greenspace</a:t>
+            </a:r>
           </a:p>
         </p:txBody>
       </p:sp>
@@ -9709,6 +13028,42 @@
           </a:p>
         </p:txBody>
       </p:sp>
+      <p:pic>
+        <p:nvPicPr>
+          <p:cNvPr id="7" name="Picture 6">
+            <a:extLst>
+              <a:ext uri="{FF2B5EF4-FFF2-40B4-BE49-F238E27FC236}">
+                <a16:creationId xmlns:a16="http://schemas.microsoft.com/office/drawing/2014/main" id="{DDC00A30-799E-969A-6BD8-EFE8CE99D99D}"/>
+              </a:ext>
+            </a:extLst>
+          </p:cNvPr>
+          <p:cNvPicPr>
+            <a:picLocks noChangeAspect="1"/>
+          </p:cNvPicPr>
+          <p:nvPr/>
+        </p:nvPicPr>
+        <p:blipFill>
+          <a:blip r:embed="rId3">
+            <a:extLst>
+              <a:ext uri="{28A0092B-C50C-407E-A947-70E740481C1C}">
+                <a14:useLocalDpi xmlns:a14="http://schemas.microsoft.com/office/drawing/2010/main" val="0"/>
+              </a:ext>
+            </a:extLst>
+          </a:blip>
+          <a:stretch>
+            <a:fillRect/>
+          </a:stretch>
+        </p:blipFill>
+        <p:spPr>
+          <a:xfrm>
+            <a:off x="3988385" y="1417198"/>
+            <a:ext cx="4693596" cy="674704"/>
+          </a:xfrm>
+          <a:prstGeom prst="rect">
+            <a:avLst/>
+          </a:prstGeom>
+        </p:spPr>
+      </p:pic>
     </p:spTree>
     <p:extLst>
       <p:ext uri="{BB962C8B-B14F-4D97-AF65-F5344CB8AC3E}">
@@ -9744,93 +13099,10 @@
       </p:grpSpPr>
       <p:sp>
         <p:nvSpPr>
-          <p:cNvPr id="2" name="Content Placeholder 1">
+          <p:cNvPr id="1031" name="Footer Placeholder 3">
             <a:extLst>
               <a:ext uri="{FF2B5EF4-FFF2-40B4-BE49-F238E27FC236}">
-                <a16:creationId xmlns:a16="http://schemas.microsoft.com/office/drawing/2014/main" id="{9E1213BA-B3C2-2AEB-9193-431C84D29BF6}"/>
-              </a:ext>
-            </a:extLst>
-          </p:cNvPr>
-          <p:cNvSpPr>
-            <a:spLocks noGrp="1"/>
-          </p:cNvSpPr>
-          <p:nvPr>
-            <p:ph idx="1"/>
-          </p:nvPr>
-        </p:nvSpPr>
-        <p:spPr/>
-        <p:txBody>
-          <a:bodyPr/>
-          <a:lstStyle/>
-          <a:p>
-            <a:r>
-              <a:rPr lang="de-AT" dirty="0"/>
-              <a:t>S</a:t>
-            </a:r>
-            <a:r>
-              <a:rPr lang="en-AT" dirty="0" err="1"/>
-              <a:t>ehr</a:t>
-            </a:r>
-            <a:r>
-              <a:rPr lang="en-AT" dirty="0"/>
-              <a:t> </a:t>
-            </a:r>
-            <a:r>
-              <a:rPr lang="en-AT" dirty="0" err="1"/>
-              <a:t>kurze</a:t>
-            </a:r>
-            <a:r>
-              <a:rPr lang="en-AT" dirty="0"/>
-              <a:t> </a:t>
-            </a:r>
-            <a:r>
-              <a:rPr lang="en-AT" dirty="0" err="1"/>
-              <a:t>beschreibung</a:t>
-            </a:r>
-            <a:r>
-              <a:rPr lang="en-AT" dirty="0"/>
-              <a:t> </a:t>
-            </a:r>
-            <a:r>
-              <a:rPr lang="en-AT" dirty="0" err="1"/>
-              <a:t>über</a:t>
-            </a:r>
-            <a:r>
-              <a:rPr lang="en-AT" dirty="0"/>
-              <a:t> </a:t>
-            </a:r>
-            <a:r>
-              <a:rPr lang="en-AT" dirty="0" err="1"/>
-              <a:t>unseren</a:t>
-            </a:r>
-            <a:r>
-              <a:rPr lang="en-AT" dirty="0"/>
-              <a:t> </a:t>
-            </a:r>
-            <a:r>
-              <a:rPr lang="en-AT" dirty="0" err="1"/>
-              <a:t>lösungsansatz</a:t>
-            </a:r>
-            <a:r>
-              <a:rPr lang="en-AT" dirty="0"/>
-              <a:t>. </a:t>
-            </a:r>
-          </a:p>
-          <a:p>
-            <a:r>
-              <a:rPr lang="en-AT" dirty="0"/>
-              <a:t>Big Picture</a:t>
-            </a:r>
-            <a:endParaRPr lang="de-AT" dirty="0"/>
-          </a:p>
-        </p:txBody>
-      </p:sp>
-      <p:sp>
-        <p:nvSpPr>
-          <p:cNvPr id="3" name="Footer Placeholder 2">
-            <a:extLst>
-              <a:ext uri="{FF2B5EF4-FFF2-40B4-BE49-F238E27FC236}">
-                <a16:creationId xmlns:a16="http://schemas.microsoft.com/office/drawing/2014/main" id="{868B6370-F74B-016B-FF0D-DC1DB043D59D}"/>
+                <a16:creationId xmlns:a16="http://schemas.microsoft.com/office/drawing/2014/main" id="{65B59FCF-21AC-54CD-B0B2-A11ED162F5D0}"/>
               </a:ext>
             </a:extLst>
           </p:cNvPr>
@@ -9841,16 +13113,27 @@
             <p:ph type="ftr" sz="quarter" idx="11"/>
           </p:nvPr>
         </p:nvSpPr>
-        <p:spPr/>
+        <p:spPr>
+          <a:xfrm>
+            <a:off x="1354561" y="5412059"/>
+            <a:ext cx="3217443" cy="258085"/>
+          </a:xfrm>
+        </p:spPr>
         <p:txBody>
-          <a:bodyPr/>
+          <a:bodyPr anchor="ctr">
+            <a:normAutofit/>
+          </a:bodyPr>
           <a:lstStyle/>
           <a:p>
+            <a:pPr>
+              <a:spcAft>
+                <a:spcPts val="600"/>
+              </a:spcAft>
+            </a:pPr>
             <a:r>
               <a:rPr lang="de-AT"/>
               <a:t>Fusszeile</a:t>
             </a:r>
-            <a:endParaRPr lang="de-AT" dirty="0"/>
           </a:p>
         </p:txBody>
       </p:sp>
@@ -9870,20 +13153,37 @@
             <p:ph type="sldNum" sz="quarter" idx="12"/>
           </p:nvPr>
         </p:nvSpPr>
-        <p:spPr/>
+        <p:spPr>
+          <a:xfrm>
+            <a:off x="462407" y="5412059"/>
+            <a:ext cx="892150" cy="258085"/>
+          </a:xfrm>
+        </p:spPr>
         <p:txBody>
-          <a:bodyPr/>
+          <a:bodyPr anchor="ctr">
+            <a:normAutofit/>
+          </a:bodyPr>
           <a:lstStyle/>
           <a:p>
+            <a:pPr>
+              <a:spcAft>
+                <a:spcPts val="600"/>
+              </a:spcAft>
+            </a:pPr>
             <a:r>
               <a:rPr lang="de-AT"/>
               <a:t>SEITE </a:t>
             </a:r>
             <a:fld id="{BE3DC40E-DBBE-4E2D-9EEC-FBF0DA0E9179}" type="slidenum">
               <a:rPr lang="de-AT" smtClean="0"/>
+              <a:pPr>
+                <a:spcAft>
+                  <a:spcPts val="600"/>
+                </a:spcAft>
+              </a:pPr>
               <a:t>6</a:t>
             </a:fld>
-            <a:endParaRPr lang="de-AT" dirty="0"/>
+            <a:endParaRPr lang="de-AT"/>
           </a:p>
         </p:txBody>
       </p:sp>
@@ -9903,19 +13203,54 @@
             <p:ph type="title"/>
           </p:nvPr>
         </p:nvSpPr>
-        <p:spPr/>
+        <p:spPr>
+          <a:xfrm>
+            <a:off x="462408" y="139700"/>
+            <a:ext cx="6840000" cy="903822"/>
+          </a:xfrm>
+        </p:spPr>
         <p:txBody>
-          <a:bodyPr/>
+          <a:bodyPr anchor="ctr">
+            <a:normAutofit/>
+          </a:bodyPr>
           <a:lstStyle/>
           <a:p>
             <a:r>
               <a:rPr lang="en-AT" dirty="0"/>
-              <a:t>Introduction – Our solution</a:t>
+              <a:t>Introduction – Project Outline</a:t>
             </a:r>
             <a:endParaRPr lang="de-AT" dirty="0"/>
           </a:p>
         </p:txBody>
       </p:sp>
+      <p:graphicFrame>
+        <p:nvGraphicFramePr>
+          <p:cNvPr id="8" name="Diagram 7">
+            <a:extLst>
+              <a:ext uri="{FF2B5EF4-FFF2-40B4-BE49-F238E27FC236}">
+                <a16:creationId xmlns:a16="http://schemas.microsoft.com/office/drawing/2014/main" id="{262296DC-0530-78F7-605F-BD422EC0545F}"/>
+              </a:ext>
+            </a:extLst>
+          </p:cNvPr>
+          <p:cNvGraphicFramePr/>
+          <p:nvPr>
+            <p:extLst>
+              <p:ext uri="{D42A27DB-BD31-4B8C-83A1-F6EECF244321}">
+                <p14:modId xmlns:p14="http://schemas.microsoft.com/office/powerpoint/2010/main" val="2716511726"/>
+              </p:ext>
+            </p:extLst>
+          </p:nvPr>
+        </p:nvGraphicFramePr>
+        <p:xfrm>
+          <a:off x="462019" y="1344613"/>
+          <a:ext cx="7759644" cy="3853905"/>
+        </p:xfrm>
+        <a:graphic>
+          <a:graphicData uri="http://schemas.openxmlformats.org/drawingml/2006/diagram">
+            <dgm:relIds xmlns:dgm="http://schemas.openxmlformats.org/drawingml/2006/diagram" xmlns:r="http://schemas.openxmlformats.org/officeDocument/2006/relationships" r:dm="rId3" r:lo="rId4" r:qs="rId5" r:cs="rId6"/>
+          </a:graphicData>
+        </a:graphic>
+      </p:graphicFrame>
     </p:spTree>
     <p:extLst>
       <p:ext uri="{BB962C8B-B14F-4D97-AF65-F5344CB8AC3E}">
@@ -9933,259 +13268,6 @@
 </file>
 
 <file path=ppt/slides/slide7.xml><?xml version="1.0" encoding="utf-8"?>
-<p:sld xmlns:a="http://schemas.openxmlformats.org/drawingml/2006/main" xmlns:r="http://schemas.openxmlformats.org/officeDocument/2006/relationships" xmlns:p="http://schemas.openxmlformats.org/presentationml/2006/main">
-  <p:cSld>
-    <p:spTree>
-      <p:nvGrpSpPr>
-        <p:cNvPr id="1" name=""/>
-        <p:cNvGrpSpPr/>
-        <p:nvPr/>
-      </p:nvGrpSpPr>
-      <p:grpSpPr>
-        <a:xfrm>
-          <a:off x="0" y="0"/>
-          <a:ext cx="0" cy="0"/>
-          <a:chOff x="0" y="0"/>
-          <a:chExt cx="0" cy="0"/>
-        </a:xfrm>
-      </p:grpSpPr>
-      <p:sp>
-        <p:nvSpPr>
-          <p:cNvPr id="2" name="Content Placeholder 1">
-            <a:extLst>
-              <a:ext uri="{FF2B5EF4-FFF2-40B4-BE49-F238E27FC236}">
-                <a16:creationId xmlns:a16="http://schemas.microsoft.com/office/drawing/2014/main" id="{1D2C18C2-F185-C621-7435-72C1CFBDD815}"/>
-              </a:ext>
-            </a:extLst>
-          </p:cNvPr>
-          <p:cNvSpPr>
-            <a:spLocks noGrp="1"/>
-          </p:cNvSpPr>
-          <p:nvPr>
-            <p:ph idx="1"/>
-          </p:nvPr>
-        </p:nvSpPr>
-        <p:spPr/>
-        <p:txBody>
-          <a:bodyPr/>
-          <a:lstStyle/>
-          <a:p>
-            <a:r>
-              <a:rPr lang="en-AT" dirty="0" err="1"/>
-              <a:t>Klimazone</a:t>
-            </a:r>
-            <a:r>
-              <a:rPr lang="en-AT" dirty="0"/>
-              <a:t> (</a:t>
-            </a:r>
-            <a:r>
-              <a:rPr lang="en-AT" dirty="0" err="1"/>
-              <a:t>gemäßigt</a:t>
-            </a:r>
-            <a:r>
-              <a:rPr lang="en-AT" dirty="0"/>
-              <a:t> </a:t>
-            </a:r>
-            <a:r>
-              <a:rPr lang="en-AT" dirty="0" err="1"/>
-              <a:t>mitteleuropäisch</a:t>
-            </a:r>
-            <a:r>
-              <a:rPr lang="en-AT" dirty="0"/>
-              <a:t>)</a:t>
-            </a:r>
-          </a:p>
-          <a:p>
-            <a:r>
-              <a:rPr lang="en-AT" dirty="0" err="1"/>
-              <a:t>Mehrere</a:t>
-            </a:r>
-            <a:r>
-              <a:rPr lang="en-AT" dirty="0"/>
-              <a:t> Jahreszeiten</a:t>
-            </a:r>
-          </a:p>
-          <a:p>
-            <a:endParaRPr lang="en-AT" dirty="0"/>
-          </a:p>
-          <a:p>
-            <a:endParaRPr lang="en-AT" dirty="0"/>
-          </a:p>
-          <a:p>
-            <a:r>
-              <a:rPr lang="en-AT" dirty="0"/>
-              <a:t>Out of scope: </a:t>
-            </a:r>
-          </a:p>
-          <a:p>
-            <a:pPr lvl="1"/>
-            <a:r>
-              <a:rPr lang="en-AT" dirty="0" err="1"/>
-              <a:t>Simulationen</a:t>
-            </a:r>
-            <a:r>
-              <a:rPr lang="en-AT" dirty="0"/>
-              <a:t> (Hitze, </a:t>
-            </a:r>
-            <a:r>
-              <a:rPr lang="en-AT" dirty="0" err="1"/>
-              <a:t>flut</a:t>
-            </a:r>
-            <a:r>
-              <a:rPr lang="en-AT" dirty="0"/>
-              <a:t>). </a:t>
-            </a:r>
-          </a:p>
-          <a:p>
-            <a:pPr lvl="1"/>
-            <a:r>
-              <a:rPr lang="en-AT" dirty="0"/>
-              <a:t>Kleine </a:t>
-            </a:r>
-            <a:r>
-              <a:rPr lang="en-AT" dirty="0" err="1"/>
-              <a:t>einzelbäume</a:t>
-            </a:r>
-            <a:r>
-              <a:rPr lang="en-AT" dirty="0"/>
-              <a:t> (die in </a:t>
-            </a:r>
-            <a:r>
-              <a:rPr lang="en-AT" dirty="0" err="1"/>
-              <a:t>auflösung</a:t>
-            </a:r>
-            <a:r>
-              <a:rPr lang="en-AT" dirty="0"/>
-              <a:t> </a:t>
-            </a:r>
-            <a:r>
-              <a:rPr lang="en-AT" dirty="0" err="1"/>
-              <a:t>unter</a:t>
-            </a:r>
-            <a:r>
-              <a:rPr lang="en-AT" dirty="0"/>
-              <a:t> </a:t>
-            </a:r>
-            <a:r>
-              <a:rPr lang="en-AT" dirty="0" err="1"/>
-              <a:t>gehen</a:t>
-            </a:r>
-            <a:r>
-              <a:rPr lang="en-AT" dirty="0"/>
-              <a:t>)</a:t>
-            </a:r>
-            <a:endParaRPr lang="de-AT" dirty="0"/>
-          </a:p>
-        </p:txBody>
-      </p:sp>
-      <p:sp>
-        <p:nvSpPr>
-          <p:cNvPr id="3" name="Footer Placeholder 2">
-            <a:extLst>
-              <a:ext uri="{FF2B5EF4-FFF2-40B4-BE49-F238E27FC236}">
-                <a16:creationId xmlns:a16="http://schemas.microsoft.com/office/drawing/2014/main" id="{55B64D95-FAF4-69ED-418D-4071B194B9C3}"/>
-              </a:ext>
-            </a:extLst>
-          </p:cNvPr>
-          <p:cNvSpPr>
-            <a:spLocks noGrp="1"/>
-          </p:cNvSpPr>
-          <p:nvPr>
-            <p:ph type="ftr" sz="quarter" idx="11"/>
-          </p:nvPr>
-        </p:nvSpPr>
-        <p:spPr/>
-        <p:txBody>
-          <a:bodyPr/>
-          <a:lstStyle/>
-          <a:p>
-            <a:r>
-              <a:rPr lang="de-AT"/>
-              <a:t>Fusszeile</a:t>
-            </a:r>
-            <a:endParaRPr lang="de-AT" dirty="0"/>
-          </a:p>
-        </p:txBody>
-      </p:sp>
-      <p:sp>
-        <p:nvSpPr>
-          <p:cNvPr id="4" name="Slide Number Placeholder 3">
-            <a:extLst>
-              <a:ext uri="{FF2B5EF4-FFF2-40B4-BE49-F238E27FC236}">
-                <a16:creationId xmlns:a16="http://schemas.microsoft.com/office/drawing/2014/main" id="{33B2AAA4-35A8-7150-EB96-79DC412AECBE}"/>
-              </a:ext>
-            </a:extLst>
-          </p:cNvPr>
-          <p:cNvSpPr>
-            <a:spLocks noGrp="1"/>
-          </p:cNvSpPr>
-          <p:nvPr>
-            <p:ph type="sldNum" sz="quarter" idx="12"/>
-          </p:nvPr>
-        </p:nvSpPr>
-        <p:spPr/>
-        <p:txBody>
-          <a:bodyPr/>
-          <a:lstStyle/>
-          <a:p>
-            <a:r>
-              <a:rPr lang="de-AT"/>
-              <a:t>SEITE </a:t>
-            </a:r>
-            <a:fld id="{BE3DC40E-DBBE-4E2D-9EEC-FBF0DA0E9179}" type="slidenum">
-              <a:rPr lang="de-AT" smtClean="0"/>
-              <a:t>7</a:t>
-            </a:fld>
-            <a:endParaRPr lang="de-AT" dirty="0"/>
-          </a:p>
-        </p:txBody>
-      </p:sp>
-      <p:sp>
-        <p:nvSpPr>
-          <p:cNvPr id="5" name="Title 4">
-            <a:extLst>
-              <a:ext uri="{FF2B5EF4-FFF2-40B4-BE49-F238E27FC236}">
-                <a16:creationId xmlns:a16="http://schemas.microsoft.com/office/drawing/2014/main" id="{404B5E96-66C7-B557-D215-2616AAD0E7D3}"/>
-              </a:ext>
-            </a:extLst>
-          </p:cNvPr>
-          <p:cNvSpPr>
-            <a:spLocks noGrp="1"/>
-          </p:cNvSpPr>
-          <p:nvPr>
-            <p:ph type="title"/>
-          </p:nvPr>
-        </p:nvSpPr>
-        <p:spPr/>
-        <p:txBody>
-          <a:bodyPr/>
-          <a:lstStyle/>
-          <a:p>
-            <a:r>
-              <a:rPr lang="en-AT" dirty="0"/>
-              <a:t>Introduction – Scope and Limitation</a:t>
-            </a:r>
-            <a:endParaRPr lang="de-AT" dirty="0"/>
-          </a:p>
-        </p:txBody>
-      </p:sp>
-    </p:spTree>
-    <p:extLst>
-      <p:ext uri="{BB962C8B-B14F-4D97-AF65-F5344CB8AC3E}">
-        <p14:creationId xmlns:p14="http://schemas.microsoft.com/office/powerpoint/2010/main" val="4176988336"/>
-      </p:ext>
-    </p:extLst>
-  </p:cSld>
-  <p:clrMapOvr>
-    <a:masterClrMapping/>
-  </p:clrMapOvr>
-  <p:transition>
-    <p:fade/>
-  </p:transition>
-</p:sld>
-</file>
-
-<file path=ppt/slides/slide8.xml><?xml version="1.0" encoding="utf-8"?>
 <p:sld xmlns:a="http://schemas.openxmlformats.org/drawingml/2006/main" xmlns:r="http://schemas.openxmlformats.org/officeDocument/2006/relationships" xmlns:p="http://schemas.openxmlformats.org/presentationml/2006/main">
   <p:cSld>
     <p:spTree>
@@ -10276,46 +13358,6 @@
       </p:sp>
       <p:sp>
         <p:nvSpPr>
-          <p:cNvPr id="3" name="Footer Placeholder 2">
-            <a:extLst>
-              <a:ext uri="{FF2B5EF4-FFF2-40B4-BE49-F238E27FC236}">
-                <a16:creationId xmlns:a16="http://schemas.microsoft.com/office/drawing/2014/main" id="{1098F11D-E956-FC68-4A79-9A2203B5CD3C}"/>
-              </a:ext>
-            </a:extLst>
-          </p:cNvPr>
-          <p:cNvSpPr>
-            <a:spLocks noGrp="1"/>
-          </p:cNvSpPr>
-          <p:nvPr>
-            <p:ph type="ftr" sz="quarter" idx="14"/>
-          </p:nvPr>
-        </p:nvSpPr>
-        <p:spPr>
-          <a:xfrm>
-            <a:off x="1354561" y="5412059"/>
-            <a:ext cx="3217443" cy="258085"/>
-          </a:xfrm>
-        </p:spPr>
-        <p:txBody>
-          <a:bodyPr anchor="ctr">
-            <a:normAutofit/>
-          </a:bodyPr>
-          <a:lstStyle/>
-          <a:p>
-            <a:pPr>
-              <a:spcAft>
-                <a:spcPts val="600"/>
-              </a:spcAft>
-            </a:pPr>
-            <a:r>
-              <a:rPr lang="de-AT"/>
-              <a:t>Fusszeile</a:t>
-            </a:r>
-          </a:p>
-        </p:txBody>
-      </p:sp>
-      <p:sp>
-        <p:nvSpPr>
           <p:cNvPr id="4" name="Slide Number Placeholder 3">
             <a:extLst>
               <a:ext uri="{FF2B5EF4-FFF2-40B4-BE49-F238E27FC236}">
@@ -10358,7 +13400,7 @@
                   <a:spcPts val="600"/>
                 </a:spcAft>
               </a:pPr>
-              <a:t>8</a:t>
+              <a:t>7</a:t>
             </a:fld>
             <a:endParaRPr lang="de-AT"/>
           </a:p>
@@ -10380,7 +13422,7 @@
 </p:sld>
 </file>
 
-<file path=ppt/slides/slide9.xml><?xml version="1.0" encoding="utf-8"?>
+<file path=ppt/slides/slide8.xml><?xml version="1.0" encoding="utf-8"?>
 <p:sld xmlns:a="http://schemas.openxmlformats.org/drawingml/2006/main" xmlns:r="http://schemas.openxmlformats.org/officeDocument/2006/relationships" xmlns:p="http://schemas.openxmlformats.org/presentationml/2006/main">
   <p:cSld>
     <p:spTree>
@@ -10428,35 +13470,6 @@
       </p:sp>
       <p:sp>
         <p:nvSpPr>
-          <p:cNvPr id="3" name="Footer Placeholder 2">
-            <a:extLst>
-              <a:ext uri="{FF2B5EF4-FFF2-40B4-BE49-F238E27FC236}">
-                <a16:creationId xmlns:a16="http://schemas.microsoft.com/office/drawing/2014/main" id="{457ACA64-64AD-8BF0-B716-0DC5C881D13E}"/>
-              </a:ext>
-            </a:extLst>
-          </p:cNvPr>
-          <p:cNvSpPr>
-            <a:spLocks noGrp="1"/>
-          </p:cNvSpPr>
-          <p:nvPr>
-            <p:ph type="ftr" sz="quarter" idx="11"/>
-          </p:nvPr>
-        </p:nvSpPr>
-        <p:spPr/>
-        <p:txBody>
-          <a:bodyPr/>
-          <a:lstStyle/>
-          <a:p>
-            <a:r>
-              <a:rPr lang="de-AT"/>
-              <a:t>Fusszeile</a:t>
-            </a:r>
-            <a:endParaRPr lang="de-AT" dirty="0"/>
-          </a:p>
-        </p:txBody>
-      </p:sp>
-      <p:sp>
-        <p:nvSpPr>
           <p:cNvPr id="4" name="Slide Number Placeholder 3">
             <a:extLst>
               <a:ext uri="{FF2B5EF4-FFF2-40B4-BE49-F238E27FC236}">
@@ -10482,7 +13495,7 @@
             </a:r>
             <a:fld id="{BE3DC40E-DBBE-4E2D-9EEC-FBF0DA0E9179}" type="slidenum">
               <a:rPr lang="de-AT" smtClean="0"/>
-              <a:t>9</a:t>
+              <a:t>8</a:t>
             </a:fld>
             <a:endParaRPr lang="de-AT" dirty="0"/>
           </a:p>
@@ -10521,6 +13534,161 @@
     <p:extLst>
       <p:ext uri="{BB962C8B-B14F-4D97-AF65-F5344CB8AC3E}">
         <p14:creationId xmlns:p14="http://schemas.microsoft.com/office/powerpoint/2010/main" val="2161093438"/>
+      </p:ext>
+    </p:extLst>
+  </p:cSld>
+  <p:clrMapOvr>
+    <a:masterClrMapping/>
+  </p:clrMapOvr>
+  <p:transition>
+    <p:fade/>
+  </p:transition>
+</p:sld>
+</file>
+
+<file path=ppt/slides/slide9.xml><?xml version="1.0" encoding="utf-8"?>
+<p:sld xmlns:a="http://schemas.openxmlformats.org/drawingml/2006/main" xmlns:r="http://schemas.openxmlformats.org/officeDocument/2006/relationships" xmlns:p="http://schemas.openxmlformats.org/presentationml/2006/main">
+  <p:cSld>
+    <p:spTree>
+      <p:nvGrpSpPr>
+        <p:cNvPr id="1" name="">
+          <a:extLst>
+            <a:ext uri="{FF2B5EF4-FFF2-40B4-BE49-F238E27FC236}">
+              <a16:creationId xmlns:a16="http://schemas.microsoft.com/office/drawing/2014/main" id="{51452552-A00A-904C-7C5B-1060AC6B9750}"/>
+            </a:ext>
+          </a:extLst>
+        </p:cNvPr>
+        <p:cNvGrpSpPr/>
+        <p:nvPr/>
+      </p:nvGrpSpPr>
+      <p:grpSpPr>
+        <a:xfrm>
+          <a:off x="0" y="0"/>
+          <a:ext cx="0" cy="0"/>
+          <a:chOff x="0" y="0"/>
+          <a:chExt cx="0" cy="0"/>
+        </a:xfrm>
+      </p:grpSpPr>
+      <p:sp>
+        <p:nvSpPr>
+          <p:cNvPr id="10" name="Text Placeholder 1">
+            <a:extLst>
+              <a:ext uri="{FF2B5EF4-FFF2-40B4-BE49-F238E27FC236}">
+                <a16:creationId xmlns:a16="http://schemas.microsoft.com/office/drawing/2014/main" id="{DEE036EB-28F2-D729-CAF5-479DBCDF2390}"/>
+              </a:ext>
+            </a:extLst>
+          </p:cNvPr>
+          <p:cNvSpPr>
+            <a:spLocks noGrp="1"/>
+          </p:cNvSpPr>
+          <p:nvPr>
+            <p:ph type="body" sz="quarter" idx="11"/>
+          </p:nvPr>
+        </p:nvSpPr>
+        <p:spPr>
+          <a:xfrm>
+            <a:off x="287338" y="2941638"/>
+            <a:ext cx="4284662" cy="620885"/>
+          </a:xfrm>
+        </p:spPr>
+        <p:txBody>
+          <a:bodyPr/>
+          <a:lstStyle/>
+          <a:p>
+            <a:endParaRPr lang="en-US"/>
+          </a:p>
+        </p:txBody>
+      </p:sp>
+      <p:sp>
+        <p:nvSpPr>
+          <p:cNvPr id="5" name="Title 4">
+            <a:extLst>
+              <a:ext uri="{FF2B5EF4-FFF2-40B4-BE49-F238E27FC236}">
+                <a16:creationId xmlns:a16="http://schemas.microsoft.com/office/drawing/2014/main" id="{1D14F809-7769-243A-89F5-C8A05A3B242E}"/>
+              </a:ext>
+            </a:extLst>
+          </p:cNvPr>
+          <p:cNvSpPr>
+            <a:spLocks noGrp="1"/>
+          </p:cNvSpPr>
+          <p:nvPr>
+            <p:ph type="ctrTitle"/>
+          </p:nvPr>
+        </p:nvSpPr>
+        <p:spPr>
+          <a:xfrm>
+            <a:off x="605406" y="1301365"/>
+            <a:ext cx="5436000" cy="1026000"/>
+          </a:xfrm>
+        </p:spPr>
+        <p:txBody>
+          <a:bodyPr anchor="ctr">
+            <a:normAutofit/>
+          </a:bodyPr>
+          <a:lstStyle/>
+          <a:p>
+            <a:r>
+              <a:rPr lang="en-AT" dirty="0"/>
+              <a:t>EDA</a:t>
+            </a:r>
+            <a:endParaRPr lang="de-AT" dirty="0"/>
+          </a:p>
+        </p:txBody>
+      </p:sp>
+      <p:sp>
+        <p:nvSpPr>
+          <p:cNvPr id="4" name="Slide Number Placeholder 3">
+            <a:extLst>
+              <a:ext uri="{FF2B5EF4-FFF2-40B4-BE49-F238E27FC236}">
+                <a16:creationId xmlns:a16="http://schemas.microsoft.com/office/drawing/2014/main" id="{2BAC7969-4824-F50A-DB54-40F24F006B15}"/>
+              </a:ext>
+            </a:extLst>
+          </p:cNvPr>
+          <p:cNvSpPr>
+            <a:spLocks noGrp="1"/>
+          </p:cNvSpPr>
+          <p:nvPr>
+            <p:ph type="sldNum" sz="quarter" idx="15"/>
+          </p:nvPr>
+        </p:nvSpPr>
+        <p:spPr>
+          <a:xfrm>
+            <a:off x="462407" y="5412059"/>
+            <a:ext cx="892150" cy="258085"/>
+          </a:xfrm>
+        </p:spPr>
+        <p:txBody>
+          <a:bodyPr anchor="ctr">
+            <a:normAutofit/>
+          </a:bodyPr>
+          <a:lstStyle/>
+          <a:p>
+            <a:pPr>
+              <a:spcAft>
+                <a:spcPts val="600"/>
+              </a:spcAft>
+            </a:pPr>
+            <a:r>
+              <a:rPr lang="de-AT"/>
+              <a:t>SEITE </a:t>
+            </a:r>
+            <a:fld id="{BE3DC40E-DBBE-4E2D-9EEC-FBF0DA0E9179}" type="slidenum">
+              <a:rPr lang="de-AT" smtClean="0"/>
+              <a:pPr>
+                <a:spcAft>
+                  <a:spcPts val="600"/>
+                </a:spcAft>
+              </a:pPr>
+              <a:t>9</a:t>
+            </a:fld>
+            <a:endParaRPr lang="de-AT"/>
+          </a:p>
+        </p:txBody>
+      </p:sp>
+    </p:spTree>
+    <p:extLst>
+      <p:ext uri="{BB962C8B-B14F-4D97-AF65-F5344CB8AC3E}">
+        <p14:creationId xmlns:p14="http://schemas.microsoft.com/office/powerpoint/2010/main" val="3607917642"/>
       </p:ext>
     </p:extLst>
   </p:cSld>
@@ -11365,6 +14533,57 @@
 </file>
 
 <file path=customXml/item1.xml><?xml version="1.0" encoding="utf-8"?>
+<?mso-contentType ?>
+<FormTemplates xmlns="http://schemas.microsoft.com/sharepoint/v3/contenttype/forms">
+  <Display>DocumentLibraryForm</Display>
+  <Edit>DocumentLibraryForm</Edit>
+  <New>DocumentLibraryForm</New>
+</FormTemplates>
+</file>
+
+<file path=customXml/item2.xml><?xml version="1.0" encoding="utf-8"?>
+<p:properties xmlns:p="http://schemas.microsoft.com/office/2006/metadata/properties" xmlns:xsi="http://www.w3.org/2001/XMLSchema-instance" xmlns:pc="http://schemas.microsoft.com/office/infopath/2007/PartnerControls">
+  <documentManagement>
+    <Kategorie xmlns="dde413db-0745-4f3a-8dca-564dc7ff6f7d">Präsentationen</Kategorie>
+    <Beschreibung xmlns="dde413db-0745-4f3a-8dca-564dc7ff6f7d">Musterpräsentation im Format 16:10 (= WU Standard)</Beschreibung>
+    <TaxCatchAll xmlns="08b0a3ee-3d2a-451c-9a1a-7e5d5b0c9c77">
+      <Value>266</Value>
+      <Value>403</Value>
+    </TaxCatchAll>
+    <DokumentenartTaxHTField0 xmlns="1a8d9a65-8471-4209-a900-f8e11db75e0a">
+      <Terms xmlns="http://schemas.microsoft.com/office/infopath/2007/PartnerControls">
+        <TermInfo xmlns="http://schemas.microsoft.com/office/infopath/2007/PartnerControls">
+          <TermName xmlns="http://schemas.microsoft.com/office/infopath/2007/PartnerControls">Vorlagen</TermName>
+          <TermId xmlns="http://schemas.microsoft.com/office/infopath/2007/PartnerControls">17fc50ed-8ad1-47be-ab12-04243fd74ddb</TermId>
+        </TermInfo>
+      </Terms>
+    </DokumentenartTaxHTField0>
+    <WU_x0020_ThemaTaxHTField0 xmlns="1a8d9a65-8471-4209-a900-f8e11db75e0a">
+      <Terms xmlns="http://schemas.microsoft.com/office/infopath/2007/PartnerControls">
+        <TermInfo xmlns="http://schemas.microsoft.com/office/infopath/2007/PartnerControls">
+          <TermName xmlns="http://schemas.microsoft.com/office/infopath/2007/PartnerControls">Corporate Design</TermName>
+          <TermId xmlns="http://schemas.microsoft.com/office/infopath/2007/PartnerControls">19895bcd-b158-45ae-ab7b-f5ca217dfcec</TermId>
+        </TermInfo>
+      </Terms>
+    </WU_x0020_ThemaTaxHTField0>
+    <Format xmlns="dde413db-0745-4f3a-8dca-564dc7ff6f7d">Microsoft Office 2013/2016</Format>
+    <SharedWithUsers xmlns="08b0a3ee-3d2a-451c-9a1a-7e5d5b0c9c77">
+      <UserInfo>
+        <DisplayName>Hernandez Perez, Laura</DisplayName>
+        <AccountId>6100</AccountId>
+        <AccountType/>
+      </UserInfo>
+      <UserInfo>
+        <DisplayName>Hermann, Anett</DisplayName>
+        <AccountId>2869</AccountId>
+        <AccountType/>
+      </UserInfo>
+    </SharedWithUsers>
+  </documentManagement>
+</p:properties>
+</file>
+
+<file path=customXml/item3.xml><?xml version="1.0" encoding="utf-8"?>
 <ct:contentTypeSchema xmlns:ct="http://schemas.microsoft.com/office/2006/metadata/contentType" xmlns:ma="http://schemas.microsoft.com/office/2006/metadata/properties/metaAttributes" ct:_="" ma:_="" ma:contentTypeName="Dokument" ma:contentTypeID="0x010100BCF651A35DF3154DB01328AF51148DAE" ma:contentTypeVersion="2" ma:contentTypeDescription="Ein neues Dokument erstellen." ma:contentTypeScope="" ma:versionID="b5ccb5bb211b6ddcc624790d84f2bb9f">
   <xsd:schema xmlns:xsd="http://www.w3.org/2001/XMLSchema" xmlns:xs="http://www.w3.org/2001/XMLSchema" xmlns:p="http://schemas.microsoft.com/office/2006/metadata/properties" xmlns:ns2="1a8d9a65-8471-4209-a900-f8e11db75e0a" xmlns:ns3="08b0a3ee-3d2a-451c-9a1a-7e5d5b0c9c77" xmlns:ns4="dde413db-0745-4f3a-8dca-564dc7ff6f7d" targetNamespace="http://schemas.microsoft.com/office/2006/metadata/properties" ma:root="true" ma:fieldsID="046596c9011a87760a505164f9d920d3" ns2:_="" ns3:_="" ns4:_="">
     <xsd:import namespace="1a8d9a65-8471-4209-a900-f8e11db75e0a"/>
@@ -11595,58 +14814,27 @@
 </ct:contentTypeSchema>
 </file>
 
-<file path=customXml/item2.xml><?xml version="1.0" encoding="utf-8"?>
-<p:properties xmlns:p="http://schemas.microsoft.com/office/2006/metadata/properties" xmlns:xsi="http://www.w3.org/2001/XMLSchema-instance" xmlns:pc="http://schemas.microsoft.com/office/infopath/2007/PartnerControls">
-  <documentManagement>
-    <Kategorie xmlns="dde413db-0745-4f3a-8dca-564dc7ff6f7d">Präsentationen</Kategorie>
-    <Beschreibung xmlns="dde413db-0745-4f3a-8dca-564dc7ff6f7d">Musterpräsentation im Format 16:10 (= WU Standard)</Beschreibung>
-    <TaxCatchAll xmlns="08b0a3ee-3d2a-451c-9a1a-7e5d5b0c9c77">
-      <Value>266</Value>
-      <Value>403</Value>
-    </TaxCatchAll>
-    <DokumentenartTaxHTField0 xmlns="1a8d9a65-8471-4209-a900-f8e11db75e0a">
-      <Terms xmlns="http://schemas.microsoft.com/office/infopath/2007/PartnerControls">
-        <TermInfo xmlns="http://schemas.microsoft.com/office/infopath/2007/PartnerControls">
-          <TermName xmlns="http://schemas.microsoft.com/office/infopath/2007/PartnerControls">Vorlagen</TermName>
-          <TermId xmlns="http://schemas.microsoft.com/office/infopath/2007/PartnerControls">17fc50ed-8ad1-47be-ab12-04243fd74ddb</TermId>
-        </TermInfo>
-      </Terms>
-    </DokumentenartTaxHTField0>
-    <WU_x0020_ThemaTaxHTField0 xmlns="1a8d9a65-8471-4209-a900-f8e11db75e0a">
-      <Terms xmlns="http://schemas.microsoft.com/office/infopath/2007/PartnerControls">
-        <TermInfo xmlns="http://schemas.microsoft.com/office/infopath/2007/PartnerControls">
-          <TermName xmlns="http://schemas.microsoft.com/office/infopath/2007/PartnerControls">Corporate Design</TermName>
-          <TermId xmlns="http://schemas.microsoft.com/office/infopath/2007/PartnerControls">19895bcd-b158-45ae-ab7b-f5ca217dfcec</TermId>
-        </TermInfo>
-      </Terms>
-    </WU_x0020_ThemaTaxHTField0>
-    <Format xmlns="dde413db-0745-4f3a-8dca-564dc7ff6f7d">Microsoft Office 2013/2016</Format>
-    <SharedWithUsers xmlns="08b0a3ee-3d2a-451c-9a1a-7e5d5b0c9c77">
-      <UserInfo>
-        <DisplayName>Hernandez Perez, Laura</DisplayName>
-        <AccountId>6100</AccountId>
-        <AccountType/>
-      </UserInfo>
-      <UserInfo>
-        <DisplayName>Hermann, Anett</DisplayName>
-        <AccountId>2869</AccountId>
-        <AccountType/>
-      </UserInfo>
-    </SharedWithUsers>
-  </documentManagement>
-</p:properties>
+<file path=customXml/itemProps1.xml><?xml version="1.0" encoding="utf-8"?>
+<ds:datastoreItem xmlns:ds="http://schemas.openxmlformats.org/officeDocument/2006/customXml" ds:itemID="{9346B3ED-06B1-4DE8-9648-0F78B5B453B2}">
+  <ds:schemaRefs>
+    <ds:schemaRef ds:uri="http://schemas.microsoft.com/sharepoint/v3/contenttype/forms"/>
+  </ds:schemaRefs>
+</ds:datastoreItem>
 </file>
 
-<file path=customXml/item3.xml><?xml version="1.0" encoding="utf-8"?>
-<?mso-contentType ?>
-<FormTemplates xmlns="http://schemas.microsoft.com/sharepoint/v3/contenttype/forms">
-  <Display>DocumentLibraryForm</Display>
-  <Edit>DocumentLibraryForm</Edit>
-  <New>DocumentLibraryForm</New>
-</FormTemplates>
+<file path=customXml/itemProps2.xml><?xml version="1.0" encoding="utf-8"?>
+<ds:datastoreItem xmlns:ds="http://schemas.openxmlformats.org/officeDocument/2006/customXml" ds:itemID="{BF58DFAF-C9AD-4CE5-A221-45D64FB05328}">
+  <ds:schemaRefs>
+    <ds:schemaRef ds:uri="http://schemas.microsoft.com/office/2006/metadata/properties"/>
+    <ds:schemaRef ds:uri="http://schemas.microsoft.com/office/infopath/2007/PartnerControls"/>
+    <ds:schemaRef ds:uri="dde413db-0745-4f3a-8dca-564dc7ff6f7d"/>
+    <ds:schemaRef ds:uri="08b0a3ee-3d2a-451c-9a1a-7e5d5b0c9c77"/>
+    <ds:schemaRef ds:uri="1a8d9a65-8471-4209-a900-f8e11db75e0a"/>
+  </ds:schemaRefs>
+</ds:datastoreItem>
 </file>
 
-<file path=customXml/itemProps1.xml><?xml version="1.0" encoding="utf-8"?>
+<file path=customXml/itemProps3.xml><?xml version="1.0" encoding="utf-8"?>
 <ds:datastoreItem xmlns:ds="http://schemas.openxmlformats.org/officeDocument/2006/customXml" ds:itemID="{069B4889-3CCA-46C6-8FD4-B0AB941A4B59}">
   <ds:schemaRefs>
     <ds:schemaRef ds:uri="http://schemas.microsoft.com/office/2006/metadata/contentType"/>
@@ -11664,24 +14852,4 @@
     <ds:schemaRef ds:uri="http://schemas.microsoft.com/internal/obd"/>
   </ds:schemaRefs>
 </ds:datastoreItem>
-</file>
-
-<file path=customXml/itemProps2.xml><?xml version="1.0" encoding="utf-8"?>
-<ds:datastoreItem xmlns:ds="http://schemas.openxmlformats.org/officeDocument/2006/customXml" ds:itemID="{BF58DFAF-C9AD-4CE5-A221-45D64FB05328}">
-  <ds:schemaRefs>
-    <ds:schemaRef ds:uri="http://schemas.microsoft.com/office/2006/metadata/properties"/>
-    <ds:schemaRef ds:uri="http://schemas.microsoft.com/office/infopath/2007/PartnerControls"/>
-    <ds:schemaRef ds:uri="dde413db-0745-4f3a-8dca-564dc7ff6f7d"/>
-    <ds:schemaRef ds:uri="08b0a3ee-3d2a-451c-9a1a-7e5d5b0c9c77"/>
-    <ds:schemaRef ds:uri="1a8d9a65-8471-4209-a900-f8e11db75e0a"/>
-  </ds:schemaRefs>
-</ds:datastoreItem>
-</file>
-
-<file path=customXml/itemProps3.xml><?xml version="1.0" encoding="utf-8"?>
-<ds:datastoreItem xmlns:ds="http://schemas.openxmlformats.org/officeDocument/2006/customXml" ds:itemID="{9346B3ED-06B1-4DE8-9648-0F78B5B453B2}">
-  <ds:schemaRefs>
-    <ds:schemaRef ds:uri="http://schemas.microsoft.com/sharepoint/v3/contenttype/forms"/>
-  </ds:schemaRefs>
-</ds:datastoreItem>
 </file>
--- a/deliverables/3b. intermediate slides/Intermediate Slides.pptx
+++ b/deliverables/3b. intermediate slides/Intermediate Slides.pptx
@@ -5,10 +5,10 @@
     <p:sldMasterId id="2147483660" r:id="rId4"/>
   </p:sldMasterIdLst>
   <p:notesMasterIdLst>
-    <p:notesMasterId r:id="rId19"/>
+    <p:notesMasterId r:id="rId20"/>
   </p:notesMasterIdLst>
   <p:handoutMasterIdLst>
-    <p:handoutMasterId r:id="rId20"/>
+    <p:handoutMasterId r:id="rId21"/>
   </p:handoutMasterIdLst>
   <p:sldIdLst>
     <p:sldId id="278" r:id="rId5"/>
@@ -23,13 +23,14 @@
     <p:sldId id="285" r:id="rId14"/>
     <p:sldId id="292" r:id="rId15"/>
     <p:sldId id="286" r:id="rId16"/>
-    <p:sldId id="287" r:id="rId17"/>
-    <p:sldId id="288" r:id="rId18"/>
+    <p:sldId id="293" r:id="rId17"/>
+    <p:sldId id="287" r:id="rId18"/>
+    <p:sldId id="288" r:id="rId19"/>
   </p:sldIdLst>
   <p:sldSz cx="9144000" cy="5715000" type="screen16x10"/>
   <p:notesSz cx="6858000" cy="9144000"/>
   <p:custDataLst>
-    <p:tags r:id="rId21"/>
+    <p:tags r:id="rId22"/>
   </p:custDataLst>
   <p:defaultTextStyle>
     <a:defPPr>
@@ -888,6 +889,753 @@
   <dgm:styleLbl name="fgShp">
     <dgm:fillClrLst meth="repeat">
       <a:schemeClr val="accent1">
+        <a:tint val="60000"/>
+      </a:schemeClr>
+    </dgm:fillClrLst>
+    <dgm:linClrLst meth="repeat">
+      <a:schemeClr val="lt1"/>
+    </dgm:linClrLst>
+    <dgm:effectClrLst/>
+    <dgm:txLinClrLst/>
+    <dgm:txFillClrLst meth="repeat">
+      <a:schemeClr val="dk1"/>
+    </dgm:txFillClrLst>
+    <dgm:txEffectClrLst/>
+  </dgm:styleLbl>
+  <dgm:styleLbl name="revTx">
+    <dgm:fillClrLst meth="repeat">
+      <a:schemeClr val="lt1">
+        <a:alpha val="0"/>
+      </a:schemeClr>
+    </dgm:fillClrLst>
+    <dgm:linClrLst meth="repeat">
+      <a:schemeClr val="dk1">
+        <a:alpha val="0"/>
+      </a:schemeClr>
+    </dgm:linClrLst>
+    <dgm:effectClrLst/>
+    <dgm:txLinClrLst/>
+    <dgm:txFillClrLst meth="repeat">
+      <a:schemeClr val="tx1"/>
+    </dgm:txFillClrLst>
+    <dgm:txEffectClrLst/>
+  </dgm:styleLbl>
+</dgm:colorsDef>
+</file>
+
+<file path=ppt/diagrams/colors2.xml><?xml version="1.0" encoding="utf-8"?>
+<dgm:colorsDef xmlns:dgm="http://schemas.openxmlformats.org/drawingml/2006/diagram" xmlns:a="http://schemas.openxmlformats.org/drawingml/2006/main" uniqueId="urn:microsoft.com/office/officeart/2005/8/colors/accent2_2">
+  <dgm:title val=""/>
+  <dgm:desc val=""/>
+  <dgm:catLst>
+    <dgm:cat type="accent2" pri="11200"/>
+  </dgm:catLst>
+  <dgm:styleLbl name="node0">
+    <dgm:fillClrLst meth="repeat">
+      <a:schemeClr val="accent2"/>
+    </dgm:fillClrLst>
+    <dgm:linClrLst meth="repeat">
+      <a:schemeClr val="lt1"/>
+    </dgm:linClrLst>
+    <dgm:effectClrLst/>
+    <dgm:txLinClrLst/>
+    <dgm:txFillClrLst/>
+    <dgm:txEffectClrLst/>
+  </dgm:styleLbl>
+  <dgm:styleLbl name="node1">
+    <dgm:fillClrLst meth="repeat">
+      <a:schemeClr val="accent2"/>
+    </dgm:fillClrLst>
+    <dgm:linClrLst meth="repeat">
+      <a:schemeClr val="lt1"/>
+    </dgm:linClrLst>
+    <dgm:effectClrLst/>
+    <dgm:txLinClrLst/>
+    <dgm:txFillClrLst/>
+    <dgm:txEffectClrLst/>
+  </dgm:styleLbl>
+  <dgm:styleLbl name="alignNode1">
+    <dgm:fillClrLst meth="repeat">
+      <a:schemeClr val="accent2"/>
+    </dgm:fillClrLst>
+    <dgm:linClrLst meth="repeat">
+      <a:schemeClr val="accent2"/>
+    </dgm:linClrLst>
+    <dgm:effectClrLst/>
+    <dgm:txLinClrLst/>
+    <dgm:txFillClrLst/>
+    <dgm:txEffectClrLst/>
+  </dgm:styleLbl>
+  <dgm:styleLbl name="lnNode1">
+    <dgm:fillClrLst meth="repeat">
+      <a:schemeClr val="accent2"/>
+    </dgm:fillClrLst>
+    <dgm:linClrLst meth="repeat">
+      <a:schemeClr val="lt1"/>
+    </dgm:linClrLst>
+    <dgm:effectClrLst/>
+    <dgm:txLinClrLst/>
+    <dgm:txFillClrLst/>
+    <dgm:txEffectClrLst/>
+  </dgm:styleLbl>
+  <dgm:styleLbl name="vennNode1">
+    <dgm:fillClrLst meth="repeat">
+      <a:schemeClr val="accent2">
+        <a:alpha val="50000"/>
+      </a:schemeClr>
+    </dgm:fillClrLst>
+    <dgm:linClrLst meth="repeat">
+      <a:schemeClr val="lt1"/>
+    </dgm:linClrLst>
+    <dgm:effectClrLst/>
+    <dgm:txLinClrLst/>
+    <dgm:txFillClrLst/>
+    <dgm:txEffectClrLst/>
+  </dgm:styleLbl>
+  <dgm:styleLbl name="node2">
+    <dgm:fillClrLst meth="repeat">
+      <a:schemeClr val="accent2"/>
+    </dgm:fillClrLst>
+    <dgm:linClrLst meth="repeat">
+      <a:schemeClr val="lt1"/>
+    </dgm:linClrLst>
+    <dgm:effectClrLst/>
+    <dgm:txLinClrLst/>
+    <dgm:txFillClrLst/>
+    <dgm:txEffectClrLst/>
+  </dgm:styleLbl>
+  <dgm:styleLbl name="node3">
+    <dgm:fillClrLst meth="repeat">
+      <a:schemeClr val="accent2"/>
+    </dgm:fillClrLst>
+    <dgm:linClrLst meth="repeat">
+      <a:schemeClr val="lt1"/>
+    </dgm:linClrLst>
+    <dgm:effectClrLst/>
+    <dgm:txLinClrLst/>
+    <dgm:txFillClrLst/>
+    <dgm:txEffectClrLst/>
+  </dgm:styleLbl>
+  <dgm:styleLbl name="node4">
+    <dgm:fillClrLst meth="repeat">
+      <a:schemeClr val="accent2"/>
+    </dgm:fillClrLst>
+    <dgm:linClrLst meth="repeat">
+      <a:schemeClr val="lt1"/>
+    </dgm:linClrLst>
+    <dgm:effectClrLst/>
+    <dgm:txLinClrLst/>
+    <dgm:txFillClrLst/>
+    <dgm:txEffectClrLst/>
+  </dgm:styleLbl>
+  <dgm:styleLbl name="fgImgPlace1">
+    <dgm:fillClrLst meth="repeat">
+      <a:schemeClr val="accent2">
+        <a:tint val="50000"/>
+      </a:schemeClr>
+    </dgm:fillClrLst>
+    <dgm:linClrLst meth="repeat">
+      <a:schemeClr val="lt1"/>
+    </dgm:linClrLst>
+    <dgm:effectClrLst/>
+    <dgm:txLinClrLst/>
+    <dgm:txFillClrLst meth="repeat">
+      <a:schemeClr val="lt1"/>
+    </dgm:txFillClrLst>
+    <dgm:txEffectClrLst/>
+  </dgm:styleLbl>
+  <dgm:styleLbl name="alignImgPlace1">
+    <dgm:fillClrLst meth="repeat">
+      <a:schemeClr val="accent2">
+        <a:tint val="50000"/>
+      </a:schemeClr>
+    </dgm:fillClrLst>
+    <dgm:linClrLst meth="repeat">
+      <a:schemeClr val="lt1"/>
+    </dgm:linClrLst>
+    <dgm:effectClrLst/>
+    <dgm:txLinClrLst/>
+    <dgm:txFillClrLst meth="repeat">
+      <a:schemeClr val="lt1"/>
+    </dgm:txFillClrLst>
+    <dgm:txEffectClrLst/>
+  </dgm:styleLbl>
+  <dgm:styleLbl name="bgImgPlace1">
+    <dgm:fillClrLst meth="repeat">
+      <a:schemeClr val="accent2">
+        <a:tint val="50000"/>
+      </a:schemeClr>
+    </dgm:fillClrLst>
+    <dgm:linClrLst meth="repeat">
+      <a:schemeClr val="lt1"/>
+    </dgm:linClrLst>
+    <dgm:effectClrLst/>
+    <dgm:txLinClrLst/>
+    <dgm:txFillClrLst meth="repeat">
+      <a:schemeClr val="lt1"/>
+    </dgm:txFillClrLst>
+    <dgm:txEffectClrLst/>
+  </dgm:styleLbl>
+  <dgm:styleLbl name="sibTrans2D1">
+    <dgm:fillClrLst meth="repeat">
+      <a:schemeClr val="accent2">
+        <a:tint val="60000"/>
+      </a:schemeClr>
+    </dgm:fillClrLst>
+    <dgm:linClrLst meth="repeat">
+      <a:schemeClr val="accent2">
+        <a:tint val="60000"/>
+      </a:schemeClr>
+    </dgm:linClrLst>
+    <dgm:effectClrLst/>
+    <dgm:txLinClrLst/>
+    <dgm:txFillClrLst/>
+    <dgm:txEffectClrLst/>
+  </dgm:styleLbl>
+  <dgm:styleLbl name="fgSibTrans2D1">
+    <dgm:fillClrLst meth="repeat">
+      <a:schemeClr val="accent2">
+        <a:tint val="60000"/>
+      </a:schemeClr>
+    </dgm:fillClrLst>
+    <dgm:linClrLst meth="repeat">
+      <a:schemeClr val="accent2">
+        <a:tint val="60000"/>
+      </a:schemeClr>
+    </dgm:linClrLst>
+    <dgm:effectClrLst/>
+    <dgm:txLinClrLst/>
+    <dgm:txFillClrLst/>
+    <dgm:txEffectClrLst/>
+  </dgm:styleLbl>
+  <dgm:styleLbl name="bgSibTrans2D1">
+    <dgm:fillClrLst meth="repeat">
+      <a:schemeClr val="accent2">
+        <a:tint val="60000"/>
+      </a:schemeClr>
+    </dgm:fillClrLst>
+    <dgm:linClrLst meth="repeat">
+      <a:schemeClr val="accent2">
+        <a:tint val="60000"/>
+      </a:schemeClr>
+    </dgm:linClrLst>
+    <dgm:effectClrLst/>
+    <dgm:txLinClrLst/>
+    <dgm:txFillClrLst/>
+    <dgm:txEffectClrLst/>
+  </dgm:styleLbl>
+  <dgm:styleLbl name="sibTrans1D1">
+    <dgm:fillClrLst meth="repeat">
+      <a:schemeClr val="accent2"/>
+    </dgm:fillClrLst>
+    <dgm:linClrLst meth="repeat">
+      <a:schemeClr val="accent2"/>
+    </dgm:linClrLst>
+    <dgm:effectClrLst/>
+    <dgm:txLinClrLst/>
+    <dgm:txFillClrLst meth="repeat">
+      <a:schemeClr val="tx1"/>
+    </dgm:txFillClrLst>
+    <dgm:txEffectClrLst/>
+  </dgm:styleLbl>
+  <dgm:styleLbl name="callout">
+    <dgm:fillClrLst meth="repeat">
+      <a:schemeClr val="accent2"/>
+    </dgm:fillClrLst>
+    <dgm:linClrLst meth="repeat">
+      <a:schemeClr val="accent2">
+        <a:tint val="50000"/>
+      </a:schemeClr>
+    </dgm:linClrLst>
+    <dgm:effectClrLst/>
+    <dgm:txLinClrLst/>
+    <dgm:txFillClrLst meth="repeat">
+      <a:schemeClr val="tx1"/>
+    </dgm:txFillClrLst>
+    <dgm:txEffectClrLst/>
+  </dgm:styleLbl>
+  <dgm:styleLbl name="asst0">
+    <dgm:fillClrLst meth="repeat">
+      <a:schemeClr val="accent2"/>
+    </dgm:fillClrLst>
+    <dgm:linClrLst meth="repeat">
+      <a:schemeClr val="lt1"/>
+    </dgm:linClrLst>
+    <dgm:effectClrLst/>
+    <dgm:txLinClrLst/>
+    <dgm:txFillClrLst/>
+    <dgm:txEffectClrLst/>
+  </dgm:styleLbl>
+  <dgm:styleLbl name="asst1">
+    <dgm:fillClrLst meth="repeat">
+      <a:schemeClr val="accent2"/>
+    </dgm:fillClrLst>
+    <dgm:linClrLst meth="repeat">
+      <a:schemeClr val="lt1"/>
+    </dgm:linClrLst>
+    <dgm:effectClrLst/>
+    <dgm:txLinClrLst/>
+    <dgm:txFillClrLst/>
+    <dgm:txEffectClrLst/>
+  </dgm:styleLbl>
+  <dgm:styleLbl name="asst2">
+    <dgm:fillClrLst meth="repeat">
+      <a:schemeClr val="accent2"/>
+    </dgm:fillClrLst>
+    <dgm:linClrLst meth="repeat">
+      <a:schemeClr val="lt1"/>
+    </dgm:linClrLst>
+    <dgm:effectClrLst/>
+    <dgm:txLinClrLst/>
+    <dgm:txFillClrLst/>
+    <dgm:txEffectClrLst/>
+  </dgm:styleLbl>
+  <dgm:styleLbl name="asst3">
+    <dgm:fillClrLst meth="repeat">
+      <a:schemeClr val="accent2"/>
+    </dgm:fillClrLst>
+    <dgm:linClrLst meth="repeat">
+      <a:schemeClr val="lt1"/>
+    </dgm:linClrLst>
+    <dgm:effectClrLst/>
+    <dgm:txLinClrLst/>
+    <dgm:txFillClrLst/>
+    <dgm:txEffectClrLst/>
+  </dgm:styleLbl>
+  <dgm:styleLbl name="asst4">
+    <dgm:fillClrLst meth="repeat">
+      <a:schemeClr val="accent2"/>
+    </dgm:fillClrLst>
+    <dgm:linClrLst meth="repeat">
+      <a:schemeClr val="lt1"/>
+    </dgm:linClrLst>
+    <dgm:effectClrLst/>
+    <dgm:txLinClrLst/>
+    <dgm:txFillClrLst/>
+    <dgm:txEffectClrLst/>
+  </dgm:styleLbl>
+  <dgm:styleLbl name="parChTrans2D1">
+    <dgm:fillClrLst meth="repeat">
+      <a:schemeClr val="accent2">
+        <a:tint val="60000"/>
+      </a:schemeClr>
+    </dgm:fillClrLst>
+    <dgm:linClrLst meth="repeat">
+      <a:schemeClr val="accent2">
+        <a:tint val="60000"/>
+      </a:schemeClr>
+    </dgm:linClrLst>
+    <dgm:effectClrLst/>
+    <dgm:txLinClrLst/>
+    <dgm:txFillClrLst meth="repeat">
+      <a:schemeClr val="lt1"/>
+    </dgm:txFillClrLst>
+    <dgm:txEffectClrLst/>
+  </dgm:styleLbl>
+  <dgm:styleLbl name="parChTrans2D2">
+    <dgm:fillClrLst meth="repeat">
+      <a:schemeClr val="accent2"/>
+    </dgm:fillClrLst>
+    <dgm:linClrLst meth="repeat">
+      <a:schemeClr val="accent2"/>
+    </dgm:linClrLst>
+    <dgm:effectClrLst/>
+    <dgm:txLinClrLst/>
+    <dgm:txFillClrLst meth="repeat">
+      <a:schemeClr val="lt1"/>
+    </dgm:txFillClrLst>
+    <dgm:txEffectClrLst/>
+  </dgm:styleLbl>
+  <dgm:styleLbl name="parChTrans2D3">
+    <dgm:fillClrLst meth="repeat">
+      <a:schemeClr val="accent2"/>
+    </dgm:fillClrLst>
+    <dgm:linClrLst meth="repeat">
+      <a:schemeClr val="accent2"/>
+    </dgm:linClrLst>
+    <dgm:effectClrLst/>
+    <dgm:txLinClrLst/>
+    <dgm:txFillClrLst meth="repeat">
+      <a:schemeClr val="lt1"/>
+    </dgm:txFillClrLst>
+    <dgm:txEffectClrLst/>
+  </dgm:styleLbl>
+  <dgm:styleLbl name="parChTrans2D4">
+    <dgm:fillClrLst meth="repeat">
+      <a:schemeClr val="accent2"/>
+    </dgm:fillClrLst>
+    <dgm:linClrLst meth="repeat">
+      <a:schemeClr val="accent2"/>
+    </dgm:linClrLst>
+    <dgm:effectClrLst/>
+    <dgm:txLinClrLst/>
+    <dgm:txFillClrLst meth="repeat">
+      <a:schemeClr val="lt1"/>
+    </dgm:txFillClrLst>
+    <dgm:txEffectClrLst/>
+  </dgm:styleLbl>
+  <dgm:styleLbl name="parChTrans1D1">
+    <dgm:fillClrLst meth="repeat">
+      <a:schemeClr val="accent2"/>
+    </dgm:fillClrLst>
+    <dgm:linClrLst meth="repeat">
+      <a:schemeClr val="accent2">
+        <a:shade val="60000"/>
+      </a:schemeClr>
+    </dgm:linClrLst>
+    <dgm:effectClrLst/>
+    <dgm:txLinClrLst/>
+    <dgm:txFillClrLst meth="repeat">
+      <a:schemeClr val="tx1"/>
+    </dgm:txFillClrLst>
+    <dgm:txEffectClrLst/>
+  </dgm:styleLbl>
+  <dgm:styleLbl name="parChTrans1D2">
+    <dgm:fillClrLst meth="repeat">
+      <a:schemeClr val="accent2"/>
+    </dgm:fillClrLst>
+    <dgm:linClrLst meth="repeat">
+      <a:schemeClr val="accent2">
+        <a:shade val="60000"/>
+      </a:schemeClr>
+    </dgm:linClrLst>
+    <dgm:effectClrLst/>
+    <dgm:txLinClrLst/>
+    <dgm:txFillClrLst meth="repeat">
+      <a:schemeClr val="tx1"/>
+    </dgm:txFillClrLst>
+    <dgm:txEffectClrLst/>
+  </dgm:styleLbl>
+  <dgm:styleLbl name="parChTrans1D3">
+    <dgm:fillClrLst meth="repeat">
+      <a:schemeClr val="accent2"/>
+    </dgm:fillClrLst>
+    <dgm:linClrLst meth="repeat">
+      <a:schemeClr val="accent2">
+        <a:shade val="80000"/>
+      </a:schemeClr>
+    </dgm:linClrLst>
+    <dgm:effectClrLst/>
+    <dgm:txLinClrLst/>
+    <dgm:txFillClrLst meth="repeat">
+      <a:schemeClr val="tx1"/>
+    </dgm:txFillClrLst>
+    <dgm:txEffectClrLst/>
+  </dgm:styleLbl>
+  <dgm:styleLbl name="parChTrans1D4">
+    <dgm:fillClrLst meth="repeat">
+      <a:schemeClr val="accent2"/>
+    </dgm:fillClrLst>
+    <dgm:linClrLst meth="repeat">
+      <a:schemeClr val="accent2">
+        <a:shade val="80000"/>
+      </a:schemeClr>
+    </dgm:linClrLst>
+    <dgm:effectClrLst/>
+    <dgm:txLinClrLst/>
+    <dgm:txFillClrLst meth="repeat">
+      <a:schemeClr val="tx1"/>
+    </dgm:txFillClrLst>
+    <dgm:txEffectClrLst/>
+  </dgm:styleLbl>
+  <dgm:styleLbl name="fgAcc1">
+    <dgm:fillClrLst meth="repeat">
+      <a:schemeClr val="lt1">
+        <a:alpha val="90000"/>
+      </a:schemeClr>
+    </dgm:fillClrLst>
+    <dgm:linClrLst meth="repeat">
+      <a:schemeClr val="accent2"/>
+    </dgm:linClrLst>
+    <dgm:effectClrLst/>
+    <dgm:txLinClrLst/>
+    <dgm:txFillClrLst meth="repeat">
+      <a:schemeClr val="dk1"/>
+    </dgm:txFillClrLst>
+    <dgm:txEffectClrLst/>
+  </dgm:styleLbl>
+  <dgm:styleLbl name="conFgAcc1">
+    <dgm:fillClrLst meth="repeat">
+      <a:schemeClr val="lt1">
+        <a:alpha val="90000"/>
+      </a:schemeClr>
+    </dgm:fillClrLst>
+    <dgm:linClrLst meth="repeat">
+      <a:schemeClr val="accent2"/>
+    </dgm:linClrLst>
+    <dgm:effectClrLst/>
+    <dgm:txLinClrLst/>
+    <dgm:txFillClrLst meth="repeat">
+      <a:schemeClr val="dk1"/>
+    </dgm:txFillClrLst>
+    <dgm:txEffectClrLst/>
+  </dgm:styleLbl>
+  <dgm:styleLbl name="alignAcc1">
+    <dgm:fillClrLst meth="repeat">
+      <a:schemeClr val="lt1">
+        <a:alpha val="90000"/>
+      </a:schemeClr>
+    </dgm:fillClrLst>
+    <dgm:linClrLst meth="repeat">
+      <a:schemeClr val="accent2"/>
+    </dgm:linClrLst>
+    <dgm:effectClrLst/>
+    <dgm:txLinClrLst/>
+    <dgm:txFillClrLst meth="repeat">
+      <a:schemeClr val="dk1"/>
+    </dgm:txFillClrLst>
+    <dgm:txEffectClrLst/>
+  </dgm:styleLbl>
+  <dgm:styleLbl name="trAlignAcc1">
+    <dgm:fillClrLst meth="repeat">
+      <a:schemeClr val="lt1">
+        <a:alpha val="40000"/>
+      </a:schemeClr>
+    </dgm:fillClrLst>
+    <dgm:linClrLst meth="repeat">
+      <a:schemeClr val="accent2"/>
+    </dgm:linClrLst>
+    <dgm:effectClrLst/>
+    <dgm:txLinClrLst/>
+    <dgm:txFillClrLst meth="repeat">
+      <a:schemeClr val="dk1"/>
+    </dgm:txFillClrLst>
+    <dgm:txEffectClrLst/>
+  </dgm:styleLbl>
+  <dgm:styleLbl name="bgAcc1">
+    <dgm:fillClrLst meth="repeat">
+      <a:schemeClr val="lt1">
+        <a:alpha val="90000"/>
+      </a:schemeClr>
+    </dgm:fillClrLst>
+    <dgm:linClrLst meth="repeat">
+      <a:schemeClr val="accent2"/>
+    </dgm:linClrLst>
+    <dgm:effectClrLst/>
+    <dgm:txLinClrLst/>
+    <dgm:txFillClrLst meth="repeat">
+      <a:schemeClr val="dk1"/>
+    </dgm:txFillClrLst>
+    <dgm:txEffectClrLst/>
+  </dgm:styleLbl>
+  <dgm:styleLbl name="solidFgAcc1">
+    <dgm:fillClrLst meth="repeat">
+      <a:schemeClr val="lt1"/>
+    </dgm:fillClrLst>
+    <dgm:linClrLst meth="repeat">
+      <a:schemeClr val="accent2"/>
+    </dgm:linClrLst>
+    <dgm:effectClrLst/>
+    <dgm:txLinClrLst/>
+    <dgm:txFillClrLst meth="repeat">
+      <a:schemeClr val="dk1"/>
+    </dgm:txFillClrLst>
+    <dgm:txEffectClrLst/>
+  </dgm:styleLbl>
+  <dgm:styleLbl name="solidAlignAcc1">
+    <dgm:fillClrLst meth="repeat">
+      <a:schemeClr val="lt1"/>
+    </dgm:fillClrLst>
+    <dgm:linClrLst meth="repeat">
+      <a:schemeClr val="accent2"/>
+    </dgm:linClrLst>
+    <dgm:effectClrLst/>
+    <dgm:txLinClrLst/>
+    <dgm:txFillClrLst meth="repeat">
+      <a:schemeClr val="dk1"/>
+    </dgm:txFillClrLst>
+    <dgm:txEffectClrLst/>
+  </dgm:styleLbl>
+  <dgm:styleLbl name="solidBgAcc1">
+    <dgm:fillClrLst meth="repeat">
+      <a:schemeClr val="lt1"/>
+    </dgm:fillClrLst>
+    <dgm:linClrLst meth="repeat">
+      <a:schemeClr val="accent2"/>
+    </dgm:linClrLst>
+    <dgm:effectClrLst/>
+    <dgm:txLinClrLst/>
+    <dgm:txFillClrLst meth="repeat">
+      <a:schemeClr val="dk1"/>
+    </dgm:txFillClrLst>
+    <dgm:txEffectClrLst/>
+  </dgm:styleLbl>
+  <dgm:styleLbl name="fgAccFollowNode1">
+    <dgm:fillClrLst meth="repeat">
+      <a:schemeClr val="accent2">
+        <a:alpha val="90000"/>
+        <a:tint val="40000"/>
+      </a:schemeClr>
+    </dgm:fillClrLst>
+    <dgm:linClrLst meth="repeat">
+      <a:schemeClr val="accent2">
+        <a:alpha val="90000"/>
+        <a:tint val="40000"/>
+      </a:schemeClr>
+    </dgm:linClrLst>
+    <dgm:effectClrLst/>
+    <dgm:txLinClrLst/>
+    <dgm:txFillClrLst meth="repeat">
+      <a:schemeClr val="dk1"/>
+    </dgm:txFillClrLst>
+    <dgm:txEffectClrLst/>
+  </dgm:styleLbl>
+  <dgm:styleLbl name="alignAccFollowNode1">
+    <dgm:fillClrLst meth="repeat">
+      <a:schemeClr val="accent2">
+        <a:alpha val="90000"/>
+        <a:tint val="40000"/>
+      </a:schemeClr>
+    </dgm:fillClrLst>
+    <dgm:linClrLst meth="repeat">
+      <a:schemeClr val="accent2">
+        <a:alpha val="90000"/>
+        <a:tint val="40000"/>
+      </a:schemeClr>
+    </dgm:linClrLst>
+    <dgm:effectClrLst/>
+    <dgm:txLinClrLst/>
+    <dgm:txFillClrLst meth="repeat">
+      <a:schemeClr val="dk1"/>
+    </dgm:txFillClrLst>
+    <dgm:txEffectClrLst/>
+  </dgm:styleLbl>
+  <dgm:styleLbl name="bgAccFollowNode1">
+    <dgm:fillClrLst meth="repeat">
+      <a:schemeClr val="accent2">
+        <a:alpha val="90000"/>
+        <a:tint val="40000"/>
+      </a:schemeClr>
+    </dgm:fillClrLst>
+    <dgm:linClrLst meth="repeat">
+      <a:schemeClr val="accent2">
+        <a:alpha val="90000"/>
+        <a:tint val="40000"/>
+      </a:schemeClr>
+    </dgm:linClrLst>
+    <dgm:effectClrLst/>
+    <dgm:txLinClrLst/>
+    <dgm:txFillClrLst meth="repeat">
+      <a:schemeClr val="dk1"/>
+    </dgm:txFillClrLst>
+    <dgm:txEffectClrLst/>
+  </dgm:styleLbl>
+  <dgm:styleLbl name="fgAcc0">
+    <dgm:fillClrLst meth="repeat">
+      <a:schemeClr val="lt1">
+        <a:alpha val="90000"/>
+      </a:schemeClr>
+    </dgm:fillClrLst>
+    <dgm:linClrLst meth="repeat">
+      <a:schemeClr val="accent2"/>
+    </dgm:linClrLst>
+    <dgm:effectClrLst/>
+    <dgm:txLinClrLst/>
+    <dgm:txFillClrLst meth="repeat">
+      <a:schemeClr val="dk1"/>
+    </dgm:txFillClrLst>
+    <dgm:txEffectClrLst/>
+  </dgm:styleLbl>
+  <dgm:styleLbl name="fgAcc2">
+    <dgm:fillClrLst meth="repeat">
+      <a:schemeClr val="lt1">
+        <a:alpha val="90000"/>
+      </a:schemeClr>
+    </dgm:fillClrLst>
+    <dgm:linClrLst meth="repeat">
+      <a:schemeClr val="accent2"/>
+    </dgm:linClrLst>
+    <dgm:effectClrLst/>
+    <dgm:txLinClrLst/>
+    <dgm:txFillClrLst meth="repeat">
+      <a:schemeClr val="dk1"/>
+    </dgm:txFillClrLst>
+    <dgm:txEffectClrLst/>
+  </dgm:styleLbl>
+  <dgm:styleLbl name="fgAcc3">
+    <dgm:fillClrLst meth="repeat">
+      <a:schemeClr val="lt1">
+        <a:alpha val="90000"/>
+      </a:schemeClr>
+    </dgm:fillClrLst>
+    <dgm:linClrLst meth="repeat">
+      <a:schemeClr val="accent2"/>
+    </dgm:linClrLst>
+    <dgm:effectClrLst/>
+    <dgm:txLinClrLst/>
+    <dgm:txFillClrLst meth="repeat">
+      <a:schemeClr val="dk1"/>
+    </dgm:txFillClrLst>
+    <dgm:txEffectClrLst/>
+  </dgm:styleLbl>
+  <dgm:styleLbl name="fgAcc4">
+    <dgm:fillClrLst meth="repeat">
+      <a:schemeClr val="lt1">
+        <a:alpha val="90000"/>
+      </a:schemeClr>
+    </dgm:fillClrLst>
+    <dgm:linClrLst meth="repeat">
+      <a:schemeClr val="accent2"/>
+    </dgm:linClrLst>
+    <dgm:effectClrLst/>
+    <dgm:txLinClrLst/>
+    <dgm:txFillClrLst meth="repeat">
+      <a:schemeClr val="dk1"/>
+    </dgm:txFillClrLst>
+    <dgm:txEffectClrLst/>
+  </dgm:styleLbl>
+  <dgm:styleLbl name="bgShp">
+    <dgm:fillClrLst meth="repeat">
+      <a:schemeClr val="accent2">
+        <a:tint val="40000"/>
+      </a:schemeClr>
+    </dgm:fillClrLst>
+    <dgm:linClrLst meth="repeat">
+      <a:schemeClr val="accent2"/>
+    </dgm:linClrLst>
+    <dgm:effectClrLst/>
+    <dgm:txLinClrLst/>
+    <dgm:txFillClrLst meth="repeat">
+      <a:schemeClr val="dk1"/>
+    </dgm:txFillClrLst>
+    <dgm:txEffectClrLst/>
+  </dgm:styleLbl>
+  <dgm:styleLbl name="dkBgShp">
+    <dgm:fillClrLst meth="repeat">
+      <a:schemeClr val="accent2">
+        <a:shade val="80000"/>
+      </a:schemeClr>
+    </dgm:fillClrLst>
+    <dgm:linClrLst meth="repeat">
+      <a:schemeClr val="accent2"/>
+    </dgm:linClrLst>
+    <dgm:effectClrLst/>
+    <dgm:txLinClrLst/>
+    <dgm:txFillClrLst meth="repeat">
+      <a:schemeClr val="lt1"/>
+    </dgm:txFillClrLst>
+    <dgm:txEffectClrLst/>
+  </dgm:styleLbl>
+  <dgm:styleLbl name="trBgShp">
+    <dgm:fillClrLst meth="repeat">
+      <a:schemeClr val="accent2">
+        <a:tint val="50000"/>
+        <a:alpha val="40000"/>
+      </a:schemeClr>
+    </dgm:fillClrLst>
+    <dgm:linClrLst meth="repeat">
+      <a:schemeClr val="accent2"/>
+    </dgm:linClrLst>
+    <dgm:effectClrLst/>
+    <dgm:txLinClrLst/>
+    <dgm:txFillClrLst meth="repeat">
+      <a:schemeClr val="lt1"/>
+    </dgm:txFillClrLst>
+    <dgm:txEffectClrLst/>
+  </dgm:styleLbl>
+  <dgm:styleLbl name="fgShp">
+    <dgm:fillClrLst meth="repeat">
+      <a:schemeClr val="accent2">
         <a:tint val="60000"/>
       </a:schemeClr>
     </dgm:fillClrLst>
@@ -1505,6 +2253,332 @@
   <dgm:extLst>
     <a:ext uri="http://schemas.microsoft.com/office/drawing/2008/diagram">
       <dsp:dataModelExt xmlns:dsp="http://schemas.microsoft.com/office/drawing/2008/diagram" relId="rId7" minVer="http://schemas.openxmlformats.org/drawingml/2006/diagram"/>
+    </a:ext>
+  </dgm:extLst>
+</dgm:dataModel>
+</file>
+
+<file path=ppt/diagrams/data2.xml><?xml version="1.0" encoding="utf-8"?>
+<dgm:dataModel xmlns:dgm="http://schemas.openxmlformats.org/drawingml/2006/diagram" xmlns:a="http://schemas.openxmlformats.org/drawingml/2006/main">
+  <dgm:ptLst>
+    <dgm:pt modelId="{31025953-094C-4EFD-A973-35BC70F9B3F6}" type="doc">
+      <dgm:prSet loTypeId="urn:microsoft.com/office/officeart/2018/2/layout/IconVerticalSolidList" loCatId="icon" qsTypeId="urn:microsoft.com/office/officeart/2005/8/quickstyle/simple1" qsCatId="simple" csTypeId="urn:microsoft.com/office/officeart/2005/8/colors/accent2_2" csCatId="accent2" phldr="1"/>
+      <dgm:spPr/>
+      <dgm:t>
+        <a:bodyPr/>
+        <a:lstStyle/>
+        <a:p>
+          <a:endParaRPr lang="en-US"/>
+        </a:p>
+      </dgm:t>
+    </dgm:pt>
+    <dgm:pt modelId="{2EC8F3E5-A87F-48B0-B133-0493E5208729}">
+      <dgm:prSet/>
+      <dgm:spPr/>
+      <dgm:t>
+        <a:bodyPr/>
+        <a:lstStyle/>
+        <a:p>
+          <a:r>
+            <a:rPr lang="de-AT"/>
+            <a:t>Limited computational resources on WU Jupyter Hub</a:t>
+          </a:r>
+          <a:endParaRPr lang="en-US"/>
+        </a:p>
+      </dgm:t>
+    </dgm:pt>
+    <dgm:pt modelId="{D1E757C5-144F-4A71-BF34-609A61033B30}" type="parTrans" cxnId="{DB28D42D-650D-496A-9A0B-91C186667765}">
+      <dgm:prSet/>
+      <dgm:spPr/>
+      <dgm:t>
+        <a:bodyPr/>
+        <a:lstStyle/>
+        <a:p>
+          <a:endParaRPr lang="en-US"/>
+        </a:p>
+      </dgm:t>
+    </dgm:pt>
+    <dgm:pt modelId="{29217524-64A0-4F72-8BB9-D5C75B34E181}" type="sibTrans" cxnId="{DB28D42D-650D-496A-9A0B-91C186667765}">
+      <dgm:prSet/>
+      <dgm:spPr/>
+      <dgm:t>
+        <a:bodyPr/>
+        <a:lstStyle/>
+        <a:p>
+          <a:endParaRPr lang="en-US"/>
+        </a:p>
+      </dgm:t>
+    </dgm:pt>
+    <dgm:pt modelId="{E69D64F7-EE74-448A-AAF6-E3DFFA6D9BAA}">
+      <dgm:prSet/>
+      <dgm:spPr/>
+      <dgm:t>
+        <a:bodyPr/>
+        <a:lstStyle/>
+        <a:p>
+          <a:r>
+            <a:rPr lang="de-AT"/>
+            <a:t>Sparse data</a:t>
+          </a:r>
+          <a:endParaRPr lang="en-US"/>
+        </a:p>
+      </dgm:t>
+    </dgm:pt>
+    <dgm:pt modelId="{AE0FF11C-DF63-4A78-8C77-C0257DA9CBCE}" type="parTrans" cxnId="{4DCDC3AC-CE5D-4ED4-8702-05509A194C1F}">
+      <dgm:prSet/>
+      <dgm:spPr/>
+      <dgm:t>
+        <a:bodyPr/>
+        <a:lstStyle/>
+        <a:p>
+          <a:endParaRPr lang="en-US"/>
+        </a:p>
+      </dgm:t>
+    </dgm:pt>
+    <dgm:pt modelId="{9142B881-E818-46DA-A6E7-3B526A019F0C}" type="sibTrans" cxnId="{4DCDC3AC-CE5D-4ED4-8702-05509A194C1F}">
+      <dgm:prSet/>
+      <dgm:spPr/>
+      <dgm:t>
+        <a:bodyPr/>
+        <a:lstStyle/>
+        <a:p>
+          <a:endParaRPr lang="en-US"/>
+        </a:p>
+      </dgm:t>
+    </dgm:pt>
+    <dgm:pt modelId="{207E62DE-71CE-4549-87C2-C27B36AD54BB}">
+      <dgm:prSet/>
+      <dgm:spPr/>
+      <dgm:t>
+        <a:bodyPr/>
+        <a:lstStyle/>
+        <a:p>
+          <a:r>
+            <a:rPr lang="de-AT"/>
+            <a:t>Final data base size</a:t>
+          </a:r>
+          <a:endParaRPr lang="en-US"/>
+        </a:p>
+      </dgm:t>
+    </dgm:pt>
+    <dgm:pt modelId="{5ECAE54F-FBB5-457A-8227-F582C048D35E}" type="parTrans" cxnId="{D10D9566-2D18-41D7-8712-F38727999379}">
+      <dgm:prSet/>
+      <dgm:spPr/>
+      <dgm:t>
+        <a:bodyPr/>
+        <a:lstStyle/>
+        <a:p>
+          <a:endParaRPr lang="en-US"/>
+        </a:p>
+      </dgm:t>
+    </dgm:pt>
+    <dgm:pt modelId="{B9B6C70D-098F-453D-9C8E-F4859D7979FE}" type="sibTrans" cxnId="{D10D9566-2D18-41D7-8712-F38727999379}">
+      <dgm:prSet/>
+      <dgm:spPr/>
+      <dgm:t>
+        <a:bodyPr/>
+        <a:lstStyle/>
+        <a:p>
+          <a:endParaRPr lang="en-US"/>
+        </a:p>
+      </dgm:t>
+    </dgm:pt>
+    <dgm:pt modelId="{A8808F13-9B9C-477A-B305-0CF6381BF24D}" type="pres">
+      <dgm:prSet presAssocID="{31025953-094C-4EFD-A973-35BC70F9B3F6}" presName="root" presStyleCnt="0">
+        <dgm:presLayoutVars>
+          <dgm:dir/>
+          <dgm:resizeHandles val="exact"/>
+        </dgm:presLayoutVars>
+      </dgm:prSet>
+      <dgm:spPr/>
+    </dgm:pt>
+    <dgm:pt modelId="{B080DA5F-4941-4851-9732-EF56CDF344B2}" type="pres">
+      <dgm:prSet presAssocID="{2EC8F3E5-A87F-48B0-B133-0493E5208729}" presName="compNode" presStyleCnt="0"/>
+      <dgm:spPr/>
+    </dgm:pt>
+    <dgm:pt modelId="{D563B15B-09E4-4F16-AD43-1300FFBF82AD}" type="pres">
+      <dgm:prSet presAssocID="{2EC8F3E5-A87F-48B0-B133-0493E5208729}" presName="bgRect" presStyleLbl="bgShp" presStyleIdx="0" presStyleCnt="3"/>
+      <dgm:spPr/>
+    </dgm:pt>
+    <dgm:pt modelId="{F82C192A-9F39-4EA1-995B-514715D7BB4B}" type="pres">
+      <dgm:prSet presAssocID="{2EC8F3E5-A87F-48B0-B133-0493E5208729}" presName="iconRect" presStyleLbl="node1" presStyleIdx="0" presStyleCnt="3"/>
+      <dgm:spPr>
+        <a:blipFill>
+          <a:blip xmlns:r="http://schemas.openxmlformats.org/officeDocument/2006/relationships">
+            <a:extLst>
+              <a:ext uri="{28A0092B-C50C-407E-A947-70E740481C1C}">
+                <a14:useLocalDpi xmlns:a14="http://schemas.microsoft.com/office/drawing/2010/main" val="0"/>
+              </a:ext>
+              <a:ext uri="{96DAC541-7B7A-43D3-8B79-37D633B846F1}">
+                <asvg:svgBlip xmlns:asvg="http://schemas.microsoft.com/office/drawing/2016/SVG/main" r:embed="rId1"/>
+              </a:ext>
+            </a:extLst>
+          </a:blip>
+          <a:stretch>
+            <a:fillRect/>
+          </a:stretch>
+        </a:blipFill>
+        <a:ln>
+          <a:noFill/>
+        </a:ln>
+      </dgm:spPr>
+      <dgm:extLst>
+        <a:ext uri="{E40237B7-FDA0-4F09-8148-C483321AD2D9}">
+          <dgm14:cNvPr xmlns:dgm14="http://schemas.microsoft.com/office/drawing/2010/diagram" id="0" name="" descr="Computer"/>
+        </a:ext>
+      </dgm:extLst>
+    </dgm:pt>
+    <dgm:pt modelId="{76F54FA7-40AF-4F50-ADBF-89E93673AC3C}" type="pres">
+      <dgm:prSet presAssocID="{2EC8F3E5-A87F-48B0-B133-0493E5208729}" presName="spaceRect" presStyleCnt="0"/>
+      <dgm:spPr/>
+    </dgm:pt>
+    <dgm:pt modelId="{0EF49EF0-67B1-49CC-ADA2-F40B0260B1C3}" type="pres">
+      <dgm:prSet presAssocID="{2EC8F3E5-A87F-48B0-B133-0493E5208729}" presName="parTx" presStyleLbl="revTx" presStyleIdx="0" presStyleCnt="3">
+        <dgm:presLayoutVars>
+          <dgm:chMax val="0"/>
+          <dgm:chPref val="0"/>
+        </dgm:presLayoutVars>
+      </dgm:prSet>
+      <dgm:spPr/>
+    </dgm:pt>
+    <dgm:pt modelId="{3364A96D-7E82-4125-A68E-EBB68BAAD8B1}" type="pres">
+      <dgm:prSet presAssocID="{29217524-64A0-4F72-8BB9-D5C75B34E181}" presName="sibTrans" presStyleCnt="0"/>
+      <dgm:spPr/>
+    </dgm:pt>
+    <dgm:pt modelId="{092D9302-96B4-45D7-A0D3-4091BA989178}" type="pres">
+      <dgm:prSet presAssocID="{E69D64F7-EE74-448A-AAF6-E3DFFA6D9BAA}" presName="compNode" presStyleCnt="0"/>
+      <dgm:spPr/>
+    </dgm:pt>
+    <dgm:pt modelId="{64C73C73-6F81-4866-A638-20ECC8C9FC27}" type="pres">
+      <dgm:prSet presAssocID="{E69D64F7-EE74-448A-AAF6-E3DFFA6D9BAA}" presName="bgRect" presStyleLbl="bgShp" presStyleIdx="1" presStyleCnt="3"/>
+      <dgm:spPr/>
+    </dgm:pt>
+    <dgm:pt modelId="{16716F67-ED8C-4293-AC12-896DCB26DDD3}" type="pres">
+      <dgm:prSet presAssocID="{E69D64F7-EE74-448A-AAF6-E3DFFA6D9BAA}" presName="iconRect" presStyleLbl="node1" presStyleIdx="1" presStyleCnt="3"/>
+      <dgm:spPr>
+        <a:blipFill>
+          <a:blip xmlns:r="http://schemas.openxmlformats.org/officeDocument/2006/relationships">
+            <a:extLst>
+              <a:ext uri="{28A0092B-C50C-407E-A947-70E740481C1C}">
+                <a14:useLocalDpi xmlns:a14="http://schemas.microsoft.com/office/drawing/2010/main" val="0"/>
+              </a:ext>
+              <a:ext uri="{96DAC541-7B7A-43D3-8B79-37D633B846F1}">
+                <asvg:svgBlip xmlns:asvg="http://schemas.microsoft.com/office/drawing/2016/SVG/main" r:embed="rId2"/>
+              </a:ext>
+            </a:extLst>
+          </a:blip>
+          <a:stretch>
+            <a:fillRect/>
+          </a:stretch>
+        </a:blipFill>
+        <a:ln>
+          <a:noFill/>
+        </a:ln>
+      </dgm:spPr>
+      <dgm:extLst>
+        <a:ext uri="{E40237B7-FDA0-4F09-8148-C483321AD2D9}">
+          <dgm14:cNvPr xmlns:dgm14="http://schemas.microsoft.com/office/drawing/2010/diagram" id="0" name="" descr="Document"/>
+        </a:ext>
+      </dgm:extLst>
+    </dgm:pt>
+    <dgm:pt modelId="{521DECA4-1DC3-42F9-A60E-2D98728CA9A0}" type="pres">
+      <dgm:prSet presAssocID="{E69D64F7-EE74-448A-AAF6-E3DFFA6D9BAA}" presName="spaceRect" presStyleCnt="0"/>
+      <dgm:spPr/>
+    </dgm:pt>
+    <dgm:pt modelId="{5D09C404-337C-43BC-B86B-87534219E974}" type="pres">
+      <dgm:prSet presAssocID="{E69D64F7-EE74-448A-AAF6-E3DFFA6D9BAA}" presName="parTx" presStyleLbl="revTx" presStyleIdx="1" presStyleCnt="3">
+        <dgm:presLayoutVars>
+          <dgm:chMax val="0"/>
+          <dgm:chPref val="0"/>
+        </dgm:presLayoutVars>
+      </dgm:prSet>
+      <dgm:spPr/>
+    </dgm:pt>
+    <dgm:pt modelId="{F125A31C-6099-4881-9642-DFB738704050}" type="pres">
+      <dgm:prSet presAssocID="{9142B881-E818-46DA-A6E7-3B526A019F0C}" presName="sibTrans" presStyleCnt="0"/>
+      <dgm:spPr/>
+    </dgm:pt>
+    <dgm:pt modelId="{9D65FE7C-C3E4-4369-BD53-3FBD70ED2DF7}" type="pres">
+      <dgm:prSet presAssocID="{207E62DE-71CE-4549-87C2-C27B36AD54BB}" presName="compNode" presStyleCnt="0"/>
+      <dgm:spPr/>
+    </dgm:pt>
+    <dgm:pt modelId="{DCF15E64-1FD9-43CD-A805-1D4F13565053}" type="pres">
+      <dgm:prSet presAssocID="{207E62DE-71CE-4549-87C2-C27B36AD54BB}" presName="bgRect" presStyleLbl="bgShp" presStyleIdx="2" presStyleCnt="3"/>
+      <dgm:spPr/>
+    </dgm:pt>
+    <dgm:pt modelId="{EAEF0509-636F-4EE4-B57A-0DCD9B6588D5}" type="pres">
+      <dgm:prSet presAssocID="{207E62DE-71CE-4549-87C2-C27B36AD54BB}" presName="iconRect" presStyleLbl="node1" presStyleIdx="2" presStyleCnt="3"/>
+      <dgm:spPr>
+        <a:blipFill>
+          <a:blip xmlns:r="http://schemas.openxmlformats.org/officeDocument/2006/relationships">
+            <a:extLst>
+              <a:ext uri="{28A0092B-C50C-407E-A947-70E740481C1C}">
+                <a14:useLocalDpi xmlns:a14="http://schemas.microsoft.com/office/drawing/2010/main" val="0"/>
+              </a:ext>
+              <a:ext uri="{96DAC541-7B7A-43D3-8B79-37D633B846F1}">
+                <asvg:svgBlip xmlns:asvg="http://schemas.microsoft.com/office/drawing/2016/SVG/main" r:embed="rId3"/>
+              </a:ext>
+            </a:extLst>
+          </a:blip>
+          <a:stretch>
+            <a:fillRect/>
+          </a:stretch>
+        </a:blipFill>
+        <a:ln>
+          <a:noFill/>
+        </a:ln>
+      </dgm:spPr>
+      <dgm:extLst>
+        <a:ext uri="{E40237B7-FDA0-4F09-8148-C483321AD2D9}">
+          <dgm14:cNvPr xmlns:dgm14="http://schemas.microsoft.com/office/drawing/2010/diagram" id="0" name="" descr="Bar chart"/>
+        </a:ext>
+      </dgm:extLst>
+    </dgm:pt>
+    <dgm:pt modelId="{C86D2A10-FF40-4C19-B8C6-37C2AF4AB060}" type="pres">
+      <dgm:prSet presAssocID="{207E62DE-71CE-4549-87C2-C27B36AD54BB}" presName="spaceRect" presStyleCnt="0"/>
+      <dgm:spPr/>
+    </dgm:pt>
+    <dgm:pt modelId="{3FE57743-9B3D-4EEF-AE29-DA461AAF3BC4}" type="pres">
+      <dgm:prSet presAssocID="{207E62DE-71CE-4549-87C2-C27B36AD54BB}" presName="parTx" presStyleLbl="revTx" presStyleIdx="2" presStyleCnt="3">
+        <dgm:presLayoutVars>
+          <dgm:chMax val="0"/>
+          <dgm:chPref val="0"/>
+        </dgm:presLayoutVars>
+      </dgm:prSet>
+      <dgm:spPr/>
+    </dgm:pt>
+  </dgm:ptLst>
+  <dgm:cxnLst>
+    <dgm:cxn modelId="{D33B832A-74EE-4776-B141-705AB4A4D51B}" type="presOf" srcId="{207E62DE-71CE-4549-87C2-C27B36AD54BB}" destId="{3FE57743-9B3D-4EEF-AE29-DA461AAF3BC4}" srcOrd="0" destOrd="0" presId="urn:microsoft.com/office/officeart/2018/2/layout/IconVerticalSolidList"/>
+    <dgm:cxn modelId="{67DD962B-6DFE-4619-88D6-A086D0CC23CE}" type="presOf" srcId="{2EC8F3E5-A87F-48B0-B133-0493E5208729}" destId="{0EF49EF0-67B1-49CC-ADA2-F40B0260B1C3}" srcOrd="0" destOrd="0" presId="urn:microsoft.com/office/officeart/2018/2/layout/IconVerticalSolidList"/>
+    <dgm:cxn modelId="{DB28D42D-650D-496A-9A0B-91C186667765}" srcId="{31025953-094C-4EFD-A973-35BC70F9B3F6}" destId="{2EC8F3E5-A87F-48B0-B133-0493E5208729}" srcOrd="0" destOrd="0" parTransId="{D1E757C5-144F-4A71-BF34-609A61033B30}" sibTransId="{29217524-64A0-4F72-8BB9-D5C75B34E181}"/>
+    <dgm:cxn modelId="{D10D9566-2D18-41D7-8712-F38727999379}" srcId="{31025953-094C-4EFD-A973-35BC70F9B3F6}" destId="{207E62DE-71CE-4549-87C2-C27B36AD54BB}" srcOrd="2" destOrd="0" parTransId="{5ECAE54F-FBB5-457A-8227-F582C048D35E}" sibTransId="{B9B6C70D-098F-453D-9C8E-F4859D7979FE}"/>
+    <dgm:cxn modelId="{33744049-EBDD-4B9D-8151-C341B484E4B2}" type="presOf" srcId="{E69D64F7-EE74-448A-AAF6-E3DFFA6D9BAA}" destId="{5D09C404-337C-43BC-B86B-87534219E974}" srcOrd="0" destOrd="0" presId="urn:microsoft.com/office/officeart/2018/2/layout/IconVerticalSolidList"/>
+    <dgm:cxn modelId="{0484D498-39BD-4A67-9EC0-58742625E129}" type="presOf" srcId="{31025953-094C-4EFD-A973-35BC70F9B3F6}" destId="{A8808F13-9B9C-477A-B305-0CF6381BF24D}" srcOrd="0" destOrd="0" presId="urn:microsoft.com/office/officeart/2018/2/layout/IconVerticalSolidList"/>
+    <dgm:cxn modelId="{4DCDC3AC-CE5D-4ED4-8702-05509A194C1F}" srcId="{31025953-094C-4EFD-A973-35BC70F9B3F6}" destId="{E69D64F7-EE74-448A-AAF6-E3DFFA6D9BAA}" srcOrd="1" destOrd="0" parTransId="{AE0FF11C-DF63-4A78-8C77-C0257DA9CBCE}" sibTransId="{9142B881-E818-46DA-A6E7-3B526A019F0C}"/>
+    <dgm:cxn modelId="{15B65E51-0BCE-4931-AB72-86165756A040}" type="presParOf" srcId="{A8808F13-9B9C-477A-B305-0CF6381BF24D}" destId="{B080DA5F-4941-4851-9732-EF56CDF344B2}" srcOrd="0" destOrd="0" presId="urn:microsoft.com/office/officeart/2018/2/layout/IconVerticalSolidList"/>
+    <dgm:cxn modelId="{F0363C11-258A-437A-AA32-AF5BE62D0FB9}" type="presParOf" srcId="{B080DA5F-4941-4851-9732-EF56CDF344B2}" destId="{D563B15B-09E4-4F16-AD43-1300FFBF82AD}" srcOrd="0" destOrd="0" presId="urn:microsoft.com/office/officeart/2018/2/layout/IconVerticalSolidList"/>
+    <dgm:cxn modelId="{1841AE39-1054-411B-B9FD-9725E5C25BE9}" type="presParOf" srcId="{B080DA5F-4941-4851-9732-EF56CDF344B2}" destId="{F82C192A-9F39-4EA1-995B-514715D7BB4B}" srcOrd="1" destOrd="0" presId="urn:microsoft.com/office/officeart/2018/2/layout/IconVerticalSolidList"/>
+    <dgm:cxn modelId="{A5D53405-5C78-4258-B2A4-DC3DB5C106D2}" type="presParOf" srcId="{B080DA5F-4941-4851-9732-EF56CDF344B2}" destId="{76F54FA7-40AF-4F50-ADBF-89E93673AC3C}" srcOrd="2" destOrd="0" presId="urn:microsoft.com/office/officeart/2018/2/layout/IconVerticalSolidList"/>
+    <dgm:cxn modelId="{3DABB1AE-9E27-42DC-B24F-059D4EFB40F2}" type="presParOf" srcId="{B080DA5F-4941-4851-9732-EF56CDF344B2}" destId="{0EF49EF0-67B1-49CC-ADA2-F40B0260B1C3}" srcOrd="3" destOrd="0" presId="urn:microsoft.com/office/officeart/2018/2/layout/IconVerticalSolidList"/>
+    <dgm:cxn modelId="{3E4C294C-B95C-4341-9E30-352723B507D3}" type="presParOf" srcId="{A8808F13-9B9C-477A-B305-0CF6381BF24D}" destId="{3364A96D-7E82-4125-A68E-EBB68BAAD8B1}" srcOrd="1" destOrd="0" presId="urn:microsoft.com/office/officeart/2018/2/layout/IconVerticalSolidList"/>
+    <dgm:cxn modelId="{B525CC4B-BA06-4207-903B-E57BB34DDFD6}" type="presParOf" srcId="{A8808F13-9B9C-477A-B305-0CF6381BF24D}" destId="{092D9302-96B4-45D7-A0D3-4091BA989178}" srcOrd="2" destOrd="0" presId="urn:microsoft.com/office/officeart/2018/2/layout/IconVerticalSolidList"/>
+    <dgm:cxn modelId="{4FEA117C-287D-426B-B3F6-6D60DF1B43EF}" type="presParOf" srcId="{092D9302-96B4-45D7-A0D3-4091BA989178}" destId="{64C73C73-6F81-4866-A638-20ECC8C9FC27}" srcOrd="0" destOrd="0" presId="urn:microsoft.com/office/officeart/2018/2/layout/IconVerticalSolidList"/>
+    <dgm:cxn modelId="{C6393DDD-CE4B-47E8-AE0C-0CF6EF265A26}" type="presParOf" srcId="{092D9302-96B4-45D7-A0D3-4091BA989178}" destId="{16716F67-ED8C-4293-AC12-896DCB26DDD3}" srcOrd="1" destOrd="0" presId="urn:microsoft.com/office/officeart/2018/2/layout/IconVerticalSolidList"/>
+    <dgm:cxn modelId="{D89C8FE2-FEED-458D-AD0A-8D8144E258FC}" type="presParOf" srcId="{092D9302-96B4-45D7-A0D3-4091BA989178}" destId="{521DECA4-1DC3-42F9-A60E-2D98728CA9A0}" srcOrd="2" destOrd="0" presId="urn:microsoft.com/office/officeart/2018/2/layout/IconVerticalSolidList"/>
+    <dgm:cxn modelId="{822AF3B2-A5B7-4C90-A55D-CA9CD4658B9B}" type="presParOf" srcId="{092D9302-96B4-45D7-A0D3-4091BA989178}" destId="{5D09C404-337C-43BC-B86B-87534219E974}" srcOrd="3" destOrd="0" presId="urn:microsoft.com/office/officeart/2018/2/layout/IconVerticalSolidList"/>
+    <dgm:cxn modelId="{82FFA81D-FC41-4B6A-8129-A72FFAB0A572}" type="presParOf" srcId="{A8808F13-9B9C-477A-B305-0CF6381BF24D}" destId="{F125A31C-6099-4881-9642-DFB738704050}" srcOrd="3" destOrd="0" presId="urn:microsoft.com/office/officeart/2018/2/layout/IconVerticalSolidList"/>
+    <dgm:cxn modelId="{E79C0678-EC48-455C-8D55-B0863BC0E2A1}" type="presParOf" srcId="{A8808F13-9B9C-477A-B305-0CF6381BF24D}" destId="{9D65FE7C-C3E4-4369-BD53-3FBD70ED2DF7}" srcOrd="4" destOrd="0" presId="urn:microsoft.com/office/officeart/2018/2/layout/IconVerticalSolidList"/>
+    <dgm:cxn modelId="{93F38FB0-163A-401C-812D-840BD93B28C2}" type="presParOf" srcId="{9D65FE7C-C3E4-4369-BD53-3FBD70ED2DF7}" destId="{DCF15E64-1FD9-43CD-A805-1D4F13565053}" srcOrd="0" destOrd="0" presId="urn:microsoft.com/office/officeart/2018/2/layout/IconVerticalSolidList"/>
+    <dgm:cxn modelId="{FE93BF65-B475-40EC-9A75-656883675A08}" type="presParOf" srcId="{9D65FE7C-C3E4-4369-BD53-3FBD70ED2DF7}" destId="{EAEF0509-636F-4EE4-B57A-0DCD9B6588D5}" srcOrd="1" destOrd="0" presId="urn:microsoft.com/office/officeart/2018/2/layout/IconVerticalSolidList"/>
+    <dgm:cxn modelId="{3916C718-7E2C-4D34-BC7B-1D216EF9242D}" type="presParOf" srcId="{9D65FE7C-C3E4-4369-BD53-3FBD70ED2DF7}" destId="{C86D2A10-FF40-4C19-B8C6-37C2AF4AB060}" srcOrd="2" destOrd="0" presId="urn:microsoft.com/office/officeart/2018/2/layout/IconVerticalSolidList"/>
+    <dgm:cxn modelId="{4DCCA3D7-827B-4134-8459-9BBEBCC18074}" type="presParOf" srcId="{9D65FE7C-C3E4-4369-BD53-3FBD70ED2DF7}" destId="{3FE57743-9B3D-4EEF-AE29-DA461AAF3BC4}" srcOrd="3" destOrd="0" presId="urn:microsoft.com/office/officeart/2018/2/layout/IconVerticalSolidList"/>
+  </dgm:cxnLst>
+  <dgm:bg/>
+  <dgm:whole/>
+  <dgm:extLst>
+    <a:ext uri="http://schemas.microsoft.com/office/drawing/2008/diagram">
+      <dsp:dataModelExt xmlns:dsp="http://schemas.microsoft.com/office/drawing/2008/diagram" relId="rId6" minVer="http://schemas.openxmlformats.org/drawingml/2006/diagram"/>
     </a:ext>
   </dgm:extLst>
 </dgm:dataModel>
@@ -2218,6 +3292,477 @@
 </dsp:drawing>
 </file>
 
+<file path=ppt/diagrams/drawing2.xml><?xml version="1.0" encoding="utf-8"?>
+<dsp:drawing xmlns:dgm="http://schemas.openxmlformats.org/drawingml/2006/diagram" xmlns:dsp="http://schemas.microsoft.com/office/drawing/2008/diagram" xmlns:a="http://schemas.openxmlformats.org/drawingml/2006/main">
+  <dsp:spTree>
+    <dsp:nvGrpSpPr>
+      <dsp:cNvPr id="0" name=""/>
+      <dsp:cNvGrpSpPr/>
+    </dsp:nvGrpSpPr>
+    <dsp:grpSpPr/>
+    <dsp:sp modelId="{D563B15B-09E4-4F16-AD43-1300FFBF82AD}">
+      <dsp:nvSpPr>
+        <dsp:cNvPr id="0" name=""/>
+        <dsp:cNvSpPr/>
+      </dsp:nvSpPr>
+      <dsp:spPr>
+        <a:xfrm>
+          <a:off x="0" y="516"/>
+          <a:ext cx="8210547" cy="1208472"/>
+        </a:xfrm>
+        <a:prstGeom prst="roundRect">
+          <a:avLst>
+            <a:gd name="adj" fmla="val 10000"/>
+          </a:avLst>
+        </a:prstGeom>
+        <a:solidFill>
+          <a:schemeClr val="accent2">
+            <a:tint val="40000"/>
+            <a:hueOff val="0"/>
+            <a:satOff val="0"/>
+            <a:lumOff val="0"/>
+            <a:alphaOff val="0"/>
+          </a:schemeClr>
+        </a:solidFill>
+        <a:ln>
+          <a:noFill/>
+        </a:ln>
+        <a:effectLst/>
+      </dsp:spPr>
+      <dsp:style>
+        <a:lnRef idx="0">
+          <a:scrgbClr r="0" g="0" b="0"/>
+        </a:lnRef>
+        <a:fillRef idx="1">
+          <a:scrgbClr r="0" g="0" b="0"/>
+        </a:fillRef>
+        <a:effectRef idx="0">
+          <a:scrgbClr r="0" g="0" b="0"/>
+        </a:effectRef>
+        <a:fontRef idx="minor"/>
+      </dsp:style>
+    </dsp:sp>
+    <dsp:sp modelId="{F82C192A-9F39-4EA1-995B-514715D7BB4B}">
+      <dsp:nvSpPr>
+        <dsp:cNvPr id="0" name=""/>
+        <dsp:cNvSpPr/>
+      </dsp:nvSpPr>
+      <dsp:spPr>
+        <a:xfrm>
+          <a:off x="365562" y="272422"/>
+          <a:ext cx="664659" cy="664659"/>
+        </a:xfrm>
+        <a:prstGeom prst="rect">
+          <a:avLst/>
+        </a:prstGeom>
+        <a:blipFill>
+          <a:blip xmlns:r="http://schemas.openxmlformats.org/officeDocument/2006/relationships">
+            <a:extLst>
+              <a:ext uri="{28A0092B-C50C-407E-A947-70E740481C1C}">
+                <a14:useLocalDpi xmlns:a14="http://schemas.microsoft.com/office/drawing/2010/main" val="0"/>
+              </a:ext>
+              <a:ext uri="{96DAC541-7B7A-43D3-8B79-37D633B846F1}">
+                <asvg:svgBlip xmlns:asvg="http://schemas.microsoft.com/office/drawing/2016/SVG/main" r:embed="rId1"/>
+              </a:ext>
+            </a:extLst>
+          </a:blip>
+          <a:stretch>
+            <a:fillRect/>
+          </a:stretch>
+        </a:blipFill>
+        <a:ln w="12700" cap="flat" cmpd="sng" algn="ctr">
+          <a:noFill/>
+          <a:prstDash val="solid"/>
+          <a:miter lim="800000"/>
+        </a:ln>
+        <a:effectLst/>
+      </dsp:spPr>
+      <dsp:style>
+        <a:lnRef idx="2">
+          <a:scrgbClr r="0" g="0" b="0"/>
+        </a:lnRef>
+        <a:fillRef idx="1">
+          <a:scrgbClr r="0" g="0" b="0"/>
+        </a:fillRef>
+        <a:effectRef idx="0">
+          <a:scrgbClr r="0" g="0" b="0"/>
+        </a:effectRef>
+        <a:fontRef idx="minor">
+          <a:schemeClr val="lt1"/>
+        </a:fontRef>
+      </dsp:style>
+    </dsp:sp>
+    <dsp:sp modelId="{0EF49EF0-67B1-49CC-ADA2-F40B0260B1C3}">
+      <dsp:nvSpPr>
+        <dsp:cNvPr id="0" name=""/>
+        <dsp:cNvSpPr/>
+      </dsp:nvSpPr>
+      <dsp:spPr>
+        <a:xfrm>
+          <a:off x="1395785" y="516"/>
+          <a:ext cx="6814761" cy="1208472"/>
+        </a:xfrm>
+        <a:prstGeom prst="rect">
+          <a:avLst/>
+        </a:prstGeom>
+        <a:noFill/>
+        <a:ln>
+          <a:noFill/>
+        </a:ln>
+        <a:effectLst/>
+      </dsp:spPr>
+      <dsp:style>
+        <a:lnRef idx="0">
+          <a:scrgbClr r="0" g="0" b="0"/>
+        </a:lnRef>
+        <a:fillRef idx="0">
+          <a:scrgbClr r="0" g="0" b="0"/>
+        </a:fillRef>
+        <a:effectRef idx="0">
+          <a:scrgbClr r="0" g="0" b="0"/>
+        </a:effectRef>
+        <a:fontRef idx="minor"/>
+      </dsp:style>
+      <dsp:txBody>
+        <a:bodyPr spcFirstLastPara="0" vert="horz" wrap="square" lIns="127897" tIns="127897" rIns="127897" bIns="127897" numCol="1" spcCol="1270" anchor="ctr" anchorCtr="0">
+          <a:noAutofit/>
+        </a:bodyPr>
+        <a:lstStyle/>
+        <a:p>
+          <a:pPr marL="0" lvl="0" indent="0" algn="l" defTabSz="1111250">
+            <a:lnSpc>
+              <a:spcPct val="90000"/>
+            </a:lnSpc>
+            <a:spcBef>
+              <a:spcPct val="0"/>
+            </a:spcBef>
+            <a:spcAft>
+              <a:spcPct val="35000"/>
+            </a:spcAft>
+            <a:buNone/>
+          </a:pPr>
+          <a:r>
+            <a:rPr lang="de-AT" sz="2500" kern="1200"/>
+            <a:t>Limited computational resources on WU Jupyter Hub</a:t>
+          </a:r>
+          <a:endParaRPr lang="en-US" sz="2500" kern="1200"/>
+        </a:p>
+      </dsp:txBody>
+      <dsp:txXfrm>
+        <a:off x="1395785" y="516"/>
+        <a:ext cx="6814761" cy="1208472"/>
+      </dsp:txXfrm>
+    </dsp:sp>
+    <dsp:sp modelId="{64C73C73-6F81-4866-A638-20ECC8C9FC27}">
+      <dsp:nvSpPr>
+        <dsp:cNvPr id="0" name=""/>
+        <dsp:cNvSpPr/>
+      </dsp:nvSpPr>
+      <dsp:spPr>
+        <a:xfrm>
+          <a:off x="0" y="1511107"/>
+          <a:ext cx="8210547" cy="1208472"/>
+        </a:xfrm>
+        <a:prstGeom prst="roundRect">
+          <a:avLst>
+            <a:gd name="adj" fmla="val 10000"/>
+          </a:avLst>
+        </a:prstGeom>
+        <a:solidFill>
+          <a:schemeClr val="accent2">
+            <a:tint val="40000"/>
+            <a:hueOff val="0"/>
+            <a:satOff val="0"/>
+            <a:lumOff val="0"/>
+            <a:alphaOff val="0"/>
+          </a:schemeClr>
+        </a:solidFill>
+        <a:ln>
+          <a:noFill/>
+        </a:ln>
+        <a:effectLst/>
+      </dsp:spPr>
+      <dsp:style>
+        <a:lnRef idx="0">
+          <a:scrgbClr r="0" g="0" b="0"/>
+        </a:lnRef>
+        <a:fillRef idx="1">
+          <a:scrgbClr r="0" g="0" b="0"/>
+        </a:fillRef>
+        <a:effectRef idx="0">
+          <a:scrgbClr r="0" g="0" b="0"/>
+        </a:effectRef>
+        <a:fontRef idx="minor"/>
+      </dsp:style>
+    </dsp:sp>
+    <dsp:sp modelId="{16716F67-ED8C-4293-AC12-896DCB26DDD3}">
+      <dsp:nvSpPr>
+        <dsp:cNvPr id="0" name=""/>
+        <dsp:cNvSpPr/>
+      </dsp:nvSpPr>
+      <dsp:spPr>
+        <a:xfrm>
+          <a:off x="365562" y="1783013"/>
+          <a:ext cx="664659" cy="664659"/>
+        </a:xfrm>
+        <a:prstGeom prst="rect">
+          <a:avLst/>
+        </a:prstGeom>
+        <a:blipFill>
+          <a:blip xmlns:r="http://schemas.openxmlformats.org/officeDocument/2006/relationships">
+            <a:extLst>
+              <a:ext uri="{28A0092B-C50C-407E-A947-70E740481C1C}">
+                <a14:useLocalDpi xmlns:a14="http://schemas.microsoft.com/office/drawing/2010/main" val="0"/>
+              </a:ext>
+              <a:ext uri="{96DAC541-7B7A-43D3-8B79-37D633B846F1}">
+                <asvg:svgBlip xmlns:asvg="http://schemas.microsoft.com/office/drawing/2016/SVG/main" r:embed="rId2"/>
+              </a:ext>
+            </a:extLst>
+          </a:blip>
+          <a:stretch>
+            <a:fillRect/>
+          </a:stretch>
+        </a:blipFill>
+        <a:ln w="12700" cap="flat" cmpd="sng" algn="ctr">
+          <a:noFill/>
+          <a:prstDash val="solid"/>
+          <a:miter lim="800000"/>
+        </a:ln>
+        <a:effectLst/>
+      </dsp:spPr>
+      <dsp:style>
+        <a:lnRef idx="2">
+          <a:scrgbClr r="0" g="0" b="0"/>
+        </a:lnRef>
+        <a:fillRef idx="1">
+          <a:scrgbClr r="0" g="0" b="0"/>
+        </a:fillRef>
+        <a:effectRef idx="0">
+          <a:scrgbClr r="0" g="0" b="0"/>
+        </a:effectRef>
+        <a:fontRef idx="minor">
+          <a:schemeClr val="lt1"/>
+        </a:fontRef>
+      </dsp:style>
+    </dsp:sp>
+    <dsp:sp modelId="{5D09C404-337C-43BC-B86B-87534219E974}">
+      <dsp:nvSpPr>
+        <dsp:cNvPr id="0" name=""/>
+        <dsp:cNvSpPr/>
+      </dsp:nvSpPr>
+      <dsp:spPr>
+        <a:xfrm>
+          <a:off x="1395785" y="1511107"/>
+          <a:ext cx="6814761" cy="1208472"/>
+        </a:xfrm>
+        <a:prstGeom prst="rect">
+          <a:avLst/>
+        </a:prstGeom>
+        <a:noFill/>
+        <a:ln>
+          <a:noFill/>
+        </a:ln>
+        <a:effectLst/>
+      </dsp:spPr>
+      <dsp:style>
+        <a:lnRef idx="0">
+          <a:scrgbClr r="0" g="0" b="0"/>
+        </a:lnRef>
+        <a:fillRef idx="0">
+          <a:scrgbClr r="0" g="0" b="0"/>
+        </a:fillRef>
+        <a:effectRef idx="0">
+          <a:scrgbClr r="0" g="0" b="0"/>
+        </a:effectRef>
+        <a:fontRef idx="minor"/>
+      </dsp:style>
+      <dsp:txBody>
+        <a:bodyPr spcFirstLastPara="0" vert="horz" wrap="square" lIns="127897" tIns="127897" rIns="127897" bIns="127897" numCol="1" spcCol="1270" anchor="ctr" anchorCtr="0">
+          <a:noAutofit/>
+        </a:bodyPr>
+        <a:lstStyle/>
+        <a:p>
+          <a:pPr marL="0" lvl="0" indent="0" algn="l" defTabSz="1111250">
+            <a:lnSpc>
+              <a:spcPct val="90000"/>
+            </a:lnSpc>
+            <a:spcBef>
+              <a:spcPct val="0"/>
+            </a:spcBef>
+            <a:spcAft>
+              <a:spcPct val="35000"/>
+            </a:spcAft>
+            <a:buNone/>
+          </a:pPr>
+          <a:r>
+            <a:rPr lang="de-AT" sz="2500" kern="1200"/>
+            <a:t>Sparse data</a:t>
+          </a:r>
+          <a:endParaRPr lang="en-US" sz="2500" kern="1200"/>
+        </a:p>
+      </dsp:txBody>
+      <dsp:txXfrm>
+        <a:off x="1395785" y="1511107"/>
+        <a:ext cx="6814761" cy="1208472"/>
+      </dsp:txXfrm>
+    </dsp:sp>
+    <dsp:sp modelId="{DCF15E64-1FD9-43CD-A805-1D4F13565053}">
+      <dsp:nvSpPr>
+        <dsp:cNvPr id="0" name=""/>
+        <dsp:cNvSpPr/>
+      </dsp:nvSpPr>
+      <dsp:spPr>
+        <a:xfrm>
+          <a:off x="0" y="3021697"/>
+          <a:ext cx="8210547" cy="1208472"/>
+        </a:xfrm>
+        <a:prstGeom prst="roundRect">
+          <a:avLst>
+            <a:gd name="adj" fmla="val 10000"/>
+          </a:avLst>
+        </a:prstGeom>
+        <a:solidFill>
+          <a:schemeClr val="accent2">
+            <a:tint val="40000"/>
+            <a:hueOff val="0"/>
+            <a:satOff val="0"/>
+            <a:lumOff val="0"/>
+            <a:alphaOff val="0"/>
+          </a:schemeClr>
+        </a:solidFill>
+        <a:ln>
+          <a:noFill/>
+        </a:ln>
+        <a:effectLst/>
+      </dsp:spPr>
+      <dsp:style>
+        <a:lnRef idx="0">
+          <a:scrgbClr r="0" g="0" b="0"/>
+        </a:lnRef>
+        <a:fillRef idx="1">
+          <a:scrgbClr r="0" g="0" b="0"/>
+        </a:fillRef>
+        <a:effectRef idx="0">
+          <a:scrgbClr r="0" g="0" b="0"/>
+        </a:effectRef>
+        <a:fontRef idx="minor"/>
+      </dsp:style>
+    </dsp:sp>
+    <dsp:sp modelId="{EAEF0509-636F-4EE4-B57A-0DCD9B6588D5}">
+      <dsp:nvSpPr>
+        <dsp:cNvPr id="0" name=""/>
+        <dsp:cNvSpPr/>
+      </dsp:nvSpPr>
+      <dsp:spPr>
+        <a:xfrm>
+          <a:off x="365562" y="3293604"/>
+          <a:ext cx="664659" cy="664659"/>
+        </a:xfrm>
+        <a:prstGeom prst="rect">
+          <a:avLst/>
+        </a:prstGeom>
+        <a:blipFill>
+          <a:blip xmlns:r="http://schemas.openxmlformats.org/officeDocument/2006/relationships">
+            <a:extLst>
+              <a:ext uri="{28A0092B-C50C-407E-A947-70E740481C1C}">
+                <a14:useLocalDpi xmlns:a14="http://schemas.microsoft.com/office/drawing/2010/main" val="0"/>
+              </a:ext>
+              <a:ext uri="{96DAC541-7B7A-43D3-8B79-37D633B846F1}">
+                <asvg:svgBlip xmlns:asvg="http://schemas.microsoft.com/office/drawing/2016/SVG/main" r:embed="rId3"/>
+              </a:ext>
+            </a:extLst>
+          </a:blip>
+          <a:stretch>
+            <a:fillRect/>
+          </a:stretch>
+        </a:blipFill>
+        <a:ln w="12700" cap="flat" cmpd="sng" algn="ctr">
+          <a:noFill/>
+          <a:prstDash val="solid"/>
+          <a:miter lim="800000"/>
+        </a:ln>
+        <a:effectLst/>
+      </dsp:spPr>
+      <dsp:style>
+        <a:lnRef idx="2">
+          <a:scrgbClr r="0" g="0" b="0"/>
+        </a:lnRef>
+        <a:fillRef idx="1">
+          <a:scrgbClr r="0" g="0" b="0"/>
+        </a:fillRef>
+        <a:effectRef idx="0">
+          <a:scrgbClr r="0" g="0" b="0"/>
+        </a:effectRef>
+        <a:fontRef idx="minor">
+          <a:schemeClr val="lt1"/>
+        </a:fontRef>
+      </dsp:style>
+    </dsp:sp>
+    <dsp:sp modelId="{3FE57743-9B3D-4EEF-AE29-DA461AAF3BC4}">
+      <dsp:nvSpPr>
+        <dsp:cNvPr id="0" name=""/>
+        <dsp:cNvSpPr/>
+      </dsp:nvSpPr>
+      <dsp:spPr>
+        <a:xfrm>
+          <a:off x="1395785" y="3021697"/>
+          <a:ext cx="6814761" cy="1208472"/>
+        </a:xfrm>
+        <a:prstGeom prst="rect">
+          <a:avLst/>
+        </a:prstGeom>
+        <a:noFill/>
+        <a:ln>
+          <a:noFill/>
+        </a:ln>
+        <a:effectLst/>
+      </dsp:spPr>
+      <dsp:style>
+        <a:lnRef idx="0">
+          <a:scrgbClr r="0" g="0" b="0"/>
+        </a:lnRef>
+        <a:fillRef idx="0">
+          <a:scrgbClr r="0" g="0" b="0"/>
+        </a:fillRef>
+        <a:effectRef idx="0">
+          <a:scrgbClr r="0" g="0" b="0"/>
+        </a:effectRef>
+        <a:fontRef idx="minor"/>
+      </dsp:style>
+      <dsp:txBody>
+        <a:bodyPr spcFirstLastPara="0" vert="horz" wrap="square" lIns="127897" tIns="127897" rIns="127897" bIns="127897" numCol="1" spcCol="1270" anchor="ctr" anchorCtr="0">
+          <a:noAutofit/>
+        </a:bodyPr>
+        <a:lstStyle/>
+        <a:p>
+          <a:pPr marL="0" lvl="0" indent="0" algn="l" defTabSz="1111250">
+            <a:lnSpc>
+              <a:spcPct val="90000"/>
+            </a:lnSpc>
+            <a:spcBef>
+              <a:spcPct val="0"/>
+            </a:spcBef>
+            <a:spcAft>
+              <a:spcPct val="35000"/>
+            </a:spcAft>
+            <a:buNone/>
+          </a:pPr>
+          <a:r>
+            <a:rPr lang="de-AT" sz="2500" kern="1200"/>
+            <a:t>Final data base size</a:t>
+          </a:r>
+          <a:endParaRPr lang="en-US" sz="2500" kern="1200"/>
+        </a:p>
+      </dsp:txBody>
+      <dsp:txXfrm>
+        <a:off x="1395785" y="3021697"/>
+        <a:ext cx="6814761" cy="1208472"/>
+      </dsp:txXfrm>
+    </dsp:sp>
+  </dsp:spTree>
+</dsp:drawing>
+</file>
+
 <file path=ppt/diagrams/layout1.xml><?xml version="1.0" encoding="utf-8"?>
 <dgm:layoutDef xmlns:dgm="http://schemas.openxmlformats.org/drawingml/2006/diagram" xmlns:a="http://schemas.openxmlformats.org/drawingml/2006/main" uniqueId="urn:microsoft.com/office/officeart/2016/7/layout/ChevronBlockProcess">
   <dgm:title val="Chevron Block Process"/>
@@ -2424,6 +3969,300 @@
 </dgm:layoutDef>
 </file>
 
+<file path=ppt/diagrams/layout2.xml><?xml version="1.0" encoding="utf-8"?>
+<dgm:layoutDef xmlns:dgm="http://schemas.openxmlformats.org/drawingml/2006/diagram" xmlns:a="http://schemas.openxmlformats.org/drawingml/2006/main" uniqueId="urn:microsoft.com/office/officeart/2018/2/layout/IconVerticalSolidList">
+  <dgm:title val="Icon Vertical Solid List"/>
+  <dgm:desc val="Use to show a series of visuals from top to bottom with Level 1 or Level 1 and Level 2 text grouped in a shape. Works best with icons or small pictures with lengthier descriptions."/>
+  <dgm:catLst>
+    <dgm:cat type="icon" pri="500"/>
+  </dgm:catLst>
+  <dgm:sampData useDef="1">
+    <dgm:dataModel>
+      <dgm:ptLst/>
+      <dgm:bg/>
+      <dgm:whole/>
+    </dgm:dataModel>
+  </dgm:sampData>
+  <dgm:styleData useDef="1">
+    <dgm:dataModel>
+      <dgm:ptLst/>
+      <dgm:bg/>
+      <dgm:whole/>
+    </dgm:dataModel>
+  </dgm:styleData>
+  <dgm:clrData useDef="1">
+    <dgm:dataModel>
+      <dgm:ptLst/>
+      <dgm:bg/>
+      <dgm:whole/>
+    </dgm:dataModel>
+  </dgm:clrData>
+  <dgm:layoutNode name="root">
+    <dgm:varLst>
+      <dgm:dir/>
+      <dgm:resizeHandles val="exact"/>
+    </dgm:varLst>
+    <dgm:choose name="Name0">
+      <dgm:if name="Name1" axis="self" func="var" arg="dir" op="equ" val="norm">
+        <dgm:alg type="lin">
+          <dgm:param type="linDir" val="fromT"/>
+          <dgm:param type="nodeHorzAlign" val="l"/>
+        </dgm:alg>
+      </dgm:if>
+      <dgm:else name="Name2">
+        <dgm:alg type="lin">
+          <dgm:param type="linDir" val="fromT"/>
+          <dgm:param type="nodeHorzAlign" val="r"/>
+        </dgm:alg>
+      </dgm:else>
+    </dgm:choose>
+    <dgm:shape xmlns:r="http://schemas.openxmlformats.org/officeDocument/2006/relationships" r:blip="">
+      <dgm:adjLst/>
+    </dgm:shape>
+    <dgm:presOf/>
+    <dgm:choose name="Name3">
+      <dgm:if name="Name4" axis="ch" ptType="node" func="cnt" op="lte" val="3">
+        <dgm:constrLst>
+          <dgm:constr type="h" for="ch" forName="compNode" refType="h" fact="0.3"/>
+          <dgm:constr type="w" for="ch" forName="compNode" refType="w"/>
+          <dgm:constr type="h" for="ch" forName="sibTrans" refType="h" refFor="ch" refForName="compNode" fact="0.25"/>
+          <dgm:constr type="primFontSz" for="des" forName="parTx" val="25"/>
+          <dgm:constr type="primFontSz" for="des" forName="desTx" refType="primFontSz" refFor="des" refForName="parTx" op="lte" fact="0.75"/>
+          <dgm:constr type="h" for="des" forName="compNode" op="equ"/>
+          <dgm:constr type="h" for="des" forName="bgRect" op="equ"/>
+          <dgm:constr type="h" for="des" forName="iconRect" op="equ"/>
+          <dgm:constr type="w" for="des" forName="iconRect" op="equ"/>
+          <dgm:constr type="h" for="des" forName="spaceRect" op="equ"/>
+          <dgm:constr type="h" for="des" forName="parTx" op="equ"/>
+          <dgm:constr type="h" for="des" forName="desTx" op="equ"/>
+        </dgm:constrLst>
+      </dgm:if>
+      <dgm:if name="Name5" axis="ch" ptType="node" func="cnt" op="lte" val="4">
+        <dgm:constrLst>
+          <dgm:constr type="h" for="ch" forName="compNode" refType="h" fact="0.3"/>
+          <dgm:constr type="w" for="ch" forName="compNode" refType="w"/>
+          <dgm:constr type="h" for="ch" forName="sibTrans" refType="h" refFor="ch" refForName="compNode" fact="0.25"/>
+          <dgm:constr type="primFontSz" for="des" forName="parTx" val="22"/>
+          <dgm:constr type="primFontSz" for="des" forName="desTx" refType="primFontSz" refFor="des" refForName="parTx" op="lte" fact="0.75"/>
+          <dgm:constr type="h" for="des" forName="compNode" op="equ"/>
+          <dgm:constr type="h" for="des" forName="bgRect" op="equ"/>
+          <dgm:constr type="h" for="des" forName="iconRect" op="equ"/>
+          <dgm:constr type="w" for="des" forName="iconRect" op="equ"/>
+          <dgm:constr type="h" for="des" forName="spaceRect" op="equ"/>
+          <dgm:constr type="h" for="des" forName="parTx" op="equ"/>
+          <dgm:constr type="h" for="des" forName="desTx" op="equ"/>
+        </dgm:constrLst>
+      </dgm:if>
+      <dgm:if name="Name6" axis="ch" ptType="node" func="cnt" op="lte" val="6">
+        <dgm:constrLst>
+          <dgm:constr type="h" for="ch" forName="compNode" refType="h" fact="0.3"/>
+          <dgm:constr type="w" for="ch" forName="compNode" refType="w"/>
+          <dgm:constr type="h" for="ch" forName="sibTrans" refType="h" refFor="ch" refForName="compNode" fact="0.25"/>
+          <dgm:constr type="primFontSz" for="des" forName="parTx" val="19"/>
+          <dgm:constr type="primFontSz" for="des" forName="desTx" refType="primFontSz" refFor="des" refForName="parTx" op="lte" fact="0.75"/>
+          <dgm:constr type="h" for="des" forName="compNode" op="equ"/>
+          <dgm:constr type="h" for="des" forName="bgRect" op="equ"/>
+          <dgm:constr type="h" for="des" forName="iconRect" op="equ"/>
+          <dgm:constr type="w" for="des" forName="iconRect" op="equ"/>
+          <dgm:constr type="h" for="des" forName="spaceRect" op="equ"/>
+          <dgm:constr type="h" for="des" forName="parTx" op="equ"/>
+          <dgm:constr type="h" for="des" forName="desTx" op="equ"/>
+        </dgm:constrLst>
+      </dgm:if>
+      <dgm:else name="Name7">
+        <dgm:constrLst>
+          <dgm:constr type="h" for="ch" forName="compNode" refType="h" fact="0.3"/>
+          <dgm:constr type="w" for="ch" forName="compNode" refType="w"/>
+          <dgm:constr type="h" for="ch" forName="sibTrans" refType="h" refFor="ch" refForName="compNode" fact="0.25"/>
+          <dgm:constr type="primFontSz" for="des" forName="parTx" val="16"/>
+          <dgm:constr type="primFontSz" for="des" forName="desTx" refType="primFontSz" refFor="des" refForName="parTx" op="lte" fact="0.75"/>
+          <dgm:constr type="h" for="des" forName="compNode" op="equ"/>
+          <dgm:constr type="h" for="des" forName="bgRect" op="equ"/>
+          <dgm:constr type="h" for="des" forName="iconRect" op="equ"/>
+          <dgm:constr type="w" for="des" forName="iconRect" op="equ"/>
+          <dgm:constr type="h" for="des" forName="spaceRect" op="equ"/>
+          <dgm:constr type="h" for="des" forName="parTx" op="equ"/>
+          <dgm:constr type="h" for="des" forName="desTx" op="equ"/>
+        </dgm:constrLst>
+      </dgm:else>
+    </dgm:choose>
+    <dgm:ruleLst>
+      <dgm:rule type="h" for="ch" forName="compNode" val="0" fact="NaN" max="NaN"/>
+    </dgm:ruleLst>
+    <dgm:forEach name="Name8" axis="ch" ptType="node">
+      <dgm:layoutNode name="compNode">
+        <dgm:alg type="composite"/>
+        <dgm:shape xmlns:r="http://schemas.openxmlformats.org/officeDocument/2006/relationships" r:blip="">
+          <dgm:adjLst/>
+        </dgm:shape>
+        <dgm:presOf axis="self"/>
+        <dgm:choose name="Name9">
+          <dgm:if name="Name10" axis="ch" ptType="node" func="cnt" op="gte" val="1">
+            <dgm:constrLst>
+              <dgm:constr type="w" for="ch" forName="bgRect" refType="w"/>
+              <dgm:constr type="h" for="ch" forName="bgRect" refType="h"/>
+              <dgm:constr type="l" for="ch" forName="bgRect"/>
+              <dgm:constr type="t" for="ch" forName="bgRect"/>
+              <dgm:constr type="h" for="ch" forName="iconRect" refType="h" fact="0.55"/>
+              <dgm:constr type="w" for="ch" forName="iconRect" refType="h" refFor="ch" refForName="iconRect"/>
+              <dgm:constr type="l" for="ch" forName="iconRect" refType="h" refFor="ch" refForName="iconRect" fact="0.55"/>
+              <dgm:constr type="ctrY" for="ch" forName="iconRect" refType="ctrY" refFor="ch" refForName="bgRect"/>
+              <dgm:constr type="w" for="ch" forName="spaceRect" refType="l" refFor="ch" refForName="iconRect"/>
+              <dgm:constr type="h" for="ch" forName="spaceRect" refType="h"/>
+              <dgm:constr type="l" for="ch" forName="spaceRect" refType="r" refFor="ch" refForName="iconRect"/>
+              <dgm:constr type="t" for="ch" forName="spaceRect"/>
+              <dgm:constr type="w" for="ch" forName="parTx" refType="w" fact="0.45"/>
+              <dgm:constr type="h" for="ch" forName="parTx" refType="h"/>
+              <dgm:constr type="l" for="ch" forName="parTx" refType="r" refFor="ch" refForName="spaceRect"/>
+              <dgm:constr type="t" for="ch" forName="parTx"/>
+              <dgm:constr type="h" for="ch" forName="desTx" refType="h"/>
+              <dgm:constr type="l" for="ch" forName="desTx" refType="r" refFor="ch" refForName="parTx"/>
+              <dgm:constr type="t" for="ch" forName="desTx"/>
+            </dgm:constrLst>
+          </dgm:if>
+          <dgm:else name="Name11">
+            <dgm:constrLst>
+              <dgm:constr type="w" for="ch" forName="bgRect" refType="w"/>
+              <dgm:constr type="h" for="ch" forName="bgRect" refType="h"/>
+              <dgm:constr type="l" for="ch" forName="bgRect"/>
+              <dgm:constr type="t" for="ch" forName="bgRect"/>
+              <dgm:constr type="h" for="ch" forName="iconRect" refType="h" fact="0.55"/>
+              <dgm:constr type="w" for="ch" forName="iconRect" refType="h" refFor="ch" refForName="iconRect"/>
+              <dgm:constr type="l" for="ch" forName="iconRect" refType="h" refFor="ch" refForName="iconRect" fact="0.55"/>
+              <dgm:constr type="ctrY" for="ch" forName="iconRect" refType="ctrY" refFor="ch" refForName="bgRect"/>
+              <dgm:constr type="w" for="ch" forName="spaceRect" refType="l" refFor="ch" refForName="iconRect"/>
+              <dgm:constr type="h" for="ch" forName="spaceRect" refType="h"/>
+              <dgm:constr type="l" for="ch" forName="spaceRect" refType="r" refFor="ch" refForName="iconRect"/>
+              <dgm:constr type="t" for="ch" forName="spaceRect"/>
+              <dgm:constr type="h" for="ch" forName="parTx" refType="h"/>
+              <dgm:constr type="l" for="ch" forName="parTx" refType="r" refFor="ch" refForName="spaceRect"/>
+              <dgm:constr type="t" for="ch" forName="parTx"/>
+            </dgm:constrLst>
+          </dgm:else>
+        </dgm:choose>
+        <dgm:ruleLst>
+          <dgm:rule type="h" val="INF" fact="NaN" max="NaN"/>
+        </dgm:ruleLst>
+        <dgm:layoutNode name="bgRect" styleLbl="bgShp">
+          <dgm:alg type="sp"/>
+          <dgm:shape xmlns:r="http://schemas.openxmlformats.org/officeDocument/2006/relationships" type="roundRect" r:blip="">
+            <dgm:adjLst>
+              <dgm:adj idx="1" val="0.1"/>
+            </dgm:adjLst>
+          </dgm:shape>
+          <dgm:presOf/>
+          <dgm:constrLst/>
+          <dgm:ruleLst/>
+        </dgm:layoutNode>
+        <dgm:layoutNode name="iconRect" styleLbl="node1">
+          <dgm:alg type="sp"/>
+          <dgm:shape xmlns:r="http://schemas.openxmlformats.org/officeDocument/2006/relationships" type="rect" r:blip="" blipPhldr="1">
+            <dgm:adjLst/>
+          </dgm:shape>
+          <dgm:presOf/>
+          <dgm:constrLst/>
+          <dgm:ruleLst/>
+        </dgm:layoutNode>
+        <dgm:layoutNode name="spaceRect">
+          <dgm:alg type="sp"/>
+          <dgm:shape xmlns:r="http://schemas.openxmlformats.org/officeDocument/2006/relationships" r:blip="">
+            <dgm:adjLst/>
+          </dgm:shape>
+          <dgm:presOf/>
+          <dgm:constrLst/>
+          <dgm:ruleLst/>
+        </dgm:layoutNode>
+        <dgm:layoutNode name="parTx" styleLbl="revTx">
+          <dgm:varLst>
+            <dgm:chMax val="0"/>
+            <dgm:chPref val="0"/>
+          </dgm:varLst>
+          <dgm:alg type="tx">
+            <dgm:param type="txAnchorVert" val="mid"/>
+            <dgm:param type="parTxLTRAlign" val="l"/>
+            <dgm:param type="shpTxLTRAlignCh" val="l"/>
+            <dgm:param type="parTxRTLAlign" val="r"/>
+            <dgm:param type="shpTxRTLAlignCh" val="r"/>
+          </dgm:alg>
+          <dgm:shape xmlns:r="http://schemas.openxmlformats.org/officeDocument/2006/relationships" type="rect" r:blip="">
+            <dgm:adjLst/>
+          </dgm:shape>
+          <dgm:presOf axis="self" ptType="node"/>
+          <dgm:constrLst>
+            <dgm:constr type="lMarg" refType="h" fact="0.3"/>
+            <dgm:constr type="rMarg" refType="h" fact="0.3"/>
+            <dgm:constr type="tMarg" refType="h" fact="0.3"/>
+            <dgm:constr type="bMarg" refType="h" fact="0.3"/>
+          </dgm:constrLst>
+          <dgm:ruleLst>
+            <dgm:rule type="primFontSz" val="14" fact="NaN" max="NaN"/>
+            <dgm:rule type="h" val="INF" fact="NaN" max="NaN"/>
+          </dgm:ruleLst>
+        </dgm:layoutNode>
+        <dgm:choose name="Name12">
+          <dgm:if name="Name13" axis="ch" ptType="node" func="cnt" op="gte" val="1">
+            <dgm:layoutNode name="desTx" styleLbl="revTx">
+              <dgm:varLst/>
+              <dgm:alg type="tx">
+                <dgm:param type="txAnchorVertCh" val="mid"/>
+                <dgm:param type="parTxLTRAlign" val="l"/>
+                <dgm:param type="shpTxLTRAlignCh" val="l"/>
+                <dgm:param type="parTxRTLAlign" val="r"/>
+                <dgm:param type="shpTxRTLAlignCh" val="r"/>
+                <dgm:param type="stBulletLvl" val="0"/>
+              </dgm:alg>
+              <dgm:shape xmlns:r="http://schemas.openxmlformats.org/officeDocument/2006/relationships" type="rect" r:blip="">
+                <dgm:adjLst/>
+              </dgm:shape>
+              <dgm:presOf axis="des" ptType="node"/>
+              <dgm:constrLst>
+                <dgm:constr type="primFontSz" val="18"/>
+                <dgm:constr type="secFontSz" refType="primFontSz"/>
+                <dgm:constr type="lMarg" refType="h" fact="0.3"/>
+                <dgm:constr type="rMarg" refType="h" fact="0.3"/>
+                <dgm:constr type="tMarg" refType="h" fact="0.3"/>
+                <dgm:constr type="bMarg" refType="h" fact="0.3"/>
+              </dgm:constrLst>
+              <dgm:ruleLst>
+                <dgm:rule type="primFontSz" val="11" fact="NaN" max="NaN"/>
+              </dgm:ruleLst>
+            </dgm:layoutNode>
+          </dgm:if>
+          <dgm:else name="Name14"/>
+        </dgm:choose>
+      </dgm:layoutNode>
+      <dgm:forEach name="Name15" axis="followSib" ptType="sibTrans" cnt="1">
+        <dgm:layoutNode name="sibTrans">
+          <dgm:alg type="sp"/>
+          <dgm:shape xmlns:r="http://schemas.openxmlformats.org/officeDocument/2006/relationships" r:blip="">
+            <dgm:adjLst/>
+          </dgm:shape>
+          <dgm:presOf axis="self"/>
+          <dgm:constrLst/>
+          <dgm:ruleLst/>
+        </dgm:layoutNode>
+      </dgm:forEach>
+    </dgm:forEach>
+  </dgm:layoutNode>
+  <dgm:extLst>
+    <a:ext uri="{68A01E43-0DF5-4B5B-8FA6-DAF915123BFB}">
+      <dgm1612:lstStyle xmlns:dgm1612="http://schemas.microsoft.com/office/drawing/2016/12/diagram">
+        <a:lvl1pPr>
+          <a:lnSpc>
+            <a:spcPct val="100000"/>
+          </a:lnSpc>
+        </a:lvl1pPr>
+        <a:lvl2pPr>
+          <a:lnSpc>
+            <a:spcPct val="100000"/>
+          </a:lnSpc>
+        </a:lvl2pPr>
+      </dgm1612:lstStyle>
+    </a:ext>
+  </dgm:extLst>
+</dgm:layoutDef>
+</file>
+
 <file path=ppt/diagrams/quickStyle1.xml><?xml version="1.0" encoding="utf-8"?>
 <dgm:styleDef xmlns:dgm="http://schemas.openxmlformats.org/drawingml/2006/diagram" xmlns:a="http://schemas.openxmlformats.org/drawingml/2006/main" uniqueId="urn:microsoft.com/office/officeart/2005/8/quickstyle/simple4">
   <dgm:title val=""/>
@@ -3430,6 +5269,1040 @@
         <a:scrgbClr r="0" g="0" b="0"/>
       </a:fillRef>
       <a:effectRef idx="2">
+        <a:scrgbClr r="0" g="0" b="0"/>
+      </a:effectRef>
+      <a:fontRef idx="minor"/>
+    </dgm:style>
+  </dgm:styleLbl>
+  <dgm:styleLbl name="revTx">
+    <dgm:scene3d>
+      <a:camera prst="orthographicFront"/>
+      <a:lightRig rig="threePt" dir="t"/>
+    </dgm:scene3d>
+    <dgm:sp3d/>
+    <dgm:txPr/>
+    <dgm:style>
+      <a:lnRef idx="0">
+        <a:scrgbClr r="0" g="0" b="0"/>
+      </a:lnRef>
+      <a:fillRef idx="0">
+        <a:scrgbClr r="0" g="0" b="0"/>
+      </a:fillRef>
+      <a:effectRef idx="0">
+        <a:scrgbClr r="0" g="0" b="0"/>
+      </a:effectRef>
+      <a:fontRef idx="minor"/>
+    </dgm:style>
+  </dgm:styleLbl>
+</dgm:styleDef>
+</file>
+
+<file path=ppt/diagrams/quickStyle2.xml><?xml version="1.0" encoding="utf-8"?>
+<dgm:styleDef xmlns:dgm="http://schemas.openxmlformats.org/drawingml/2006/diagram" xmlns:a="http://schemas.openxmlformats.org/drawingml/2006/main" uniqueId="urn:microsoft.com/office/officeart/2005/8/quickstyle/simple1">
+  <dgm:title val=""/>
+  <dgm:desc val=""/>
+  <dgm:catLst>
+    <dgm:cat type="simple" pri="10100"/>
+  </dgm:catLst>
+  <dgm:scene3d>
+    <a:camera prst="orthographicFront"/>
+    <a:lightRig rig="threePt" dir="t"/>
+  </dgm:scene3d>
+  <dgm:styleLbl name="node0">
+    <dgm:scene3d>
+      <a:camera prst="orthographicFront"/>
+      <a:lightRig rig="threePt" dir="t"/>
+    </dgm:scene3d>
+    <dgm:sp3d/>
+    <dgm:txPr/>
+    <dgm:style>
+      <a:lnRef idx="2">
+        <a:scrgbClr r="0" g="0" b="0"/>
+      </a:lnRef>
+      <a:fillRef idx="1">
+        <a:scrgbClr r="0" g="0" b="0"/>
+      </a:fillRef>
+      <a:effectRef idx="0">
+        <a:scrgbClr r="0" g="0" b="0"/>
+      </a:effectRef>
+      <a:fontRef idx="minor">
+        <a:schemeClr val="lt1"/>
+      </a:fontRef>
+    </dgm:style>
+  </dgm:styleLbl>
+  <dgm:styleLbl name="lnNode1">
+    <dgm:scene3d>
+      <a:camera prst="orthographicFront"/>
+      <a:lightRig rig="threePt" dir="t"/>
+    </dgm:scene3d>
+    <dgm:sp3d/>
+    <dgm:txPr/>
+    <dgm:style>
+      <a:lnRef idx="2">
+        <a:scrgbClr r="0" g="0" b="0"/>
+      </a:lnRef>
+      <a:fillRef idx="1">
+        <a:scrgbClr r="0" g="0" b="0"/>
+      </a:fillRef>
+      <a:effectRef idx="0">
+        <a:scrgbClr r="0" g="0" b="0"/>
+      </a:effectRef>
+      <a:fontRef idx="minor">
+        <a:schemeClr val="lt1"/>
+      </a:fontRef>
+    </dgm:style>
+  </dgm:styleLbl>
+  <dgm:styleLbl name="vennNode1">
+    <dgm:scene3d>
+      <a:camera prst="orthographicFront"/>
+      <a:lightRig rig="threePt" dir="t"/>
+    </dgm:scene3d>
+    <dgm:sp3d/>
+    <dgm:txPr/>
+    <dgm:style>
+      <a:lnRef idx="2">
+        <a:scrgbClr r="0" g="0" b="0"/>
+      </a:lnRef>
+      <a:fillRef idx="1">
+        <a:scrgbClr r="0" g="0" b="0"/>
+      </a:fillRef>
+      <a:effectRef idx="0">
+        <a:scrgbClr r="0" g="0" b="0"/>
+      </a:effectRef>
+      <a:fontRef idx="minor">
+        <a:schemeClr val="tx1"/>
+      </a:fontRef>
+    </dgm:style>
+  </dgm:styleLbl>
+  <dgm:styleLbl name="alignNode1">
+    <dgm:scene3d>
+      <a:camera prst="orthographicFront"/>
+      <a:lightRig rig="threePt" dir="t"/>
+    </dgm:scene3d>
+    <dgm:sp3d/>
+    <dgm:txPr/>
+    <dgm:style>
+      <a:lnRef idx="2">
+        <a:scrgbClr r="0" g="0" b="0"/>
+      </a:lnRef>
+      <a:fillRef idx="1">
+        <a:scrgbClr r="0" g="0" b="0"/>
+      </a:fillRef>
+      <a:effectRef idx="0">
+        <a:scrgbClr r="0" g="0" b="0"/>
+      </a:effectRef>
+      <a:fontRef idx="minor">
+        <a:schemeClr val="lt1"/>
+      </a:fontRef>
+    </dgm:style>
+  </dgm:styleLbl>
+  <dgm:styleLbl name="node1">
+    <dgm:scene3d>
+      <a:camera prst="orthographicFront"/>
+      <a:lightRig rig="threePt" dir="t"/>
+    </dgm:scene3d>
+    <dgm:sp3d/>
+    <dgm:txPr/>
+    <dgm:style>
+      <a:lnRef idx="2">
+        <a:scrgbClr r="0" g="0" b="0"/>
+      </a:lnRef>
+      <a:fillRef idx="1">
+        <a:scrgbClr r="0" g="0" b="0"/>
+      </a:fillRef>
+      <a:effectRef idx="0">
+        <a:scrgbClr r="0" g="0" b="0"/>
+      </a:effectRef>
+      <a:fontRef idx="minor">
+        <a:schemeClr val="lt1"/>
+      </a:fontRef>
+    </dgm:style>
+  </dgm:styleLbl>
+  <dgm:styleLbl name="node2">
+    <dgm:scene3d>
+      <a:camera prst="orthographicFront"/>
+      <a:lightRig rig="threePt" dir="t"/>
+    </dgm:scene3d>
+    <dgm:sp3d/>
+    <dgm:txPr/>
+    <dgm:style>
+      <a:lnRef idx="2">
+        <a:scrgbClr r="0" g="0" b="0"/>
+      </a:lnRef>
+      <a:fillRef idx="1">
+        <a:scrgbClr r="0" g="0" b="0"/>
+      </a:fillRef>
+      <a:effectRef idx="0">
+        <a:scrgbClr r="0" g="0" b="0"/>
+      </a:effectRef>
+      <a:fontRef idx="minor">
+        <a:schemeClr val="lt1"/>
+      </a:fontRef>
+    </dgm:style>
+  </dgm:styleLbl>
+  <dgm:styleLbl name="node3">
+    <dgm:scene3d>
+      <a:camera prst="orthographicFront"/>
+      <a:lightRig rig="threePt" dir="t"/>
+    </dgm:scene3d>
+    <dgm:sp3d/>
+    <dgm:txPr/>
+    <dgm:style>
+      <a:lnRef idx="2">
+        <a:scrgbClr r="0" g="0" b="0"/>
+      </a:lnRef>
+      <a:fillRef idx="1">
+        <a:scrgbClr r="0" g="0" b="0"/>
+      </a:fillRef>
+      <a:effectRef idx="0">
+        <a:scrgbClr r="0" g="0" b="0"/>
+      </a:effectRef>
+      <a:fontRef idx="minor">
+        <a:schemeClr val="lt1"/>
+      </a:fontRef>
+    </dgm:style>
+  </dgm:styleLbl>
+  <dgm:styleLbl name="node4">
+    <dgm:scene3d>
+      <a:camera prst="orthographicFront"/>
+      <a:lightRig rig="threePt" dir="t"/>
+    </dgm:scene3d>
+    <dgm:sp3d/>
+    <dgm:txPr/>
+    <dgm:style>
+      <a:lnRef idx="2">
+        <a:scrgbClr r="0" g="0" b="0"/>
+      </a:lnRef>
+      <a:fillRef idx="1">
+        <a:scrgbClr r="0" g="0" b="0"/>
+      </a:fillRef>
+      <a:effectRef idx="0">
+        <a:scrgbClr r="0" g="0" b="0"/>
+      </a:effectRef>
+      <a:fontRef idx="minor">
+        <a:schemeClr val="lt1"/>
+      </a:fontRef>
+    </dgm:style>
+  </dgm:styleLbl>
+  <dgm:styleLbl name="fgImgPlace1">
+    <dgm:scene3d>
+      <a:camera prst="orthographicFront"/>
+      <a:lightRig rig="threePt" dir="t"/>
+    </dgm:scene3d>
+    <dgm:sp3d/>
+    <dgm:txPr/>
+    <dgm:style>
+      <a:lnRef idx="2">
+        <a:scrgbClr r="0" g="0" b="0"/>
+      </a:lnRef>
+      <a:fillRef idx="1">
+        <a:scrgbClr r="0" g="0" b="0"/>
+      </a:fillRef>
+      <a:effectRef idx="0">
+        <a:scrgbClr r="0" g="0" b="0"/>
+      </a:effectRef>
+      <a:fontRef idx="minor"/>
+    </dgm:style>
+  </dgm:styleLbl>
+  <dgm:styleLbl name="alignImgPlace1">
+    <dgm:scene3d>
+      <a:camera prst="orthographicFront"/>
+      <a:lightRig rig="threePt" dir="t"/>
+    </dgm:scene3d>
+    <dgm:sp3d/>
+    <dgm:txPr/>
+    <dgm:style>
+      <a:lnRef idx="2">
+        <a:scrgbClr r="0" g="0" b="0"/>
+      </a:lnRef>
+      <a:fillRef idx="1">
+        <a:scrgbClr r="0" g="0" b="0"/>
+      </a:fillRef>
+      <a:effectRef idx="0">
+        <a:scrgbClr r="0" g="0" b="0"/>
+      </a:effectRef>
+      <a:fontRef idx="minor"/>
+    </dgm:style>
+  </dgm:styleLbl>
+  <dgm:styleLbl name="bgImgPlace1">
+    <dgm:scene3d>
+      <a:camera prst="orthographicFront"/>
+      <a:lightRig rig="threePt" dir="t"/>
+    </dgm:scene3d>
+    <dgm:sp3d/>
+    <dgm:txPr/>
+    <dgm:style>
+      <a:lnRef idx="2">
+        <a:scrgbClr r="0" g="0" b="0"/>
+      </a:lnRef>
+      <a:fillRef idx="1">
+        <a:scrgbClr r="0" g="0" b="0"/>
+      </a:fillRef>
+      <a:effectRef idx="0">
+        <a:scrgbClr r="0" g="0" b="0"/>
+      </a:effectRef>
+      <a:fontRef idx="minor"/>
+    </dgm:style>
+  </dgm:styleLbl>
+  <dgm:styleLbl name="sibTrans2D1">
+    <dgm:scene3d>
+      <a:camera prst="orthographicFront"/>
+      <a:lightRig rig="threePt" dir="t"/>
+    </dgm:scene3d>
+    <dgm:sp3d/>
+    <dgm:txPr/>
+    <dgm:style>
+      <a:lnRef idx="0">
+        <a:scrgbClr r="0" g="0" b="0"/>
+      </a:lnRef>
+      <a:fillRef idx="1">
+        <a:scrgbClr r="0" g="0" b="0"/>
+      </a:fillRef>
+      <a:effectRef idx="0">
+        <a:scrgbClr r="0" g="0" b="0"/>
+      </a:effectRef>
+      <a:fontRef idx="minor">
+        <a:schemeClr val="lt1"/>
+      </a:fontRef>
+    </dgm:style>
+  </dgm:styleLbl>
+  <dgm:styleLbl name="fgSibTrans2D1">
+    <dgm:scene3d>
+      <a:camera prst="orthographicFront"/>
+      <a:lightRig rig="threePt" dir="t"/>
+    </dgm:scene3d>
+    <dgm:sp3d/>
+    <dgm:txPr/>
+    <dgm:style>
+      <a:lnRef idx="0">
+        <a:scrgbClr r="0" g="0" b="0"/>
+      </a:lnRef>
+      <a:fillRef idx="1">
+        <a:scrgbClr r="0" g="0" b="0"/>
+      </a:fillRef>
+      <a:effectRef idx="0">
+        <a:scrgbClr r="0" g="0" b="0"/>
+      </a:effectRef>
+      <a:fontRef idx="minor">
+        <a:schemeClr val="lt1"/>
+      </a:fontRef>
+    </dgm:style>
+  </dgm:styleLbl>
+  <dgm:styleLbl name="bgSibTrans2D1">
+    <dgm:scene3d>
+      <a:camera prst="orthographicFront"/>
+      <a:lightRig rig="threePt" dir="t"/>
+    </dgm:scene3d>
+    <dgm:sp3d/>
+    <dgm:txPr/>
+    <dgm:style>
+      <a:lnRef idx="0">
+        <a:scrgbClr r="0" g="0" b="0"/>
+      </a:lnRef>
+      <a:fillRef idx="1">
+        <a:scrgbClr r="0" g="0" b="0"/>
+      </a:fillRef>
+      <a:effectRef idx="0">
+        <a:scrgbClr r="0" g="0" b="0"/>
+      </a:effectRef>
+      <a:fontRef idx="minor">
+        <a:schemeClr val="lt1"/>
+      </a:fontRef>
+    </dgm:style>
+  </dgm:styleLbl>
+  <dgm:styleLbl name="sibTrans1D1">
+    <dgm:scene3d>
+      <a:camera prst="orthographicFront"/>
+      <a:lightRig rig="threePt" dir="t"/>
+    </dgm:scene3d>
+    <dgm:sp3d/>
+    <dgm:txPr/>
+    <dgm:style>
+      <a:lnRef idx="1">
+        <a:scrgbClr r="0" g="0" b="0"/>
+      </a:lnRef>
+      <a:fillRef idx="0">
+        <a:scrgbClr r="0" g="0" b="0"/>
+      </a:fillRef>
+      <a:effectRef idx="0">
+        <a:scrgbClr r="0" g="0" b="0"/>
+      </a:effectRef>
+      <a:fontRef idx="minor"/>
+    </dgm:style>
+  </dgm:styleLbl>
+  <dgm:styleLbl name="callout">
+    <dgm:scene3d>
+      <a:camera prst="orthographicFront"/>
+      <a:lightRig rig="threePt" dir="t"/>
+    </dgm:scene3d>
+    <dgm:sp3d/>
+    <dgm:txPr/>
+    <dgm:style>
+      <a:lnRef idx="2">
+        <a:scrgbClr r="0" g="0" b="0"/>
+      </a:lnRef>
+      <a:fillRef idx="1">
+        <a:scrgbClr r="0" g="0" b="0"/>
+      </a:fillRef>
+      <a:effectRef idx="0">
+        <a:scrgbClr r="0" g="0" b="0"/>
+      </a:effectRef>
+      <a:fontRef idx="minor"/>
+    </dgm:style>
+  </dgm:styleLbl>
+  <dgm:styleLbl name="asst0">
+    <dgm:scene3d>
+      <a:camera prst="orthographicFront"/>
+      <a:lightRig rig="threePt" dir="t"/>
+    </dgm:scene3d>
+    <dgm:sp3d/>
+    <dgm:txPr/>
+    <dgm:style>
+      <a:lnRef idx="2">
+        <a:scrgbClr r="0" g="0" b="0"/>
+      </a:lnRef>
+      <a:fillRef idx="1">
+        <a:scrgbClr r="0" g="0" b="0"/>
+      </a:fillRef>
+      <a:effectRef idx="0">
+        <a:scrgbClr r="0" g="0" b="0"/>
+      </a:effectRef>
+      <a:fontRef idx="minor">
+        <a:schemeClr val="lt1"/>
+      </a:fontRef>
+    </dgm:style>
+  </dgm:styleLbl>
+  <dgm:styleLbl name="asst1">
+    <dgm:scene3d>
+      <a:camera prst="orthographicFront"/>
+      <a:lightRig rig="threePt" dir="t"/>
+    </dgm:scene3d>
+    <dgm:sp3d/>
+    <dgm:txPr/>
+    <dgm:style>
+      <a:lnRef idx="2">
+        <a:scrgbClr r="0" g="0" b="0"/>
+      </a:lnRef>
+      <a:fillRef idx="1">
+        <a:scrgbClr r="0" g="0" b="0"/>
+      </a:fillRef>
+      <a:effectRef idx="0">
+        <a:scrgbClr r="0" g="0" b="0"/>
+      </a:effectRef>
+      <a:fontRef idx="minor">
+        <a:schemeClr val="lt1"/>
+      </a:fontRef>
+    </dgm:style>
+  </dgm:styleLbl>
+  <dgm:styleLbl name="asst2">
+    <dgm:scene3d>
+      <a:camera prst="orthographicFront"/>
+      <a:lightRig rig="threePt" dir="t"/>
+    </dgm:scene3d>
+    <dgm:sp3d/>
+    <dgm:txPr/>
+    <dgm:style>
+      <a:lnRef idx="2">
+        <a:scrgbClr r="0" g="0" b="0"/>
+      </a:lnRef>
+      <a:fillRef idx="1">
+        <a:scrgbClr r="0" g="0" b="0"/>
+      </a:fillRef>
+      <a:effectRef idx="0">
+        <a:scrgbClr r="0" g="0" b="0"/>
+      </a:effectRef>
+      <a:fontRef idx="minor">
+        <a:schemeClr val="lt1"/>
+      </a:fontRef>
+    </dgm:style>
+  </dgm:styleLbl>
+  <dgm:styleLbl name="asst3">
+    <dgm:scene3d>
+      <a:camera prst="orthographicFront"/>
+      <a:lightRig rig="threePt" dir="t"/>
+    </dgm:scene3d>
+    <dgm:sp3d/>
+    <dgm:txPr/>
+    <dgm:style>
+      <a:lnRef idx="2">
+        <a:scrgbClr r="0" g="0" b="0"/>
+      </a:lnRef>
+      <a:fillRef idx="1">
+        <a:scrgbClr r="0" g="0" b="0"/>
+      </a:fillRef>
+      <a:effectRef idx="0">
+        <a:scrgbClr r="0" g="0" b="0"/>
+      </a:effectRef>
+      <a:fontRef idx="minor">
+        <a:schemeClr val="lt1"/>
+      </a:fontRef>
+    </dgm:style>
+  </dgm:styleLbl>
+  <dgm:styleLbl name="asst4">
+    <dgm:scene3d>
+      <a:camera prst="orthographicFront"/>
+      <a:lightRig rig="threePt" dir="t"/>
+    </dgm:scene3d>
+    <dgm:sp3d/>
+    <dgm:txPr/>
+    <dgm:style>
+      <a:lnRef idx="2">
+        <a:scrgbClr r="0" g="0" b="0"/>
+      </a:lnRef>
+      <a:fillRef idx="1">
+        <a:scrgbClr r="0" g="0" b="0"/>
+      </a:fillRef>
+      <a:effectRef idx="0">
+        <a:scrgbClr r="0" g="0" b="0"/>
+      </a:effectRef>
+      <a:fontRef idx="minor">
+        <a:schemeClr val="lt1"/>
+      </a:fontRef>
+    </dgm:style>
+  </dgm:styleLbl>
+  <dgm:styleLbl name="parChTrans2D1">
+    <dgm:scene3d>
+      <a:camera prst="orthographicFront"/>
+      <a:lightRig rig="threePt" dir="t"/>
+    </dgm:scene3d>
+    <dgm:sp3d/>
+    <dgm:txPr/>
+    <dgm:style>
+      <a:lnRef idx="2">
+        <a:scrgbClr r="0" g="0" b="0"/>
+      </a:lnRef>
+      <a:fillRef idx="1">
+        <a:scrgbClr r="0" g="0" b="0"/>
+      </a:fillRef>
+      <a:effectRef idx="0">
+        <a:scrgbClr r="0" g="0" b="0"/>
+      </a:effectRef>
+      <a:fontRef idx="minor">
+        <a:schemeClr val="lt1"/>
+      </a:fontRef>
+    </dgm:style>
+  </dgm:styleLbl>
+  <dgm:styleLbl name="parChTrans2D2">
+    <dgm:scene3d>
+      <a:camera prst="orthographicFront"/>
+      <a:lightRig rig="threePt" dir="t"/>
+    </dgm:scene3d>
+    <dgm:sp3d/>
+    <dgm:txPr/>
+    <dgm:style>
+      <a:lnRef idx="2">
+        <a:scrgbClr r="0" g="0" b="0"/>
+      </a:lnRef>
+      <a:fillRef idx="1">
+        <a:scrgbClr r="0" g="0" b="0"/>
+      </a:fillRef>
+      <a:effectRef idx="0">
+        <a:scrgbClr r="0" g="0" b="0"/>
+      </a:effectRef>
+      <a:fontRef idx="minor">
+        <a:schemeClr val="lt1"/>
+      </a:fontRef>
+    </dgm:style>
+  </dgm:styleLbl>
+  <dgm:styleLbl name="parChTrans2D3">
+    <dgm:scene3d>
+      <a:camera prst="orthographicFront"/>
+      <a:lightRig rig="threePt" dir="t"/>
+    </dgm:scene3d>
+    <dgm:sp3d/>
+    <dgm:txPr/>
+    <dgm:style>
+      <a:lnRef idx="2">
+        <a:scrgbClr r="0" g="0" b="0"/>
+      </a:lnRef>
+      <a:fillRef idx="1">
+        <a:scrgbClr r="0" g="0" b="0"/>
+      </a:fillRef>
+      <a:effectRef idx="0">
+        <a:scrgbClr r="0" g="0" b="0"/>
+      </a:effectRef>
+      <a:fontRef idx="minor">
+        <a:schemeClr val="lt1"/>
+      </a:fontRef>
+    </dgm:style>
+  </dgm:styleLbl>
+  <dgm:styleLbl name="parChTrans2D4">
+    <dgm:scene3d>
+      <a:camera prst="orthographicFront"/>
+      <a:lightRig rig="threePt" dir="t"/>
+    </dgm:scene3d>
+    <dgm:sp3d/>
+    <dgm:txPr/>
+    <dgm:style>
+      <a:lnRef idx="2">
+        <a:scrgbClr r="0" g="0" b="0"/>
+      </a:lnRef>
+      <a:fillRef idx="1">
+        <a:scrgbClr r="0" g="0" b="0"/>
+      </a:fillRef>
+      <a:effectRef idx="0">
+        <a:scrgbClr r="0" g="0" b="0"/>
+      </a:effectRef>
+      <a:fontRef idx="minor">
+        <a:schemeClr val="lt1"/>
+      </a:fontRef>
+    </dgm:style>
+  </dgm:styleLbl>
+  <dgm:styleLbl name="parChTrans1D1">
+    <dgm:scene3d>
+      <a:camera prst="orthographicFront"/>
+      <a:lightRig rig="threePt" dir="t"/>
+    </dgm:scene3d>
+    <dgm:sp3d/>
+    <dgm:txPr/>
+    <dgm:style>
+      <a:lnRef idx="2">
+        <a:scrgbClr r="0" g="0" b="0"/>
+      </a:lnRef>
+      <a:fillRef idx="0">
+        <a:scrgbClr r="0" g="0" b="0"/>
+      </a:fillRef>
+      <a:effectRef idx="0">
+        <a:scrgbClr r="0" g="0" b="0"/>
+      </a:effectRef>
+      <a:fontRef idx="minor"/>
+    </dgm:style>
+  </dgm:styleLbl>
+  <dgm:styleLbl name="parChTrans1D2">
+    <dgm:scene3d>
+      <a:camera prst="orthographicFront"/>
+      <a:lightRig rig="threePt" dir="t"/>
+    </dgm:scene3d>
+    <dgm:sp3d/>
+    <dgm:txPr/>
+    <dgm:style>
+      <a:lnRef idx="2">
+        <a:scrgbClr r="0" g="0" b="0"/>
+      </a:lnRef>
+      <a:fillRef idx="0">
+        <a:scrgbClr r="0" g="0" b="0"/>
+      </a:fillRef>
+      <a:effectRef idx="0">
+        <a:scrgbClr r="0" g="0" b="0"/>
+      </a:effectRef>
+      <a:fontRef idx="minor"/>
+    </dgm:style>
+  </dgm:styleLbl>
+  <dgm:styleLbl name="parChTrans1D3">
+    <dgm:scene3d>
+      <a:camera prst="orthographicFront"/>
+      <a:lightRig rig="threePt" dir="t"/>
+    </dgm:scene3d>
+    <dgm:sp3d/>
+    <dgm:txPr/>
+    <dgm:style>
+      <a:lnRef idx="2">
+        <a:scrgbClr r="0" g="0" b="0"/>
+      </a:lnRef>
+      <a:fillRef idx="0">
+        <a:scrgbClr r="0" g="0" b="0"/>
+      </a:fillRef>
+      <a:effectRef idx="0">
+        <a:scrgbClr r="0" g="0" b="0"/>
+      </a:effectRef>
+      <a:fontRef idx="minor"/>
+    </dgm:style>
+  </dgm:styleLbl>
+  <dgm:styleLbl name="parChTrans1D4">
+    <dgm:scene3d>
+      <a:camera prst="orthographicFront"/>
+      <a:lightRig rig="threePt" dir="t"/>
+    </dgm:scene3d>
+    <dgm:sp3d/>
+    <dgm:txPr/>
+    <dgm:style>
+      <a:lnRef idx="2">
+        <a:scrgbClr r="0" g="0" b="0"/>
+      </a:lnRef>
+      <a:fillRef idx="0">
+        <a:scrgbClr r="0" g="0" b="0"/>
+      </a:fillRef>
+      <a:effectRef idx="0">
+        <a:scrgbClr r="0" g="0" b="0"/>
+      </a:effectRef>
+      <a:fontRef idx="minor"/>
+    </dgm:style>
+  </dgm:styleLbl>
+  <dgm:styleLbl name="fgAcc1">
+    <dgm:scene3d>
+      <a:camera prst="orthographicFront"/>
+      <a:lightRig rig="threePt" dir="t"/>
+    </dgm:scene3d>
+    <dgm:sp3d/>
+    <dgm:txPr/>
+    <dgm:style>
+      <a:lnRef idx="2">
+        <a:scrgbClr r="0" g="0" b="0"/>
+      </a:lnRef>
+      <a:fillRef idx="1">
+        <a:scrgbClr r="0" g="0" b="0"/>
+      </a:fillRef>
+      <a:effectRef idx="0">
+        <a:scrgbClr r="0" g="0" b="0"/>
+      </a:effectRef>
+      <a:fontRef idx="minor"/>
+    </dgm:style>
+  </dgm:styleLbl>
+  <dgm:styleLbl name="conFgAcc1">
+    <dgm:scene3d>
+      <a:camera prst="orthographicFront"/>
+      <a:lightRig rig="threePt" dir="t"/>
+    </dgm:scene3d>
+    <dgm:sp3d/>
+    <dgm:txPr/>
+    <dgm:style>
+      <a:lnRef idx="2">
+        <a:scrgbClr r="0" g="0" b="0"/>
+      </a:lnRef>
+      <a:fillRef idx="1">
+        <a:scrgbClr r="0" g="0" b="0"/>
+      </a:fillRef>
+      <a:effectRef idx="0">
+        <a:scrgbClr r="0" g="0" b="0"/>
+      </a:effectRef>
+      <a:fontRef idx="minor"/>
+    </dgm:style>
+  </dgm:styleLbl>
+  <dgm:styleLbl name="alignAcc1">
+    <dgm:scene3d>
+      <a:camera prst="orthographicFront"/>
+      <a:lightRig rig="threePt" dir="t"/>
+    </dgm:scene3d>
+    <dgm:sp3d/>
+    <dgm:txPr/>
+    <dgm:style>
+      <a:lnRef idx="2">
+        <a:scrgbClr r="0" g="0" b="0"/>
+      </a:lnRef>
+      <a:fillRef idx="1">
+        <a:scrgbClr r="0" g="0" b="0"/>
+      </a:fillRef>
+      <a:effectRef idx="0">
+        <a:scrgbClr r="0" g="0" b="0"/>
+      </a:effectRef>
+      <a:fontRef idx="minor"/>
+    </dgm:style>
+  </dgm:styleLbl>
+  <dgm:styleLbl name="trAlignAcc1">
+    <dgm:scene3d>
+      <a:camera prst="orthographicFront"/>
+      <a:lightRig rig="threePt" dir="t"/>
+    </dgm:scene3d>
+    <dgm:sp3d/>
+    <dgm:txPr/>
+    <dgm:style>
+      <a:lnRef idx="1">
+        <a:scrgbClr r="0" g="0" b="0"/>
+      </a:lnRef>
+      <a:fillRef idx="1">
+        <a:scrgbClr r="0" g="0" b="0"/>
+      </a:fillRef>
+      <a:effectRef idx="0">
+        <a:scrgbClr r="0" g="0" b="0"/>
+      </a:effectRef>
+      <a:fontRef idx="minor"/>
+    </dgm:style>
+  </dgm:styleLbl>
+  <dgm:styleLbl name="bgAcc1">
+    <dgm:scene3d>
+      <a:camera prst="orthographicFront"/>
+      <a:lightRig rig="threePt" dir="t"/>
+    </dgm:scene3d>
+    <dgm:sp3d/>
+    <dgm:txPr/>
+    <dgm:style>
+      <a:lnRef idx="2">
+        <a:scrgbClr r="0" g="0" b="0"/>
+      </a:lnRef>
+      <a:fillRef idx="1">
+        <a:scrgbClr r="0" g="0" b="0"/>
+      </a:fillRef>
+      <a:effectRef idx="0">
+        <a:scrgbClr r="0" g="0" b="0"/>
+      </a:effectRef>
+      <a:fontRef idx="minor"/>
+    </dgm:style>
+  </dgm:styleLbl>
+  <dgm:styleLbl name="solidFgAcc1">
+    <dgm:scene3d>
+      <a:camera prst="orthographicFront"/>
+      <a:lightRig rig="threePt" dir="t"/>
+    </dgm:scene3d>
+    <dgm:sp3d/>
+    <dgm:txPr/>
+    <dgm:style>
+      <a:lnRef idx="2">
+        <a:scrgbClr r="0" g="0" b="0"/>
+      </a:lnRef>
+      <a:fillRef idx="1">
+        <a:scrgbClr r="0" g="0" b="0"/>
+      </a:fillRef>
+      <a:effectRef idx="0">
+        <a:scrgbClr r="0" g="0" b="0"/>
+      </a:effectRef>
+      <a:fontRef idx="minor"/>
+    </dgm:style>
+  </dgm:styleLbl>
+  <dgm:styleLbl name="solidAlignAcc1">
+    <dgm:scene3d>
+      <a:camera prst="orthographicFront"/>
+      <a:lightRig rig="threePt" dir="t"/>
+    </dgm:scene3d>
+    <dgm:sp3d/>
+    <dgm:txPr/>
+    <dgm:style>
+      <a:lnRef idx="2">
+        <a:scrgbClr r="0" g="0" b="0"/>
+      </a:lnRef>
+      <a:fillRef idx="1">
+        <a:scrgbClr r="0" g="0" b="0"/>
+      </a:fillRef>
+      <a:effectRef idx="0">
+        <a:scrgbClr r="0" g="0" b="0"/>
+      </a:effectRef>
+      <a:fontRef idx="minor"/>
+    </dgm:style>
+  </dgm:styleLbl>
+  <dgm:styleLbl name="solidBgAcc1">
+    <dgm:scene3d>
+      <a:camera prst="orthographicFront"/>
+      <a:lightRig rig="threePt" dir="t"/>
+    </dgm:scene3d>
+    <dgm:sp3d/>
+    <dgm:txPr/>
+    <dgm:style>
+      <a:lnRef idx="2">
+        <a:scrgbClr r="0" g="0" b="0"/>
+      </a:lnRef>
+      <a:fillRef idx="1">
+        <a:scrgbClr r="0" g="0" b="0"/>
+      </a:fillRef>
+      <a:effectRef idx="0">
+        <a:scrgbClr r="0" g="0" b="0"/>
+      </a:effectRef>
+      <a:fontRef idx="minor"/>
+    </dgm:style>
+  </dgm:styleLbl>
+  <dgm:styleLbl name="fgAccFollowNode1">
+    <dgm:scene3d>
+      <a:camera prst="orthographicFront"/>
+      <a:lightRig rig="threePt" dir="t"/>
+    </dgm:scene3d>
+    <dgm:sp3d/>
+    <dgm:txPr/>
+    <dgm:style>
+      <a:lnRef idx="2">
+        <a:scrgbClr r="0" g="0" b="0"/>
+      </a:lnRef>
+      <a:fillRef idx="1">
+        <a:scrgbClr r="0" g="0" b="0"/>
+      </a:fillRef>
+      <a:effectRef idx="0">
+        <a:scrgbClr r="0" g="0" b="0"/>
+      </a:effectRef>
+      <a:fontRef idx="minor"/>
+    </dgm:style>
+  </dgm:styleLbl>
+  <dgm:styleLbl name="alignAccFollowNode1">
+    <dgm:scene3d>
+      <a:camera prst="orthographicFront"/>
+      <a:lightRig rig="threePt" dir="t"/>
+    </dgm:scene3d>
+    <dgm:sp3d/>
+    <dgm:txPr/>
+    <dgm:style>
+      <a:lnRef idx="2">
+        <a:scrgbClr r="0" g="0" b="0"/>
+      </a:lnRef>
+      <a:fillRef idx="1">
+        <a:scrgbClr r="0" g="0" b="0"/>
+      </a:fillRef>
+      <a:effectRef idx="0">
+        <a:scrgbClr r="0" g="0" b="0"/>
+      </a:effectRef>
+      <a:fontRef idx="minor"/>
+    </dgm:style>
+  </dgm:styleLbl>
+  <dgm:styleLbl name="bgAccFollowNode1">
+    <dgm:scene3d>
+      <a:camera prst="orthographicFront"/>
+      <a:lightRig rig="threePt" dir="t"/>
+    </dgm:scene3d>
+    <dgm:sp3d/>
+    <dgm:txPr/>
+    <dgm:style>
+      <a:lnRef idx="2">
+        <a:scrgbClr r="0" g="0" b="0"/>
+      </a:lnRef>
+      <a:fillRef idx="1">
+        <a:scrgbClr r="0" g="0" b="0"/>
+      </a:fillRef>
+      <a:effectRef idx="0">
+        <a:scrgbClr r="0" g="0" b="0"/>
+      </a:effectRef>
+      <a:fontRef idx="minor"/>
+    </dgm:style>
+  </dgm:styleLbl>
+  <dgm:styleLbl name="fgAcc0">
+    <dgm:scene3d>
+      <a:camera prst="orthographicFront"/>
+      <a:lightRig rig="threePt" dir="t"/>
+    </dgm:scene3d>
+    <dgm:sp3d/>
+    <dgm:txPr/>
+    <dgm:style>
+      <a:lnRef idx="2">
+        <a:scrgbClr r="0" g="0" b="0"/>
+      </a:lnRef>
+      <a:fillRef idx="1">
+        <a:scrgbClr r="0" g="0" b="0"/>
+      </a:fillRef>
+      <a:effectRef idx="0">
+        <a:scrgbClr r="0" g="0" b="0"/>
+      </a:effectRef>
+      <a:fontRef idx="minor"/>
+    </dgm:style>
+  </dgm:styleLbl>
+  <dgm:styleLbl name="fgAcc2">
+    <dgm:scene3d>
+      <a:camera prst="orthographicFront"/>
+      <a:lightRig rig="threePt" dir="t"/>
+    </dgm:scene3d>
+    <dgm:sp3d/>
+    <dgm:txPr/>
+    <dgm:style>
+      <a:lnRef idx="2">
+        <a:scrgbClr r="0" g="0" b="0"/>
+      </a:lnRef>
+      <a:fillRef idx="1">
+        <a:scrgbClr r="0" g="0" b="0"/>
+      </a:fillRef>
+      <a:effectRef idx="0">
+        <a:scrgbClr r="0" g="0" b="0"/>
+      </a:effectRef>
+      <a:fontRef idx="minor"/>
+    </dgm:style>
+  </dgm:styleLbl>
+  <dgm:styleLbl name="fgAcc3">
+    <dgm:scene3d>
+      <a:camera prst="orthographicFront"/>
+      <a:lightRig rig="threePt" dir="t"/>
+    </dgm:scene3d>
+    <dgm:sp3d/>
+    <dgm:txPr/>
+    <dgm:style>
+      <a:lnRef idx="2">
+        <a:scrgbClr r="0" g="0" b="0"/>
+      </a:lnRef>
+      <a:fillRef idx="1">
+        <a:scrgbClr r="0" g="0" b="0"/>
+      </a:fillRef>
+      <a:effectRef idx="0">
+        <a:scrgbClr r="0" g="0" b="0"/>
+      </a:effectRef>
+      <a:fontRef idx="minor"/>
+    </dgm:style>
+  </dgm:styleLbl>
+  <dgm:styleLbl name="fgAcc4">
+    <dgm:scene3d>
+      <a:camera prst="orthographicFront"/>
+      <a:lightRig rig="threePt" dir="t"/>
+    </dgm:scene3d>
+    <dgm:sp3d/>
+    <dgm:txPr/>
+    <dgm:style>
+      <a:lnRef idx="2">
+        <a:scrgbClr r="0" g="0" b="0"/>
+      </a:lnRef>
+      <a:fillRef idx="1">
+        <a:scrgbClr r="0" g="0" b="0"/>
+      </a:fillRef>
+      <a:effectRef idx="0">
+        <a:scrgbClr r="0" g="0" b="0"/>
+      </a:effectRef>
+      <a:fontRef idx="minor"/>
+    </dgm:style>
+  </dgm:styleLbl>
+  <dgm:styleLbl name="bgShp">
+    <dgm:scene3d>
+      <a:camera prst="orthographicFront"/>
+      <a:lightRig rig="threePt" dir="t"/>
+    </dgm:scene3d>
+    <dgm:sp3d/>
+    <dgm:txPr/>
+    <dgm:style>
+      <a:lnRef idx="0">
+        <a:scrgbClr r="0" g="0" b="0"/>
+      </a:lnRef>
+      <a:fillRef idx="1">
+        <a:scrgbClr r="0" g="0" b="0"/>
+      </a:fillRef>
+      <a:effectRef idx="0">
+        <a:scrgbClr r="0" g="0" b="0"/>
+      </a:effectRef>
+      <a:fontRef idx="minor"/>
+    </dgm:style>
+  </dgm:styleLbl>
+  <dgm:styleLbl name="dkBgShp">
+    <dgm:scene3d>
+      <a:camera prst="orthographicFront"/>
+      <a:lightRig rig="threePt" dir="t"/>
+    </dgm:scene3d>
+    <dgm:sp3d/>
+    <dgm:txPr/>
+    <dgm:style>
+      <a:lnRef idx="0">
+        <a:scrgbClr r="0" g="0" b="0"/>
+      </a:lnRef>
+      <a:fillRef idx="1">
+        <a:scrgbClr r="0" g="0" b="0"/>
+      </a:fillRef>
+      <a:effectRef idx="0">
+        <a:scrgbClr r="0" g="0" b="0"/>
+      </a:effectRef>
+      <a:fontRef idx="minor"/>
+    </dgm:style>
+  </dgm:styleLbl>
+  <dgm:styleLbl name="trBgShp">
+    <dgm:scene3d>
+      <a:camera prst="orthographicFront"/>
+      <a:lightRig rig="threePt" dir="t"/>
+    </dgm:scene3d>
+    <dgm:sp3d/>
+    <dgm:txPr/>
+    <dgm:style>
+      <a:lnRef idx="0">
+        <a:scrgbClr r="0" g="0" b="0"/>
+      </a:lnRef>
+      <a:fillRef idx="1">
+        <a:scrgbClr r="0" g="0" b="0"/>
+      </a:fillRef>
+      <a:effectRef idx="0">
+        <a:scrgbClr r="0" g="0" b="0"/>
+      </a:effectRef>
+      <a:fontRef idx="minor"/>
+    </dgm:style>
+  </dgm:styleLbl>
+  <dgm:styleLbl name="fgShp">
+    <dgm:scene3d>
+      <a:camera prst="orthographicFront"/>
+      <a:lightRig rig="threePt" dir="t"/>
+    </dgm:scene3d>
+    <dgm:sp3d/>
+    <dgm:txPr/>
+    <dgm:style>
+      <a:lnRef idx="2">
+        <a:scrgbClr r="0" g="0" b="0"/>
+      </a:lnRef>
+      <a:fillRef idx="1">
+        <a:scrgbClr r="0" g="0" b="0"/>
+      </a:fillRef>
+      <a:effectRef idx="0">
         <a:scrgbClr r="0" g="0" b="0"/>
       </a:effectRef>
       <a:fontRef idx="minor"/>
@@ -3548,7 +6421,7 @@
                 <a:ea typeface="Verdana" pitchFamily="34" charset="0"/>
                 <a:cs typeface="Verdana" pitchFamily="34" charset="0"/>
               </a:rPr>
-              <a:t>18.04.2026</a:t>
+              <a:t>19.04.2026</a:t>
             </a:fld>
             <a:endParaRPr lang="de-AT" sz="1000" dirty="0">
               <a:latin typeface="Verdana" pitchFamily="34" charset="0"/>
@@ -3738,7 +6611,7 @@
             <a:fld id="{C0A972FC-F5E0-4F80-B169-F0B5EFC71333}" type="datetimeFigureOut">
               <a:rPr lang="de-AT" smtClean="0"/>
               <a:pPr/>
-              <a:t>18.04.2026</a:t>
+              <a:t>19.04.2026</a:t>
             </a:fld>
             <a:endParaRPr lang="de-AT" dirty="0"/>
           </a:p>
@@ -4673,6 +7546,176 @@
     <p:extLst>
       <p:ext uri="{BB962C8B-B14F-4D97-AF65-F5344CB8AC3E}">
         <p14:creationId xmlns:p14="http://schemas.microsoft.com/office/powerpoint/2010/main" val="929153240"/>
+      </p:ext>
+    </p:extLst>
+  </p:cSld>
+  <p:clrMapOvr>
+    <a:masterClrMapping/>
+  </p:clrMapOvr>
+</p:notes>
+</file>
+
+<file path=ppt/notesSlides/notesSlide5.xml><?xml version="1.0" encoding="utf-8"?>
+<p:notes xmlns:a="http://schemas.openxmlformats.org/drawingml/2006/main" xmlns:r="http://schemas.openxmlformats.org/officeDocument/2006/relationships" xmlns:p="http://schemas.openxmlformats.org/presentationml/2006/main">
+  <p:cSld>
+    <p:spTree>
+      <p:nvGrpSpPr>
+        <p:cNvPr id="1" name=""/>
+        <p:cNvGrpSpPr/>
+        <p:nvPr/>
+      </p:nvGrpSpPr>
+      <p:grpSpPr>
+        <a:xfrm>
+          <a:off x="0" y="0"/>
+          <a:ext cx="0" cy="0"/>
+          <a:chOff x="0" y="0"/>
+          <a:chExt cx="0" cy="0"/>
+        </a:xfrm>
+      </p:grpSpPr>
+      <p:sp>
+        <p:nvSpPr>
+          <p:cNvPr id="2" name="Slide Image Placeholder 1"/>
+          <p:cNvSpPr>
+            <a:spLocks noGrp="1" noRot="1" noChangeAspect="1"/>
+          </p:cNvSpPr>
+          <p:nvPr>
+            <p:ph type="sldImg"/>
+          </p:nvPr>
+        </p:nvSpPr>
+        <p:spPr/>
+      </p:sp>
+      <p:sp>
+        <p:nvSpPr>
+          <p:cNvPr id="3" name="Notes Placeholder 2"/>
+          <p:cNvSpPr>
+            <a:spLocks noGrp="1"/>
+          </p:cNvSpPr>
+          <p:nvPr>
+            <p:ph type="body" idx="1"/>
+          </p:nvPr>
+        </p:nvSpPr>
+        <p:spPr/>
+        <p:txBody>
+          <a:bodyPr/>
+          <a:lstStyle/>
+          <a:p>
+            <a:endParaRPr lang="de-AT" dirty="0"/>
+          </a:p>
+        </p:txBody>
+      </p:sp>
+      <p:sp>
+        <p:nvSpPr>
+          <p:cNvPr id="4" name="Slide Number Placeholder 3"/>
+          <p:cNvSpPr>
+            <a:spLocks noGrp="1"/>
+          </p:cNvSpPr>
+          <p:nvPr>
+            <p:ph type="sldNum" sz="quarter" idx="5"/>
+          </p:nvPr>
+        </p:nvSpPr>
+        <p:spPr/>
+        <p:txBody>
+          <a:bodyPr/>
+          <a:lstStyle/>
+          <a:p>
+            <a:fld id="{219CC2FD-B32F-4992-A15B-F95E2E35C81B}" type="slidenum">
+              <a:rPr lang="de-AT" smtClean="0"/>
+              <a:pPr/>
+              <a:t>12</a:t>
+            </a:fld>
+            <a:endParaRPr lang="de-AT" dirty="0"/>
+          </a:p>
+        </p:txBody>
+      </p:sp>
+    </p:spTree>
+    <p:extLst>
+      <p:ext uri="{BB962C8B-B14F-4D97-AF65-F5344CB8AC3E}">
+        <p14:creationId xmlns:p14="http://schemas.microsoft.com/office/powerpoint/2010/main" val="3221962897"/>
+      </p:ext>
+    </p:extLst>
+  </p:cSld>
+  <p:clrMapOvr>
+    <a:masterClrMapping/>
+  </p:clrMapOvr>
+</p:notes>
+</file>
+
+<file path=ppt/notesSlides/notesSlide6.xml><?xml version="1.0" encoding="utf-8"?>
+<p:notes xmlns:a="http://schemas.openxmlformats.org/drawingml/2006/main" xmlns:r="http://schemas.openxmlformats.org/officeDocument/2006/relationships" xmlns:p="http://schemas.openxmlformats.org/presentationml/2006/main">
+  <p:cSld>
+    <p:spTree>
+      <p:nvGrpSpPr>
+        <p:cNvPr id="1" name=""/>
+        <p:cNvGrpSpPr/>
+        <p:nvPr/>
+      </p:nvGrpSpPr>
+      <p:grpSpPr>
+        <a:xfrm>
+          <a:off x="0" y="0"/>
+          <a:ext cx="0" cy="0"/>
+          <a:chOff x="0" y="0"/>
+          <a:chExt cx="0" cy="0"/>
+        </a:xfrm>
+      </p:grpSpPr>
+      <p:sp>
+        <p:nvSpPr>
+          <p:cNvPr id="2" name="Slide Image Placeholder 1"/>
+          <p:cNvSpPr>
+            <a:spLocks noGrp="1" noRot="1" noChangeAspect="1"/>
+          </p:cNvSpPr>
+          <p:nvPr>
+            <p:ph type="sldImg"/>
+          </p:nvPr>
+        </p:nvSpPr>
+        <p:spPr/>
+      </p:sp>
+      <p:sp>
+        <p:nvSpPr>
+          <p:cNvPr id="3" name="Notes Placeholder 2"/>
+          <p:cNvSpPr>
+            <a:spLocks noGrp="1"/>
+          </p:cNvSpPr>
+          <p:nvPr>
+            <p:ph type="body" idx="1"/>
+          </p:nvPr>
+        </p:nvSpPr>
+        <p:spPr/>
+        <p:txBody>
+          <a:bodyPr/>
+          <a:lstStyle/>
+          <a:p>
+            <a:endParaRPr lang="de-AT" dirty="0"/>
+          </a:p>
+        </p:txBody>
+      </p:sp>
+      <p:sp>
+        <p:nvSpPr>
+          <p:cNvPr id="4" name="Slide Number Placeholder 3"/>
+          <p:cNvSpPr>
+            <a:spLocks noGrp="1"/>
+          </p:cNvSpPr>
+          <p:nvPr>
+            <p:ph type="sldNum" sz="quarter" idx="5"/>
+          </p:nvPr>
+        </p:nvSpPr>
+        <p:spPr/>
+        <p:txBody>
+          <a:bodyPr/>
+          <a:lstStyle/>
+          <a:p>
+            <a:fld id="{219CC2FD-B32F-4992-A15B-F95E2E35C81B}" type="slidenum">
+              <a:rPr lang="de-AT" smtClean="0"/>
+              <a:pPr/>
+              <a:t>13</a:t>
+            </a:fld>
+            <a:endParaRPr lang="de-AT" dirty="0"/>
+          </a:p>
+        </p:txBody>
+      </p:sp>
+    </p:spTree>
+    <p:extLst>
+      <p:ext uri="{BB962C8B-B14F-4D97-AF65-F5344CB8AC3E}">
+        <p14:creationId xmlns:p14="http://schemas.microsoft.com/office/powerpoint/2010/main" val="3708938510"/>
       </p:ext>
     </p:extLst>
   </p:cSld>
@@ -5416,7 +8459,7 @@
           <a:p>
             <a:fld id="{EF16FBD4-A1A0-4C0D-8ECA-591A550A295A}" type="datetime1">
               <a:rPr lang="de-AT" smtClean="0"/>
-              <a:t>18.04.2026</a:t>
+              <a:t>19.04.2026</a:t>
             </a:fld>
             <a:endParaRPr lang="de-AT" dirty="0"/>
           </a:p>
@@ -5781,7 +8824,7 @@
           <a:p>
             <a:fld id="{EF16FBD4-A1A0-4C0D-8ECA-591A550A295A}" type="datetime1">
               <a:rPr lang="de-AT" smtClean="0"/>
-              <a:t>18.04.2026</a:t>
+              <a:t>19.04.2026</a:t>
             </a:fld>
             <a:endParaRPr lang="de-AT" dirty="0"/>
           </a:p>
@@ -6282,7 +9325,7 @@
           <a:p>
             <a:fld id="{DC0C0548-BB61-4975-B080-1B6E0D52ECC3}" type="datetime1">
               <a:rPr lang="de-AT" smtClean="0"/>
-              <a:t>18.04.2026</a:t>
+              <a:t>19.04.2026</a:t>
             </a:fld>
             <a:endParaRPr lang="de-AT" dirty="0"/>
           </a:p>
@@ -6644,7 +9687,7 @@
           <a:p>
             <a:fld id="{2208B580-4914-472C-873D-0ABC3D2F1944}" type="datetime1">
               <a:rPr lang="de-AT" smtClean="0"/>
-              <a:t>18.04.2026</a:t>
+              <a:t>19.04.2026</a:t>
             </a:fld>
             <a:endParaRPr lang="de-AT" dirty="0"/>
           </a:p>
@@ -7029,7 +10072,7 @@
           <a:p>
             <a:fld id="{460B22D8-19A8-4750-AD83-286C35A4BCEC}" type="datetime1">
               <a:rPr lang="de-AT" smtClean="0"/>
-              <a:t>18.04.2026</a:t>
+              <a:t>19.04.2026</a:t>
             </a:fld>
             <a:endParaRPr lang="de-AT" dirty="0"/>
           </a:p>
@@ -7692,7 +10735,7 @@
           <a:p>
             <a:fld id="{BCE4B0F6-B814-432F-A5EF-779CD4E3E58E}" type="datetime1">
               <a:rPr lang="de-AT" smtClean="0"/>
-              <a:t>18.04.2026</a:t>
+              <a:t>19.04.2026</a:t>
             </a:fld>
             <a:endParaRPr lang="de-AT" dirty="0"/>
           </a:p>
@@ -10958,7 +14001,7 @@
             <a:fld id="{EF16FBD4-A1A0-4C0D-8ECA-591A550A295A}" type="datetime1">
               <a:rPr lang="de-AT" smtClean="0"/>
               <a:pPr/>
-              <a:t>18.04.2026</a:t>
+              <a:t>19.04.2026</a:t>
             </a:fld>
             <a:endParaRPr lang="de-AT" dirty="0"/>
           </a:p>
@@ -11930,35 +14973,6 @@
       </p:grpSpPr>
       <p:sp>
         <p:nvSpPr>
-          <p:cNvPr id="2" name="Content Placeholder 1">
-            <a:extLst>
-              <a:ext uri="{FF2B5EF4-FFF2-40B4-BE49-F238E27FC236}">
-                <a16:creationId xmlns:a16="http://schemas.microsoft.com/office/drawing/2014/main" id="{6F82311F-B799-E5F3-5922-87F2BC9843E6}"/>
-              </a:ext>
-            </a:extLst>
-          </p:cNvPr>
-          <p:cNvSpPr>
-            <a:spLocks noGrp="1"/>
-          </p:cNvSpPr>
-          <p:nvPr>
-            <p:ph idx="1"/>
-          </p:nvPr>
-        </p:nvSpPr>
-        <p:spPr/>
-        <p:txBody>
-          <a:bodyPr/>
-          <a:lstStyle/>
-          <a:p>
-            <a:r>
-              <a:rPr lang="en-AT" dirty="0"/>
-              <a:t>Moritz</a:t>
-            </a:r>
-            <a:endParaRPr lang="de-AT" dirty="0"/>
-          </a:p>
-        </p:txBody>
-      </p:sp>
-      <p:sp>
-        <p:nvSpPr>
           <p:cNvPr id="4" name="Slide Number Placeholder 3">
             <a:extLst>
               <a:ext uri="{FF2B5EF4-FFF2-40B4-BE49-F238E27FC236}">
@@ -12012,13 +15026,48 @@
           <a:lstStyle/>
           <a:p>
             <a:r>
-              <a:rPr lang="en-AT" dirty="0"/>
-              <a:t>Pipeline, Implementation</a:t>
-            </a:r>
-            <a:endParaRPr lang="de-AT" dirty="0"/>
+              <a:rPr lang="de-AT" dirty="0"/>
+              <a:t>Model</a:t>
+            </a:r>
           </a:p>
         </p:txBody>
       </p:sp>
+      <p:pic>
+        <p:nvPicPr>
+          <p:cNvPr id="6" name="Picture 5">
+            <a:extLst>
+              <a:ext uri="{FF2B5EF4-FFF2-40B4-BE49-F238E27FC236}">
+                <a16:creationId xmlns:a16="http://schemas.microsoft.com/office/drawing/2014/main" id="{735F3477-C139-866C-B79D-08CCFB941A9D}"/>
+              </a:ext>
+            </a:extLst>
+          </p:cNvPr>
+          <p:cNvPicPr>
+            <a:picLocks noChangeAspect="1"/>
+          </p:cNvPicPr>
+          <p:nvPr/>
+        </p:nvPicPr>
+        <p:blipFill>
+          <a:blip r:embed="rId3">
+            <a:extLst>
+              <a:ext uri="{28A0092B-C50C-407E-A947-70E740481C1C}">
+                <a14:useLocalDpi xmlns:a14="http://schemas.microsoft.com/office/drawing/2010/main" val="0"/>
+              </a:ext>
+            </a:extLst>
+          </a:blip>
+          <a:stretch>
+            <a:fillRect/>
+          </a:stretch>
+        </p:blipFill>
+        <p:spPr>
+          <a:xfrm>
+            <a:off x="885825" y="1203728"/>
+            <a:ext cx="7372350" cy="4048125"/>
+          </a:xfrm>
+          <a:prstGeom prst="rect">
+            <a:avLst/>
+          </a:prstGeom>
+        </p:spPr>
+      </p:pic>
     </p:spTree>
     <p:extLst>
       <p:ext uri="{BB962C8B-B14F-4D97-AF65-F5344CB8AC3E}">
@@ -12054,10 +15103,10 @@
       </p:grpSpPr>
       <p:sp>
         <p:nvSpPr>
-          <p:cNvPr id="2" name="Content Placeholder 1">
+          <p:cNvPr id="3" name="Footer Placeholder 2">
             <a:extLst>
               <a:ext uri="{FF2B5EF4-FFF2-40B4-BE49-F238E27FC236}">
-                <a16:creationId xmlns:a16="http://schemas.microsoft.com/office/drawing/2014/main" id="{439199E9-7453-F47B-9446-81F386FB039E}"/>
+                <a16:creationId xmlns:a16="http://schemas.microsoft.com/office/drawing/2014/main" id="{7758357E-35BE-24C8-66D7-0B3C2FA88187}"/>
               </a:ext>
             </a:extLst>
           </p:cNvPr>
@@ -12065,7 +15114,7 @@
             <a:spLocks noGrp="1"/>
           </p:cNvSpPr>
           <p:nvPr>
-            <p:ph idx="1"/>
+            <p:ph type="ftr" sz="quarter" idx="11"/>
           </p:nvPr>
         </p:nvSpPr>
         <p:spPr/>
@@ -12074,8 +15123,8 @@
           <a:lstStyle/>
           <a:p>
             <a:r>
-              <a:rPr lang="en-AT" dirty="0"/>
-              <a:t>Moritz</a:t>
+              <a:rPr lang="de-AT"/>
+              <a:t>Fusszeile</a:t>
             </a:r>
             <a:endParaRPr lang="de-AT" dirty="0"/>
           </a:p>
@@ -12086,7 +15135,7 @@
           <p:cNvPr id="4" name="Slide Number Placeholder 3">
             <a:extLst>
               <a:ext uri="{FF2B5EF4-FFF2-40B4-BE49-F238E27FC236}">
-                <a16:creationId xmlns:a16="http://schemas.microsoft.com/office/drawing/2014/main" id="{106B0CDD-22CD-F2C3-CDA9-CB13E464927D}"/>
+                <a16:creationId xmlns:a16="http://schemas.microsoft.com/office/drawing/2014/main" id="{10E8643C-9F0C-6D6B-69DD-9FD3D6B74C88}"/>
               </a:ext>
             </a:extLst>
           </p:cNvPr>
@@ -12114,6 +15163,288 @@
           </a:p>
         </p:txBody>
       </p:sp>
+      <p:sp>
+        <p:nvSpPr>
+          <p:cNvPr id="5" name="Title 4">
+            <a:extLst>
+              <a:ext uri="{FF2B5EF4-FFF2-40B4-BE49-F238E27FC236}">
+                <a16:creationId xmlns:a16="http://schemas.microsoft.com/office/drawing/2014/main" id="{B20849D2-B9BE-625C-FAD7-EF625DC7684F}"/>
+              </a:ext>
+            </a:extLst>
+          </p:cNvPr>
+          <p:cNvSpPr>
+            <a:spLocks noGrp="1"/>
+          </p:cNvSpPr>
+          <p:nvPr>
+            <p:ph type="title"/>
+          </p:nvPr>
+        </p:nvSpPr>
+        <p:spPr/>
+        <p:txBody>
+          <a:bodyPr/>
+          <a:lstStyle/>
+          <a:p>
+            <a:r>
+              <a:rPr lang="de-AT" dirty="0"/>
+              <a:t>First </a:t>
+            </a:r>
+            <a:r>
+              <a:rPr lang="de-AT" dirty="0" err="1"/>
+              <a:t>results</a:t>
+            </a:r>
+            <a:endParaRPr lang="de-AT" dirty="0"/>
+          </a:p>
+        </p:txBody>
+      </p:sp>
+      <p:pic>
+        <p:nvPicPr>
+          <p:cNvPr id="7" name="Picture 6">
+            <a:extLst>
+              <a:ext uri="{FF2B5EF4-FFF2-40B4-BE49-F238E27FC236}">
+                <a16:creationId xmlns:a16="http://schemas.microsoft.com/office/drawing/2014/main" id="{E956B433-53B6-89DE-CEA4-87E7D43828CA}"/>
+              </a:ext>
+            </a:extLst>
+          </p:cNvPr>
+          <p:cNvPicPr>
+            <a:picLocks noChangeAspect="1"/>
+          </p:cNvPicPr>
+          <p:nvPr/>
+        </p:nvPicPr>
+        <p:blipFill>
+          <a:blip r:embed="rId3">
+            <a:extLst>
+              <a:ext uri="{28A0092B-C50C-407E-A947-70E740481C1C}">
+                <a14:useLocalDpi xmlns:a14="http://schemas.microsoft.com/office/drawing/2010/main" val="0"/>
+              </a:ext>
+            </a:extLst>
+          </a:blip>
+          <a:stretch>
+            <a:fillRect/>
+          </a:stretch>
+        </p:blipFill>
+        <p:spPr>
+          <a:xfrm>
+            <a:off x="929545" y="1268072"/>
+            <a:ext cx="1732044" cy="1732044"/>
+          </a:xfrm>
+          <a:prstGeom prst="rect">
+            <a:avLst/>
+          </a:prstGeom>
+        </p:spPr>
+      </p:pic>
+      <p:pic>
+        <p:nvPicPr>
+          <p:cNvPr id="9" name="Picture 8">
+            <a:extLst>
+              <a:ext uri="{FF2B5EF4-FFF2-40B4-BE49-F238E27FC236}">
+                <a16:creationId xmlns:a16="http://schemas.microsoft.com/office/drawing/2014/main" id="{96DBA26F-193C-8B19-3E21-05AF202D8E34}"/>
+              </a:ext>
+            </a:extLst>
+          </p:cNvPr>
+          <p:cNvPicPr>
+            <a:picLocks noChangeAspect="1"/>
+          </p:cNvPicPr>
+          <p:nvPr/>
+        </p:nvPicPr>
+        <p:blipFill>
+          <a:blip r:embed="rId4">
+            <a:extLst>
+              <a:ext uri="{28A0092B-C50C-407E-A947-70E740481C1C}">
+                <a14:useLocalDpi xmlns:a14="http://schemas.microsoft.com/office/drawing/2010/main" val="0"/>
+              </a:ext>
+            </a:extLst>
+          </a:blip>
+          <a:stretch>
+            <a:fillRect/>
+          </a:stretch>
+        </p:blipFill>
+        <p:spPr>
+          <a:xfrm>
+            <a:off x="3274144" y="1240289"/>
+            <a:ext cx="2160000" cy="1817505"/>
+          </a:xfrm>
+          <a:prstGeom prst="rect">
+            <a:avLst/>
+          </a:prstGeom>
+        </p:spPr>
+      </p:pic>
+      <p:pic>
+        <p:nvPicPr>
+          <p:cNvPr id="11" name="Picture 10">
+            <a:extLst>
+              <a:ext uri="{FF2B5EF4-FFF2-40B4-BE49-F238E27FC236}">
+                <a16:creationId xmlns:a16="http://schemas.microsoft.com/office/drawing/2014/main" id="{AD1E02C1-8049-107B-CD31-0CA00F373645}"/>
+              </a:ext>
+            </a:extLst>
+          </p:cNvPr>
+          <p:cNvPicPr>
+            <a:picLocks noChangeAspect="1"/>
+          </p:cNvPicPr>
+          <p:nvPr/>
+        </p:nvPicPr>
+        <p:blipFill>
+          <a:blip r:embed="rId5">
+            <a:extLst>
+              <a:ext uri="{28A0092B-C50C-407E-A947-70E740481C1C}">
+                <a14:useLocalDpi xmlns:a14="http://schemas.microsoft.com/office/drawing/2010/main" val="0"/>
+              </a:ext>
+            </a:extLst>
+          </a:blip>
+          <a:stretch>
+            <a:fillRect/>
+          </a:stretch>
+        </p:blipFill>
+        <p:spPr>
+          <a:xfrm>
+            <a:off x="5987065" y="1201086"/>
+            <a:ext cx="2160000" cy="1876035"/>
+          </a:xfrm>
+          <a:prstGeom prst="rect">
+            <a:avLst/>
+          </a:prstGeom>
+        </p:spPr>
+      </p:pic>
+      <p:pic>
+        <p:nvPicPr>
+          <p:cNvPr id="13" name="Picture 12">
+            <a:extLst>
+              <a:ext uri="{FF2B5EF4-FFF2-40B4-BE49-F238E27FC236}">
+                <a16:creationId xmlns:a16="http://schemas.microsoft.com/office/drawing/2014/main" id="{F8928197-98CD-545B-03CC-DD6D0EE723AC}"/>
+              </a:ext>
+            </a:extLst>
+          </p:cNvPr>
+          <p:cNvPicPr>
+            <a:picLocks noChangeAspect="1"/>
+          </p:cNvPicPr>
+          <p:nvPr/>
+        </p:nvPicPr>
+        <p:blipFill>
+          <a:blip r:embed="rId6">
+            <a:extLst>
+              <a:ext uri="{28A0092B-C50C-407E-A947-70E740481C1C}">
+                <a14:useLocalDpi xmlns:a14="http://schemas.microsoft.com/office/drawing/2010/main" val="0"/>
+              </a:ext>
+            </a:extLst>
+          </a:blip>
+          <a:stretch>
+            <a:fillRect/>
+          </a:stretch>
+        </p:blipFill>
+        <p:spPr>
+          <a:xfrm>
+            <a:off x="929545" y="3185634"/>
+            <a:ext cx="1731600" cy="1731600"/>
+          </a:xfrm>
+          <a:prstGeom prst="rect">
+            <a:avLst/>
+          </a:prstGeom>
+        </p:spPr>
+      </p:pic>
+      <p:pic>
+        <p:nvPicPr>
+          <p:cNvPr id="15" name="Picture 14">
+            <a:extLst>
+              <a:ext uri="{FF2B5EF4-FFF2-40B4-BE49-F238E27FC236}">
+                <a16:creationId xmlns:a16="http://schemas.microsoft.com/office/drawing/2014/main" id="{B75573F0-531F-EB0F-C4DC-F4388744F05A}"/>
+              </a:ext>
+            </a:extLst>
+          </p:cNvPr>
+          <p:cNvPicPr>
+            <a:picLocks noChangeAspect="1"/>
+          </p:cNvPicPr>
+          <p:nvPr/>
+        </p:nvPicPr>
+        <p:blipFill>
+          <a:blip r:embed="rId7">
+            <a:extLst>
+              <a:ext uri="{28A0092B-C50C-407E-A947-70E740481C1C}">
+                <a14:useLocalDpi xmlns:a14="http://schemas.microsoft.com/office/drawing/2010/main" val="0"/>
+              </a:ext>
+            </a:extLst>
+          </a:blip>
+          <a:stretch>
+            <a:fillRect/>
+          </a:stretch>
+        </p:blipFill>
+        <p:spPr>
+          <a:xfrm>
+            <a:off x="3274145" y="3142682"/>
+            <a:ext cx="2160000" cy="1817505"/>
+          </a:xfrm>
+          <a:prstGeom prst="rect">
+            <a:avLst/>
+          </a:prstGeom>
+        </p:spPr>
+      </p:pic>
+      <p:pic>
+        <p:nvPicPr>
+          <p:cNvPr id="17" name="Picture 16">
+            <a:extLst>
+              <a:ext uri="{FF2B5EF4-FFF2-40B4-BE49-F238E27FC236}">
+                <a16:creationId xmlns:a16="http://schemas.microsoft.com/office/drawing/2014/main" id="{40BD22CF-75C4-12DE-B9C3-C31A34E08FBB}"/>
+              </a:ext>
+            </a:extLst>
+          </p:cNvPr>
+          <p:cNvPicPr>
+            <a:picLocks noChangeAspect="1"/>
+          </p:cNvPicPr>
+          <p:nvPr/>
+        </p:nvPicPr>
+        <p:blipFill>
+          <a:blip r:embed="rId8">
+            <a:extLst>
+              <a:ext uri="{28A0092B-C50C-407E-A947-70E740481C1C}">
+                <a14:useLocalDpi xmlns:a14="http://schemas.microsoft.com/office/drawing/2010/main" val="0"/>
+              </a:ext>
+            </a:extLst>
+          </a:blip>
+          <a:stretch>
+            <a:fillRect/>
+          </a:stretch>
+        </p:blipFill>
+        <p:spPr>
+          <a:xfrm>
+            <a:off x="5977126" y="3122804"/>
+            <a:ext cx="2160000" cy="1876035"/>
+          </a:xfrm>
+          <a:prstGeom prst="rect">
+            <a:avLst/>
+          </a:prstGeom>
+        </p:spPr>
+      </p:pic>
+    </p:spTree>
+    <p:extLst>
+      <p:ext uri="{BB962C8B-B14F-4D97-AF65-F5344CB8AC3E}">
+        <p14:creationId xmlns:p14="http://schemas.microsoft.com/office/powerpoint/2010/main" val="345967724"/>
+      </p:ext>
+    </p:extLst>
+  </p:cSld>
+  <p:clrMapOvr>
+    <a:masterClrMapping/>
+  </p:clrMapOvr>
+  <p:transition>
+    <p:fade/>
+  </p:transition>
+</p:sld>
+</file>
+
+<file path=ppt/slides/slide14.xml><?xml version="1.0" encoding="utf-8"?>
+<p:sld xmlns:a="http://schemas.openxmlformats.org/drawingml/2006/main" xmlns:r="http://schemas.openxmlformats.org/officeDocument/2006/relationships" xmlns:p="http://schemas.openxmlformats.org/presentationml/2006/main">
+  <p:cSld>
+    <p:spTree>
+      <p:nvGrpSpPr>
+        <p:cNvPr id="1" name=""/>
+        <p:cNvGrpSpPr/>
+        <p:nvPr/>
+      </p:nvGrpSpPr>
+      <p:grpSpPr>
+        <a:xfrm>
+          <a:off x="0" y="0"/>
+          <a:ext cx="0" cy="0"/>
+          <a:chOff x="0" y="0"/>
+          <a:chExt cx="0" cy="0"/>
+        </a:xfrm>
+      </p:grpSpPr>
       <p:sp>
         <p:nvSpPr>
           <p:cNvPr id="5" name="Title 4">
@@ -12130,16 +15461,102 @@
             <p:ph type="title"/>
           </p:nvPr>
         </p:nvSpPr>
-        <p:spPr/>
+        <p:spPr>
+          <a:xfrm>
+            <a:off x="462408" y="139700"/>
+            <a:ext cx="6840000" cy="903822"/>
+          </a:xfrm>
+        </p:spPr>
+        <p:txBody>
+          <a:bodyPr anchor="ctr">
+            <a:normAutofit/>
+          </a:bodyPr>
+          <a:lstStyle/>
+          <a:p>
+            <a:r>
+              <a:rPr lang="en-AT" dirty="0"/>
+              <a:t>Problems</a:t>
+            </a:r>
+            <a:endParaRPr lang="de-AT" dirty="0"/>
+          </a:p>
+        </p:txBody>
+      </p:sp>
+      <p:graphicFrame>
+        <p:nvGraphicFramePr>
+          <p:cNvPr id="7" name="Content Placeholder 1">
+            <a:extLst>
+              <a:ext uri="{FF2B5EF4-FFF2-40B4-BE49-F238E27FC236}">
+                <a16:creationId xmlns:a16="http://schemas.microsoft.com/office/drawing/2014/main" id="{E5565217-4E53-ED8F-5CD3-B4F73A161F65}"/>
+              </a:ext>
+            </a:extLst>
+          </p:cNvPr>
+          <p:cNvGraphicFramePr>
+            <a:graphicFrameLocks noGrp="1"/>
+          </p:cNvGraphicFramePr>
+          <p:nvPr>
+            <p:ph sz="quarter" idx="10"/>
+            <p:extLst>
+              <p:ext uri="{D42A27DB-BD31-4B8C-83A1-F6EECF244321}">
+                <p14:modId xmlns:p14="http://schemas.microsoft.com/office/powerpoint/2010/main" val="1503758250"/>
+              </p:ext>
+            </p:extLst>
+          </p:nvPr>
+        </p:nvGraphicFramePr>
+        <p:xfrm>
+          <a:off x="466726" y="1268413"/>
+          <a:ext cx="8210547" cy="4230687"/>
+        </p:xfrm>
+        <a:graphic>
+          <a:graphicData uri="http://schemas.openxmlformats.org/drawingml/2006/diagram">
+            <dgm:relIds xmlns:dgm="http://schemas.openxmlformats.org/drawingml/2006/diagram" xmlns:r="http://schemas.openxmlformats.org/officeDocument/2006/relationships" r:dm="rId2" r:lo="rId3" r:qs="rId4" r:cs="rId5"/>
+          </a:graphicData>
+        </a:graphic>
+      </p:graphicFrame>
+      <p:sp>
+        <p:nvSpPr>
+          <p:cNvPr id="4" name="Slide Number Placeholder 3" hidden="1">
+            <a:extLst>
+              <a:ext uri="{FF2B5EF4-FFF2-40B4-BE49-F238E27FC236}">
+                <a16:creationId xmlns:a16="http://schemas.microsoft.com/office/drawing/2014/main" id="{106B0CDD-22CD-F2C3-CDA9-CB13E464927D}"/>
+              </a:ext>
+            </a:extLst>
+          </p:cNvPr>
+          <p:cNvSpPr>
+            <a:spLocks noGrp="1"/>
+          </p:cNvSpPr>
+          <p:nvPr>
+            <p:ph type="sldNum" sz="quarter" idx="4294967295"/>
+          </p:nvPr>
+        </p:nvSpPr>
+        <p:spPr>
+          <a:xfrm>
+            <a:off x="462407" y="5412059"/>
+            <a:ext cx="892150" cy="258085"/>
+          </a:xfrm>
+        </p:spPr>
         <p:txBody>
           <a:bodyPr/>
           <a:lstStyle/>
           <a:p>
-            <a:r>
-              <a:rPr lang="en-AT" dirty="0"/>
-              <a:t>Problems</a:t>
-            </a:r>
-            <a:endParaRPr lang="de-AT" dirty="0"/>
+            <a:pPr>
+              <a:spcAft>
+                <a:spcPts val="600"/>
+              </a:spcAft>
+            </a:pPr>
+            <a:r>
+              <a:rPr lang="de-AT"/>
+              <a:t>SEITE </a:t>
+            </a:r>
+            <a:fld id="{BE3DC40E-DBBE-4E2D-9EEC-FBF0DA0E9179}" type="slidenum">
+              <a:rPr lang="de-AT" smtClean="0"/>
+              <a:pPr>
+                <a:spcAft>
+                  <a:spcPts val="600"/>
+                </a:spcAft>
+              </a:pPr>
+              <a:t>14</a:t>
+            </a:fld>
+            <a:endParaRPr lang="de-AT"/>
           </a:p>
         </p:txBody>
       </p:sp>
@@ -12159,7 +15576,7 @@
 </p:sld>
 </file>
 
-<file path=ppt/slides/slide14.xml><?xml version="1.0" encoding="utf-8"?>
+<file path=ppt/slides/slide15.xml><?xml version="1.0" encoding="utf-8"?>
 <p:sld xmlns:a="http://schemas.openxmlformats.org/drawingml/2006/main" xmlns:r="http://schemas.openxmlformats.org/officeDocument/2006/relationships" xmlns:p="http://schemas.openxmlformats.org/presentationml/2006/main">
   <p:cSld>
     <p:spTree>
@@ -12228,7 +15645,7 @@
             </a:r>
             <a:fld id="{BE3DC40E-DBBE-4E2D-9EEC-FBF0DA0E9179}" type="slidenum">
               <a:rPr lang="de-AT" smtClean="0"/>
-              <a:t>14</a:t>
+              <a:t>15</a:t>
             </a:fld>
             <a:endParaRPr lang="de-AT" dirty="0"/>
           </a:p>
@@ -14533,57 +17950,6 @@
 </file>
 
 <file path=customXml/item1.xml><?xml version="1.0" encoding="utf-8"?>
-<?mso-contentType ?>
-<FormTemplates xmlns="http://schemas.microsoft.com/sharepoint/v3/contenttype/forms">
-  <Display>DocumentLibraryForm</Display>
-  <Edit>DocumentLibraryForm</Edit>
-  <New>DocumentLibraryForm</New>
-</FormTemplates>
-</file>
-
-<file path=customXml/item2.xml><?xml version="1.0" encoding="utf-8"?>
-<p:properties xmlns:p="http://schemas.microsoft.com/office/2006/metadata/properties" xmlns:xsi="http://www.w3.org/2001/XMLSchema-instance" xmlns:pc="http://schemas.microsoft.com/office/infopath/2007/PartnerControls">
-  <documentManagement>
-    <Kategorie xmlns="dde413db-0745-4f3a-8dca-564dc7ff6f7d">Präsentationen</Kategorie>
-    <Beschreibung xmlns="dde413db-0745-4f3a-8dca-564dc7ff6f7d">Musterpräsentation im Format 16:10 (= WU Standard)</Beschreibung>
-    <TaxCatchAll xmlns="08b0a3ee-3d2a-451c-9a1a-7e5d5b0c9c77">
-      <Value>266</Value>
-      <Value>403</Value>
-    </TaxCatchAll>
-    <DokumentenartTaxHTField0 xmlns="1a8d9a65-8471-4209-a900-f8e11db75e0a">
-      <Terms xmlns="http://schemas.microsoft.com/office/infopath/2007/PartnerControls">
-        <TermInfo xmlns="http://schemas.microsoft.com/office/infopath/2007/PartnerControls">
-          <TermName xmlns="http://schemas.microsoft.com/office/infopath/2007/PartnerControls">Vorlagen</TermName>
-          <TermId xmlns="http://schemas.microsoft.com/office/infopath/2007/PartnerControls">17fc50ed-8ad1-47be-ab12-04243fd74ddb</TermId>
-        </TermInfo>
-      </Terms>
-    </DokumentenartTaxHTField0>
-    <WU_x0020_ThemaTaxHTField0 xmlns="1a8d9a65-8471-4209-a900-f8e11db75e0a">
-      <Terms xmlns="http://schemas.microsoft.com/office/infopath/2007/PartnerControls">
-        <TermInfo xmlns="http://schemas.microsoft.com/office/infopath/2007/PartnerControls">
-          <TermName xmlns="http://schemas.microsoft.com/office/infopath/2007/PartnerControls">Corporate Design</TermName>
-          <TermId xmlns="http://schemas.microsoft.com/office/infopath/2007/PartnerControls">19895bcd-b158-45ae-ab7b-f5ca217dfcec</TermId>
-        </TermInfo>
-      </Terms>
-    </WU_x0020_ThemaTaxHTField0>
-    <Format xmlns="dde413db-0745-4f3a-8dca-564dc7ff6f7d">Microsoft Office 2013/2016</Format>
-    <SharedWithUsers xmlns="08b0a3ee-3d2a-451c-9a1a-7e5d5b0c9c77">
-      <UserInfo>
-        <DisplayName>Hernandez Perez, Laura</DisplayName>
-        <AccountId>6100</AccountId>
-        <AccountType/>
-      </UserInfo>
-      <UserInfo>
-        <DisplayName>Hermann, Anett</DisplayName>
-        <AccountId>2869</AccountId>
-        <AccountType/>
-      </UserInfo>
-    </SharedWithUsers>
-  </documentManagement>
-</p:properties>
-</file>
-
-<file path=customXml/item3.xml><?xml version="1.0" encoding="utf-8"?>
 <ct:contentTypeSchema xmlns:ct="http://schemas.microsoft.com/office/2006/metadata/contentType" xmlns:ma="http://schemas.microsoft.com/office/2006/metadata/properties/metaAttributes" ct:_="" ma:_="" ma:contentTypeName="Dokument" ma:contentTypeID="0x010100BCF651A35DF3154DB01328AF51148DAE" ma:contentTypeVersion="2" ma:contentTypeDescription="Ein neues Dokument erstellen." ma:contentTypeScope="" ma:versionID="b5ccb5bb211b6ddcc624790d84f2bb9f">
   <xsd:schema xmlns:xsd="http://www.w3.org/2001/XMLSchema" xmlns:xs="http://www.w3.org/2001/XMLSchema" xmlns:p="http://schemas.microsoft.com/office/2006/metadata/properties" xmlns:ns2="1a8d9a65-8471-4209-a900-f8e11db75e0a" xmlns:ns3="08b0a3ee-3d2a-451c-9a1a-7e5d5b0c9c77" xmlns:ns4="dde413db-0745-4f3a-8dca-564dc7ff6f7d" targetNamespace="http://schemas.microsoft.com/office/2006/metadata/properties" ma:root="true" ma:fieldsID="046596c9011a87760a505164f9d920d3" ns2:_="" ns3:_="" ns4:_="">
     <xsd:import namespace="1a8d9a65-8471-4209-a900-f8e11db75e0a"/>
@@ -14814,10 +18180,73 @@
 </ct:contentTypeSchema>
 </file>
 
+<file path=customXml/item2.xml><?xml version="1.0" encoding="utf-8"?>
+<p:properties xmlns:p="http://schemas.microsoft.com/office/2006/metadata/properties" xmlns:xsi="http://www.w3.org/2001/XMLSchema-instance" xmlns:pc="http://schemas.microsoft.com/office/infopath/2007/PartnerControls">
+  <documentManagement>
+    <Kategorie xmlns="dde413db-0745-4f3a-8dca-564dc7ff6f7d">Präsentationen</Kategorie>
+    <Beschreibung xmlns="dde413db-0745-4f3a-8dca-564dc7ff6f7d">Musterpräsentation im Format 16:10 (= WU Standard)</Beschreibung>
+    <TaxCatchAll xmlns="08b0a3ee-3d2a-451c-9a1a-7e5d5b0c9c77">
+      <Value>266</Value>
+      <Value>403</Value>
+    </TaxCatchAll>
+    <DokumentenartTaxHTField0 xmlns="1a8d9a65-8471-4209-a900-f8e11db75e0a">
+      <Terms xmlns="http://schemas.microsoft.com/office/infopath/2007/PartnerControls">
+        <TermInfo xmlns="http://schemas.microsoft.com/office/infopath/2007/PartnerControls">
+          <TermName xmlns="http://schemas.microsoft.com/office/infopath/2007/PartnerControls">Vorlagen</TermName>
+          <TermId xmlns="http://schemas.microsoft.com/office/infopath/2007/PartnerControls">17fc50ed-8ad1-47be-ab12-04243fd74ddb</TermId>
+        </TermInfo>
+      </Terms>
+    </DokumentenartTaxHTField0>
+    <WU_x0020_ThemaTaxHTField0 xmlns="1a8d9a65-8471-4209-a900-f8e11db75e0a">
+      <Terms xmlns="http://schemas.microsoft.com/office/infopath/2007/PartnerControls">
+        <TermInfo xmlns="http://schemas.microsoft.com/office/infopath/2007/PartnerControls">
+          <TermName xmlns="http://schemas.microsoft.com/office/infopath/2007/PartnerControls">Corporate Design</TermName>
+          <TermId xmlns="http://schemas.microsoft.com/office/infopath/2007/PartnerControls">19895bcd-b158-45ae-ab7b-f5ca217dfcec</TermId>
+        </TermInfo>
+      </Terms>
+    </WU_x0020_ThemaTaxHTField0>
+    <Format xmlns="dde413db-0745-4f3a-8dca-564dc7ff6f7d">Microsoft Office 2013/2016</Format>
+    <SharedWithUsers xmlns="08b0a3ee-3d2a-451c-9a1a-7e5d5b0c9c77">
+      <UserInfo>
+        <DisplayName>Hernandez Perez, Laura</DisplayName>
+        <AccountId>6100</AccountId>
+        <AccountType/>
+      </UserInfo>
+      <UserInfo>
+        <DisplayName>Hermann, Anett</DisplayName>
+        <AccountId>2869</AccountId>
+        <AccountType/>
+      </UserInfo>
+    </SharedWithUsers>
+  </documentManagement>
+</p:properties>
+</file>
+
+<file path=customXml/item3.xml><?xml version="1.0" encoding="utf-8"?>
+<?mso-contentType ?>
+<FormTemplates xmlns="http://schemas.microsoft.com/sharepoint/v3/contenttype/forms">
+  <Display>DocumentLibraryForm</Display>
+  <Edit>DocumentLibraryForm</Edit>
+  <New>DocumentLibraryForm</New>
+</FormTemplates>
+</file>
+
 <file path=customXml/itemProps1.xml><?xml version="1.0" encoding="utf-8"?>
-<ds:datastoreItem xmlns:ds="http://schemas.openxmlformats.org/officeDocument/2006/customXml" ds:itemID="{9346B3ED-06B1-4DE8-9648-0F78B5B453B2}">
+<ds:datastoreItem xmlns:ds="http://schemas.openxmlformats.org/officeDocument/2006/customXml" ds:itemID="{069B4889-3CCA-46C6-8FD4-B0AB941A4B59}">
   <ds:schemaRefs>
-    <ds:schemaRef ds:uri="http://schemas.microsoft.com/sharepoint/v3/contenttype/forms"/>
+    <ds:schemaRef ds:uri="http://schemas.microsoft.com/office/2006/metadata/contentType"/>
+    <ds:schemaRef ds:uri="http://schemas.microsoft.com/office/2006/metadata/properties/metaAttributes"/>
+    <ds:schemaRef ds:uri="http://www.w3.org/2001/XMLSchema"/>
+    <ds:schemaRef ds:uri="http://schemas.microsoft.com/office/2006/metadata/properties"/>
+    <ds:schemaRef ds:uri="1a8d9a65-8471-4209-a900-f8e11db75e0a"/>
+    <ds:schemaRef ds:uri="08b0a3ee-3d2a-451c-9a1a-7e5d5b0c9c77"/>
+    <ds:schemaRef ds:uri="dde413db-0745-4f3a-8dca-564dc7ff6f7d"/>
+    <ds:schemaRef ds:uri="http://schemas.microsoft.com/office/2006/documentManagement/types"/>
+    <ds:schemaRef ds:uri="http://schemas.microsoft.com/office/infopath/2007/PartnerControls"/>
+    <ds:schemaRef ds:uri="http://schemas.openxmlformats.org/package/2006/metadata/core-properties"/>
+    <ds:schemaRef ds:uri="http://purl.org/dc/elements/1.1/"/>
+    <ds:schemaRef ds:uri="http://purl.org/dc/terms/"/>
+    <ds:schemaRef ds:uri="http://schemas.microsoft.com/internal/obd"/>
   </ds:schemaRefs>
 </ds:datastoreItem>
 </file>
@@ -14835,21 +18264,9 @@
 </file>
 
 <file path=customXml/itemProps3.xml><?xml version="1.0" encoding="utf-8"?>
-<ds:datastoreItem xmlns:ds="http://schemas.openxmlformats.org/officeDocument/2006/customXml" ds:itemID="{069B4889-3CCA-46C6-8FD4-B0AB941A4B59}">
+<ds:datastoreItem xmlns:ds="http://schemas.openxmlformats.org/officeDocument/2006/customXml" ds:itemID="{9346B3ED-06B1-4DE8-9648-0F78B5B453B2}">
   <ds:schemaRefs>
-    <ds:schemaRef ds:uri="http://schemas.microsoft.com/office/2006/metadata/contentType"/>
-    <ds:schemaRef ds:uri="http://schemas.microsoft.com/office/2006/metadata/properties/metaAttributes"/>
-    <ds:schemaRef ds:uri="http://www.w3.org/2001/XMLSchema"/>
-    <ds:schemaRef ds:uri="http://schemas.microsoft.com/office/2006/metadata/properties"/>
-    <ds:schemaRef ds:uri="1a8d9a65-8471-4209-a900-f8e11db75e0a"/>
-    <ds:schemaRef ds:uri="08b0a3ee-3d2a-451c-9a1a-7e5d5b0c9c77"/>
-    <ds:schemaRef ds:uri="dde413db-0745-4f3a-8dca-564dc7ff6f7d"/>
-    <ds:schemaRef ds:uri="http://schemas.microsoft.com/office/2006/documentManagement/types"/>
-    <ds:schemaRef ds:uri="http://schemas.microsoft.com/office/infopath/2007/PartnerControls"/>
-    <ds:schemaRef ds:uri="http://schemas.openxmlformats.org/package/2006/metadata/core-properties"/>
-    <ds:schemaRef ds:uri="http://purl.org/dc/elements/1.1/"/>
-    <ds:schemaRef ds:uri="http://purl.org/dc/terms/"/>
-    <ds:schemaRef ds:uri="http://schemas.microsoft.com/internal/obd"/>
+    <ds:schemaRef ds:uri="http://schemas.microsoft.com/sharepoint/v3/contenttype/forms"/>
   </ds:schemaRefs>
 </ds:datastoreItem>
 </file>
--- a/deliverables/3b. intermediate slides/Intermediate Slides.pptx
+++ b/deliverables/3b. intermediate slides/Intermediate Slides.pptx
@@ -15034,10 +15034,10 @@
       </p:sp>
       <p:pic>
         <p:nvPicPr>
-          <p:cNvPr id="6" name="Picture 5">
+          <p:cNvPr id="3" name="Picture 2">
             <a:extLst>
               <a:ext uri="{FF2B5EF4-FFF2-40B4-BE49-F238E27FC236}">
-                <a16:creationId xmlns:a16="http://schemas.microsoft.com/office/drawing/2014/main" id="{735F3477-C139-866C-B79D-08CCFB941A9D}"/>
+                <a16:creationId xmlns:a16="http://schemas.microsoft.com/office/drawing/2014/main" id="{40F4E8DF-E83A-7266-6C8D-4259224876D6}"/>
               </a:ext>
             </a:extLst>
           </p:cNvPr>
@@ -15060,8 +15060,8 @@
         </p:blipFill>
         <p:spPr>
           <a:xfrm>
-            <a:off x="885825" y="1203728"/>
-            <a:ext cx="7372350" cy="4048125"/>
+            <a:off x="952500" y="1270403"/>
+            <a:ext cx="7239000" cy="3914775"/>
           </a:xfrm>
           <a:prstGeom prst="rect">
             <a:avLst/>
@@ -17950,6 +17950,57 @@
 </file>
 
 <file path=customXml/item1.xml><?xml version="1.0" encoding="utf-8"?>
+<?mso-contentType ?>
+<FormTemplates xmlns="http://schemas.microsoft.com/sharepoint/v3/contenttype/forms">
+  <Display>DocumentLibraryForm</Display>
+  <Edit>DocumentLibraryForm</Edit>
+  <New>DocumentLibraryForm</New>
+</FormTemplates>
+</file>
+
+<file path=customXml/item2.xml><?xml version="1.0" encoding="utf-8"?>
+<p:properties xmlns:p="http://schemas.microsoft.com/office/2006/metadata/properties" xmlns:xsi="http://www.w3.org/2001/XMLSchema-instance" xmlns:pc="http://schemas.microsoft.com/office/infopath/2007/PartnerControls">
+  <documentManagement>
+    <Kategorie xmlns="dde413db-0745-4f3a-8dca-564dc7ff6f7d">Präsentationen</Kategorie>
+    <Beschreibung xmlns="dde413db-0745-4f3a-8dca-564dc7ff6f7d">Musterpräsentation im Format 16:10 (= WU Standard)</Beschreibung>
+    <TaxCatchAll xmlns="08b0a3ee-3d2a-451c-9a1a-7e5d5b0c9c77">
+      <Value>266</Value>
+      <Value>403</Value>
+    </TaxCatchAll>
+    <DokumentenartTaxHTField0 xmlns="1a8d9a65-8471-4209-a900-f8e11db75e0a">
+      <Terms xmlns="http://schemas.microsoft.com/office/infopath/2007/PartnerControls">
+        <TermInfo xmlns="http://schemas.microsoft.com/office/infopath/2007/PartnerControls">
+          <TermName xmlns="http://schemas.microsoft.com/office/infopath/2007/PartnerControls">Vorlagen</TermName>
+          <TermId xmlns="http://schemas.microsoft.com/office/infopath/2007/PartnerControls">17fc50ed-8ad1-47be-ab12-04243fd74ddb</TermId>
+        </TermInfo>
+      </Terms>
+    </DokumentenartTaxHTField0>
+    <WU_x0020_ThemaTaxHTField0 xmlns="1a8d9a65-8471-4209-a900-f8e11db75e0a">
+      <Terms xmlns="http://schemas.microsoft.com/office/infopath/2007/PartnerControls">
+        <TermInfo xmlns="http://schemas.microsoft.com/office/infopath/2007/PartnerControls">
+          <TermName xmlns="http://schemas.microsoft.com/office/infopath/2007/PartnerControls">Corporate Design</TermName>
+          <TermId xmlns="http://schemas.microsoft.com/office/infopath/2007/PartnerControls">19895bcd-b158-45ae-ab7b-f5ca217dfcec</TermId>
+        </TermInfo>
+      </Terms>
+    </WU_x0020_ThemaTaxHTField0>
+    <Format xmlns="dde413db-0745-4f3a-8dca-564dc7ff6f7d">Microsoft Office 2013/2016</Format>
+    <SharedWithUsers xmlns="08b0a3ee-3d2a-451c-9a1a-7e5d5b0c9c77">
+      <UserInfo>
+        <DisplayName>Hernandez Perez, Laura</DisplayName>
+        <AccountId>6100</AccountId>
+        <AccountType/>
+      </UserInfo>
+      <UserInfo>
+        <DisplayName>Hermann, Anett</DisplayName>
+        <AccountId>2869</AccountId>
+        <AccountType/>
+      </UserInfo>
+    </SharedWithUsers>
+  </documentManagement>
+</p:properties>
+</file>
+
+<file path=customXml/item3.xml><?xml version="1.0" encoding="utf-8"?>
 <ct:contentTypeSchema xmlns:ct="http://schemas.microsoft.com/office/2006/metadata/contentType" xmlns:ma="http://schemas.microsoft.com/office/2006/metadata/properties/metaAttributes" ct:_="" ma:_="" ma:contentTypeName="Dokument" ma:contentTypeID="0x010100BCF651A35DF3154DB01328AF51148DAE" ma:contentTypeVersion="2" ma:contentTypeDescription="Ein neues Dokument erstellen." ma:contentTypeScope="" ma:versionID="b5ccb5bb211b6ddcc624790d84f2bb9f">
   <xsd:schema xmlns:xsd="http://www.w3.org/2001/XMLSchema" xmlns:xs="http://www.w3.org/2001/XMLSchema" xmlns:p="http://schemas.microsoft.com/office/2006/metadata/properties" xmlns:ns2="1a8d9a65-8471-4209-a900-f8e11db75e0a" xmlns:ns3="08b0a3ee-3d2a-451c-9a1a-7e5d5b0c9c77" xmlns:ns4="dde413db-0745-4f3a-8dca-564dc7ff6f7d" targetNamespace="http://schemas.microsoft.com/office/2006/metadata/properties" ma:root="true" ma:fieldsID="046596c9011a87760a505164f9d920d3" ns2:_="" ns3:_="" ns4:_="">
     <xsd:import namespace="1a8d9a65-8471-4209-a900-f8e11db75e0a"/>
@@ -18180,58 +18231,27 @@
 </ct:contentTypeSchema>
 </file>
 
-<file path=customXml/item2.xml><?xml version="1.0" encoding="utf-8"?>
-<p:properties xmlns:p="http://schemas.microsoft.com/office/2006/metadata/properties" xmlns:xsi="http://www.w3.org/2001/XMLSchema-instance" xmlns:pc="http://schemas.microsoft.com/office/infopath/2007/PartnerControls">
-  <documentManagement>
-    <Kategorie xmlns="dde413db-0745-4f3a-8dca-564dc7ff6f7d">Präsentationen</Kategorie>
-    <Beschreibung xmlns="dde413db-0745-4f3a-8dca-564dc7ff6f7d">Musterpräsentation im Format 16:10 (= WU Standard)</Beschreibung>
-    <TaxCatchAll xmlns="08b0a3ee-3d2a-451c-9a1a-7e5d5b0c9c77">
-      <Value>266</Value>
-      <Value>403</Value>
-    </TaxCatchAll>
-    <DokumentenartTaxHTField0 xmlns="1a8d9a65-8471-4209-a900-f8e11db75e0a">
-      <Terms xmlns="http://schemas.microsoft.com/office/infopath/2007/PartnerControls">
-        <TermInfo xmlns="http://schemas.microsoft.com/office/infopath/2007/PartnerControls">
-          <TermName xmlns="http://schemas.microsoft.com/office/infopath/2007/PartnerControls">Vorlagen</TermName>
-          <TermId xmlns="http://schemas.microsoft.com/office/infopath/2007/PartnerControls">17fc50ed-8ad1-47be-ab12-04243fd74ddb</TermId>
-        </TermInfo>
-      </Terms>
-    </DokumentenartTaxHTField0>
-    <WU_x0020_ThemaTaxHTField0 xmlns="1a8d9a65-8471-4209-a900-f8e11db75e0a">
-      <Terms xmlns="http://schemas.microsoft.com/office/infopath/2007/PartnerControls">
-        <TermInfo xmlns="http://schemas.microsoft.com/office/infopath/2007/PartnerControls">
-          <TermName xmlns="http://schemas.microsoft.com/office/infopath/2007/PartnerControls">Corporate Design</TermName>
-          <TermId xmlns="http://schemas.microsoft.com/office/infopath/2007/PartnerControls">19895bcd-b158-45ae-ab7b-f5ca217dfcec</TermId>
-        </TermInfo>
-      </Terms>
-    </WU_x0020_ThemaTaxHTField0>
-    <Format xmlns="dde413db-0745-4f3a-8dca-564dc7ff6f7d">Microsoft Office 2013/2016</Format>
-    <SharedWithUsers xmlns="08b0a3ee-3d2a-451c-9a1a-7e5d5b0c9c77">
-      <UserInfo>
-        <DisplayName>Hernandez Perez, Laura</DisplayName>
-        <AccountId>6100</AccountId>
-        <AccountType/>
-      </UserInfo>
-      <UserInfo>
-        <DisplayName>Hermann, Anett</DisplayName>
-        <AccountId>2869</AccountId>
-        <AccountType/>
-      </UserInfo>
-    </SharedWithUsers>
-  </documentManagement>
-</p:properties>
+<file path=customXml/itemProps1.xml><?xml version="1.0" encoding="utf-8"?>
+<ds:datastoreItem xmlns:ds="http://schemas.openxmlformats.org/officeDocument/2006/customXml" ds:itemID="{9346B3ED-06B1-4DE8-9648-0F78B5B453B2}">
+  <ds:schemaRefs>
+    <ds:schemaRef ds:uri="http://schemas.microsoft.com/sharepoint/v3/contenttype/forms"/>
+  </ds:schemaRefs>
+</ds:datastoreItem>
 </file>
 
-<file path=customXml/item3.xml><?xml version="1.0" encoding="utf-8"?>
-<?mso-contentType ?>
-<FormTemplates xmlns="http://schemas.microsoft.com/sharepoint/v3/contenttype/forms">
-  <Display>DocumentLibraryForm</Display>
-  <Edit>DocumentLibraryForm</Edit>
-  <New>DocumentLibraryForm</New>
-</FormTemplates>
+<file path=customXml/itemProps2.xml><?xml version="1.0" encoding="utf-8"?>
+<ds:datastoreItem xmlns:ds="http://schemas.openxmlformats.org/officeDocument/2006/customXml" ds:itemID="{BF58DFAF-C9AD-4CE5-A221-45D64FB05328}">
+  <ds:schemaRefs>
+    <ds:schemaRef ds:uri="http://schemas.microsoft.com/office/2006/metadata/properties"/>
+    <ds:schemaRef ds:uri="http://schemas.microsoft.com/office/infopath/2007/PartnerControls"/>
+    <ds:schemaRef ds:uri="dde413db-0745-4f3a-8dca-564dc7ff6f7d"/>
+    <ds:schemaRef ds:uri="08b0a3ee-3d2a-451c-9a1a-7e5d5b0c9c77"/>
+    <ds:schemaRef ds:uri="1a8d9a65-8471-4209-a900-f8e11db75e0a"/>
+  </ds:schemaRefs>
+</ds:datastoreItem>
 </file>
 
-<file path=customXml/itemProps1.xml><?xml version="1.0" encoding="utf-8"?>
+<file path=customXml/itemProps3.xml><?xml version="1.0" encoding="utf-8"?>
 <ds:datastoreItem xmlns:ds="http://schemas.openxmlformats.org/officeDocument/2006/customXml" ds:itemID="{069B4889-3CCA-46C6-8FD4-B0AB941A4B59}">
   <ds:schemaRefs>
     <ds:schemaRef ds:uri="http://schemas.microsoft.com/office/2006/metadata/contentType"/>
@@ -18249,24 +18269,4 @@
     <ds:schemaRef ds:uri="http://schemas.microsoft.com/internal/obd"/>
   </ds:schemaRefs>
 </ds:datastoreItem>
-</file>
-
-<file path=customXml/itemProps2.xml><?xml version="1.0" encoding="utf-8"?>
-<ds:datastoreItem xmlns:ds="http://schemas.openxmlformats.org/officeDocument/2006/customXml" ds:itemID="{BF58DFAF-C9AD-4CE5-A221-45D64FB05328}">
-  <ds:schemaRefs>
-    <ds:schemaRef ds:uri="http://schemas.microsoft.com/office/2006/metadata/properties"/>
-    <ds:schemaRef ds:uri="http://schemas.microsoft.com/office/infopath/2007/PartnerControls"/>
-    <ds:schemaRef ds:uri="dde413db-0745-4f3a-8dca-564dc7ff6f7d"/>
-    <ds:schemaRef ds:uri="08b0a3ee-3d2a-451c-9a1a-7e5d5b0c9c77"/>
-    <ds:schemaRef ds:uri="1a8d9a65-8471-4209-a900-f8e11db75e0a"/>
-  </ds:schemaRefs>
-</ds:datastoreItem>
-</file>
-
-<file path=customXml/itemProps3.xml><?xml version="1.0" encoding="utf-8"?>
-<ds:datastoreItem xmlns:ds="http://schemas.openxmlformats.org/officeDocument/2006/customXml" ds:itemID="{9346B3ED-06B1-4DE8-9648-0F78B5B453B2}">
-  <ds:schemaRefs>
-    <ds:schemaRef ds:uri="http://schemas.microsoft.com/sharepoint/v3/contenttype/forms"/>
-  </ds:schemaRefs>
-</ds:datastoreItem>
 </file>
--- a/deliverables/3b. intermediate slides/Intermediate Slides.pptx
+++ b/deliverables/3b. intermediate slides/Intermediate Slides.pptx
@@ -5,10 +5,10 @@
     <p:sldMasterId id="2147483660" r:id="rId4"/>
   </p:sldMasterIdLst>
   <p:notesMasterIdLst>
-    <p:notesMasterId r:id="rId24"/>
+    <p:notesMasterId r:id="rId25"/>
   </p:notesMasterIdLst>
   <p:handoutMasterIdLst>
-    <p:handoutMasterId r:id="rId25"/>
+    <p:handoutMasterId r:id="rId26"/>
   </p:handoutMasterIdLst>
   <p:sldIdLst>
     <p:sldId id="278" r:id="rId5"/>
@@ -29,12 +29,13 @@
     <p:sldId id="286" r:id="rId20"/>
     <p:sldId id="293" r:id="rId21"/>
     <p:sldId id="287" r:id="rId22"/>
-    <p:sldId id="288" r:id="rId23"/>
+    <p:sldId id="299" r:id="rId23"/>
+    <p:sldId id="288" r:id="rId24"/>
   </p:sldIdLst>
   <p:sldSz cx="9144000" cy="5715000" type="screen16x10"/>
   <p:notesSz cx="6858000" cy="9144000"/>
   <p:custDataLst>
-    <p:tags r:id="rId26"/>
+    <p:tags r:id="rId27"/>
   </p:custDataLst>
   <p:defaultTextStyle>
     <a:defPPr>
@@ -6513,7 +6514,7 @@
                 <a:ea typeface="Verdana" pitchFamily="34" charset="0"/>
                 <a:cs typeface="Verdana" pitchFamily="34" charset="0"/>
               </a:rPr>
-              <a:t>19.04.2026</a:t>
+              <a:t>20.04.2026</a:t>
             </a:fld>
             <a:endParaRPr lang="de-AT" sz="1000" dirty="0">
               <a:latin typeface="Verdana" pitchFamily="34" charset="0"/>
@@ -6591,7 +6592,7 @@
                 <a:ea typeface="Verdana" pitchFamily="34" charset="0"/>
                 <a:cs typeface="Verdana" pitchFamily="34" charset="0"/>
               </a:rPr>
-              <a:t>‹Nr.›</a:t>
+              <a:t>‹#›</a:t>
             </a:fld>
             <a:endParaRPr lang="de-AT" sz="1000" dirty="0">
               <a:latin typeface="Verdana" pitchFamily="34" charset="0"/>
@@ -6703,7 +6704,7 @@
             <a:fld id="{C0A972FC-F5E0-4F80-B169-F0B5EFC71333}" type="datetimeFigureOut">
               <a:rPr lang="de-AT" smtClean="0"/>
               <a:pPr/>
-              <a:t>19.04.2026</a:t>
+              <a:t>20.04.2026</a:t>
             </a:fld>
             <a:endParaRPr lang="de-AT" dirty="0"/>
           </a:p>
@@ -6870,7 +6871,7 @@
             <a:fld id="{219CC2FD-B32F-4992-A15B-F95E2E35C81B}" type="slidenum">
               <a:rPr lang="de-AT" smtClean="0"/>
               <a:pPr/>
-              <a:t>‹Nr.›</a:t>
+              <a:t>‹#›</a:t>
             </a:fld>
             <a:endParaRPr lang="de-AT" dirty="0"/>
           </a:p>
@@ -8730,7 +8731,7 @@
           <a:p>
             <a:fld id="{EF16FBD4-A1A0-4C0D-8ECA-591A550A295A}" type="datetime1">
               <a:rPr lang="de-AT" smtClean="0"/>
-              <a:t>19.04.2026</a:t>
+              <a:t>20.04.2026</a:t>
             </a:fld>
             <a:endParaRPr lang="de-AT" dirty="0"/>
           </a:p>
@@ -8780,7 +8781,7 @@
             <a:fld id="{BE3DC40E-DBBE-4E2D-9EEC-FBF0DA0E9179}" type="slidenum">
               <a:rPr lang="de-AT" smtClean="0"/>
               <a:pPr/>
-              <a:t>‹Nr.›</a:t>
+              <a:t>‹#›</a:t>
             </a:fld>
             <a:endParaRPr lang="de-AT" dirty="0"/>
           </a:p>
@@ -9095,7 +9096,7 @@
           <a:p>
             <a:fld id="{EF16FBD4-A1A0-4C0D-8ECA-591A550A295A}" type="datetime1">
               <a:rPr lang="de-AT" smtClean="0"/>
-              <a:t>19.04.2026</a:t>
+              <a:t>20.04.2026</a:t>
             </a:fld>
             <a:endParaRPr lang="de-AT" dirty="0"/>
           </a:p>
@@ -9145,7 +9146,7 @@
             <a:fld id="{BE3DC40E-DBBE-4E2D-9EEC-FBF0DA0E9179}" type="slidenum">
               <a:rPr lang="de-AT" smtClean="0"/>
               <a:pPr/>
-              <a:t>‹Nr.›</a:t>
+              <a:t>‹#›</a:t>
             </a:fld>
             <a:endParaRPr lang="de-AT" dirty="0"/>
           </a:p>
@@ -9596,7 +9597,7 @@
           <a:p>
             <a:fld id="{DC0C0548-BB61-4975-B080-1B6E0D52ECC3}" type="datetime1">
               <a:rPr lang="de-AT" smtClean="0"/>
-              <a:t>19.04.2026</a:t>
+              <a:t>20.04.2026</a:t>
             </a:fld>
             <a:endParaRPr lang="de-AT" dirty="0"/>
           </a:p>
@@ -9645,7 +9646,7 @@
             </a:r>
             <a:fld id="{BE3DC40E-DBBE-4E2D-9EEC-FBF0DA0E9179}" type="slidenum">
               <a:rPr lang="de-AT" smtClean="0"/>
-              <a:t>‹Nr.›</a:t>
+              <a:t>‹#›</a:t>
             </a:fld>
             <a:endParaRPr lang="de-AT" dirty="0"/>
           </a:p>
@@ -9958,7 +9959,7 @@
           <a:p>
             <a:fld id="{2208B580-4914-472C-873D-0ABC3D2F1944}" type="datetime1">
               <a:rPr lang="de-AT" smtClean="0"/>
-              <a:t>19.04.2026</a:t>
+              <a:t>20.04.2026</a:t>
             </a:fld>
             <a:endParaRPr lang="de-AT" dirty="0"/>
           </a:p>
@@ -10007,7 +10008,7 @@
             </a:r>
             <a:fld id="{BE3DC40E-DBBE-4E2D-9EEC-FBF0DA0E9179}" type="slidenum">
               <a:rPr lang="de-AT" smtClean="0"/>
-              <a:t>‹Nr.›</a:t>
+              <a:t>‹#›</a:t>
             </a:fld>
             <a:endParaRPr lang="de-AT" dirty="0"/>
           </a:p>
@@ -10343,7 +10344,7 @@
           <a:p>
             <a:fld id="{460B22D8-19A8-4750-AD83-286C35A4BCEC}" type="datetime1">
               <a:rPr lang="de-AT" smtClean="0"/>
-              <a:t>19.04.2026</a:t>
+              <a:t>20.04.2026</a:t>
             </a:fld>
             <a:endParaRPr lang="de-AT" dirty="0"/>
           </a:p>
@@ -10392,7 +10393,7 @@
             </a:r>
             <a:fld id="{BE3DC40E-DBBE-4E2D-9EEC-FBF0DA0E9179}" type="slidenum">
               <a:rPr lang="de-AT" smtClean="0"/>
-              <a:t>‹Nr.›</a:t>
+              <a:t>‹#›</a:t>
             </a:fld>
             <a:endParaRPr lang="de-AT" dirty="0"/>
           </a:p>
@@ -11006,7 +11007,7 @@
           <a:p>
             <a:fld id="{BCE4B0F6-B814-432F-A5EF-779CD4E3E58E}" type="datetime1">
               <a:rPr lang="de-AT" smtClean="0"/>
-              <a:t>19.04.2026</a:t>
+              <a:t>20.04.2026</a:t>
             </a:fld>
             <a:endParaRPr lang="de-AT" dirty="0"/>
           </a:p>
@@ -11055,7 +11056,7 @@
             </a:r>
             <a:fld id="{BE3DC40E-DBBE-4E2D-9EEC-FBF0DA0E9179}" type="slidenum">
               <a:rPr lang="de-AT" smtClean="0"/>
-              <a:t>‹Nr.›</a:t>
+              <a:t>‹#›</a:t>
             </a:fld>
             <a:endParaRPr lang="de-AT" dirty="0"/>
           </a:p>
@@ -14227,7 +14228,7 @@
             <a:fld id="{BE3DC40E-DBBE-4E2D-9EEC-FBF0DA0E9179}" type="slidenum">
               <a:rPr lang="de-AT" smtClean="0"/>
               <a:pPr/>
-              <a:t>‹Nr.›</a:t>
+              <a:t>‹#›</a:t>
             </a:fld>
             <a:endParaRPr lang="de-AT" dirty="0"/>
           </a:p>
@@ -14272,7 +14273,7 @@
             <a:fld id="{EF16FBD4-A1A0-4C0D-8ECA-591A550A295A}" type="datetime1">
               <a:rPr lang="de-AT" smtClean="0"/>
               <a:pPr/>
-              <a:t>19.04.2026</a:t>
+              <a:t>20.04.2026</a:t>
             </a:fld>
             <a:endParaRPr lang="de-AT" dirty="0"/>
           </a:p>
@@ -16791,7 +16792,7 @@
         </p:blipFill>
         <p:spPr>
           <a:xfrm>
-            <a:off x="929545" y="1268072"/>
+            <a:off x="929545" y="1603045"/>
             <a:ext cx="1732044" cy="1732044"/>
           </a:xfrm>
           <a:prstGeom prst="rect">
@@ -16827,7 +16828,7 @@
         </p:blipFill>
         <p:spPr>
           <a:xfrm>
-            <a:off x="3274144" y="1240289"/>
+            <a:off x="3274144" y="1575262"/>
             <a:ext cx="2160000" cy="1817505"/>
           </a:xfrm>
           <a:prstGeom prst="rect">
@@ -16863,7 +16864,7 @@
         </p:blipFill>
         <p:spPr>
           <a:xfrm>
-            <a:off x="5987065" y="1201086"/>
+            <a:off x="5987065" y="1536059"/>
             <a:ext cx="2160000" cy="1876035"/>
           </a:xfrm>
           <a:prstGeom prst="rect">
@@ -16899,7 +16900,7 @@
         </p:blipFill>
         <p:spPr>
           <a:xfrm>
-            <a:off x="929545" y="3185634"/>
+            <a:off x="929545" y="3520607"/>
             <a:ext cx="1731600" cy="1731600"/>
           </a:xfrm>
           <a:prstGeom prst="rect">
@@ -16935,7 +16936,7 @@
         </p:blipFill>
         <p:spPr>
           <a:xfrm>
-            <a:off x="3274145" y="3142682"/>
+            <a:off x="3274145" y="3477655"/>
             <a:ext cx="2160000" cy="1817505"/>
           </a:xfrm>
           <a:prstGeom prst="rect">
@@ -16971,7 +16972,7 @@
         </p:blipFill>
         <p:spPr>
           <a:xfrm>
-            <a:off x="5977126" y="3122804"/>
+            <a:off x="5977126" y="3457777"/>
             <a:ext cx="2160000" cy="1876035"/>
           </a:xfrm>
           <a:prstGeom prst="rect">
@@ -16979,6 +16980,119 @@
           </a:prstGeom>
         </p:spPr>
       </p:pic>
+      <p:sp>
+        <p:nvSpPr>
+          <p:cNvPr id="10" name="TextBox 9">
+            <a:extLst>
+              <a:ext uri="{FF2B5EF4-FFF2-40B4-BE49-F238E27FC236}">
+                <a16:creationId xmlns:a16="http://schemas.microsoft.com/office/drawing/2014/main" id="{879F468B-DBD3-9B70-36F9-96AFF9504012}"/>
+              </a:ext>
+            </a:extLst>
+          </p:cNvPr>
+          <p:cNvSpPr txBox="1"/>
+          <p:nvPr/>
+        </p:nvSpPr>
+        <p:spPr>
+          <a:xfrm>
+            <a:off x="807036" y="1219831"/>
+            <a:ext cx="1976617" cy="338554"/>
+          </a:xfrm>
+          <a:prstGeom prst="rect">
+            <a:avLst/>
+          </a:prstGeom>
+          <a:noFill/>
+        </p:spPr>
+        <p:txBody>
+          <a:bodyPr wrap="square" rtlCol="0">
+            <a:spAutoFit/>
+          </a:bodyPr>
+          <a:lstStyle/>
+          <a:p>
+            <a:pPr algn="ctr"/>
+            <a:r>
+              <a:rPr lang="de-AT" sz="1600" dirty="0"/>
+              <a:t>Sentinel-2 Image</a:t>
+            </a:r>
+          </a:p>
+        </p:txBody>
+      </p:sp>
+      <p:sp>
+        <p:nvSpPr>
+          <p:cNvPr id="12" name="TextBox 11">
+            <a:extLst>
+              <a:ext uri="{FF2B5EF4-FFF2-40B4-BE49-F238E27FC236}">
+                <a16:creationId xmlns:a16="http://schemas.microsoft.com/office/drawing/2014/main" id="{C3287921-8E1B-95B3-9A4B-321640E5D429}"/>
+              </a:ext>
+            </a:extLst>
+          </p:cNvPr>
+          <p:cNvSpPr txBox="1"/>
+          <p:nvPr/>
+        </p:nvSpPr>
+        <p:spPr>
+          <a:xfrm>
+            <a:off x="6078756" y="1219831"/>
+            <a:ext cx="1976617" cy="338554"/>
+          </a:xfrm>
+          <a:prstGeom prst="rect">
+            <a:avLst/>
+          </a:prstGeom>
+          <a:noFill/>
+        </p:spPr>
+        <p:txBody>
+          <a:bodyPr wrap="square" rtlCol="0">
+            <a:spAutoFit/>
+          </a:bodyPr>
+          <a:lstStyle/>
+          <a:p>
+            <a:pPr algn="ctr"/>
+            <a:r>
+              <a:rPr lang="de-AT" sz="1600" dirty="0"/>
+              <a:t>Ground Truth</a:t>
+            </a:r>
+          </a:p>
+        </p:txBody>
+      </p:sp>
+      <p:sp>
+        <p:nvSpPr>
+          <p:cNvPr id="14" name="TextBox 13">
+            <a:extLst>
+              <a:ext uri="{FF2B5EF4-FFF2-40B4-BE49-F238E27FC236}">
+                <a16:creationId xmlns:a16="http://schemas.microsoft.com/office/drawing/2014/main" id="{EAD12880-B78C-1F6D-6E81-4AA935C854E9}"/>
+              </a:ext>
+            </a:extLst>
+          </p:cNvPr>
+          <p:cNvSpPr txBox="1"/>
+          <p:nvPr/>
+        </p:nvSpPr>
+        <p:spPr>
+          <a:xfrm>
+            <a:off x="3365835" y="1219831"/>
+            <a:ext cx="1976617" cy="338554"/>
+          </a:xfrm>
+          <a:prstGeom prst="rect">
+            <a:avLst/>
+          </a:prstGeom>
+          <a:noFill/>
+        </p:spPr>
+        <p:txBody>
+          <a:bodyPr wrap="square" rtlCol="0">
+            <a:spAutoFit/>
+          </a:bodyPr>
+          <a:lstStyle/>
+          <a:p>
+            <a:pPr algn="ctr"/>
+            <a:r>
+              <a:rPr lang="de-AT" sz="1600" dirty="0"/>
+              <a:t>Model </a:t>
+            </a:r>
+            <a:r>
+              <a:rPr lang="de-AT" sz="1600" dirty="0" err="1"/>
+              <a:t>Prediction</a:t>
+            </a:r>
+            <a:endParaRPr lang="de-AT" sz="1600" dirty="0"/>
+          </a:p>
+        </p:txBody>
+      </p:sp>
     </p:spTree>
     <p:extLst>
       <p:ext uri="{BB962C8B-B14F-4D97-AF65-F5344CB8AC3E}">
@@ -17170,68 +17284,10 @@
       </p:grpSpPr>
       <p:sp>
         <p:nvSpPr>
-          <p:cNvPr id="2" name="Content Placeholder 1">
+          <p:cNvPr id="3" name="Title 2">
             <a:extLst>
               <a:ext uri="{FF2B5EF4-FFF2-40B4-BE49-F238E27FC236}">
-                <a16:creationId xmlns:a16="http://schemas.microsoft.com/office/drawing/2014/main" id="{D49693A6-9344-C5E4-3755-8973C9E05706}"/>
-              </a:ext>
-            </a:extLst>
-          </p:cNvPr>
-          <p:cNvSpPr>
-            <a:spLocks noGrp="1"/>
-          </p:cNvSpPr>
-          <p:nvPr>
-            <p:ph idx="1"/>
-          </p:nvPr>
-        </p:nvSpPr>
-        <p:spPr/>
-        <p:txBody>
-          <a:bodyPr/>
-          <a:lstStyle/>
-          <a:p>
-            <a:endParaRPr lang="de-AT"/>
-          </a:p>
-        </p:txBody>
-      </p:sp>
-      <p:sp>
-        <p:nvSpPr>
-          <p:cNvPr id="4" name="Slide Number Placeholder 3">
-            <a:extLst>
-              <a:ext uri="{FF2B5EF4-FFF2-40B4-BE49-F238E27FC236}">
-                <a16:creationId xmlns:a16="http://schemas.microsoft.com/office/drawing/2014/main" id="{7DFC2F18-AA5F-703D-E941-865891491132}"/>
-              </a:ext>
-            </a:extLst>
-          </p:cNvPr>
-          <p:cNvSpPr>
-            <a:spLocks noGrp="1"/>
-          </p:cNvSpPr>
-          <p:nvPr>
-            <p:ph type="sldNum" sz="quarter" idx="12"/>
-          </p:nvPr>
-        </p:nvSpPr>
-        <p:spPr/>
-        <p:txBody>
-          <a:bodyPr/>
-          <a:lstStyle/>
-          <a:p>
-            <a:r>
-              <a:rPr lang="de-AT"/>
-              <a:t>SEITE </a:t>
-            </a:r>
-            <a:fld id="{BE3DC40E-DBBE-4E2D-9EEC-FBF0DA0E9179}" type="slidenum">
-              <a:rPr lang="de-AT" smtClean="0"/>
-              <a:t>19</a:t>
-            </a:fld>
-            <a:endParaRPr lang="de-AT" dirty="0"/>
-          </a:p>
-        </p:txBody>
-      </p:sp>
-      <p:sp>
-        <p:nvSpPr>
-          <p:cNvPr id="5" name="Title 4">
-            <a:extLst>
-              <a:ext uri="{FF2B5EF4-FFF2-40B4-BE49-F238E27FC236}">
-                <a16:creationId xmlns:a16="http://schemas.microsoft.com/office/drawing/2014/main" id="{E17993FF-05FC-40D7-1E06-61B1A287DAB8}"/>
+                <a16:creationId xmlns:a16="http://schemas.microsoft.com/office/drawing/2014/main" id="{33F1F7C6-7903-D01E-7211-CE0250929C3F}"/>
               </a:ext>
             </a:extLst>
           </p:cNvPr>
@@ -17244,23 +17300,374 @@
         </p:nvSpPr>
         <p:spPr/>
         <p:txBody>
+          <a:bodyPr/>
+          <a:lstStyle/>
+          <a:p>
+            <a:r>
+              <a:rPr lang="de-AT" dirty="0"/>
+              <a:t>Future Plans</a:t>
+            </a:r>
+          </a:p>
+        </p:txBody>
+      </p:sp>
+      <p:sp>
+        <p:nvSpPr>
+          <p:cNvPr id="6" name="Content Placeholder 1">
+            <a:extLst>
+              <a:ext uri="{FF2B5EF4-FFF2-40B4-BE49-F238E27FC236}">
+                <a16:creationId xmlns:a16="http://schemas.microsoft.com/office/drawing/2014/main" id="{9A8E3442-5812-F8AF-D7AD-7EFE989E487F}"/>
+              </a:ext>
+            </a:extLst>
+          </p:cNvPr>
+          <p:cNvSpPr txBox="1">
+            <a:spLocks/>
+          </p:cNvSpPr>
+          <p:nvPr/>
+        </p:nvSpPr>
+        <p:spPr>
+          <a:xfrm>
+            <a:off x="692178" y="1476105"/>
+            <a:ext cx="7759644" cy="3853905"/>
+          </a:xfrm>
+          <a:prstGeom prst="rect">
+            <a:avLst/>
+          </a:prstGeom>
+        </p:spPr>
+        <p:txBody>
           <a:bodyPr>
             <a:normAutofit/>
           </a:bodyPr>
-          <a:lstStyle/>
-          <a:p>
-            <a:r>
-              <a:rPr lang="en-AT" sz="2800" dirty="0"/>
-              <a:t>Discussion</a:t>
-            </a:r>
-            <a:endParaRPr lang="de-AT" sz="2800" dirty="0"/>
+          <a:lstStyle>
+            <a:lvl1pPr marL="266700" indent="-266700" algn="l" defTabSz="914306" rtl="0" eaLnBrk="1" latinLnBrk="0" hangingPunct="1">
+              <a:lnSpc>
+                <a:spcPct val="100000"/>
+              </a:lnSpc>
+              <a:spcBef>
+                <a:spcPts val="0"/>
+              </a:spcBef>
+              <a:spcAft>
+                <a:spcPts val="600"/>
+              </a:spcAft>
+              <a:buClr>
+                <a:schemeClr val="accent1"/>
+              </a:buClr>
+              <a:buFont typeface="Wingdings" charset="2"/>
+              <a:buChar char="§"/>
+              <a:defRPr sz="1600" kern="1200">
+                <a:solidFill>
+                  <a:schemeClr val="tx1"/>
+                </a:solidFill>
+                <a:latin typeface="+mn-lt"/>
+                <a:ea typeface="+mn-ea"/>
+                <a:cs typeface="+mn-cs"/>
+              </a:defRPr>
+            </a:lvl1pPr>
+            <a:lvl2pPr marL="539750" indent="-273050" algn="l" defTabSz="914306" rtl="0" eaLnBrk="1" latinLnBrk="0" hangingPunct="1">
+              <a:lnSpc>
+                <a:spcPct val="100000"/>
+              </a:lnSpc>
+              <a:spcBef>
+                <a:spcPts val="0"/>
+              </a:spcBef>
+              <a:spcAft>
+                <a:spcPts val="400"/>
+              </a:spcAft>
+              <a:buClr>
+                <a:schemeClr val="accent1"/>
+              </a:buClr>
+              <a:buSzPct val="100000"/>
+              <a:buFont typeface="Wingdings" charset="2"/>
+              <a:buChar char="§"/>
+              <a:defRPr sz="1500" kern="1200">
+                <a:solidFill>
+                  <a:schemeClr val="tx1"/>
+                </a:solidFill>
+                <a:latin typeface="+mn-lt"/>
+                <a:ea typeface="+mn-ea"/>
+                <a:cs typeface="+mn-cs"/>
+              </a:defRPr>
+            </a:lvl2pPr>
+            <a:lvl3pPr marL="814388" indent="-273050" algn="l" defTabSz="914306" rtl="0" eaLnBrk="1" latinLnBrk="0" hangingPunct="1">
+              <a:lnSpc>
+                <a:spcPct val="100000"/>
+              </a:lnSpc>
+              <a:spcBef>
+                <a:spcPts val="0"/>
+              </a:spcBef>
+              <a:spcAft>
+                <a:spcPts val="400"/>
+              </a:spcAft>
+              <a:buClr>
+                <a:schemeClr val="accent1"/>
+              </a:buClr>
+              <a:buFont typeface="Wingdings" charset="2"/>
+              <a:buChar char="§"/>
+              <a:defRPr sz="1400" kern="1200">
+                <a:solidFill>
+                  <a:schemeClr val="tx1"/>
+                </a:solidFill>
+                <a:latin typeface="+mn-lt"/>
+                <a:ea typeface="+mn-ea"/>
+                <a:cs typeface="+mn-cs"/>
+              </a:defRPr>
+            </a:lvl3pPr>
+            <a:lvl4pPr marL="1074738" indent="-266700" algn="l" defTabSz="914306" rtl="0" eaLnBrk="1" latinLnBrk="0" hangingPunct="1">
+              <a:lnSpc>
+                <a:spcPct val="100000"/>
+              </a:lnSpc>
+              <a:spcBef>
+                <a:spcPts val="0"/>
+              </a:spcBef>
+              <a:spcAft>
+                <a:spcPts val="400"/>
+              </a:spcAft>
+              <a:buClr>
+                <a:schemeClr val="accent1"/>
+              </a:buClr>
+              <a:buFont typeface="Wingdings" charset="2"/>
+              <a:buChar char="§"/>
+              <a:defRPr sz="1200" kern="1200">
+                <a:solidFill>
+                  <a:schemeClr val="tx1"/>
+                </a:solidFill>
+                <a:latin typeface="+mn-lt"/>
+                <a:ea typeface="+mn-ea"/>
+                <a:cs typeface="+mn-cs"/>
+              </a:defRPr>
+            </a:lvl4pPr>
+            <a:lvl5pPr marL="1341438" indent="-263525" algn="l" defTabSz="914306" rtl="0" eaLnBrk="1" latinLnBrk="0" hangingPunct="1">
+              <a:lnSpc>
+                <a:spcPct val="100000"/>
+              </a:lnSpc>
+              <a:spcBef>
+                <a:spcPts val="0"/>
+              </a:spcBef>
+              <a:spcAft>
+                <a:spcPts val="400"/>
+              </a:spcAft>
+              <a:buClr>
+                <a:schemeClr val="accent1"/>
+              </a:buClr>
+              <a:buFont typeface="Wingdings" charset="2"/>
+              <a:buChar char="§"/>
+              <a:defRPr sz="1200" kern="1200">
+                <a:solidFill>
+                  <a:schemeClr val="tx1"/>
+                </a:solidFill>
+                <a:latin typeface="+mn-lt"/>
+                <a:ea typeface="+mn-ea"/>
+                <a:cs typeface="+mn-cs"/>
+              </a:defRPr>
+            </a:lvl5pPr>
+            <a:lvl6pPr marL="2514343" indent="-228577" algn="l" defTabSz="914306" rtl="0" eaLnBrk="1" latinLnBrk="0" hangingPunct="1">
+              <a:spcBef>
+                <a:spcPct val="20000"/>
+              </a:spcBef>
+              <a:buFont typeface="Arial" pitchFamily="34" charset="0"/>
+              <a:buChar char="•"/>
+              <a:defRPr sz="2000" kern="1200">
+                <a:solidFill>
+                  <a:schemeClr val="tx1"/>
+                </a:solidFill>
+                <a:latin typeface="+mn-lt"/>
+                <a:ea typeface="+mn-ea"/>
+                <a:cs typeface="+mn-cs"/>
+              </a:defRPr>
+            </a:lvl6pPr>
+            <a:lvl7pPr marL="2971496" indent="-228577" algn="l" defTabSz="914306" rtl="0" eaLnBrk="1" latinLnBrk="0" hangingPunct="1">
+              <a:spcBef>
+                <a:spcPct val="20000"/>
+              </a:spcBef>
+              <a:buFont typeface="Arial" pitchFamily="34" charset="0"/>
+              <a:buChar char="•"/>
+              <a:defRPr sz="2000" kern="1200">
+                <a:solidFill>
+                  <a:schemeClr val="tx1"/>
+                </a:solidFill>
+                <a:latin typeface="+mn-lt"/>
+                <a:ea typeface="+mn-ea"/>
+                <a:cs typeface="+mn-cs"/>
+              </a:defRPr>
+            </a:lvl7pPr>
+            <a:lvl8pPr marL="3428650" indent="-228577" algn="l" defTabSz="914306" rtl="0" eaLnBrk="1" latinLnBrk="0" hangingPunct="1">
+              <a:spcBef>
+                <a:spcPct val="20000"/>
+              </a:spcBef>
+              <a:buFont typeface="Arial" pitchFamily="34" charset="0"/>
+              <a:buChar char="•"/>
+              <a:defRPr sz="2000" kern="1200">
+                <a:solidFill>
+                  <a:schemeClr val="tx1"/>
+                </a:solidFill>
+                <a:latin typeface="+mn-lt"/>
+                <a:ea typeface="+mn-ea"/>
+                <a:cs typeface="+mn-cs"/>
+              </a:defRPr>
+            </a:lvl8pPr>
+            <a:lvl9pPr marL="3885803" indent="-228577" algn="l" defTabSz="914306" rtl="0" eaLnBrk="1" latinLnBrk="0" hangingPunct="1">
+              <a:spcBef>
+                <a:spcPct val="20000"/>
+              </a:spcBef>
+              <a:buFont typeface="Arial" pitchFamily="34" charset="0"/>
+              <a:buChar char="•"/>
+              <a:defRPr sz="2000" kern="1200">
+                <a:solidFill>
+                  <a:schemeClr val="tx1"/>
+                </a:solidFill>
+                <a:latin typeface="+mn-lt"/>
+                <a:ea typeface="+mn-ea"/>
+                <a:cs typeface="+mn-cs"/>
+              </a:defRPr>
+            </a:lvl9pPr>
+          </a:lstStyle>
+          <a:p>
+            <a:r>
+              <a:rPr lang="de-AT" sz="2000" dirty="0" err="1"/>
+              <a:t>Inclusion</a:t>
+            </a:r>
+            <a:r>
+              <a:rPr lang="de-AT" sz="2000" dirty="0"/>
+              <a:t> </a:t>
+            </a:r>
+            <a:r>
+              <a:rPr lang="de-AT" sz="2000" dirty="0" err="1"/>
+              <a:t>of</a:t>
+            </a:r>
+            <a:r>
+              <a:rPr lang="de-AT" sz="2000" dirty="0"/>
+              <a:t> OSM </a:t>
+            </a:r>
+            <a:r>
+              <a:rPr lang="de-AT" sz="2000" dirty="0" err="1"/>
+              <a:t>data</a:t>
+            </a:r>
+            <a:endParaRPr lang="de-AT" sz="2000" dirty="0"/>
+          </a:p>
+          <a:p>
+            <a:pPr lvl="1"/>
+            <a:r>
+              <a:rPr lang="de-AT" sz="1900" dirty="0"/>
+              <a:t>Classification: </a:t>
+            </a:r>
+            <a:r>
+              <a:rPr lang="de-AT" sz="1900" dirty="0" err="1"/>
+              <a:t>predicting</a:t>
+            </a:r>
+            <a:r>
+              <a:rPr lang="de-AT" sz="1900" dirty="0"/>
+              <a:t> different </a:t>
+            </a:r>
+            <a:r>
+              <a:rPr lang="de-AT" sz="1900" dirty="0" err="1"/>
+              <a:t>structure</a:t>
+            </a:r>
+            <a:r>
+              <a:rPr lang="de-AT" sz="1900" dirty="0"/>
+              <a:t> </a:t>
+            </a:r>
+            <a:r>
+              <a:rPr lang="de-AT" sz="1900" dirty="0" err="1"/>
+              <a:t>types</a:t>
+            </a:r>
+            <a:endParaRPr lang="de-AT" sz="1900" dirty="0"/>
+          </a:p>
+          <a:p>
+            <a:pPr lvl="1"/>
+            <a:r>
+              <a:rPr lang="de-AT" sz="1900" dirty="0"/>
+              <a:t>Regression: </a:t>
+            </a:r>
+            <a:r>
+              <a:rPr lang="de-AT" sz="1900" dirty="0" err="1"/>
+              <a:t>predicting</a:t>
+            </a:r>
+            <a:r>
+              <a:rPr lang="de-AT" sz="1900" dirty="0"/>
+              <a:t> </a:t>
+            </a:r>
+            <a:r>
+              <a:rPr lang="de-AT" sz="1900" dirty="0" err="1"/>
+              <a:t>number</a:t>
+            </a:r>
+            <a:r>
+              <a:rPr lang="de-AT" sz="1900" dirty="0"/>
+              <a:t> </a:t>
+            </a:r>
+            <a:r>
+              <a:rPr lang="de-AT" sz="1900" dirty="0" err="1"/>
+              <a:t>of</a:t>
+            </a:r>
+            <a:r>
+              <a:rPr lang="de-AT" sz="1900" dirty="0"/>
+              <a:t> </a:t>
+            </a:r>
+            <a:r>
+              <a:rPr lang="de-AT" sz="1900" dirty="0" err="1"/>
+              <a:t>trees</a:t>
+            </a:r>
+            <a:r>
+              <a:rPr lang="de-AT" sz="1900" dirty="0"/>
+              <a:t> </a:t>
+            </a:r>
+            <a:r>
+              <a:rPr lang="de-AT" sz="1900" dirty="0" err="1"/>
+              <a:t>using</a:t>
+            </a:r>
+            <a:r>
+              <a:rPr lang="de-AT" sz="1900" dirty="0"/>
+              <a:t> different </a:t>
+            </a:r>
+            <a:r>
+              <a:rPr lang="de-AT" sz="1900" dirty="0" err="1"/>
+              <a:t>structure</a:t>
+            </a:r>
+            <a:r>
+              <a:rPr lang="de-AT" sz="1900" dirty="0"/>
+              <a:t> </a:t>
+            </a:r>
+            <a:r>
+              <a:rPr lang="de-AT" sz="1900" dirty="0" err="1"/>
+              <a:t>types</a:t>
+            </a:r>
+            <a:endParaRPr lang="de-AT" sz="1900" dirty="0"/>
+          </a:p>
+          <a:p>
+            <a:r>
+              <a:rPr lang="de-AT" sz="2000" dirty="0"/>
+              <a:t>Train larger </a:t>
+            </a:r>
+            <a:r>
+              <a:rPr lang="de-AT" sz="2000" dirty="0" err="1"/>
+              <a:t>model</a:t>
+            </a:r>
+            <a:r>
+              <a:rPr lang="de-AT" sz="2000" dirty="0"/>
+              <a:t> </a:t>
+            </a:r>
+            <a:r>
+              <a:rPr lang="de-AT" sz="2000" dirty="0" err="1"/>
+              <a:t>for</a:t>
+            </a:r>
+            <a:r>
+              <a:rPr lang="de-AT" sz="2000" dirty="0"/>
+              <a:t> </a:t>
+            </a:r>
+            <a:r>
+              <a:rPr lang="de-AT" sz="2000" dirty="0" err="1"/>
+              <a:t>more</a:t>
+            </a:r>
+            <a:r>
+              <a:rPr lang="de-AT" sz="2000" dirty="0"/>
+              <a:t> time</a:t>
+            </a:r>
+            <a:endParaRPr lang="en-AT" sz="2000" dirty="0"/>
           </a:p>
         </p:txBody>
       </p:sp>
     </p:spTree>
     <p:extLst>
       <p:ext uri="{BB962C8B-B14F-4D97-AF65-F5344CB8AC3E}">
-        <p14:creationId xmlns:p14="http://schemas.microsoft.com/office/powerpoint/2010/main" val="1722022222"/>
+        <p14:creationId xmlns:p14="http://schemas.microsoft.com/office/powerpoint/2010/main" val="692227241"/>
       </p:ext>
     </p:extLst>
   </p:cSld>
@@ -17522,6 +17929,128 @@
     <p:extLst>
       <p:ext uri="{BB962C8B-B14F-4D97-AF65-F5344CB8AC3E}">
         <p14:creationId xmlns:p14="http://schemas.microsoft.com/office/powerpoint/2010/main" val="1982120146"/>
+      </p:ext>
+    </p:extLst>
+  </p:cSld>
+  <p:clrMapOvr>
+    <a:masterClrMapping/>
+  </p:clrMapOvr>
+  <p:transition>
+    <p:fade/>
+  </p:transition>
+</p:sld>
+</file>
+
+<file path=ppt/slides/slide20.xml><?xml version="1.0" encoding="utf-8"?>
+<p:sld xmlns:a="http://schemas.openxmlformats.org/drawingml/2006/main" xmlns:r="http://schemas.openxmlformats.org/officeDocument/2006/relationships" xmlns:p="http://schemas.openxmlformats.org/presentationml/2006/main">
+  <p:cSld>
+    <p:spTree>
+      <p:nvGrpSpPr>
+        <p:cNvPr id="1" name=""/>
+        <p:cNvGrpSpPr/>
+        <p:nvPr/>
+      </p:nvGrpSpPr>
+      <p:grpSpPr>
+        <a:xfrm>
+          <a:off x="0" y="0"/>
+          <a:ext cx="0" cy="0"/>
+          <a:chOff x="0" y="0"/>
+          <a:chExt cx="0" cy="0"/>
+        </a:xfrm>
+      </p:grpSpPr>
+      <p:sp>
+        <p:nvSpPr>
+          <p:cNvPr id="2" name="Content Placeholder 1">
+            <a:extLst>
+              <a:ext uri="{FF2B5EF4-FFF2-40B4-BE49-F238E27FC236}">
+                <a16:creationId xmlns:a16="http://schemas.microsoft.com/office/drawing/2014/main" id="{D49693A6-9344-C5E4-3755-8973C9E05706}"/>
+              </a:ext>
+            </a:extLst>
+          </p:cNvPr>
+          <p:cNvSpPr>
+            <a:spLocks noGrp="1"/>
+          </p:cNvSpPr>
+          <p:nvPr>
+            <p:ph idx="1"/>
+          </p:nvPr>
+        </p:nvSpPr>
+        <p:spPr/>
+        <p:txBody>
+          <a:bodyPr/>
+          <a:lstStyle/>
+          <a:p>
+            <a:endParaRPr lang="de-AT"/>
+          </a:p>
+        </p:txBody>
+      </p:sp>
+      <p:sp>
+        <p:nvSpPr>
+          <p:cNvPr id="4" name="Slide Number Placeholder 3">
+            <a:extLst>
+              <a:ext uri="{FF2B5EF4-FFF2-40B4-BE49-F238E27FC236}">
+                <a16:creationId xmlns:a16="http://schemas.microsoft.com/office/drawing/2014/main" id="{7DFC2F18-AA5F-703D-E941-865891491132}"/>
+              </a:ext>
+            </a:extLst>
+          </p:cNvPr>
+          <p:cNvSpPr>
+            <a:spLocks noGrp="1"/>
+          </p:cNvSpPr>
+          <p:nvPr>
+            <p:ph type="sldNum" sz="quarter" idx="12"/>
+          </p:nvPr>
+        </p:nvSpPr>
+        <p:spPr/>
+        <p:txBody>
+          <a:bodyPr/>
+          <a:lstStyle/>
+          <a:p>
+            <a:r>
+              <a:rPr lang="de-AT"/>
+              <a:t>SEITE </a:t>
+            </a:r>
+            <a:fld id="{BE3DC40E-DBBE-4E2D-9EEC-FBF0DA0E9179}" type="slidenum">
+              <a:rPr lang="de-AT" smtClean="0"/>
+              <a:t>20</a:t>
+            </a:fld>
+            <a:endParaRPr lang="de-AT" dirty="0"/>
+          </a:p>
+        </p:txBody>
+      </p:sp>
+      <p:sp>
+        <p:nvSpPr>
+          <p:cNvPr id="5" name="Title 4">
+            <a:extLst>
+              <a:ext uri="{FF2B5EF4-FFF2-40B4-BE49-F238E27FC236}">
+                <a16:creationId xmlns:a16="http://schemas.microsoft.com/office/drawing/2014/main" id="{E17993FF-05FC-40D7-1E06-61B1A287DAB8}"/>
+              </a:ext>
+            </a:extLst>
+          </p:cNvPr>
+          <p:cNvSpPr>
+            <a:spLocks noGrp="1"/>
+          </p:cNvSpPr>
+          <p:nvPr>
+            <p:ph type="title"/>
+          </p:nvPr>
+        </p:nvSpPr>
+        <p:spPr/>
+        <p:txBody>
+          <a:bodyPr>
+            <a:normAutofit/>
+          </a:bodyPr>
+          <a:lstStyle/>
+          <a:p>
+            <a:r>
+              <a:rPr lang="en-AT" sz="2800" dirty="0"/>
+              <a:t>Discussion</a:t>
+            </a:r>
+            <a:endParaRPr lang="de-AT" sz="2800" dirty="0"/>
+          </a:p>
+        </p:txBody>
+      </p:sp>
+    </p:spTree>
+    <p:extLst>
+      <p:ext uri="{BB962C8B-B14F-4D97-AF65-F5344CB8AC3E}">
+        <p14:creationId xmlns:p14="http://schemas.microsoft.com/office/powerpoint/2010/main" val="1722022222"/>
       </p:ext>
     </p:extLst>
   </p:cSld>
@@ -19851,6 +20380,15 @@
 </file>
 
 <file path=customXml/item1.xml><?xml version="1.0" encoding="utf-8"?>
+<?mso-contentType ?>
+<FormTemplates xmlns="http://schemas.microsoft.com/sharepoint/v3/contenttype/forms">
+  <Display>DocumentLibraryForm</Display>
+  <Edit>DocumentLibraryForm</Edit>
+  <New>DocumentLibraryForm</New>
+</FormTemplates>
+</file>
+
+<file path=customXml/item2.xml><?xml version="1.0" encoding="utf-8"?>
 <ct:contentTypeSchema xmlns:ct="http://schemas.microsoft.com/office/2006/metadata/contentType" xmlns:ma="http://schemas.microsoft.com/office/2006/metadata/properties/metaAttributes" ct:_="" ma:_="" ma:contentTypeName="Dokument" ma:contentTypeID="0x010100BCF651A35DF3154DB01328AF51148DAE" ma:contentTypeVersion="2" ma:contentTypeDescription="Ein neues Dokument erstellen." ma:contentTypeScope="" ma:versionID="b5ccb5bb211b6ddcc624790d84f2bb9f">
   <xsd:schema xmlns:xsd="http://www.w3.org/2001/XMLSchema" xmlns:xs="http://www.w3.org/2001/XMLSchema" xmlns:p="http://schemas.microsoft.com/office/2006/metadata/properties" xmlns:ns2="1a8d9a65-8471-4209-a900-f8e11db75e0a" xmlns:ns3="08b0a3ee-3d2a-451c-9a1a-7e5d5b0c9c77" xmlns:ns4="dde413db-0745-4f3a-8dca-564dc7ff6f7d" targetNamespace="http://schemas.microsoft.com/office/2006/metadata/properties" ma:root="true" ma:fieldsID="046596c9011a87760a505164f9d920d3" ns2:_="" ns3:_="" ns4:_="">
     <xsd:import namespace="1a8d9a65-8471-4209-a900-f8e11db75e0a"/>
@@ -20081,15 +20619,6 @@
 </ct:contentTypeSchema>
 </file>
 
-<file path=customXml/item2.xml><?xml version="1.0" encoding="utf-8"?>
-<?mso-contentType ?>
-<FormTemplates xmlns="http://schemas.microsoft.com/sharepoint/v3/contenttype/forms">
-  <Display>DocumentLibraryForm</Display>
-  <Edit>DocumentLibraryForm</Edit>
-  <New>DocumentLibraryForm</New>
-</FormTemplates>
-</file>
-
 <file path=customXml/item3.xml><?xml version="1.0" encoding="utf-8"?>
 <p:properties xmlns:p="http://schemas.microsoft.com/office/2006/metadata/properties" xmlns:xsi="http://www.w3.org/2001/XMLSchema-instance" xmlns:pc="http://schemas.microsoft.com/office/infopath/2007/PartnerControls">
   <documentManagement>
@@ -20133,6 +20662,14 @@
 </file>
 
 <file path=customXml/itemProps1.xml><?xml version="1.0" encoding="utf-8"?>
+<ds:datastoreItem xmlns:ds="http://schemas.openxmlformats.org/officeDocument/2006/customXml" ds:itemID="{9346B3ED-06B1-4DE8-9648-0F78B5B453B2}">
+  <ds:schemaRefs>
+    <ds:schemaRef ds:uri="http://schemas.microsoft.com/sharepoint/v3/contenttype/forms"/>
+  </ds:schemaRefs>
+</ds:datastoreItem>
+</file>
+
+<file path=customXml/itemProps2.xml><?xml version="1.0" encoding="utf-8"?>
 <ds:datastoreItem xmlns:ds="http://schemas.openxmlformats.org/officeDocument/2006/customXml" ds:itemID="{069B4889-3CCA-46C6-8FD4-B0AB941A4B59}">
   <ds:schemaRefs>
     <ds:schemaRef ds:uri="http://schemas.microsoft.com/office/2006/metadata/contentType"/>
@@ -20152,14 +20689,6 @@
 </ds:datastoreItem>
 </file>
 
-<file path=customXml/itemProps2.xml><?xml version="1.0" encoding="utf-8"?>
-<ds:datastoreItem xmlns:ds="http://schemas.openxmlformats.org/officeDocument/2006/customXml" ds:itemID="{9346B3ED-06B1-4DE8-9648-0F78B5B453B2}">
-  <ds:schemaRefs>
-    <ds:schemaRef ds:uri="http://schemas.microsoft.com/sharepoint/v3/contenttype/forms"/>
-  </ds:schemaRefs>
-</ds:datastoreItem>
-</file>
-
 <file path=customXml/itemProps3.xml><?xml version="1.0" encoding="utf-8"?>
 <ds:datastoreItem xmlns:ds="http://schemas.openxmlformats.org/officeDocument/2006/customXml" ds:itemID="{BF58DFAF-C9AD-4CE5-A221-45D64FB05328}">
   <ds:schemaRefs>

--- a/deliverables/3b. intermediate slides/Intermediate Slides.pptx
+++ b/deliverables/3b. intermediate slides/Intermediate Slides.pptx
@@ -28,8 +28,8 @@
     <p:sldId id="292" r:id="rId19"/>
     <p:sldId id="286" r:id="rId20"/>
     <p:sldId id="293" r:id="rId21"/>
-    <p:sldId id="287" r:id="rId22"/>
-    <p:sldId id="299" r:id="rId23"/>
+    <p:sldId id="300" r:id="rId22"/>
+    <p:sldId id="301" r:id="rId23"/>
     <p:sldId id="288" r:id="rId24"/>
   </p:sldIdLst>
   <p:sldSz cx="9144000" cy="5715000" type="screen16x10"/>
@@ -2627,7 +2627,7 @@
   <dgm:whole/>
   <dgm:extLst>
     <a:ext uri="http://schemas.microsoft.com/office/drawing/2008/diagram">
-      <dsp:dataModelExt xmlns:dsp="http://schemas.microsoft.com/office/drawing/2008/diagram" relId="rId7" minVer="http://schemas.openxmlformats.org/drawingml/2006/diagram"/>
+      <dsp:dataModelExt xmlns:dsp="http://schemas.microsoft.com/office/drawing/2008/diagram" relId="rId6" minVer="http://schemas.openxmlformats.org/drawingml/2006/diagram"/>
     </a:ext>
   </dgm:extLst>
 </dgm:dataModel>
@@ -3356,8 +3356,8 @@
       </dsp:nvSpPr>
       <dsp:spPr>
         <a:xfrm>
-          <a:off x="0" y="516"/>
-          <a:ext cx="8210547" cy="1208472"/>
+          <a:off x="0" y="486"/>
+          <a:ext cx="8210547" cy="1139546"/>
         </a:xfrm>
         <a:prstGeom prst="roundRect">
           <a:avLst>
@@ -3398,8 +3398,8 @@
       </dsp:nvSpPr>
       <dsp:spPr>
         <a:xfrm>
-          <a:off x="365562" y="272422"/>
-          <a:ext cx="664659" cy="664659"/>
+          <a:off x="344712" y="256884"/>
+          <a:ext cx="626750" cy="626750"/>
         </a:xfrm>
         <a:prstGeom prst="rect">
           <a:avLst/>
@@ -3448,8 +3448,8 @@
       </dsp:nvSpPr>
       <dsp:spPr>
         <a:xfrm>
-          <a:off x="1395785" y="516"/>
-          <a:ext cx="6814761" cy="1208472"/>
+          <a:off x="1316176" y="486"/>
+          <a:ext cx="6894370" cy="1139546"/>
         </a:xfrm>
         <a:prstGeom prst="rect">
           <a:avLst/>
@@ -3473,7 +3473,7 @@
         <a:fontRef idx="minor"/>
       </dsp:style>
       <dsp:txBody>
-        <a:bodyPr spcFirstLastPara="0" vert="horz" wrap="square" lIns="127897" tIns="127897" rIns="127897" bIns="127897" numCol="1" spcCol="1270" anchor="ctr" anchorCtr="0">
+        <a:bodyPr spcFirstLastPara="0" vert="horz" wrap="square" lIns="120602" tIns="120602" rIns="120602" bIns="120602" numCol="1" spcCol="1270" anchor="ctr" anchorCtr="0">
           <a:noAutofit/>
         </a:bodyPr>
         <a:lstStyle/>
@@ -3522,8 +3522,8 @@
         </a:p>
       </dsp:txBody>
       <dsp:txXfrm>
-        <a:off x="1395785" y="516"/>
-        <a:ext cx="6814761" cy="1208472"/>
+        <a:off x="1316176" y="486"/>
+        <a:ext cx="6894370" cy="1139546"/>
       </dsp:txXfrm>
     </dsp:sp>
     <dsp:sp modelId="{64C73C73-6F81-4866-A638-20ECC8C9FC27}">
@@ -3533,8 +3533,8 @@
       </dsp:nvSpPr>
       <dsp:spPr>
         <a:xfrm>
-          <a:off x="0" y="1492629"/>
-          <a:ext cx="8210547" cy="1208472"/>
+          <a:off x="0" y="1407496"/>
+          <a:ext cx="8210547" cy="1139546"/>
         </a:xfrm>
         <a:prstGeom prst="roundRect">
           <a:avLst>
@@ -3575,8 +3575,8 @@
       </dsp:nvSpPr>
       <dsp:spPr>
         <a:xfrm>
-          <a:off x="365562" y="1783013"/>
-          <a:ext cx="664659" cy="664659"/>
+          <a:off x="344712" y="1681318"/>
+          <a:ext cx="626750" cy="626750"/>
         </a:xfrm>
         <a:prstGeom prst="rect">
           <a:avLst/>
@@ -3625,8 +3625,8 @@
       </dsp:nvSpPr>
       <dsp:spPr>
         <a:xfrm>
-          <a:off x="1395785" y="1511107"/>
-          <a:ext cx="6814761" cy="1208472"/>
+          <a:off x="1316176" y="1424920"/>
+          <a:ext cx="6894370" cy="1139546"/>
         </a:xfrm>
         <a:prstGeom prst="rect">
           <a:avLst/>
@@ -3650,7 +3650,7 @@
         <a:fontRef idx="minor"/>
       </dsp:style>
       <dsp:txBody>
-        <a:bodyPr spcFirstLastPara="0" vert="horz" wrap="square" lIns="127897" tIns="127897" rIns="127897" bIns="127897" numCol="1" spcCol="1270" anchor="ctr" anchorCtr="0">
+        <a:bodyPr spcFirstLastPara="0" vert="horz" wrap="square" lIns="120602" tIns="120602" rIns="120602" bIns="120602" numCol="1" spcCol="1270" anchor="ctr" anchorCtr="0">
           <a:noAutofit/>
         </a:bodyPr>
         <a:lstStyle/>
@@ -3679,8 +3679,8 @@
         </a:p>
       </dsp:txBody>
       <dsp:txXfrm>
-        <a:off x="1395785" y="1511107"/>
-        <a:ext cx="6814761" cy="1208472"/>
+        <a:off x="1316176" y="1424920"/>
+        <a:ext cx="6894370" cy="1139546"/>
       </dsp:txXfrm>
     </dsp:sp>
     <dsp:sp modelId="{DCF15E64-1FD9-43CD-A805-1D4F13565053}">
@@ -3690,8 +3690,8 @@
       </dsp:nvSpPr>
       <dsp:spPr>
         <a:xfrm>
-          <a:off x="0" y="3021697"/>
-          <a:ext cx="8210547" cy="1208472"/>
+          <a:off x="0" y="2849353"/>
+          <a:ext cx="8210547" cy="1139546"/>
         </a:xfrm>
         <a:prstGeom prst="roundRect">
           <a:avLst>
@@ -3732,8 +3732,8 @@
       </dsp:nvSpPr>
       <dsp:spPr>
         <a:xfrm>
-          <a:off x="365562" y="3293604"/>
-          <a:ext cx="664659" cy="664659"/>
+          <a:off x="344712" y="3105751"/>
+          <a:ext cx="626750" cy="626750"/>
         </a:xfrm>
         <a:prstGeom prst="rect">
           <a:avLst/>
@@ -3782,8 +3782,8 @@
       </dsp:nvSpPr>
       <dsp:spPr>
         <a:xfrm>
-          <a:off x="1395785" y="3021697"/>
-          <a:ext cx="6814761" cy="1208472"/>
+          <a:off x="1316176" y="2849353"/>
+          <a:ext cx="6894370" cy="1139546"/>
         </a:xfrm>
         <a:prstGeom prst="rect">
           <a:avLst/>
@@ -3807,7 +3807,7 @@
         <a:fontRef idx="minor"/>
       </dsp:style>
       <dsp:txBody>
-        <a:bodyPr spcFirstLastPara="0" vert="horz" wrap="square" lIns="127897" tIns="127897" rIns="127897" bIns="127897" numCol="1" spcCol="1270" anchor="ctr" anchorCtr="0">
+        <a:bodyPr spcFirstLastPara="0" vert="horz" wrap="square" lIns="120602" tIns="120602" rIns="120602" bIns="120602" numCol="1" spcCol="1270" anchor="ctr" anchorCtr="0">
           <a:noAutofit/>
         </a:bodyPr>
         <a:lstStyle/>
@@ -3848,8 +3848,8 @@
         </a:p>
       </dsp:txBody>
       <dsp:txXfrm>
-        <a:off x="1395785" y="3021697"/>
-        <a:ext cx="6814761" cy="1208472"/>
+        <a:off x="1316176" y="2849353"/>
+        <a:ext cx="6894370" cy="1139546"/>
       </dsp:txXfrm>
     </dsp:sp>
   </dsp:spTree>
@@ -7894,109 +7894,6 @@
 </p:notes>
 </file>
 
-<file path=ppt/notesSlides/notesSlide7.xml><?xml version="1.0" encoding="utf-8"?>
-<p:notes xmlns:a="http://schemas.openxmlformats.org/drawingml/2006/main" xmlns:r="http://schemas.openxmlformats.org/officeDocument/2006/relationships" xmlns:p="http://schemas.openxmlformats.org/presentationml/2006/main">
-  <p:cSld>
-    <p:spTree>
-      <p:nvGrpSpPr>
-        <p:cNvPr id="1" name=""/>
-        <p:cNvGrpSpPr/>
-        <p:nvPr/>
-      </p:nvGrpSpPr>
-      <p:grpSpPr>
-        <a:xfrm>
-          <a:off x="0" y="0"/>
-          <a:ext cx="0" cy="0"/>
-          <a:chOff x="0" y="0"/>
-          <a:chExt cx="0" cy="0"/>
-        </a:xfrm>
-      </p:grpSpPr>
-      <p:sp>
-        <p:nvSpPr>
-          <p:cNvPr id="2" name="Folienbildplatzhalter 1"/>
-          <p:cNvSpPr>
-            <a:spLocks noGrp="1" noRot="1" noChangeAspect="1"/>
-          </p:cNvSpPr>
-          <p:nvPr>
-            <p:ph type="sldImg"/>
-          </p:nvPr>
-        </p:nvSpPr>
-        <p:spPr/>
-      </p:sp>
-      <p:sp>
-        <p:nvSpPr>
-          <p:cNvPr id="3" name="Notizenplatzhalter 2"/>
-          <p:cNvSpPr>
-            <a:spLocks noGrp="1"/>
-          </p:cNvSpPr>
-          <p:nvPr>
-            <p:ph type="body" idx="1"/>
-          </p:nvPr>
-        </p:nvSpPr>
-        <p:spPr/>
-        <p:txBody>
-          <a:bodyPr/>
-          <a:lstStyle/>
-          <a:p>
-            <a:r>
-              <a:rPr lang="en-US" b="0" dirty="0"/>
-              <a:t>“sparse data" may be misleading=implies small dataset, but we have 6gb</a:t>
-            </a:r>
-          </a:p>
-          <a:p>
-            <a:r>
-              <a:rPr lang="en-US" b="0" dirty="0"/>
-              <a:t>Pls check -&gt;sparse coverage may better describes the </a:t>
-            </a:r>
-            <a:r>
-              <a:rPr lang="en-US" b="0" dirty="0" err="1"/>
-              <a:t>Baumkataster</a:t>
-            </a:r>
-            <a:r>
-              <a:rPr lang="en-US" b="0" dirty="0"/>
-              <a:t> picture on slide 17</a:t>
-            </a:r>
-            <a:endParaRPr lang="de-AT" b="0" dirty="0"/>
-          </a:p>
-        </p:txBody>
-      </p:sp>
-      <p:sp>
-        <p:nvSpPr>
-          <p:cNvPr id="4" name="Foliennummernplatzhalter 3"/>
-          <p:cNvSpPr>
-            <a:spLocks noGrp="1"/>
-          </p:cNvSpPr>
-          <p:nvPr>
-            <p:ph type="sldNum" sz="quarter" idx="5"/>
-          </p:nvPr>
-        </p:nvSpPr>
-        <p:spPr/>
-        <p:txBody>
-          <a:bodyPr/>
-          <a:lstStyle/>
-          <a:p>
-            <a:fld id="{219CC2FD-B32F-4992-A15B-F95E2E35C81B}" type="slidenum">
-              <a:rPr lang="de-AT" smtClean="0"/>
-              <a:pPr/>
-              <a:t>18</a:t>
-            </a:fld>
-            <a:endParaRPr lang="de-AT" dirty="0"/>
-          </a:p>
-        </p:txBody>
-      </p:sp>
-    </p:spTree>
-    <p:extLst>
-      <p:ext uri="{BB962C8B-B14F-4D97-AF65-F5344CB8AC3E}">
-        <p14:creationId xmlns:p14="http://schemas.microsoft.com/office/powerpoint/2010/main" val="1586076493"/>
-      </p:ext>
-    </p:extLst>
-  </p:cSld>
-  <p:clrMapOvr>
-    <a:masterClrMapping/>
-  </p:clrMapOvr>
-</p:notes>
-</file>
-
 <file path=ppt/slideLayouts/slideLayout1.xml><?xml version="1.0" encoding="utf-8"?>
 <p:sldLayout xmlns:a="http://schemas.openxmlformats.org/drawingml/2006/main" xmlns:r="http://schemas.openxmlformats.org/officeDocument/2006/relationships" xmlns:p="http://schemas.openxmlformats.org/presentationml/2006/main" showMasterSp="0" preserve="1" userDrawn="1">
   <p:cSld name="Titelfolie">
@@ -16626,8 +16523,8 @@
         </p:blipFill>
         <p:spPr>
           <a:xfrm>
-            <a:off x="781050" y="1177684"/>
-            <a:ext cx="7581900" cy="4100212"/>
+            <a:off x="235323" y="1222540"/>
+            <a:ext cx="8673353" cy="4189519"/>
           </a:xfrm>
           <a:prstGeom prst="rect">
             <a:avLst/>
@@ -16689,7 +16586,7 @@
           <a:lstStyle/>
           <a:p>
             <a:r>
-              <a:rPr lang="de-AT"/>
+              <a:rPr lang="de-AT" dirty="0" err="1"/>
               <a:t>Fusszeile</a:t>
             </a:r>
             <a:endParaRPr lang="de-AT" dirty="0"/>
@@ -16718,7 +16615,7 @@
           <a:lstStyle/>
           <a:p>
             <a:r>
-              <a:rPr lang="de-AT"/>
+              <a:rPr lang="de-AT" dirty="0"/>
               <a:t>SEITE </a:t>
             </a:r>
             <a:fld id="{BE3DC40E-DBBE-4E2D-9EEC-FBF0DA0E9179}" type="slidenum">
@@ -17093,6 +16990,80 @@
           </a:p>
         </p:txBody>
       </p:sp>
+      <p:sp>
+        <p:nvSpPr>
+          <p:cNvPr id="2" name="TextBox 1">
+            <a:extLst>
+              <a:ext uri="{FF2B5EF4-FFF2-40B4-BE49-F238E27FC236}">
+                <a16:creationId xmlns:a16="http://schemas.microsoft.com/office/drawing/2014/main" id="{E8145B13-EC20-4F6E-4E1D-1D1B31C9AB6E}"/>
+              </a:ext>
+            </a:extLst>
+          </p:cNvPr>
+          <p:cNvSpPr txBox="1"/>
+          <p:nvPr/>
+        </p:nvSpPr>
+        <p:spPr>
+          <a:xfrm rot="16200000">
+            <a:off x="-349853" y="2208140"/>
+            <a:ext cx="1976617" cy="338554"/>
+          </a:xfrm>
+          <a:prstGeom prst="rect">
+            <a:avLst/>
+          </a:prstGeom>
+          <a:noFill/>
+        </p:spPr>
+        <p:txBody>
+          <a:bodyPr wrap="square" rtlCol="0">
+            <a:spAutoFit/>
+          </a:bodyPr>
+          <a:lstStyle/>
+          <a:p>
+            <a:pPr algn="ctr"/>
+            <a:r>
+              <a:rPr lang="en-AT" sz="1600" dirty="0"/>
+              <a:t>Barcelona</a:t>
+            </a:r>
+            <a:endParaRPr lang="de-AT" sz="1600" dirty="0"/>
+          </a:p>
+        </p:txBody>
+      </p:sp>
+      <p:sp>
+        <p:nvSpPr>
+          <p:cNvPr id="6" name="TextBox 5">
+            <a:extLst>
+              <a:ext uri="{FF2B5EF4-FFF2-40B4-BE49-F238E27FC236}">
+                <a16:creationId xmlns:a16="http://schemas.microsoft.com/office/drawing/2014/main" id="{8673677A-E9F7-7B1B-183A-191FACC6702D}"/>
+              </a:ext>
+            </a:extLst>
+          </p:cNvPr>
+          <p:cNvSpPr txBox="1"/>
+          <p:nvPr/>
+        </p:nvSpPr>
+        <p:spPr>
+          <a:xfrm rot="16200000">
+            <a:off x="-349854" y="4217130"/>
+            <a:ext cx="1976617" cy="338554"/>
+          </a:xfrm>
+          <a:prstGeom prst="rect">
+            <a:avLst/>
+          </a:prstGeom>
+          <a:noFill/>
+        </p:spPr>
+        <p:txBody>
+          <a:bodyPr wrap="square" rtlCol="0">
+            <a:spAutoFit/>
+          </a:bodyPr>
+          <a:lstStyle/>
+          <a:p>
+            <a:pPr algn="ctr"/>
+            <a:r>
+              <a:rPr lang="en-AT" sz="1600" dirty="0"/>
+              <a:t>Vienna</a:t>
+            </a:r>
+            <a:endParaRPr lang="de-AT" sz="1600" dirty="0"/>
+          </a:p>
+        </p:txBody>
+      </p:sp>
     </p:spTree>
     <p:extLst>
       <p:ext uri="{BB962C8B-B14F-4D97-AF65-F5344CB8AC3E}">
@@ -17128,10 +17099,72 @@
       </p:grpSpPr>
       <p:sp>
         <p:nvSpPr>
+          <p:cNvPr id="3" name="Footer Placeholder 2">
+            <a:extLst>
+              <a:ext uri="{FF2B5EF4-FFF2-40B4-BE49-F238E27FC236}">
+                <a16:creationId xmlns:a16="http://schemas.microsoft.com/office/drawing/2014/main" id="{BB83A407-A2C6-F9F6-D33C-7B55E5777289}"/>
+              </a:ext>
+            </a:extLst>
+          </p:cNvPr>
+          <p:cNvSpPr>
+            <a:spLocks noGrp="1"/>
+          </p:cNvSpPr>
+          <p:nvPr>
+            <p:ph type="ftr" sz="quarter" idx="11"/>
+          </p:nvPr>
+        </p:nvSpPr>
+        <p:spPr/>
+        <p:txBody>
+          <a:bodyPr/>
+          <a:lstStyle/>
+          <a:p>
+            <a:r>
+              <a:rPr lang="de-AT"/>
+              <a:t>Fusszeile</a:t>
+            </a:r>
+            <a:endParaRPr lang="de-AT" dirty="0"/>
+          </a:p>
+        </p:txBody>
+      </p:sp>
+      <p:sp>
+        <p:nvSpPr>
+          <p:cNvPr id="4" name="Slide Number Placeholder 3">
+            <a:extLst>
+              <a:ext uri="{FF2B5EF4-FFF2-40B4-BE49-F238E27FC236}">
+                <a16:creationId xmlns:a16="http://schemas.microsoft.com/office/drawing/2014/main" id="{175DE404-18FD-9E95-8B3D-ECE14D24A5DE}"/>
+              </a:ext>
+            </a:extLst>
+          </p:cNvPr>
+          <p:cNvSpPr>
+            <a:spLocks noGrp="1"/>
+          </p:cNvSpPr>
+          <p:nvPr>
+            <p:ph type="sldNum" sz="quarter" idx="12"/>
+          </p:nvPr>
+        </p:nvSpPr>
+        <p:spPr/>
+        <p:txBody>
+          <a:bodyPr/>
+          <a:lstStyle/>
+          <a:p>
+            <a:r>
+              <a:rPr lang="de-AT"/>
+              <a:t>SEITE </a:t>
+            </a:r>
+            <a:fld id="{BE3DC40E-DBBE-4E2D-9EEC-FBF0DA0E9179}" type="slidenum">
+              <a:rPr lang="de-AT" smtClean="0"/>
+              <a:t>18</a:t>
+            </a:fld>
+            <a:endParaRPr lang="de-AT" dirty="0"/>
+          </a:p>
+        </p:txBody>
+      </p:sp>
+      <p:sp>
+        <p:nvSpPr>
           <p:cNvPr id="5" name="Title 4">
             <a:extLst>
               <a:ext uri="{FF2B5EF4-FFF2-40B4-BE49-F238E27FC236}">
-                <a16:creationId xmlns:a16="http://schemas.microsoft.com/office/drawing/2014/main" id="{30B34AEE-C292-F9D9-E0D1-5FCDC45038F2}"/>
+                <a16:creationId xmlns:a16="http://schemas.microsoft.com/office/drawing/2014/main" id="{81FFDD39-91E7-3556-F113-129FFF91175A}"/>
               </a:ext>
             </a:extLst>
           </p:cNvPr>
@@ -17144,29 +17177,27 @@
         </p:nvSpPr>
         <p:spPr>
           <a:xfrm>
-            <a:off x="462408" y="139700"/>
+            <a:off x="462019" y="139700"/>
             <a:ext cx="6840000" cy="903822"/>
           </a:xfrm>
         </p:spPr>
         <p:txBody>
-          <a:bodyPr anchor="ctr">
-            <a:normAutofit/>
-          </a:bodyPr>
+          <a:bodyPr/>
           <a:lstStyle/>
           <a:p>
             <a:r>
-              <a:rPr lang="de-AT" sz="2800" dirty="0" err="1"/>
+              <a:rPr lang="de-AT" dirty="0" err="1"/>
               <a:t>Current</a:t>
             </a:r>
             <a:r>
-              <a:rPr lang="de-AT" sz="2800" dirty="0"/>
+              <a:rPr lang="de-AT" dirty="0"/>
               <a:t> </a:t>
             </a:r>
             <a:r>
-              <a:rPr lang="en-AT" sz="2800" dirty="0"/>
+              <a:rPr lang="en-AT" dirty="0"/>
               <a:t>Problems</a:t>
             </a:r>
-            <a:endParaRPr lang="de-AT" sz="2800" dirty="0"/>
+            <a:endParaRPr lang="de-AT" dirty="0"/>
           </a:p>
         </p:txBody>
       </p:sp>
@@ -17175,84 +17206,35 @@
           <p:cNvPr id="7" name="Content Placeholder 1">
             <a:extLst>
               <a:ext uri="{FF2B5EF4-FFF2-40B4-BE49-F238E27FC236}">
-                <a16:creationId xmlns:a16="http://schemas.microsoft.com/office/drawing/2014/main" id="{E5565217-4E53-ED8F-5CD3-B4F73A161F65}"/>
+                <a16:creationId xmlns:a16="http://schemas.microsoft.com/office/drawing/2014/main" id="{85EC6FBE-19D5-70F7-9F3D-0668411FCCDD}"/>
               </a:ext>
             </a:extLst>
           </p:cNvPr>
           <p:cNvGraphicFramePr>
-            <a:graphicFrameLocks noGrp="1"/>
+            <a:graphicFrameLocks/>
           </p:cNvGraphicFramePr>
           <p:nvPr>
-            <p:ph sz="quarter" idx="10"/>
             <p:extLst>
               <p:ext uri="{D42A27DB-BD31-4B8C-83A1-F6EECF244321}">
-                <p14:modId xmlns:p14="http://schemas.microsoft.com/office/powerpoint/2010/main" val="3661367616"/>
+                <p14:modId xmlns:p14="http://schemas.microsoft.com/office/powerpoint/2010/main" val="1413016806"/>
               </p:ext>
             </p:extLst>
           </p:nvPr>
         </p:nvGraphicFramePr>
         <p:xfrm>
-          <a:off x="466726" y="1268413"/>
-          <a:ext cx="8210547" cy="4230687"/>
+          <a:off x="466726" y="1233097"/>
+          <a:ext cx="8210547" cy="3989387"/>
         </p:xfrm>
         <a:graphic>
           <a:graphicData uri="http://schemas.openxmlformats.org/drawingml/2006/diagram">
-            <dgm:relIds xmlns:dgm="http://schemas.openxmlformats.org/drawingml/2006/diagram" xmlns:r="http://schemas.openxmlformats.org/officeDocument/2006/relationships" r:dm="rId3" r:lo="rId4" r:qs="rId5" r:cs="rId6"/>
+            <dgm:relIds xmlns:dgm="http://schemas.openxmlformats.org/drawingml/2006/diagram" xmlns:r="http://schemas.openxmlformats.org/officeDocument/2006/relationships" r:dm="rId2" r:lo="rId3" r:qs="rId4" r:cs="rId5"/>
           </a:graphicData>
         </a:graphic>
       </p:graphicFrame>
-      <p:sp>
-        <p:nvSpPr>
-          <p:cNvPr id="4" name="Slide Number Placeholder 3" hidden="1">
-            <a:extLst>
-              <a:ext uri="{FF2B5EF4-FFF2-40B4-BE49-F238E27FC236}">
-                <a16:creationId xmlns:a16="http://schemas.microsoft.com/office/drawing/2014/main" id="{106B0CDD-22CD-F2C3-CDA9-CB13E464927D}"/>
-              </a:ext>
-            </a:extLst>
-          </p:cNvPr>
-          <p:cNvSpPr>
-            <a:spLocks noGrp="1"/>
-          </p:cNvSpPr>
-          <p:nvPr>
-            <p:ph type="sldNum" sz="quarter" idx="4294967295"/>
-          </p:nvPr>
-        </p:nvSpPr>
-        <p:spPr>
-          <a:xfrm>
-            <a:off x="462407" y="5412059"/>
-            <a:ext cx="892150" cy="258085"/>
-          </a:xfrm>
-        </p:spPr>
-        <p:txBody>
-          <a:bodyPr/>
-          <a:lstStyle/>
-          <a:p>
-            <a:pPr>
-              <a:spcAft>
-                <a:spcPts val="600"/>
-              </a:spcAft>
-            </a:pPr>
-            <a:r>
-              <a:rPr lang="de-AT"/>
-              <a:t>SEITE </a:t>
-            </a:r>
-            <a:fld id="{BE3DC40E-DBBE-4E2D-9EEC-FBF0DA0E9179}" type="slidenum">
-              <a:rPr lang="de-AT" smtClean="0"/>
-              <a:pPr>
-                <a:spcAft>
-                  <a:spcPts val="600"/>
-                </a:spcAft>
-              </a:pPr>
-              <a:t>18</a:t>
-            </a:fld>
-            <a:endParaRPr lang="de-AT"/>
-          </a:p>
-        </p:txBody>
-      </p:sp>
     </p:spTree>
     <p:extLst>
       <p:ext uri="{BB962C8B-B14F-4D97-AF65-F5344CB8AC3E}">
-        <p14:creationId xmlns:p14="http://schemas.microsoft.com/office/powerpoint/2010/main" val="1228913258"/>
+        <p14:creationId xmlns:p14="http://schemas.microsoft.com/office/powerpoint/2010/main" val="777702214"/>
       </p:ext>
     </p:extLst>
   </p:cSld>
@@ -17284,10 +17266,72 @@
       </p:grpSpPr>
       <p:sp>
         <p:nvSpPr>
-          <p:cNvPr id="3" name="Title 2">
+          <p:cNvPr id="3" name="Footer Placeholder 2">
             <a:extLst>
               <a:ext uri="{FF2B5EF4-FFF2-40B4-BE49-F238E27FC236}">
-                <a16:creationId xmlns:a16="http://schemas.microsoft.com/office/drawing/2014/main" id="{33F1F7C6-7903-D01E-7211-CE0250929C3F}"/>
+                <a16:creationId xmlns:a16="http://schemas.microsoft.com/office/drawing/2014/main" id="{4E6A2416-C96A-1CF8-1902-9D486F0BF144}"/>
+              </a:ext>
+            </a:extLst>
+          </p:cNvPr>
+          <p:cNvSpPr>
+            <a:spLocks noGrp="1"/>
+          </p:cNvSpPr>
+          <p:nvPr>
+            <p:ph type="ftr" sz="quarter" idx="11"/>
+          </p:nvPr>
+        </p:nvSpPr>
+        <p:spPr/>
+        <p:txBody>
+          <a:bodyPr/>
+          <a:lstStyle/>
+          <a:p>
+            <a:r>
+              <a:rPr lang="de-AT"/>
+              <a:t>Fusszeile</a:t>
+            </a:r>
+            <a:endParaRPr lang="de-AT" dirty="0"/>
+          </a:p>
+        </p:txBody>
+      </p:sp>
+      <p:sp>
+        <p:nvSpPr>
+          <p:cNvPr id="4" name="Slide Number Placeholder 3">
+            <a:extLst>
+              <a:ext uri="{FF2B5EF4-FFF2-40B4-BE49-F238E27FC236}">
+                <a16:creationId xmlns:a16="http://schemas.microsoft.com/office/drawing/2014/main" id="{A80C1CE1-BAEB-8A99-47AA-B12855601DB7}"/>
+              </a:ext>
+            </a:extLst>
+          </p:cNvPr>
+          <p:cNvSpPr>
+            <a:spLocks noGrp="1"/>
+          </p:cNvSpPr>
+          <p:nvPr>
+            <p:ph type="sldNum" sz="quarter" idx="12"/>
+          </p:nvPr>
+        </p:nvSpPr>
+        <p:spPr/>
+        <p:txBody>
+          <a:bodyPr/>
+          <a:lstStyle/>
+          <a:p>
+            <a:r>
+              <a:rPr lang="de-AT"/>
+              <a:t>SEITE </a:t>
+            </a:r>
+            <a:fld id="{BE3DC40E-DBBE-4E2D-9EEC-FBF0DA0E9179}" type="slidenum">
+              <a:rPr lang="de-AT" smtClean="0"/>
+              <a:t>19</a:t>
+            </a:fld>
+            <a:endParaRPr lang="de-AT" dirty="0"/>
+          </a:p>
+        </p:txBody>
+      </p:sp>
+      <p:sp>
+        <p:nvSpPr>
+          <p:cNvPr id="5" name="Title 4">
+            <a:extLst>
+              <a:ext uri="{FF2B5EF4-FFF2-40B4-BE49-F238E27FC236}">
+                <a16:creationId xmlns:a16="http://schemas.microsoft.com/office/drawing/2014/main" id="{2C87E4F7-B898-81A6-DABB-E44B9004B45E}"/>
               </a:ext>
             </a:extLst>
           </p:cNvPr>
@@ -17304,9 +17348,10 @@
           <a:lstStyle/>
           <a:p>
             <a:r>
-              <a:rPr lang="de-AT" dirty="0"/>
-              <a:t>Future Plans</a:t>
-            </a:r>
+              <a:rPr lang="en-AT" dirty="0"/>
+              <a:t>Follow Up</a:t>
+            </a:r>
+            <a:endParaRPr lang="de-AT" dirty="0"/>
           </a:p>
         </p:txBody>
       </p:sp>
@@ -17315,7 +17360,7 @@
           <p:cNvPr id="6" name="Content Placeholder 1">
             <a:extLst>
               <a:ext uri="{FF2B5EF4-FFF2-40B4-BE49-F238E27FC236}">
-                <a16:creationId xmlns:a16="http://schemas.microsoft.com/office/drawing/2014/main" id="{9A8E3442-5812-F8AF-D7AD-7EFE989E487F}"/>
+                <a16:creationId xmlns:a16="http://schemas.microsoft.com/office/drawing/2014/main" id="{379F8EEB-8A49-D9BC-8CC4-9F001C63A0DC}"/>
               </a:ext>
             </a:extLst>
           </p:cNvPr>
@@ -17326,7 +17371,7 @@
         </p:nvSpPr>
         <p:spPr>
           <a:xfrm>
-            <a:off x="692178" y="1476105"/>
+            <a:off x="462407" y="1300838"/>
             <a:ext cx="7759644" cy="3853905"/>
           </a:xfrm>
           <a:prstGeom prst="rect">
@@ -17335,7 +17380,7 @@
         </p:spPr>
         <p:txBody>
           <a:bodyPr>
-            <a:normAutofit/>
+            <a:normAutofit lnSpcReduction="10000"/>
           </a:bodyPr>
           <a:lstStyle>
             <a:lvl1pPr marL="266700" indent="-266700" algn="l" defTabSz="914306" rtl="0" eaLnBrk="1" latinLnBrk="0" hangingPunct="1">
@@ -17522,152 +17567,174 @@
           </a:lstStyle>
           <a:p>
             <a:r>
-              <a:rPr lang="de-AT" sz="2000" dirty="0" err="1"/>
+              <a:rPr lang="de-AT" sz="2200" dirty="0" err="1"/>
               <a:t>Inclusion</a:t>
             </a:r>
             <a:r>
-              <a:rPr lang="de-AT" sz="2000" dirty="0"/>
+              <a:rPr lang="de-AT" sz="2200" dirty="0"/>
               <a:t> </a:t>
             </a:r>
             <a:r>
-              <a:rPr lang="de-AT" sz="2000" dirty="0" err="1"/>
+              <a:rPr lang="de-AT" sz="2200" dirty="0" err="1"/>
               <a:t>of</a:t>
             </a:r>
             <a:r>
-              <a:rPr lang="de-AT" sz="2000" dirty="0"/>
+              <a:rPr lang="de-AT" sz="2200" dirty="0"/>
               <a:t> OSM </a:t>
             </a:r>
             <a:r>
-              <a:rPr lang="de-AT" sz="2000" dirty="0" err="1"/>
+              <a:rPr lang="de-AT" sz="2200" dirty="0" err="1"/>
               <a:t>data</a:t>
             </a:r>
-            <a:endParaRPr lang="de-AT" sz="2000" dirty="0"/>
+            <a:endParaRPr lang="de-AT" sz="2200" dirty="0"/>
           </a:p>
           <a:p>
             <a:pPr lvl="1"/>
             <a:r>
-              <a:rPr lang="de-AT" sz="1900" dirty="0"/>
+              <a:rPr lang="de-AT" sz="2200" dirty="0"/>
               <a:t>Classification: </a:t>
             </a:r>
             <a:r>
-              <a:rPr lang="de-AT" sz="1900" dirty="0" err="1"/>
+              <a:rPr lang="de-AT" sz="2200" dirty="0" err="1"/>
               <a:t>predicting</a:t>
             </a:r>
             <a:r>
-              <a:rPr lang="de-AT" sz="1900" dirty="0"/>
+              <a:rPr lang="de-AT" sz="2200" dirty="0"/>
               <a:t> different </a:t>
             </a:r>
             <a:r>
-              <a:rPr lang="de-AT" sz="1900" dirty="0" err="1"/>
+              <a:rPr lang="de-AT" sz="2200" dirty="0" err="1"/>
               <a:t>structure</a:t>
             </a:r>
             <a:r>
-              <a:rPr lang="de-AT" sz="1900" dirty="0"/>
+              <a:rPr lang="de-AT" sz="2200" dirty="0"/>
               <a:t> </a:t>
             </a:r>
             <a:r>
-              <a:rPr lang="de-AT" sz="1900" dirty="0" err="1"/>
+              <a:rPr lang="de-AT" sz="2200" dirty="0" err="1"/>
               <a:t>types</a:t>
             </a:r>
-            <a:endParaRPr lang="de-AT" sz="1900" dirty="0"/>
+            <a:endParaRPr lang="de-AT" sz="2200" dirty="0"/>
           </a:p>
           <a:p>
             <a:pPr lvl="1"/>
             <a:r>
-              <a:rPr lang="de-AT" sz="1900" dirty="0"/>
+              <a:rPr lang="de-AT" sz="2200" dirty="0"/>
               <a:t>Regression: </a:t>
             </a:r>
             <a:r>
-              <a:rPr lang="de-AT" sz="1900" dirty="0" err="1"/>
+              <a:rPr lang="de-AT" sz="2200" dirty="0" err="1"/>
               <a:t>predicting</a:t>
             </a:r>
             <a:r>
-              <a:rPr lang="de-AT" sz="1900" dirty="0"/>
+              <a:rPr lang="de-AT" sz="2200" dirty="0"/>
               <a:t> </a:t>
             </a:r>
             <a:r>
-              <a:rPr lang="de-AT" sz="1900" dirty="0" err="1"/>
+              <a:rPr lang="de-AT" sz="2200" dirty="0" err="1"/>
               <a:t>number</a:t>
             </a:r>
             <a:r>
-              <a:rPr lang="de-AT" sz="1900" dirty="0"/>
+              <a:rPr lang="de-AT" sz="2200" dirty="0"/>
               <a:t> </a:t>
             </a:r>
             <a:r>
-              <a:rPr lang="de-AT" sz="1900" dirty="0" err="1"/>
+              <a:rPr lang="de-AT" sz="2200" dirty="0" err="1"/>
               <a:t>of</a:t>
             </a:r>
             <a:r>
-              <a:rPr lang="de-AT" sz="1900" dirty="0"/>
+              <a:rPr lang="de-AT" sz="2200" dirty="0"/>
               <a:t> </a:t>
             </a:r>
             <a:r>
-              <a:rPr lang="de-AT" sz="1900" dirty="0" err="1"/>
+              <a:rPr lang="de-AT" sz="2200" dirty="0" err="1"/>
               <a:t>trees</a:t>
             </a:r>
             <a:r>
-              <a:rPr lang="de-AT" sz="1900" dirty="0"/>
+              <a:rPr lang="de-AT" sz="2200" dirty="0"/>
               <a:t> </a:t>
             </a:r>
             <a:r>
-              <a:rPr lang="de-AT" sz="1900" dirty="0" err="1"/>
+              <a:rPr lang="de-AT" sz="2200" dirty="0" err="1"/>
               <a:t>using</a:t>
             </a:r>
             <a:r>
-              <a:rPr lang="de-AT" sz="1900" dirty="0"/>
+              <a:rPr lang="de-AT" sz="2200" dirty="0"/>
               <a:t> different </a:t>
             </a:r>
             <a:r>
-              <a:rPr lang="de-AT" sz="1900" dirty="0" err="1"/>
+              <a:rPr lang="de-AT" sz="2200" dirty="0" err="1"/>
               <a:t>structure</a:t>
             </a:r>
             <a:r>
-              <a:rPr lang="de-AT" sz="1900" dirty="0"/>
+              <a:rPr lang="de-AT" sz="2200" dirty="0"/>
               <a:t> </a:t>
             </a:r>
             <a:r>
-              <a:rPr lang="de-AT" sz="1900" dirty="0" err="1"/>
+              <a:rPr lang="de-AT" sz="2200" dirty="0" err="1"/>
               <a:t>types</a:t>
             </a:r>
-            <a:endParaRPr lang="de-AT" sz="1900" dirty="0"/>
-          </a:p>
-          <a:p>
-            <a:r>
-              <a:rPr lang="de-AT" sz="2000" dirty="0"/>
+            <a:endParaRPr lang="en-AT" sz="2200" dirty="0"/>
+          </a:p>
+          <a:p>
+            <a:pPr lvl="1"/>
+            <a:endParaRPr lang="de-AT" sz="2200" dirty="0"/>
+          </a:p>
+          <a:p>
+            <a:r>
+              <a:rPr lang="de-AT" sz="2200" dirty="0"/>
               <a:t>Train larger </a:t>
             </a:r>
             <a:r>
-              <a:rPr lang="de-AT" sz="2000" dirty="0" err="1"/>
+              <a:rPr lang="de-AT" sz="2200" dirty="0" err="1"/>
               <a:t>model</a:t>
             </a:r>
             <a:r>
-              <a:rPr lang="de-AT" sz="2000" dirty="0"/>
+              <a:rPr lang="de-AT" sz="2200" dirty="0"/>
               <a:t> </a:t>
             </a:r>
             <a:r>
-              <a:rPr lang="de-AT" sz="2000" dirty="0" err="1"/>
+              <a:rPr lang="de-AT" sz="2200" dirty="0" err="1"/>
               <a:t>for</a:t>
             </a:r>
             <a:r>
-              <a:rPr lang="de-AT" sz="2000" dirty="0"/>
+              <a:rPr lang="de-AT" sz="2200" dirty="0"/>
               <a:t> </a:t>
             </a:r>
             <a:r>
-              <a:rPr lang="de-AT" sz="2000" dirty="0" err="1"/>
-              <a:t>more</a:t>
-            </a:r>
-            <a:r>
-              <a:rPr lang="de-AT" sz="2000" dirty="0"/>
+              <a:rPr lang="en-AT" sz="2200" dirty="0"/>
+              <a:t>longer</a:t>
+            </a:r>
+            <a:r>
+              <a:rPr lang="de-AT" sz="2200" dirty="0"/>
               <a:t> time</a:t>
             </a:r>
-            <a:endParaRPr lang="en-AT" sz="2000" dirty="0"/>
+            <a:endParaRPr lang="en-AT" sz="2200" dirty="0"/>
+          </a:p>
+          <a:p>
+            <a:endParaRPr lang="en-AT" sz="2200" dirty="0"/>
+          </a:p>
+          <a:p>
+            <a:r>
+              <a:rPr lang="en-AT" sz="2200" dirty="0"/>
+              <a:t>Pick best model to create tree cadastre database</a:t>
+            </a:r>
+          </a:p>
+          <a:p>
+            <a:endParaRPr lang="en-AT" sz="2200" dirty="0"/>
+          </a:p>
+          <a:p>
+            <a:r>
+              <a:rPr lang="en-AT" sz="2200" dirty="0"/>
+              <a:t>Scrape new sentinel images to test model</a:t>
+            </a:r>
           </a:p>
         </p:txBody>
       </p:sp>
     </p:spTree>
     <p:extLst>
       <p:ext uri="{BB962C8B-B14F-4D97-AF65-F5344CB8AC3E}">
-        <p14:creationId xmlns:p14="http://schemas.microsoft.com/office/powerpoint/2010/main" val="692227241"/>
+        <p14:creationId xmlns:p14="http://schemas.microsoft.com/office/powerpoint/2010/main" val="934764725"/>
       </p:ext>
     </p:extLst>
   </p:cSld>
@@ -17814,16 +17881,26 @@
               <a:buChar char="•"/>
             </a:pPr>
             <a:r>
-              <a:rPr lang="de-AT" sz="2400" u="sng" dirty="0" err="1"/>
+              <a:rPr lang="de-AT" sz="2400" dirty="0" err="1"/>
               <a:t>Current</a:t>
             </a:r>
             <a:r>
-              <a:rPr lang="de-AT" sz="2400" u="sng" dirty="0"/>
+              <a:rPr lang="de-AT" sz="2400" dirty="0"/>
               <a:t> </a:t>
             </a:r>
             <a:r>
-              <a:rPr lang="en-AT" sz="2400" u="sng" dirty="0"/>
+              <a:rPr lang="en-AT" sz="2400" dirty="0"/>
               <a:t>Problems</a:t>
+            </a:r>
+          </a:p>
+          <a:p>
+            <a:pPr>
+              <a:buFont typeface="Arial" panose="020B0604020202020204" pitchFamily="34" charset="0"/>
+              <a:buChar char="•"/>
+            </a:pPr>
+            <a:r>
+              <a:rPr lang="en-AT" sz="2400" dirty="0"/>
+              <a:t>Follow Up</a:t>
             </a:r>
           </a:p>
           <a:p>
@@ -17960,10 +18037,10 @@
       </p:grpSpPr>
       <p:sp>
         <p:nvSpPr>
-          <p:cNvPr id="2" name="Content Placeholder 1">
+          <p:cNvPr id="10" name="Text Placeholder 1">
             <a:extLst>
               <a:ext uri="{FF2B5EF4-FFF2-40B4-BE49-F238E27FC236}">
-                <a16:creationId xmlns:a16="http://schemas.microsoft.com/office/drawing/2014/main" id="{D49693A6-9344-C5E4-3755-8973C9E05706}"/>
+                <a16:creationId xmlns:a16="http://schemas.microsoft.com/office/drawing/2014/main" id="{A72D61DB-091D-4DEA-536C-D956BEB5BF5D}"/>
               </a:ext>
             </a:extLst>
           </p:cNvPr>
@@ -17971,15 +18048,94 @@
             <a:spLocks noGrp="1"/>
           </p:cNvSpPr>
           <p:nvPr>
-            <p:ph idx="1"/>
+            <p:ph type="body" sz="quarter" idx="11"/>
           </p:nvPr>
         </p:nvSpPr>
-        <p:spPr/>
+        <p:spPr>
+          <a:xfrm>
+            <a:off x="287338" y="2941638"/>
+            <a:ext cx="4284662" cy="620885"/>
+          </a:xfrm>
+        </p:spPr>
         <p:txBody>
           <a:bodyPr/>
           <a:lstStyle/>
           <a:p>
-            <a:endParaRPr lang="de-AT"/>
+            <a:endParaRPr lang="en-US"/>
+          </a:p>
+        </p:txBody>
+      </p:sp>
+      <p:sp>
+        <p:nvSpPr>
+          <p:cNvPr id="5" name="Title 4">
+            <a:extLst>
+              <a:ext uri="{FF2B5EF4-FFF2-40B4-BE49-F238E27FC236}">
+                <a16:creationId xmlns:a16="http://schemas.microsoft.com/office/drawing/2014/main" id="{E17993FF-05FC-40D7-1E06-61B1A287DAB8}"/>
+              </a:ext>
+            </a:extLst>
+          </p:cNvPr>
+          <p:cNvSpPr>
+            <a:spLocks noGrp="1"/>
+          </p:cNvSpPr>
+          <p:nvPr>
+            <p:ph type="ctrTitle"/>
+          </p:nvPr>
+        </p:nvSpPr>
+        <p:spPr>
+          <a:xfrm>
+            <a:off x="605406" y="1301365"/>
+            <a:ext cx="5436000" cy="1026000"/>
+          </a:xfrm>
+        </p:spPr>
+        <p:txBody>
+          <a:bodyPr anchor="ctr">
+            <a:normAutofit/>
+          </a:bodyPr>
+          <a:lstStyle/>
+          <a:p>
+            <a:r>
+              <a:rPr lang="en-AT" dirty="0"/>
+              <a:t>Thanks for your attention</a:t>
+            </a:r>
+            <a:endParaRPr lang="de-AT" dirty="0"/>
+          </a:p>
+        </p:txBody>
+      </p:sp>
+      <p:sp>
+        <p:nvSpPr>
+          <p:cNvPr id="12" name="Footer Placeholder 3">
+            <a:extLst>
+              <a:ext uri="{FF2B5EF4-FFF2-40B4-BE49-F238E27FC236}">
+                <a16:creationId xmlns:a16="http://schemas.microsoft.com/office/drawing/2014/main" id="{F702F2FA-53E9-800F-FD5A-2A35CB1F23CE}"/>
+              </a:ext>
+            </a:extLst>
+          </p:cNvPr>
+          <p:cNvSpPr>
+            <a:spLocks noGrp="1"/>
+          </p:cNvSpPr>
+          <p:nvPr>
+            <p:ph type="ftr" sz="quarter" idx="14"/>
+          </p:nvPr>
+        </p:nvSpPr>
+        <p:spPr>
+          <a:xfrm>
+            <a:off x="1354561" y="5412059"/>
+            <a:ext cx="3217443" cy="258085"/>
+          </a:xfrm>
+        </p:spPr>
+        <p:txBody>
+          <a:bodyPr/>
+          <a:lstStyle/>
+          <a:p>
+            <a:pPr>
+              <a:spcAft>
+                <a:spcPts val="600"/>
+              </a:spcAft>
+            </a:pPr>
+            <a:r>
+              <a:rPr lang="de-AT"/>
+              <a:t>Fusszeile</a:t>
+            </a:r>
           </a:p>
         </p:txBody>
       </p:sp>
@@ -17996,54 +18152,40 @@
             <a:spLocks noGrp="1"/>
           </p:cNvSpPr>
           <p:nvPr>
-            <p:ph type="sldNum" sz="quarter" idx="12"/>
+            <p:ph type="sldNum" sz="quarter" idx="15"/>
           </p:nvPr>
         </p:nvSpPr>
-        <p:spPr/>
+        <p:spPr>
+          <a:xfrm>
+            <a:off x="462407" y="5412059"/>
+            <a:ext cx="892150" cy="258085"/>
+          </a:xfrm>
+        </p:spPr>
         <p:txBody>
-          <a:bodyPr/>
-          <a:lstStyle/>
-          <a:p>
-            <a:r>
-              <a:rPr lang="de-AT"/>
-              <a:t>SEITE </a:t>
-            </a:r>
-            <a:fld id="{BE3DC40E-DBBE-4E2D-9EEC-FBF0DA0E9179}" type="slidenum">
-              <a:rPr lang="de-AT" smtClean="0"/>
-              <a:t>20</a:t>
-            </a:fld>
-            <a:endParaRPr lang="de-AT" dirty="0"/>
-          </a:p>
-        </p:txBody>
-      </p:sp>
-      <p:sp>
-        <p:nvSpPr>
-          <p:cNvPr id="5" name="Title 4">
-            <a:extLst>
-              <a:ext uri="{FF2B5EF4-FFF2-40B4-BE49-F238E27FC236}">
-                <a16:creationId xmlns:a16="http://schemas.microsoft.com/office/drawing/2014/main" id="{E17993FF-05FC-40D7-1E06-61B1A287DAB8}"/>
-              </a:ext>
-            </a:extLst>
-          </p:cNvPr>
-          <p:cNvSpPr>
-            <a:spLocks noGrp="1"/>
-          </p:cNvSpPr>
-          <p:nvPr>
-            <p:ph type="title"/>
-          </p:nvPr>
-        </p:nvSpPr>
-        <p:spPr/>
-        <p:txBody>
-          <a:bodyPr>
+          <a:bodyPr anchor="ctr">
             <a:normAutofit/>
           </a:bodyPr>
           <a:lstStyle/>
           <a:p>
-            <a:r>
-              <a:rPr lang="en-AT" sz="2800" dirty="0"/>
-              <a:t>Discussion</a:t>
-            </a:r>
-            <a:endParaRPr lang="de-AT" sz="2800" dirty="0"/>
+            <a:pPr>
+              <a:spcAft>
+                <a:spcPts val="600"/>
+              </a:spcAft>
+            </a:pPr>
+            <a:r>
+              <a:rPr lang="de-AT"/>
+              <a:t>SEITE </a:t>
+            </a:r>
+            <a:fld id="{BE3DC40E-DBBE-4E2D-9EEC-FBF0DA0E9179}" type="slidenum">
+              <a:rPr lang="de-AT" smtClean="0"/>
+              <a:pPr>
+                <a:spcAft>
+                  <a:spcPts val="600"/>
+                </a:spcAft>
+              </a:pPr>
+              <a:t>20</a:t>
+            </a:fld>
+            <a:endParaRPr lang="de-AT"/>
           </a:p>
         </p:txBody>
       </p:sp>
@@ -20389,6 +20531,48 @@
 </file>
 
 <file path=customXml/item2.xml><?xml version="1.0" encoding="utf-8"?>
+<p:properties xmlns:p="http://schemas.microsoft.com/office/2006/metadata/properties" xmlns:xsi="http://www.w3.org/2001/XMLSchema-instance" xmlns:pc="http://schemas.microsoft.com/office/infopath/2007/PartnerControls">
+  <documentManagement>
+    <Kategorie xmlns="dde413db-0745-4f3a-8dca-564dc7ff6f7d">Präsentationen</Kategorie>
+    <Beschreibung xmlns="dde413db-0745-4f3a-8dca-564dc7ff6f7d">Musterpräsentation im Format 16:10 (= WU Standard)</Beschreibung>
+    <TaxCatchAll xmlns="08b0a3ee-3d2a-451c-9a1a-7e5d5b0c9c77">
+      <Value>266</Value>
+      <Value>403</Value>
+    </TaxCatchAll>
+    <DokumentenartTaxHTField0 xmlns="1a8d9a65-8471-4209-a900-f8e11db75e0a">
+      <Terms xmlns="http://schemas.microsoft.com/office/infopath/2007/PartnerControls">
+        <TermInfo xmlns="http://schemas.microsoft.com/office/infopath/2007/PartnerControls">
+          <TermName xmlns="http://schemas.microsoft.com/office/infopath/2007/PartnerControls">Vorlagen</TermName>
+          <TermId xmlns="http://schemas.microsoft.com/office/infopath/2007/PartnerControls">17fc50ed-8ad1-47be-ab12-04243fd74ddb</TermId>
+        </TermInfo>
+      </Terms>
+    </DokumentenartTaxHTField0>
+    <WU_x0020_ThemaTaxHTField0 xmlns="1a8d9a65-8471-4209-a900-f8e11db75e0a">
+      <Terms xmlns="http://schemas.microsoft.com/office/infopath/2007/PartnerControls">
+        <TermInfo xmlns="http://schemas.microsoft.com/office/infopath/2007/PartnerControls">
+          <TermName xmlns="http://schemas.microsoft.com/office/infopath/2007/PartnerControls">Corporate Design</TermName>
+          <TermId xmlns="http://schemas.microsoft.com/office/infopath/2007/PartnerControls">19895bcd-b158-45ae-ab7b-f5ca217dfcec</TermId>
+        </TermInfo>
+      </Terms>
+    </WU_x0020_ThemaTaxHTField0>
+    <Format xmlns="dde413db-0745-4f3a-8dca-564dc7ff6f7d">Microsoft Office 2013/2016</Format>
+    <SharedWithUsers xmlns="08b0a3ee-3d2a-451c-9a1a-7e5d5b0c9c77">
+      <UserInfo>
+        <DisplayName>Hernandez Perez, Laura</DisplayName>
+        <AccountId>6100</AccountId>
+        <AccountType/>
+      </UserInfo>
+      <UserInfo>
+        <DisplayName>Hermann, Anett</DisplayName>
+        <AccountId>2869</AccountId>
+        <AccountType/>
+      </UserInfo>
+    </SharedWithUsers>
+  </documentManagement>
+</p:properties>
+</file>
+
+<file path=customXml/item3.xml><?xml version="1.0" encoding="utf-8"?>
 <ct:contentTypeSchema xmlns:ct="http://schemas.microsoft.com/office/2006/metadata/contentType" xmlns:ma="http://schemas.microsoft.com/office/2006/metadata/properties/metaAttributes" ct:_="" ma:_="" ma:contentTypeName="Dokument" ma:contentTypeID="0x010100BCF651A35DF3154DB01328AF51148DAE" ma:contentTypeVersion="2" ma:contentTypeDescription="Ein neues Dokument erstellen." ma:contentTypeScope="" ma:versionID="b5ccb5bb211b6ddcc624790d84f2bb9f">
   <xsd:schema xmlns:xsd="http://www.w3.org/2001/XMLSchema" xmlns:xs="http://www.w3.org/2001/XMLSchema" xmlns:p="http://schemas.microsoft.com/office/2006/metadata/properties" xmlns:ns2="1a8d9a65-8471-4209-a900-f8e11db75e0a" xmlns:ns3="08b0a3ee-3d2a-451c-9a1a-7e5d5b0c9c77" xmlns:ns4="dde413db-0745-4f3a-8dca-564dc7ff6f7d" targetNamespace="http://schemas.microsoft.com/office/2006/metadata/properties" ma:root="true" ma:fieldsID="046596c9011a87760a505164f9d920d3" ns2:_="" ns3:_="" ns4:_="">
     <xsd:import namespace="1a8d9a65-8471-4209-a900-f8e11db75e0a"/>
@@ -20619,48 +20803,6 @@
 </ct:contentTypeSchema>
 </file>
 
-<file path=customXml/item3.xml><?xml version="1.0" encoding="utf-8"?>
-<p:properties xmlns:p="http://schemas.microsoft.com/office/2006/metadata/properties" xmlns:xsi="http://www.w3.org/2001/XMLSchema-instance" xmlns:pc="http://schemas.microsoft.com/office/infopath/2007/PartnerControls">
-  <documentManagement>
-    <Kategorie xmlns="dde413db-0745-4f3a-8dca-564dc7ff6f7d">Präsentationen</Kategorie>
-    <Beschreibung xmlns="dde413db-0745-4f3a-8dca-564dc7ff6f7d">Musterpräsentation im Format 16:10 (= WU Standard)</Beschreibung>
-    <TaxCatchAll xmlns="08b0a3ee-3d2a-451c-9a1a-7e5d5b0c9c77">
-      <Value>266</Value>
-      <Value>403</Value>
-    </TaxCatchAll>
-    <DokumentenartTaxHTField0 xmlns="1a8d9a65-8471-4209-a900-f8e11db75e0a">
-      <Terms xmlns="http://schemas.microsoft.com/office/infopath/2007/PartnerControls">
-        <TermInfo xmlns="http://schemas.microsoft.com/office/infopath/2007/PartnerControls">
-          <TermName xmlns="http://schemas.microsoft.com/office/infopath/2007/PartnerControls">Vorlagen</TermName>
-          <TermId xmlns="http://schemas.microsoft.com/office/infopath/2007/PartnerControls">17fc50ed-8ad1-47be-ab12-04243fd74ddb</TermId>
-        </TermInfo>
-      </Terms>
-    </DokumentenartTaxHTField0>
-    <WU_x0020_ThemaTaxHTField0 xmlns="1a8d9a65-8471-4209-a900-f8e11db75e0a">
-      <Terms xmlns="http://schemas.microsoft.com/office/infopath/2007/PartnerControls">
-        <TermInfo xmlns="http://schemas.microsoft.com/office/infopath/2007/PartnerControls">
-          <TermName xmlns="http://schemas.microsoft.com/office/infopath/2007/PartnerControls">Corporate Design</TermName>
-          <TermId xmlns="http://schemas.microsoft.com/office/infopath/2007/PartnerControls">19895bcd-b158-45ae-ab7b-f5ca217dfcec</TermId>
-        </TermInfo>
-      </Terms>
-    </WU_x0020_ThemaTaxHTField0>
-    <Format xmlns="dde413db-0745-4f3a-8dca-564dc7ff6f7d">Microsoft Office 2013/2016</Format>
-    <SharedWithUsers xmlns="08b0a3ee-3d2a-451c-9a1a-7e5d5b0c9c77">
-      <UserInfo>
-        <DisplayName>Hernandez Perez, Laura</DisplayName>
-        <AccountId>6100</AccountId>
-        <AccountType/>
-      </UserInfo>
-      <UserInfo>
-        <DisplayName>Hermann, Anett</DisplayName>
-        <AccountId>2869</AccountId>
-        <AccountType/>
-      </UserInfo>
-    </SharedWithUsers>
-  </documentManagement>
-</p:properties>
-</file>
-
 <file path=customXml/itemProps1.xml><?xml version="1.0" encoding="utf-8"?>
 <ds:datastoreItem xmlns:ds="http://schemas.openxmlformats.org/officeDocument/2006/customXml" ds:itemID="{9346B3ED-06B1-4DE8-9648-0F78B5B453B2}">
   <ds:schemaRefs>
@@ -20670,6 +20812,24 @@
 </file>
 
 <file path=customXml/itemProps2.xml><?xml version="1.0" encoding="utf-8"?>
+<ds:datastoreItem xmlns:ds="http://schemas.openxmlformats.org/officeDocument/2006/customXml" ds:itemID="{BF58DFAF-C9AD-4CE5-A221-45D64FB05328}">
+  <ds:schemaRefs>
+    <ds:schemaRef ds:uri="08b0a3ee-3d2a-451c-9a1a-7e5d5b0c9c77"/>
+    <ds:schemaRef ds:uri="http://purl.org/dc/terms/"/>
+    <ds:schemaRef ds:uri="http://schemas.microsoft.com/office/infopath/2007/PartnerControls"/>
+    <ds:schemaRef ds:uri="http://schemas.microsoft.com/office/2006/metadata/properties"/>
+    <ds:schemaRef ds:uri="http://purl.org/dc/elements/1.1/"/>
+    <ds:schemaRef ds:uri="http://www.w3.org/XML/1998/namespace"/>
+    <ds:schemaRef ds:uri="http://schemas.microsoft.com/office/2006/documentManagement/types"/>
+    <ds:schemaRef ds:uri="http://schemas.openxmlformats.org/package/2006/metadata/core-properties"/>
+    <ds:schemaRef ds:uri="dde413db-0745-4f3a-8dca-564dc7ff6f7d"/>
+    <ds:schemaRef ds:uri="1a8d9a65-8471-4209-a900-f8e11db75e0a"/>
+    <ds:schemaRef ds:uri="http://purl.org/dc/dcmitype/"/>
+  </ds:schemaRefs>
+</ds:datastoreItem>
+</file>
+
+<file path=customXml/itemProps3.xml><?xml version="1.0" encoding="utf-8"?>
 <ds:datastoreItem xmlns:ds="http://schemas.openxmlformats.org/officeDocument/2006/customXml" ds:itemID="{069B4889-3CCA-46C6-8FD4-B0AB941A4B59}">
   <ds:schemaRefs>
     <ds:schemaRef ds:uri="http://schemas.microsoft.com/office/2006/metadata/contentType"/>
@@ -20687,16 +20847,4 @@
     <ds:schemaRef ds:uri="http://schemas.microsoft.com/internal/obd"/>
   </ds:schemaRefs>
 </ds:datastoreItem>
-</file>
-
-<file path=customXml/itemProps3.xml><?xml version="1.0" encoding="utf-8"?>
-<ds:datastoreItem xmlns:ds="http://schemas.openxmlformats.org/officeDocument/2006/customXml" ds:itemID="{BF58DFAF-C9AD-4CE5-A221-45D64FB05328}">
-  <ds:schemaRefs>
-    <ds:schemaRef ds:uri="http://schemas.microsoft.com/office/2006/metadata/properties"/>
-    <ds:schemaRef ds:uri="http://schemas.microsoft.com/office/infopath/2007/PartnerControls"/>
-    <ds:schemaRef ds:uri="dde413db-0745-4f3a-8dca-564dc7ff6f7d"/>
-    <ds:schemaRef ds:uri="08b0a3ee-3d2a-451c-9a1a-7e5d5b0c9c77"/>
-    <ds:schemaRef ds:uri="1a8d9a65-8471-4209-a900-f8e11db75e0a"/>
-  </ds:schemaRefs>
-</ds:datastoreItem>
 </file>